--- a/learning/P01_zephyr_make_project/slides/P001_官方环境安装与源码准备_Linux.pptx
+++ b/learning/P01_zephyr_make_project/slides/P001_官方环境安装与源码准备_Linux.pptx
@@ -79,7 +79,7 @@
           <a:lstStyle xmlns:a="http://schemas.openxmlformats.org/drawingml/2006/main"/>
           <a:p xmlns:a="http://schemas.openxmlformats.org/drawingml/2006/main">
             <a:r>
-              <a:t>对应正文：P001_Linux，本章只准备环境，编译仍由 P007 解释</a:t>
+              <a:t>对应正文：P001_Linux，本章只准备环境，编译仍由 P011 解释</a:t>
             </a:r>
           </a:p>
           <a:p xmlns:a="http://schemas.openxmlformats.org/drawingml/2006/main">
@@ -5548,7 +5548,7 @@
           <a:lstStyle xmlns:a="http://schemas.openxmlformats.org/drawingml/2006/main"/>
           <a:p xmlns:a="http://schemas.openxmlformats.org/drawingml/2006/main">
             <a:r>
-              <a:t>源码每次更新后重新查安装依据，不把本次apt包列表视为固定常量。P004讲解原理、已有mps2/an386和新增练习板及HC32接入，Windows路径/SDK不能照抄为Linux。Linux实际实验前需适配本机路径，并分别记录环境、编译、实板结果。完整命令和来源见linux/P01正文。</a:t>
+              <a:t>源码每次更新后重新查安装依据，不把本次apt包列表视为固定常量。P003讲解原理、已有mps2/an386和新增练习板及HC32接入，Windows路径/SDK不能照抄为Linux。Linux实际实验前需适配本机路径，并分别记录环境、编译、实板结果。完整命令和来源见linux/P01正文。</a:t>
             </a:r>
           </a:p>
           <a:p xmlns:a="http://schemas.openxmlformats.org/drawingml/2006/main">
@@ -13815,7 +13815,7 @@
                 <a:ea typeface="Microsoft YaHei"/>
                 <a:cs typeface="Microsoft YaHei"/>
               </a:rPr>
-              <a:t>本章只准备环境，编译仍由 P007 解释</a:t>
+              <a:t>本章只准备环境，编译仍由 P011 解释</a:t>
             </a:r>
           </a:p>
         </p:txBody>
@@ -34517,7 +34517,7 @@
                 <a:ea typeface="Noto Sans SC"/>
                 <a:cs typeface="Noto Sans SC"/>
               </a:rPr>
-              <a:t>P007 共用编译知识；现有详细命令标注为 Windows 实验</a:t>
+              <a:t>P011 共用编译知识；现有详细命令标注为 Windows 实验</a:t>
             </a:r>
           </a:p>
         </p:txBody>

--- a/learning/P01_zephyr_make_project/slides/P001_官方环境安装与源码准备_Linux.pptx
+++ b/learning/P01_zephyr_make_project/slides/P001_官方环境安装与源码准备_Linux.pptx
@@ -13906,13 +13906,24 @@
             <a:r>
               <a:rPr sz="2175" b="0">
                 <a:solidFill>
+                  <a:srgbClr val="A02B93"/>
+                </a:solidFill>
+                <a:latin typeface="Microsoft YaHei"/>
+                <a:ea typeface="Microsoft YaHei"/>
+                <a:cs typeface="Microsoft YaHei"/>
+              </a:rPr>
+              <a:t>apt</a:t>
+            </a:r>
+            <a:r>
+              <a:rPr sz="2175" b="0">
+                <a:solidFill>
                   <a:srgbClr val="29263B"/>
                 </a:solidFill>
                 <a:latin typeface="Microsoft YaHei"/>
                 <a:ea typeface="Microsoft YaHei"/>
                 <a:cs typeface="Microsoft YaHei"/>
               </a:rPr>
-              <a:t>apt 装主机依赖；官方 Python 源码构建独立解释器。</a:t>
+              <a:t> 装主机依赖；官方 Python 源码构建独立解释器。</a:t>
             </a:r>
           </a:p>
           <a:p xmlns:a="http://schemas.openxmlformats.org/drawingml/2006/main">
@@ -13932,13 +13943,24 @@
             <a:r>
               <a:rPr sz="2175" b="0">
                 <a:solidFill>
+                  <a:srgbClr val="A02B93"/>
+                </a:solidFill>
+                <a:latin typeface="Microsoft YaHei"/>
+                <a:ea typeface="Microsoft YaHei"/>
+                <a:cs typeface="Microsoft YaHei"/>
+              </a:rPr>
+              <a:t>west</a:t>
+            </a:r>
+            <a:r>
+              <a:rPr sz="2175" b="0">
+                <a:solidFill>
                   <a:srgbClr val="29263B"/>
                 </a:solidFill>
                 <a:latin typeface="Microsoft YaHei"/>
                 <a:ea typeface="Microsoft YaHei"/>
                 <a:cs typeface="Microsoft YaHei"/>
               </a:rPr>
-              <a:t>west 建工作区、取模块；SDK 提供目标编译工具。</a:t>
+              <a:t> 建工作区、取模块；SDK 提供目标编译工具。</a:t>
             </a:r>
           </a:p>
         </p:txBody>
@@ -14036,6 +14058,107 @@
               </a:rPr>
               <a:t>2</a:t>
             </a:fld>
+          </a:p>
+        </p:txBody>
+      </p:sp>
+      <p:sp>
+        <p:nvSpPr>
+          <p:cNvPr id="10" name="Semantic color legend">
+            <a:extLst xmlns:a="http://schemas.openxmlformats.org/drawingml/2006/main">
+              <a:ext uri="{FF2B5EF4-FFF2-40B4-BE49-F238E27FC236}">
+                <a16:creationId xmlns:a16="http://schemas.microsoft.com/office/drawing/2014/main" id="{39154CEE-9E0E-4815-8A42-342F49989EDD}"/>
+              </a:ext>
+            </a:extLst>
+          </p:cNvPr>
+          <p:cNvSpPr>
+            <a:spLocks xmlns:a="http://schemas.openxmlformats.org/drawingml/2006/main" noGrp="1"/>
+          </p:cNvSpPr>
+          <p:nvPr/>
+        </p:nvSpPr>
+        <p:spPr>
+          <a:xfrm xmlns:a="http://schemas.openxmlformats.org/drawingml/2006/main">
+            <a:off x="609600" y="5734050"/>
+            <a:ext cx="10972800" cy="342900"/>
+          </a:xfrm>
+          <a:prstGeom xmlns:a="http://schemas.openxmlformats.org/drawingml/2006/main" prst="rect">
+            <a:avLst/>
+          </a:prstGeom>
+          <a:noFill xmlns:a="http://schemas.openxmlformats.org/drawingml/2006/main"/>
+          <a:ln xmlns:a="http://schemas.openxmlformats.org/drawingml/2006/main" w="0">
+            <a:noFill/>
+          </a:ln>
+        </p:spPr>
+        <p:txBody>
+          <a:bodyPr xmlns:a="http://schemas.openxmlformats.org/drawingml/2006/main">
+            <a:noAutofit/>
+          </a:bodyPr>
+          <a:lstStyle xmlns:a="http://schemas.openxmlformats.org/drawingml/2006/main">
+            <a:defPPr>
+              <a:defRPr sz="1575">
+                <a:solidFill>
+                  <a:srgbClr val="646173"/>
+                </a:solidFill>
+                <a:latin typeface="Microsoft YaHei"/>
+                <a:ea typeface="Microsoft YaHei"/>
+                <a:cs typeface="Microsoft YaHei"/>
+              </a:defRPr>
+            </a:defPPr>
+          </a:lstStyle>
+          <a:p xmlns:a="http://schemas.openxmlformats.org/drawingml/2006/main">
+            <a:pPr>
+              <a:defRPr sz="1575">
+                <a:solidFill>
+                  <a:srgbClr val="646173"/>
+                </a:solidFill>
+                <a:latin typeface="Microsoft YaHei"/>
+                <a:ea typeface="Microsoft YaHei"/>
+                <a:cs typeface="Microsoft YaHei"/>
+              </a:defRPr>
+            </a:pPr>
+            <a:r>
+              <a:t>阅读标色： </a:t>
+            </a:r>
+            <a:r>
+              <a:rPr>
+                <a:solidFill>
+                  <a:srgbClr val="B84E00"/>
+                </a:solidFill>
+              </a:rPr>
+              <a:t>变量 / 参数</a:t>
+            </a:r>
+            <a:r>
+              <a:t>     </a:t>
+            </a:r>
+            <a:r>
+              <a:rPr>
+                <a:solidFill>
+                  <a:srgbClr val="0070C0"/>
+                </a:solidFill>
+              </a:rPr>
+              <a:t>文件 / 路径</a:t>
+            </a:r>
+            <a:r>
+              <a:t>     </a:t>
+            </a:r>
+            <a:r>
+              <a:rPr>
+                <a:solidFill>
+                  <a:srgbClr val="087B3D"/>
+                </a:solidFill>
+              </a:rPr>
+              <a:t>接口函数</a:t>
+            </a:r>
+            <a:r>
+              <a:t>     </a:t>
+            </a:r>
+            <a:r>
+              <a:rPr>
+                <a:solidFill>
+                  <a:srgbClr val="A02B93"/>
+                </a:solidFill>
+              </a:rPr>
+              <a:t>终端命令</a:t>
+            </a:r>
           </a:p>
         </p:txBody>
       </p:sp>
@@ -15416,13 +15539,68 @@
             <a:r>
               <a:rPr sz="2175" b="0">
                 <a:solidFill>
+                  <a:srgbClr val="0070C0"/>
+                </a:solidFill>
+                <a:latin typeface="Microsoft YaHei"/>
+                <a:ea typeface="Microsoft YaHei"/>
+                <a:cs typeface="Microsoft YaHei"/>
+              </a:rPr>
+              <a:t>~/zephyrproject</a:t>
+            </a:r>
+            <a:r>
+              <a:rPr sz="2175" b="0">
+                <a:solidFill>
                   <a:srgbClr val="29263B"/>
                 </a:solidFill>
                 <a:latin typeface="Microsoft YaHei"/>
                 <a:ea typeface="Microsoft YaHei"/>
                 <a:cs typeface="Microsoft YaHei"/>
               </a:rPr>
-              <a:t>~/zephyrproject 是工作区根，里面有 .west、.venv、zephyr 与 modules。</a:t>
+              <a:t> 是工作区根，里面有 </a:t>
+            </a:r>
+            <a:r>
+              <a:rPr sz="2175" b="0">
+                <a:solidFill>
+                  <a:srgbClr val="0070C0"/>
+                </a:solidFill>
+                <a:latin typeface="Microsoft YaHei"/>
+                <a:ea typeface="Microsoft YaHei"/>
+                <a:cs typeface="Microsoft YaHei"/>
+              </a:rPr>
+              <a:t>.west</a:t>
+            </a:r>
+            <a:r>
+              <a:rPr sz="2175" b="0">
+                <a:solidFill>
+                  <a:srgbClr val="29263B"/>
+                </a:solidFill>
+                <a:latin typeface="Microsoft YaHei"/>
+                <a:ea typeface="Microsoft YaHei"/>
+                <a:cs typeface="Microsoft YaHei"/>
+              </a:rPr>
+              <a:t>、</a:t>
+            </a:r>
+            <a:r>
+              <a:rPr sz="2175" b="0">
+                <a:solidFill>
+                  <a:srgbClr val="0070C0"/>
+                </a:solidFill>
+                <a:latin typeface="Microsoft YaHei"/>
+                <a:ea typeface="Microsoft YaHei"/>
+                <a:cs typeface="Microsoft YaHei"/>
+              </a:rPr>
+              <a:t>.venv</a:t>
+            </a:r>
+            <a:r>
+              <a:rPr sz="2175" b="0">
+                <a:solidFill>
+                  <a:srgbClr val="29263B"/>
+                </a:solidFill>
+                <a:latin typeface="Microsoft YaHei"/>
+                <a:ea typeface="Microsoft YaHei"/>
+                <a:cs typeface="Microsoft YaHei"/>
+              </a:rPr>
+              <a:t>、zephyr 与 modules。</a:t>
             </a:r>
           </a:p>
           <a:p xmlns:a="http://schemas.openxmlformats.org/drawingml/2006/main">
@@ -15442,13 +15620,46 @@
             <a:r>
               <a:rPr sz="2175" b="0">
                 <a:solidFill>
+                  <a:srgbClr val="0070C0"/>
+                </a:solidFill>
+                <a:latin typeface="Microsoft YaHei"/>
+                <a:ea typeface="Microsoft YaHei"/>
+                <a:cs typeface="Microsoft YaHei"/>
+              </a:rPr>
+              <a:t>~/zephyrproject/zephyr</a:t>
+            </a:r>
+            <a:r>
+              <a:rPr sz="2175" b="0">
+                <a:solidFill>
                   <a:srgbClr val="29263B"/>
                 </a:solidFill>
                 <a:latin typeface="Microsoft YaHei"/>
                 <a:ea typeface="Microsoft YaHei"/>
                 <a:cs typeface="Microsoft YaHei"/>
               </a:rPr>
-              <a:t>~/zephyrproject/zephyr 才是含 VERSION、boards、samples 的主源码。</a:t>
+              <a:t> 才是含 </a:t>
+            </a:r>
+            <a:r>
+              <a:rPr sz="2175" b="0">
+                <a:solidFill>
+                  <a:srgbClr val="0070C0"/>
+                </a:solidFill>
+                <a:latin typeface="Microsoft YaHei"/>
+                <a:ea typeface="Microsoft YaHei"/>
+                <a:cs typeface="Microsoft YaHei"/>
+              </a:rPr>
+              <a:t>VERSION</a:t>
+            </a:r>
+            <a:r>
+              <a:rPr sz="2175" b="0">
+                <a:solidFill>
+                  <a:srgbClr val="29263B"/>
+                </a:solidFill>
+                <a:latin typeface="Microsoft YaHei"/>
+                <a:ea typeface="Microsoft YaHei"/>
+                <a:cs typeface="Microsoft YaHei"/>
+              </a:rPr>
+              <a:t>、boards、samples 的主源码。</a:t>
             </a:r>
           </a:p>
           <a:p xmlns:a="http://schemas.openxmlformats.org/drawingml/2006/main">
@@ -15468,13 +15679,46 @@
             <a:r>
               <a:rPr sz="2175" b="0">
                 <a:solidFill>
+                  <a:srgbClr val="A02B93"/>
+                </a:solidFill>
+                <a:latin typeface="Microsoft YaHei"/>
+                <a:ea typeface="Microsoft YaHei"/>
+                <a:cs typeface="Microsoft YaHei"/>
+              </a:rPr>
+              <a:t>west</a:t>
+            </a:r>
+            <a:r>
+              <a:rPr sz="2175" b="0">
+                <a:solidFill>
                   <a:srgbClr val="29263B"/>
                 </a:solidFill>
                 <a:latin typeface="Microsoft YaHei"/>
                 <a:ea typeface="Microsoft YaHei"/>
                 <a:cs typeface="Microsoft YaHei"/>
               </a:rPr>
-              <a:t>west init 建立管理目录并获取主仓库；west update 按清单取得外部项目。</a:t>
+              <a:t> init 建立管理目录并获取主仓库；</a:t>
+            </a:r>
+            <a:r>
+              <a:rPr sz="2175" b="0">
+                <a:solidFill>
+                  <a:srgbClr val="A02B93"/>
+                </a:solidFill>
+                <a:latin typeface="Microsoft YaHei"/>
+                <a:ea typeface="Microsoft YaHei"/>
+                <a:cs typeface="Microsoft YaHei"/>
+              </a:rPr>
+              <a:t>west</a:t>
+            </a:r>
+            <a:r>
+              <a:rPr sz="2175" b="0">
+                <a:solidFill>
+                  <a:srgbClr val="29263B"/>
+                </a:solidFill>
+                <a:latin typeface="Microsoft YaHei"/>
+                <a:ea typeface="Microsoft YaHei"/>
+                <a:cs typeface="Microsoft YaHei"/>
+              </a:rPr>
+              <a:t> update 按清单取得外部项目。</a:t>
             </a:r>
           </a:p>
           <a:p xmlns:a="http://schemas.openxmlformats.org/drawingml/2006/main">
@@ -15798,13 +16042,105 @@
             <a:r>
               <a:rPr sz="1875" b="0">
                 <a:solidFill>
+                  <a:srgbClr val="646173"/>
+                </a:solidFill>
+                <a:latin typeface="Consolas"/>
+                <a:ea typeface="Consolas"/>
+                <a:cs typeface="Consolas"/>
+              </a:rPr>
+              <a:t># 终端：Linux Bash；上一步 .venv 已激活。</a:t>
+            </a:r>
+          </a:p>
+          <a:p xmlns:a="http://schemas.openxmlformats.org/drawingml/2006/main">
+            <a:pPr>
+              <a:lnSpc>
+                <a:spcPct val="120000"/>
+              </a:lnSpc>
+              <a:defRPr sz="1875" b="0">
+                <a:solidFill>
                   <a:srgbClr val="005968"/>
                 </a:solidFill>
                 <a:latin typeface="Consolas"/>
                 <a:ea typeface="Consolas"/>
                 <a:cs typeface="Consolas"/>
-              </a:rPr>
-              <a:t># 终端：Linux Bash；上一步 .venv 已激活。</a:t>
+              </a:defRPr>
+            </a:pPr>
+            <a:r>
+              <a:rPr sz="1875" b="0">
+                <a:solidFill>
+                  <a:srgbClr val="A02B93"/>
+                </a:solidFill>
+                <a:latin typeface="Consolas"/>
+                <a:ea typeface="Consolas"/>
+                <a:cs typeface="Consolas"/>
+              </a:rPr>
+              <a:t>west</a:t>
+            </a:r>
+            <a:r>
+              <a:rPr sz="1875" b="0">
+                <a:solidFill>
+                  <a:srgbClr val="29263B"/>
+                </a:solidFill>
+                <a:latin typeface="Consolas"/>
+                <a:ea typeface="Consolas"/>
+                <a:cs typeface="Consolas"/>
+              </a:rPr>
+              <a:t> init </a:t>
+            </a:r>
+            <a:r>
+              <a:rPr sz="1875" b="0">
+                <a:solidFill>
+                  <a:srgbClr val="B84E00"/>
+                </a:solidFill>
+                <a:latin typeface="Consolas"/>
+                <a:ea typeface="Consolas"/>
+                <a:cs typeface="Consolas"/>
+              </a:rPr>
+              <a:t>-m</a:t>
+            </a:r>
+            <a:r>
+              <a:rPr sz="1875" b="0">
+                <a:solidFill>
+                  <a:srgbClr val="29263B"/>
+                </a:solidFill>
+                <a:latin typeface="Consolas"/>
+                <a:ea typeface="Consolas"/>
+                <a:cs typeface="Consolas"/>
+              </a:rPr>
+              <a:t> </a:t>
+            </a:r>
+            <a:r>
+              <a:rPr sz="1875" b="0">
+                <a:solidFill>
+                  <a:srgbClr val="0070C0"/>
+                </a:solidFill>
+                <a:latin typeface="Consolas"/>
+                <a:ea typeface="Consolas"/>
+                <a:cs typeface="Consolas"/>
+              </a:rPr>
+              <a:t>https://github.com/zephyrproject-rtos/zephyr</a:t>
+            </a:r>
+            <a:r>
+              <a:rPr sz="1875" b="0">
+                <a:solidFill>
+                  <a:srgbClr val="29263B"/>
+                </a:solidFill>
+                <a:latin typeface="Consolas"/>
+                <a:ea typeface="Consolas"/>
+                <a:cs typeface="Consolas"/>
+              </a:rPr>
+              <a:t> </a:t>
+            </a:r>
+            <a:r>
+              <a:rPr sz="1875" b="0">
+                <a:solidFill>
+                  <a:srgbClr val="0070C0"/>
+                </a:solidFill>
+                <a:latin typeface="Consolas"/>
+                <a:ea typeface="Consolas"/>
+                <a:cs typeface="Consolas"/>
+              </a:rPr>
+              <a:t>~/zephyrproject</a:t>
             </a:r>
           </a:p>
           <a:p xmlns:a="http://schemas.openxmlformats.org/drawingml/2006/main">
@@ -15824,13 +16160,72 @@
             <a:r>
               <a:rPr sz="1875" b="0">
                 <a:solidFill>
+                  <a:srgbClr val="A02B93"/>
+                </a:solidFill>
+                <a:latin typeface="Consolas"/>
+                <a:ea typeface="Consolas"/>
+                <a:cs typeface="Consolas"/>
+              </a:rPr>
+              <a:t>cd</a:t>
+            </a:r>
+            <a:r>
+              <a:rPr sz="1875" b="0">
+                <a:solidFill>
+                  <a:srgbClr val="29263B"/>
+                </a:solidFill>
+                <a:latin typeface="Consolas"/>
+                <a:ea typeface="Consolas"/>
+                <a:cs typeface="Consolas"/>
+              </a:rPr>
+              <a:t> </a:t>
+            </a:r>
+            <a:r>
+              <a:rPr sz="1875" b="0">
+                <a:solidFill>
+                  <a:srgbClr val="0070C0"/>
+                </a:solidFill>
+                <a:latin typeface="Consolas"/>
+                <a:ea typeface="Consolas"/>
+                <a:cs typeface="Consolas"/>
+              </a:rPr>
+              <a:t>~/zephyrproject</a:t>
+            </a:r>
+          </a:p>
+          <a:p xmlns:a="http://schemas.openxmlformats.org/drawingml/2006/main">
+            <a:pPr>
+              <a:lnSpc>
+                <a:spcPct val="120000"/>
+              </a:lnSpc>
+              <a:defRPr sz="1875" b="0">
+                <a:solidFill>
                   <a:srgbClr val="005968"/>
                 </a:solidFill>
                 <a:latin typeface="Consolas"/>
                 <a:ea typeface="Consolas"/>
                 <a:cs typeface="Consolas"/>
-              </a:rPr>
-              <a:t>west init -m https://github.com/zephyrproject-rtos/zephyr ~/zephyrproject</a:t>
+              </a:defRPr>
+            </a:pPr>
+            <a:r>
+              <a:rPr sz="1875" b="0">
+                <a:solidFill>
+                  <a:srgbClr val="A02B93"/>
+                </a:solidFill>
+                <a:latin typeface="Consolas"/>
+                <a:ea typeface="Consolas"/>
+                <a:cs typeface="Consolas"/>
+              </a:rPr>
+              <a:t>west</a:t>
+            </a:r>
+            <a:r>
+              <a:rPr sz="1875" b="0">
+                <a:solidFill>
+                  <a:srgbClr val="29263B"/>
+                </a:solidFill>
+                <a:latin typeface="Consolas"/>
+                <a:ea typeface="Consolas"/>
+                <a:cs typeface="Consolas"/>
+              </a:rPr>
+              <a:t> update</a:t>
             </a:r>
           </a:p>
           <a:p xmlns:a="http://schemas.openxmlformats.org/drawingml/2006/main">
@@ -15850,13 +16245,61 @@
             <a:r>
               <a:rPr sz="1875" b="0">
                 <a:solidFill>
+                  <a:srgbClr val="A02B93"/>
+                </a:solidFill>
+                <a:latin typeface="Consolas"/>
+                <a:ea typeface="Consolas"/>
+                <a:cs typeface="Consolas"/>
+              </a:rPr>
+              <a:t>cd</a:t>
+            </a:r>
+            <a:r>
+              <a:rPr sz="1875" b="0">
+                <a:solidFill>
+                  <a:srgbClr val="29263B"/>
+                </a:solidFill>
+                <a:latin typeface="Consolas"/>
+                <a:ea typeface="Consolas"/>
+                <a:cs typeface="Consolas"/>
+              </a:rPr>
+              <a:t> zephyr</a:t>
+            </a:r>
+          </a:p>
+          <a:p xmlns:a="http://schemas.openxmlformats.org/drawingml/2006/main">
+            <a:pPr>
+              <a:lnSpc>
+                <a:spcPct val="120000"/>
+              </a:lnSpc>
+              <a:defRPr sz="1875" b="0">
+                <a:solidFill>
                   <a:srgbClr val="005968"/>
                 </a:solidFill>
                 <a:latin typeface="Consolas"/>
                 <a:ea typeface="Consolas"/>
                 <a:cs typeface="Consolas"/>
-              </a:rPr>
-              <a:t>cd ~/zephyrproject</a:t>
+              </a:defRPr>
+            </a:pPr>
+            <a:r>
+              <a:rPr sz="1875" b="0">
+                <a:solidFill>
+                  <a:srgbClr val="A02B93"/>
+                </a:solidFill>
+                <a:latin typeface="Consolas"/>
+                <a:ea typeface="Consolas"/>
+                <a:cs typeface="Consolas"/>
+              </a:rPr>
+              <a:t>git</a:t>
+            </a:r>
+            <a:r>
+              <a:rPr sz="1875" b="0">
+                <a:solidFill>
+                  <a:srgbClr val="29263B"/>
+                </a:solidFill>
+                <a:latin typeface="Consolas"/>
+                <a:ea typeface="Consolas"/>
+                <a:cs typeface="Consolas"/>
+              </a:rPr>
+              <a:t> rev-parse HEAD</a:t>
             </a:r>
           </a:p>
           <a:p xmlns:a="http://schemas.openxmlformats.org/drawingml/2006/main">
@@ -15876,117 +16319,83 @@
             <a:r>
               <a:rPr sz="1875" b="0">
                 <a:solidFill>
+                  <a:srgbClr val="A02B93"/>
+                </a:solidFill>
+                <a:latin typeface="Consolas"/>
+                <a:ea typeface="Consolas"/>
+                <a:cs typeface="Consolas"/>
+              </a:rPr>
+              <a:t>cat</a:t>
+            </a:r>
+            <a:r>
+              <a:rPr sz="1875" b="0">
+                <a:solidFill>
+                  <a:srgbClr val="29263B"/>
+                </a:solidFill>
+                <a:latin typeface="Consolas"/>
+                <a:ea typeface="Consolas"/>
+                <a:cs typeface="Consolas"/>
+              </a:rPr>
+              <a:t> </a:t>
+            </a:r>
+            <a:r>
+              <a:rPr sz="1875" b="0">
+                <a:solidFill>
+                  <a:srgbClr val="0070C0"/>
+                </a:solidFill>
+                <a:latin typeface="Consolas"/>
+                <a:ea typeface="Consolas"/>
+                <a:cs typeface="Consolas"/>
+              </a:rPr>
+              <a:t>VERSION</a:t>
+            </a:r>
+          </a:p>
+          <a:p xmlns:a="http://schemas.openxmlformats.org/drawingml/2006/main">
+            <a:pPr>
+              <a:lnSpc>
+                <a:spcPct val="120000"/>
+              </a:lnSpc>
+              <a:defRPr sz="1875" b="0">
+                <a:solidFill>
                   <a:srgbClr val="005968"/>
                 </a:solidFill>
                 <a:latin typeface="Consolas"/>
                 <a:ea typeface="Consolas"/>
                 <a:cs typeface="Consolas"/>
-              </a:rPr>
-              <a:t>west update</a:t>
-            </a:r>
-          </a:p>
-          <a:p xmlns:a="http://schemas.openxmlformats.org/drawingml/2006/main">
-            <a:pPr>
-              <a:lnSpc>
-                <a:spcPct val="120000"/>
-              </a:lnSpc>
-              <a:defRPr sz="1875" b="0">
-                <a:solidFill>
-                  <a:srgbClr val="005968"/>
-                </a:solidFill>
-                <a:latin typeface="Consolas"/>
-                <a:ea typeface="Consolas"/>
-                <a:cs typeface="Consolas"/>
               </a:defRPr>
             </a:pPr>
             <a:r>
               <a:rPr sz="1875" b="0">
                 <a:solidFill>
-                  <a:srgbClr val="005968"/>
-                </a:solidFill>
-                <a:latin typeface="Consolas"/>
-                <a:ea typeface="Consolas"/>
-                <a:cs typeface="Consolas"/>
-              </a:rPr>
-              <a:t>cd zephyr</a:t>
-            </a:r>
-          </a:p>
-          <a:p xmlns:a="http://schemas.openxmlformats.org/drawingml/2006/main">
-            <a:pPr>
-              <a:lnSpc>
-                <a:spcPct val="120000"/>
-              </a:lnSpc>
-              <a:defRPr sz="1875" b="0">
-                <a:solidFill>
-                  <a:srgbClr val="005968"/>
-                </a:solidFill>
-                <a:latin typeface="Consolas"/>
-                <a:ea typeface="Consolas"/>
-                <a:cs typeface="Consolas"/>
-              </a:defRPr>
-            </a:pPr>
+                  <a:srgbClr val="A02B93"/>
+                </a:solidFill>
+                <a:latin typeface="Consolas"/>
+                <a:ea typeface="Consolas"/>
+                <a:cs typeface="Consolas"/>
+              </a:rPr>
+              <a:t>cat</a:t>
+            </a:r>
             <a:r>
               <a:rPr sz="1875" b="0">
                 <a:solidFill>
-                  <a:srgbClr val="005968"/>
-                </a:solidFill>
-                <a:latin typeface="Consolas"/>
-                <a:ea typeface="Consolas"/>
-                <a:cs typeface="Consolas"/>
-              </a:rPr>
-              <a:t>git rev-parse HEAD</a:t>
-            </a:r>
-          </a:p>
-          <a:p xmlns:a="http://schemas.openxmlformats.org/drawingml/2006/main">
-            <a:pPr>
-              <a:lnSpc>
-                <a:spcPct val="120000"/>
-              </a:lnSpc>
-              <a:defRPr sz="1875" b="0">
-                <a:solidFill>
-                  <a:srgbClr val="005968"/>
-                </a:solidFill>
-                <a:latin typeface="Consolas"/>
-                <a:ea typeface="Consolas"/>
-                <a:cs typeface="Consolas"/>
-              </a:defRPr>
-            </a:pPr>
+                  <a:srgbClr val="29263B"/>
+                </a:solidFill>
+                <a:latin typeface="Consolas"/>
+                <a:ea typeface="Consolas"/>
+                <a:cs typeface="Consolas"/>
+              </a:rPr>
+              <a:t> </a:t>
+            </a:r>
             <a:r>
               <a:rPr sz="1875" b="0">
                 <a:solidFill>
-                  <a:srgbClr val="005968"/>
-                </a:solidFill>
-                <a:latin typeface="Consolas"/>
-                <a:ea typeface="Consolas"/>
-                <a:cs typeface="Consolas"/>
-              </a:rPr>
-              <a:t>cat VERSION</a:t>
-            </a:r>
-          </a:p>
-          <a:p xmlns:a="http://schemas.openxmlformats.org/drawingml/2006/main">
-            <a:pPr>
-              <a:lnSpc>
-                <a:spcPct val="120000"/>
-              </a:lnSpc>
-              <a:defRPr sz="1875" b="0">
-                <a:solidFill>
-                  <a:srgbClr val="005968"/>
-                </a:solidFill>
-                <a:latin typeface="Consolas"/>
-                <a:ea typeface="Consolas"/>
-                <a:cs typeface="Consolas"/>
-              </a:defRPr>
-            </a:pPr>
-            <a:r>
-              <a:rPr sz="1875" b="0">
-                <a:solidFill>
-                  <a:srgbClr val="005968"/>
-                </a:solidFill>
-                <a:latin typeface="Consolas"/>
-                <a:ea typeface="Consolas"/>
-                <a:cs typeface="Consolas"/>
-              </a:rPr>
-              <a:t>cat SDK_VERSION</a:t>
+                  <a:srgbClr val="0070C0"/>
+                </a:solidFill>
+                <a:latin typeface="Consolas"/>
+                <a:ea typeface="Consolas"/>
+                <a:cs typeface="Consolas"/>
+              </a:rPr>
+              <a:t>SDK_VERSION</a:t>
             </a:r>
           </a:p>
         </p:txBody>
@@ -16424,13 +16833,61 @@
             <a:r>
               <a:rPr sz="1875" b="0">
                 <a:solidFill>
+                  <a:srgbClr val="646173"/>
+                </a:solidFill>
+                <a:latin typeface="Consolas"/>
+                <a:ea typeface="Consolas"/>
+                <a:cs typeface="Consolas"/>
+              </a:rPr>
+              <a:t># Ubuntu 22.04 Bash；1.4 的 west init/update 已完成，venv 已激活。</a:t>
+            </a:r>
+          </a:p>
+          <a:p xmlns:a="http://schemas.openxmlformats.org/drawingml/2006/main">
+            <a:pPr>
+              <a:lnSpc>
+                <a:spcPct val="120000"/>
+              </a:lnSpc>
+              <a:defRPr sz="1875" b="0">
+                <a:solidFill>
                   <a:srgbClr val="005968"/>
                 </a:solidFill>
                 <a:latin typeface="Consolas"/>
                 <a:ea typeface="Consolas"/>
                 <a:cs typeface="Consolas"/>
-              </a:rPr>
-              <a:t># Ubuntu 22.04 Bash；1.4 的 west init/update 已完成，venv 已激活。</a:t>
+              </a:defRPr>
+            </a:pPr>
+            <a:r>
+              <a:rPr sz="1875" b="0">
+                <a:solidFill>
+                  <a:srgbClr val="A02B93"/>
+                </a:solidFill>
+                <a:latin typeface="Consolas"/>
+                <a:ea typeface="Consolas"/>
+                <a:cs typeface="Consolas"/>
+              </a:rPr>
+              <a:t>cd</a:t>
+            </a:r>
+            <a:r>
+              <a:rPr sz="1875" b="0">
+                <a:solidFill>
+                  <a:srgbClr val="29263B"/>
+                </a:solidFill>
+                <a:latin typeface="Consolas"/>
+                <a:ea typeface="Consolas"/>
+                <a:cs typeface="Consolas"/>
+              </a:rPr>
+              <a:t> </a:t>
+            </a:r>
+            <a:r>
+              <a:rPr sz="1875" b="0">
+                <a:solidFill>
+                  <a:srgbClr val="0070C0"/>
+                </a:solidFill>
+                <a:latin typeface="Consolas"/>
+                <a:ea typeface="Consolas"/>
+                <a:cs typeface="Consolas"/>
+              </a:rPr>
+              <a:t>~/zephyrproject/zephyr</a:t>
             </a:r>
           </a:p>
           <a:p xmlns:a="http://schemas.openxmlformats.org/drawingml/2006/main">
@@ -16450,13 +16907,83 @@
             <a:r>
               <a:rPr sz="1875" b="0">
                 <a:solidFill>
+                  <a:srgbClr val="A02B93"/>
+                </a:solidFill>
+                <a:latin typeface="Consolas"/>
+                <a:ea typeface="Consolas"/>
+                <a:cs typeface="Consolas"/>
+              </a:rPr>
+              <a:t>west</a:t>
+            </a:r>
+            <a:r>
+              <a:rPr sz="1875" b="0">
+                <a:solidFill>
+                  <a:srgbClr val="29263B"/>
+                </a:solidFill>
+                <a:latin typeface="Consolas"/>
+                <a:ea typeface="Consolas"/>
+                <a:cs typeface="Consolas"/>
+              </a:rPr>
+              <a:t> topdir</a:t>
+            </a:r>
+          </a:p>
+          <a:p xmlns:a="http://schemas.openxmlformats.org/drawingml/2006/main">
+            <a:pPr>
+              <a:lnSpc>
+                <a:spcPct val="120000"/>
+              </a:lnSpc>
+              <a:defRPr sz="1875" b="0">
+                <a:solidFill>
                   <a:srgbClr val="005968"/>
                 </a:solidFill>
                 <a:latin typeface="Consolas"/>
                 <a:ea typeface="Consolas"/>
                 <a:cs typeface="Consolas"/>
-              </a:rPr>
-              <a:t>cd ~/zephyrproject/zephyr</a:t>
+              </a:defRPr>
+            </a:pPr>
+            <a:r>
+              <a:rPr sz="1875" b="0">
+                <a:solidFill>
+                  <a:srgbClr val="A02B93"/>
+                </a:solidFill>
+                <a:latin typeface="Consolas"/>
+                <a:ea typeface="Consolas"/>
+                <a:cs typeface="Consolas"/>
+              </a:rPr>
+              <a:t>west</a:t>
+            </a:r>
+            <a:r>
+              <a:rPr sz="1875" b="0">
+                <a:solidFill>
+                  <a:srgbClr val="29263B"/>
+                </a:solidFill>
+                <a:latin typeface="Consolas"/>
+                <a:ea typeface="Consolas"/>
+                <a:cs typeface="Consolas"/>
+              </a:rPr>
+              <a:t> list cmsis_6 </a:t>
+            </a:r>
+            <a:r>
+              <a:rPr sz="1875" b="0">
+                <a:solidFill>
+                  <a:srgbClr val="B84E00"/>
+                </a:solidFill>
+                <a:latin typeface="Consolas"/>
+                <a:ea typeface="Consolas"/>
+                <a:cs typeface="Consolas"/>
+              </a:rPr>
+              <a:t>-f</a:t>
+            </a:r>
+            <a:r>
+              <a:rPr sz="1875" b="0">
+                <a:solidFill>
+                  <a:srgbClr val="29263B"/>
+                </a:solidFill>
+                <a:latin typeface="Consolas"/>
+                <a:ea typeface="Consolas"/>
+                <a:cs typeface="Consolas"/>
+              </a:rPr>
+              <a:t> '{url} {revision} {abspath}'</a:t>
             </a:r>
           </a:p>
           <a:p xmlns:a="http://schemas.openxmlformats.org/drawingml/2006/main">
@@ -16476,65 +17003,35 @@
             <a:r>
               <a:rPr sz="1875" b="0">
                 <a:solidFill>
-                  <a:srgbClr val="005968"/>
-                </a:solidFill>
-                <a:latin typeface="Consolas"/>
-                <a:ea typeface="Consolas"/>
-                <a:cs typeface="Consolas"/>
-              </a:rPr>
-              <a:t>west topdir</a:t>
-            </a:r>
-          </a:p>
-          <a:p xmlns:a="http://schemas.openxmlformats.org/drawingml/2006/main">
-            <a:pPr>
-              <a:lnSpc>
-                <a:spcPct val="120000"/>
-              </a:lnSpc>
-              <a:defRPr sz="1875" b="0">
-                <a:solidFill>
-                  <a:srgbClr val="005968"/>
-                </a:solidFill>
-                <a:latin typeface="Consolas"/>
-                <a:ea typeface="Consolas"/>
-                <a:cs typeface="Consolas"/>
-              </a:defRPr>
-            </a:pPr>
+                  <a:srgbClr val="A02B93"/>
+                </a:solidFill>
+                <a:latin typeface="Consolas"/>
+                <a:ea typeface="Consolas"/>
+                <a:cs typeface="Consolas"/>
+              </a:rPr>
+              <a:t>cat</a:t>
+            </a:r>
             <a:r>
               <a:rPr sz="1875" b="0">
                 <a:solidFill>
-                  <a:srgbClr val="005968"/>
-                </a:solidFill>
-                <a:latin typeface="Consolas"/>
-                <a:ea typeface="Consolas"/>
-                <a:cs typeface="Consolas"/>
-              </a:rPr>
-              <a:t>west list cmsis_6 -f '{url} {revision} {abspath}'</a:t>
-            </a:r>
-          </a:p>
-          <a:p xmlns:a="http://schemas.openxmlformats.org/drawingml/2006/main">
-            <a:pPr>
-              <a:lnSpc>
-                <a:spcPct val="120000"/>
-              </a:lnSpc>
-              <a:defRPr sz="1875" b="0">
-                <a:solidFill>
-                  <a:srgbClr val="005968"/>
-                </a:solidFill>
-                <a:latin typeface="Consolas"/>
-                <a:ea typeface="Consolas"/>
-                <a:cs typeface="Consolas"/>
-              </a:defRPr>
-            </a:pPr>
+                  <a:srgbClr val="29263B"/>
+                </a:solidFill>
+                <a:latin typeface="Consolas"/>
+                <a:ea typeface="Consolas"/>
+                <a:cs typeface="Consolas"/>
+              </a:rPr>
+              <a:t> </a:t>
+            </a:r>
             <a:r>
               <a:rPr sz="1875" b="0">
                 <a:solidFill>
-                  <a:srgbClr val="005968"/>
-                </a:solidFill>
-                <a:latin typeface="Consolas"/>
-                <a:ea typeface="Consolas"/>
-                <a:cs typeface="Consolas"/>
-              </a:rPr>
-              <a:t>cat ../modules/hal/cmsis_6/zephyr/module.yml</a:t>
+                  <a:srgbClr val="0070C0"/>
+                </a:solidFill>
+                <a:latin typeface="Consolas"/>
+                <a:ea typeface="Consolas"/>
+                <a:cs typeface="Consolas"/>
+              </a:rPr>
+              <a:t>../modules/hal/cmsis_6/zephyr/module.yml</a:t>
             </a:r>
           </a:p>
         </p:txBody>
@@ -16605,7 +17102,29 @@
                 <a:ea typeface="Microsoft YaHei"/>
                 <a:cs typeface="Microsoft YaHei"/>
               </a:rPr>
-              <a:t>打开输出 URL 的固定 revision 网页，查看 Code → Download ZIP；west 已下载则不重复覆盖。</a:t>
+              <a:t>打开输出 URL 的固定 revision 网页，查看 Code → Download ZIP；</a:t>
+            </a:r>
+            <a:r>
+              <a:rPr sz="1875" b="0">
+                <a:solidFill>
+                  <a:srgbClr val="A02B93"/>
+                </a:solidFill>
+                <a:latin typeface="Microsoft YaHei"/>
+                <a:ea typeface="Microsoft YaHei"/>
+                <a:cs typeface="Microsoft YaHei"/>
+              </a:rPr>
+              <a:t>west</a:t>
+            </a:r>
+            <a:r>
+              <a:rPr sz="1875" b="0">
+                <a:solidFill>
+                  <a:srgbClr val="29263B"/>
+                </a:solidFill>
+                <a:latin typeface="Microsoft YaHei"/>
+                <a:ea typeface="Microsoft YaHei"/>
+                <a:cs typeface="Microsoft YaHei"/>
+              </a:rPr>
+              <a:t> 已下载则不重复覆盖。</a:t>
             </a:r>
           </a:p>
         </p:txBody>
@@ -17342,13 +17861,61 @@
             <a:r>
               <a:rPr sz="1875" b="0">
                 <a:solidFill>
+                  <a:srgbClr val="646173"/>
+                </a:solidFill>
+                <a:latin typeface="Consolas"/>
+                <a:ea typeface="Consolas"/>
+                <a:cs typeface="Consolas"/>
+              </a:rPr>
+              <a:t># 终端：Linux Bash；位置：~/zephyrproject/zephyr；.venv 已激活。</a:t>
+            </a:r>
+          </a:p>
+          <a:p xmlns:a="http://schemas.openxmlformats.org/drawingml/2006/main">
+            <a:pPr>
+              <a:lnSpc>
+                <a:spcPct val="120000"/>
+              </a:lnSpc>
+              <a:defRPr sz="1875" b="0">
+                <a:solidFill>
                   <a:srgbClr val="005968"/>
                 </a:solidFill>
                 <a:latin typeface="Consolas"/>
                 <a:ea typeface="Consolas"/>
                 <a:cs typeface="Consolas"/>
-              </a:rPr>
-              <a:t># 终端：Linux Bash；位置：~/zephyrproject/zephyr；.venv 已激活。</a:t>
+              </a:defRPr>
+            </a:pPr>
+            <a:r>
+              <a:rPr sz="1875" b="0">
+                <a:solidFill>
+                  <a:srgbClr val="A02B93"/>
+                </a:solidFill>
+                <a:latin typeface="Consolas"/>
+                <a:ea typeface="Consolas"/>
+                <a:cs typeface="Consolas"/>
+              </a:rPr>
+              <a:t>west</a:t>
+            </a:r>
+            <a:r>
+              <a:rPr sz="1875" b="0">
+                <a:solidFill>
+                  <a:srgbClr val="29263B"/>
+                </a:solidFill>
+                <a:latin typeface="Consolas"/>
+                <a:ea typeface="Consolas"/>
+                <a:cs typeface="Consolas"/>
+              </a:rPr>
+              <a:t> packages pip </a:t>
+            </a:r>
+            <a:r>
+              <a:rPr sz="1875" b="0">
+                <a:solidFill>
+                  <a:srgbClr val="B84E00"/>
+                </a:solidFill>
+                <a:latin typeface="Consolas"/>
+                <a:ea typeface="Consolas"/>
+                <a:cs typeface="Consolas"/>
+              </a:rPr>
+              <a:t>--install</a:t>
             </a:r>
           </a:p>
           <a:p xmlns:a="http://schemas.openxmlformats.org/drawingml/2006/main">
@@ -17368,13 +17935,72 @@
             <a:r>
               <a:rPr sz="1875" b="0">
                 <a:solidFill>
+                  <a:srgbClr val="A02B93"/>
+                </a:solidFill>
+                <a:latin typeface="Consolas"/>
+                <a:ea typeface="Consolas"/>
+                <a:cs typeface="Consolas"/>
+              </a:rPr>
+              <a:t>west</a:t>
+            </a:r>
+            <a:r>
+              <a:rPr sz="1875" b="0">
+                <a:solidFill>
+                  <a:srgbClr val="29263B"/>
+                </a:solidFill>
+                <a:latin typeface="Consolas"/>
+                <a:ea typeface="Consolas"/>
+                <a:cs typeface="Consolas"/>
+              </a:rPr>
+              <a:t> zephyr-export</a:t>
+            </a:r>
+          </a:p>
+          <a:p xmlns:a="http://schemas.openxmlformats.org/drawingml/2006/main">
+            <a:pPr>
+              <a:lnSpc>
+                <a:spcPct val="120000"/>
+              </a:lnSpc>
+              <a:defRPr sz="1875" b="0">
+                <a:solidFill>
                   <a:srgbClr val="005968"/>
                 </a:solidFill>
                 <a:latin typeface="Consolas"/>
                 <a:ea typeface="Consolas"/>
                 <a:cs typeface="Consolas"/>
-              </a:rPr>
-              <a:t>west packages pip --install</a:t>
+              </a:defRPr>
+            </a:pPr>
+            <a:r>
+              <a:rPr sz="1875" b="0">
+                <a:solidFill>
+                  <a:srgbClr val="A02B93"/>
+                </a:solidFill>
+                <a:latin typeface="Consolas"/>
+                <a:ea typeface="Consolas"/>
+                <a:cs typeface="Consolas"/>
+              </a:rPr>
+              <a:t>west</a:t>
+            </a:r>
+            <a:r>
+              <a:rPr sz="1875" b="0">
+                <a:solidFill>
+                  <a:srgbClr val="29263B"/>
+                </a:solidFill>
+                <a:latin typeface="Consolas"/>
+                <a:ea typeface="Consolas"/>
+                <a:cs typeface="Consolas"/>
+              </a:rPr>
+              <a:t> sdk install </a:t>
+            </a:r>
+            <a:r>
+              <a:rPr sz="1875" b="0">
+                <a:solidFill>
+                  <a:srgbClr val="B84E00"/>
+                </a:solidFill>
+                <a:latin typeface="Consolas"/>
+                <a:ea typeface="Consolas"/>
+                <a:cs typeface="Consolas"/>
+              </a:rPr>
+              <a:t>--help</a:t>
             </a:r>
           </a:p>
           <a:p xmlns:a="http://schemas.openxmlformats.org/drawingml/2006/main">
@@ -17394,65 +18020,46 @@
             <a:r>
               <a:rPr sz="1875" b="0">
                 <a:solidFill>
-                  <a:srgbClr val="005968"/>
-                </a:solidFill>
-                <a:latin typeface="Consolas"/>
-                <a:ea typeface="Consolas"/>
-                <a:cs typeface="Consolas"/>
-              </a:rPr>
-              <a:t>west zephyr-export</a:t>
-            </a:r>
-          </a:p>
-          <a:p xmlns:a="http://schemas.openxmlformats.org/drawingml/2006/main">
-            <a:pPr>
-              <a:lnSpc>
-                <a:spcPct val="120000"/>
-              </a:lnSpc>
-              <a:defRPr sz="1875" b="0">
-                <a:solidFill>
-                  <a:srgbClr val="005968"/>
-                </a:solidFill>
-                <a:latin typeface="Consolas"/>
-                <a:ea typeface="Consolas"/>
-                <a:cs typeface="Consolas"/>
-              </a:defRPr>
-            </a:pPr>
+                  <a:srgbClr val="A02B93"/>
+                </a:solidFill>
+                <a:latin typeface="Consolas"/>
+                <a:ea typeface="Consolas"/>
+                <a:cs typeface="Consolas"/>
+              </a:rPr>
+              <a:t>west</a:t>
+            </a:r>
             <a:r>
               <a:rPr sz="1875" b="0">
                 <a:solidFill>
-                  <a:srgbClr val="005968"/>
-                </a:solidFill>
-                <a:latin typeface="Consolas"/>
-                <a:ea typeface="Consolas"/>
-                <a:cs typeface="Consolas"/>
-              </a:rPr>
-              <a:t>west sdk install --help</a:t>
-            </a:r>
-          </a:p>
-          <a:p xmlns:a="http://schemas.openxmlformats.org/drawingml/2006/main">
-            <a:pPr>
-              <a:lnSpc>
-                <a:spcPct val="120000"/>
-              </a:lnSpc>
-              <a:defRPr sz="1875" b="0">
-                <a:solidFill>
-                  <a:srgbClr val="005968"/>
-                </a:solidFill>
-                <a:latin typeface="Consolas"/>
-                <a:ea typeface="Consolas"/>
-                <a:cs typeface="Consolas"/>
-              </a:defRPr>
-            </a:pPr>
+                  <a:srgbClr val="29263B"/>
+                </a:solidFill>
+                <a:latin typeface="Consolas"/>
+                <a:ea typeface="Consolas"/>
+                <a:cs typeface="Consolas"/>
+              </a:rPr>
+              <a:t> sdk install </a:t>
+            </a:r>
             <a:r>
               <a:rPr sz="1875" b="0">
                 <a:solidFill>
-                  <a:srgbClr val="005968"/>
-                </a:solidFill>
-                <a:latin typeface="Consolas"/>
-                <a:ea typeface="Consolas"/>
-                <a:cs typeface="Consolas"/>
-              </a:rPr>
-              <a:t>west sdk install --gnu-toolchains arm-zephyr-eabi</a:t>
+                  <a:srgbClr val="B84E00"/>
+                </a:solidFill>
+                <a:latin typeface="Consolas"/>
+                <a:ea typeface="Consolas"/>
+                <a:cs typeface="Consolas"/>
+              </a:rPr>
+              <a:t>--gnu-toolchains</a:t>
+            </a:r>
+            <a:r>
+              <a:rPr sz="1875" b="0">
+                <a:solidFill>
+                  <a:srgbClr val="29263B"/>
+                </a:solidFill>
+                <a:latin typeface="Consolas"/>
+                <a:ea typeface="Consolas"/>
+                <a:cs typeface="Consolas"/>
+              </a:rPr>
+              <a:t> arm-zephyr-eabi</a:t>
             </a:r>
           </a:p>
         </p:txBody>
@@ -17523,7 +18130,29 @@
                 <a:ea typeface="Microsoft YaHei"/>
                 <a:cs typeface="Microsoft YaHei"/>
               </a:rPr>
-              <a:t>先看 --help 支持的选项。本章只安装 ARM GNU；默认无列表会安装更多目标。</a:t>
+              <a:t>先看 </a:t>
+            </a:r>
+            <a:r>
+              <a:rPr sz="1875" b="0">
+                <a:solidFill>
+                  <a:srgbClr val="B84E00"/>
+                </a:solidFill>
+                <a:latin typeface="Microsoft YaHei"/>
+                <a:ea typeface="Microsoft YaHei"/>
+                <a:cs typeface="Microsoft YaHei"/>
+              </a:rPr>
+              <a:t>--help</a:t>
+            </a:r>
+            <a:r>
+              <a:rPr sz="1875" b="0">
+                <a:solidFill>
+                  <a:srgbClr val="29263B"/>
+                </a:solidFill>
+                <a:latin typeface="Microsoft YaHei"/>
+                <a:ea typeface="Microsoft YaHei"/>
+                <a:cs typeface="Microsoft YaHei"/>
+              </a:rPr>
+              <a:t> 支持的选项。本章只安装 ARM GNU；默认无列表会安装更多目标。</a:t>
             </a:r>
           </a:p>
         </p:txBody>
@@ -17896,7 +18525,29 @@
                 <a:ea typeface="Microsoft YaHei"/>
                 <a:cs typeface="Microsoft YaHei"/>
               </a:rPr>
-              <a:t>先读取源码 SDK_VERSION，再进入同版 SDK Releases。</a:t>
+              <a:t>先读取源码 </a:t>
+            </a:r>
+            <a:r>
+              <a:rPr sz="2175" b="0">
+                <a:solidFill>
+                  <a:srgbClr val="0070C0"/>
+                </a:solidFill>
+                <a:latin typeface="Microsoft YaHei"/>
+                <a:ea typeface="Microsoft YaHei"/>
+                <a:cs typeface="Microsoft YaHei"/>
+              </a:rPr>
+              <a:t>SDK_VERSION</a:t>
+            </a:r>
+            <a:r>
+              <a:rPr sz="2175" b="0">
+                <a:solidFill>
+                  <a:srgbClr val="29263B"/>
+                </a:solidFill>
+                <a:latin typeface="Microsoft YaHei"/>
+                <a:ea typeface="Microsoft YaHei"/>
+                <a:cs typeface="Microsoft YaHei"/>
+              </a:rPr>
+              <a:t>，再进入同版 SDK Releases。</a:t>
             </a:r>
           </a:p>
           <a:p xmlns:a="http://schemas.openxmlformats.org/drawingml/2006/main">
@@ -17948,7 +18599,29 @@
                 <a:ea typeface="Microsoft YaHei"/>
                 <a:cs typeface="Microsoft YaHei"/>
               </a:rPr>
-              <a:t>同时下载 sha256.sum，比对同名归档的摘要。</a:t>
+              <a:t>同时下载 </a:t>
+            </a:r>
+            <a:r>
+              <a:rPr sz="2175" b="0">
+                <a:solidFill>
+                  <a:srgbClr val="0070C0"/>
+                </a:solidFill>
+                <a:latin typeface="Microsoft YaHei"/>
+                <a:ea typeface="Microsoft YaHei"/>
+                <a:cs typeface="Microsoft YaHei"/>
+              </a:rPr>
+              <a:t>sha256.sum</a:t>
+            </a:r>
+            <a:r>
+              <a:rPr sz="2175" b="0">
+                <a:solidFill>
+                  <a:srgbClr val="29263B"/>
+                </a:solidFill>
+                <a:latin typeface="Microsoft YaHei"/>
+                <a:ea typeface="Microsoft YaHei"/>
+                <a:cs typeface="Microsoft YaHei"/>
+              </a:rPr>
+              <a:t>，比对同名归档的摘要。</a:t>
             </a:r>
           </a:p>
           <a:p xmlns:a="http://schemas.openxmlformats.org/drawingml/2006/main">
@@ -17974,7 +18647,51 @@
                 <a:ea typeface="Microsoft YaHei"/>
                 <a:cs typeface="Microsoft YaHei"/>
               </a:rPr>
-              <a:t>解压后进入含 sdk_version、setup.sh 的内层，不新建这些官方文件。</a:t>
+              <a:t>解压后进入含 </a:t>
+            </a:r>
+            <a:r>
+              <a:rPr sz="2175" b="0">
+                <a:solidFill>
+                  <a:srgbClr val="0070C0"/>
+                </a:solidFill>
+                <a:latin typeface="Microsoft YaHei"/>
+                <a:ea typeface="Microsoft YaHei"/>
+                <a:cs typeface="Microsoft YaHei"/>
+              </a:rPr>
+              <a:t>sdk_version</a:t>
+            </a:r>
+            <a:r>
+              <a:rPr sz="2175" b="0">
+                <a:solidFill>
+                  <a:srgbClr val="29263B"/>
+                </a:solidFill>
+                <a:latin typeface="Microsoft YaHei"/>
+                <a:ea typeface="Microsoft YaHei"/>
+                <a:cs typeface="Microsoft YaHei"/>
+              </a:rPr>
+              <a:t>、</a:t>
+            </a:r>
+            <a:r>
+              <a:rPr sz="2175" b="0">
+                <a:solidFill>
+                  <a:srgbClr val="0070C0"/>
+                </a:solidFill>
+                <a:latin typeface="Microsoft YaHei"/>
+                <a:ea typeface="Microsoft YaHei"/>
+                <a:cs typeface="Microsoft YaHei"/>
+              </a:rPr>
+              <a:t>setup.sh</a:t>
+            </a:r>
+            <a:r>
+              <a:rPr sz="2175" b="0">
+                <a:solidFill>
+                  <a:srgbClr val="29263B"/>
+                </a:solidFill>
+                <a:latin typeface="Microsoft YaHei"/>
+                <a:ea typeface="Microsoft YaHei"/>
+                <a:cs typeface="Microsoft YaHei"/>
+              </a:rPr>
+              <a:t> 的内层，不新建这些官方文件。</a:t>
             </a:r>
           </a:p>
         </p:txBody>
@@ -18871,13 +19588,61 @@
             <a:r>
               <a:rPr sz="1725" b="0">
                 <a:solidFill>
+                  <a:srgbClr val="646173"/>
+                </a:solidFill>
+                <a:latin typeface="Consolas"/>
+                <a:ea typeface="Consolas"/>
+                <a:cs typeface="Consolas"/>
+              </a:rPr>
+              <a:t># 终端：Linux Bash；重新打开终端后的恢复与只读检查。</a:t>
+            </a:r>
+          </a:p>
+          <a:p xmlns:a="http://schemas.openxmlformats.org/drawingml/2006/main">
+            <a:pPr>
+              <a:lnSpc>
+                <a:spcPct val="120000"/>
+              </a:lnSpc>
+              <a:defRPr sz="1725" b="0">
+                <a:solidFill>
                   <a:srgbClr val="005968"/>
                 </a:solidFill>
                 <a:latin typeface="Consolas"/>
                 <a:ea typeface="Consolas"/>
                 <a:cs typeface="Consolas"/>
-              </a:rPr>
-              <a:t># 终端：Linux Bash；重新打开终端后的恢复与只读检查。</a:t>
+              </a:defRPr>
+            </a:pPr>
+            <a:r>
+              <a:rPr sz="1725" b="0">
+                <a:solidFill>
+                  <a:srgbClr val="A02B93"/>
+                </a:solidFill>
+                <a:latin typeface="Consolas"/>
+                <a:ea typeface="Consolas"/>
+                <a:cs typeface="Consolas"/>
+              </a:rPr>
+              <a:t>source</a:t>
+            </a:r>
+            <a:r>
+              <a:rPr sz="1725" b="0">
+                <a:solidFill>
+                  <a:srgbClr val="29263B"/>
+                </a:solidFill>
+                <a:latin typeface="Consolas"/>
+                <a:ea typeface="Consolas"/>
+                <a:cs typeface="Consolas"/>
+              </a:rPr>
+              <a:t> </a:t>
+            </a:r>
+            <a:r>
+              <a:rPr sz="1725" b="0">
+                <a:solidFill>
+                  <a:srgbClr val="0070C0"/>
+                </a:solidFill>
+                <a:latin typeface="Consolas"/>
+                <a:ea typeface="Consolas"/>
+                <a:cs typeface="Consolas"/>
+              </a:rPr>
+              <a:t>~/zephyrproject/.venv/bin/activate</a:t>
             </a:r>
           </a:p>
           <a:p xmlns:a="http://schemas.openxmlformats.org/drawingml/2006/main">
@@ -18897,13 +19662,138 @@
             <a:r>
               <a:rPr sz="1725" b="0">
                 <a:solidFill>
+                  <a:srgbClr val="A02B93"/>
+                </a:solidFill>
+                <a:latin typeface="Consolas"/>
+                <a:ea typeface="Consolas"/>
+                <a:cs typeface="Consolas"/>
+              </a:rPr>
+              <a:t>cd</a:t>
+            </a:r>
+            <a:r>
+              <a:rPr sz="1725" b="0">
+                <a:solidFill>
+                  <a:srgbClr val="29263B"/>
+                </a:solidFill>
+                <a:latin typeface="Consolas"/>
+                <a:ea typeface="Consolas"/>
+                <a:cs typeface="Consolas"/>
+              </a:rPr>
+              <a:t> </a:t>
+            </a:r>
+            <a:r>
+              <a:rPr sz="1725" b="0">
+                <a:solidFill>
+                  <a:srgbClr val="0070C0"/>
+                </a:solidFill>
+                <a:latin typeface="Consolas"/>
+                <a:ea typeface="Consolas"/>
+                <a:cs typeface="Consolas"/>
+              </a:rPr>
+              <a:t>~/zephyrproject/zephyr</a:t>
+            </a:r>
+          </a:p>
+          <a:p xmlns:a="http://schemas.openxmlformats.org/drawingml/2006/main">
+            <a:pPr>
+              <a:lnSpc>
+                <a:spcPct val="120000"/>
+              </a:lnSpc>
+              <a:defRPr sz="1725" b="0">
+                <a:solidFill>
                   <a:srgbClr val="005968"/>
                 </a:solidFill>
                 <a:latin typeface="Consolas"/>
                 <a:ea typeface="Consolas"/>
                 <a:cs typeface="Consolas"/>
-              </a:rPr>
-              <a:t>source ~/zephyrproject/.venv/bin/activate</a:t>
+              </a:defRPr>
+            </a:pPr>
+            <a:r>
+              <a:rPr sz="1725" b="0">
+                <a:solidFill>
+                  <a:srgbClr val="A02B93"/>
+                </a:solidFill>
+                <a:latin typeface="Consolas"/>
+                <a:ea typeface="Consolas"/>
+                <a:cs typeface="Consolas"/>
+              </a:rPr>
+              <a:t>python</a:t>
+            </a:r>
+            <a:r>
+              <a:rPr sz="1725" b="0">
+                <a:solidFill>
+                  <a:srgbClr val="29263B"/>
+                </a:solidFill>
+                <a:latin typeface="Consolas"/>
+                <a:ea typeface="Consolas"/>
+                <a:cs typeface="Consolas"/>
+              </a:rPr>
+              <a:t> </a:t>
+            </a:r>
+            <a:r>
+              <a:rPr sz="1725" b="0">
+                <a:solidFill>
+                  <a:srgbClr val="B84E00"/>
+                </a:solidFill>
+                <a:latin typeface="Consolas"/>
+                <a:ea typeface="Consolas"/>
+                <a:cs typeface="Consolas"/>
+              </a:rPr>
+              <a:t>-c</a:t>
+            </a:r>
+            <a:r>
+              <a:rPr sz="1725" b="0">
+                <a:solidFill>
+                  <a:srgbClr val="29263B"/>
+                </a:solidFill>
+                <a:latin typeface="Consolas"/>
+                <a:ea typeface="Consolas"/>
+                <a:cs typeface="Consolas"/>
+              </a:rPr>
+              <a:t> 'import sys; </a:t>
+            </a:r>
+            <a:r>
+              <a:rPr sz="1725" b="0">
+                <a:solidFill>
+                  <a:srgbClr val="087B3D"/>
+                </a:solidFill>
+                <a:latin typeface="Consolas"/>
+                <a:ea typeface="Consolas"/>
+                <a:cs typeface="Consolas"/>
+              </a:rPr>
+              <a:t>print</a:t>
+            </a:r>
+            <a:r>
+              <a:rPr sz="1725" b="0">
+                <a:solidFill>
+                  <a:srgbClr val="29263B"/>
+                </a:solidFill>
+                <a:latin typeface="Consolas"/>
+                <a:ea typeface="Consolas"/>
+                <a:cs typeface="Consolas"/>
+              </a:rPr>
+              <a:t>(sys.executable); </a:t>
+            </a:r>
+            <a:r>
+              <a:rPr sz="1725" b="0">
+                <a:solidFill>
+                  <a:srgbClr val="087B3D"/>
+                </a:solidFill>
+                <a:latin typeface="Consolas"/>
+                <a:ea typeface="Consolas"/>
+                <a:cs typeface="Consolas"/>
+              </a:rPr>
+              <a:t>print</a:t>
+            </a:r>
+            <a:r>
+              <a:rPr sz="1725" b="0">
+                <a:solidFill>
+                  <a:srgbClr val="29263B"/>
+                </a:solidFill>
+                <a:latin typeface="Consolas"/>
+                <a:ea typeface="Consolas"/>
+                <a:cs typeface="Consolas"/>
+              </a:rPr>
+              <a:t>(sys.platform)'</a:t>
             </a:r>
           </a:p>
           <a:p xmlns:a="http://schemas.openxmlformats.org/drawingml/2006/main">
@@ -18923,13 +19813,94 @@
             <a:r>
               <a:rPr sz="1725" b="0">
                 <a:solidFill>
+                  <a:srgbClr val="A02B93"/>
+                </a:solidFill>
+                <a:latin typeface="Consolas"/>
+                <a:ea typeface="Consolas"/>
+                <a:cs typeface="Consolas"/>
+              </a:rPr>
+              <a:t>python</a:t>
+            </a:r>
+            <a:r>
+              <a:rPr sz="1725" b="0">
+                <a:solidFill>
+                  <a:srgbClr val="29263B"/>
+                </a:solidFill>
+                <a:latin typeface="Consolas"/>
+                <a:ea typeface="Consolas"/>
+                <a:cs typeface="Consolas"/>
+              </a:rPr>
+              <a:t> </a:t>
+            </a:r>
+            <a:r>
+              <a:rPr sz="1725" b="0">
+                <a:solidFill>
+                  <a:srgbClr val="B84E00"/>
+                </a:solidFill>
+                <a:latin typeface="Consolas"/>
+                <a:ea typeface="Consolas"/>
+                <a:cs typeface="Consolas"/>
+              </a:rPr>
+              <a:t>-m</a:t>
+            </a:r>
+            <a:r>
+              <a:rPr sz="1725" b="0">
+                <a:solidFill>
+                  <a:srgbClr val="29263B"/>
+                </a:solidFill>
+                <a:latin typeface="Consolas"/>
+                <a:ea typeface="Consolas"/>
+                <a:cs typeface="Consolas"/>
+              </a:rPr>
+              <a:t> pip check</a:t>
+            </a:r>
+          </a:p>
+          <a:p xmlns:a="http://schemas.openxmlformats.org/drawingml/2006/main">
+            <a:pPr>
+              <a:lnSpc>
+                <a:spcPct val="120000"/>
+              </a:lnSpc>
+              <a:defRPr sz="1725" b="0">
+                <a:solidFill>
                   <a:srgbClr val="005968"/>
                 </a:solidFill>
                 <a:latin typeface="Consolas"/>
                 <a:ea typeface="Consolas"/>
                 <a:cs typeface="Consolas"/>
-              </a:rPr>
-              <a:t>cd ~/zephyrproject/zephyr</a:t>
+              </a:defRPr>
+            </a:pPr>
+            <a:r>
+              <a:rPr sz="1725" b="0">
+                <a:solidFill>
+                  <a:srgbClr val="A02B93"/>
+                </a:solidFill>
+                <a:latin typeface="Consolas"/>
+                <a:ea typeface="Consolas"/>
+                <a:cs typeface="Consolas"/>
+              </a:rPr>
+              <a:t>west</a:t>
+            </a:r>
+            <a:r>
+              <a:rPr sz="1725" b="0">
+                <a:solidFill>
+                  <a:srgbClr val="29263B"/>
+                </a:solidFill>
+                <a:latin typeface="Consolas"/>
+                <a:ea typeface="Consolas"/>
+                <a:cs typeface="Consolas"/>
+              </a:rPr>
+              <a:t> </a:t>
+            </a:r>
+            <a:r>
+              <a:rPr sz="1725" b="0">
+                <a:solidFill>
+                  <a:srgbClr val="B84E00"/>
+                </a:solidFill>
+                <a:latin typeface="Consolas"/>
+                <a:ea typeface="Consolas"/>
+                <a:cs typeface="Consolas"/>
+              </a:rPr>
+              <a:t>--version</a:t>
             </a:r>
           </a:p>
           <a:p xmlns:a="http://schemas.openxmlformats.org/drawingml/2006/main">
@@ -18949,13 +19920,61 @@
             <a:r>
               <a:rPr sz="1725" b="0">
                 <a:solidFill>
+                  <a:srgbClr val="A02B93"/>
+                </a:solidFill>
+                <a:latin typeface="Consolas"/>
+                <a:ea typeface="Consolas"/>
+                <a:cs typeface="Consolas"/>
+              </a:rPr>
+              <a:t>west</a:t>
+            </a:r>
+            <a:r>
+              <a:rPr sz="1725" b="0">
+                <a:solidFill>
+                  <a:srgbClr val="29263B"/>
+                </a:solidFill>
+                <a:latin typeface="Consolas"/>
+                <a:ea typeface="Consolas"/>
+                <a:cs typeface="Consolas"/>
+              </a:rPr>
+              <a:t> topdir</a:t>
+            </a:r>
+          </a:p>
+          <a:p xmlns:a="http://schemas.openxmlformats.org/drawingml/2006/main">
+            <a:pPr>
+              <a:lnSpc>
+                <a:spcPct val="120000"/>
+              </a:lnSpc>
+              <a:defRPr sz="1725" b="0">
+                <a:solidFill>
                   <a:srgbClr val="005968"/>
                 </a:solidFill>
                 <a:latin typeface="Consolas"/>
                 <a:ea typeface="Consolas"/>
                 <a:cs typeface="Consolas"/>
-              </a:rPr>
-              <a:t>python -c 'import sys; print(sys.executable); print(sys.platform)'</a:t>
+              </a:defRPr>
+            </a:pPr>
+            <a:r>
+              <a:rPr sz="1725" b="0">
+                <a:solidFill>
+                  <a:srgbClr val="A02B93"/>
+                </a:solidFill>
+                <a:latin typeface="Consolas"/>
+                <a:ea typeface="Consolas"/>
+                <a:cs typeface="Consolas"/>
+              </a:rPr>
+              <a:t>west</a:t>
+            </a:r>
+            <a:r>
+              <a:rPr sz="1725" b="0">
+                <a:solidFill>
+                  <a:srgbClr val="29263B"/>
+                </a:solidFill>
+                <a:latin typeface="Consolas"/>
+                <a:ea typeface="Consolas"/>
+                <a:cs typeface="Consolas"/>
+              </a:rPr>
+              <a:t> sdk list</a:t>
             </a:r>
           </a:p>
           <a:p xmlns:a="http://schemas.openxmlformats.org/drawingml/2006/main">
@@ -18975,143 +19994,83 @@
             <a:r>
               <a:rPr sz="1725" b="0">
                 <a:solidFill>
+                  <a:srgbClr val="A02B93"/>
+                </a:solidFill>
+                <a:latin typeface="Consolas"/>
+                <a:ea typeface="Consolas"/>
+                <a:cs typeface="Consolas"/>
+              </a:rPr>
+              <a:t>cmake</a:t>
+            </a:r>
+            <a:r>
+              <a:rPr sz="1725" b="0">
+                <a:solidFill>
+                  <a:srgbClr val="29263B"/>
+                </a:solidFill>
+                <a:latin typeface="Consolas"/>
+                <a:ea typeface="Consolas"/>
+                <a:cs typeface="Consolas"/>
+              </a:rPr>
+              <a:t> </a:t>
+            </a:r>
+            <a:r>
+              <a:rPr sz="1725" b="0">
+                <a:solidFill>
+                  <a:srgbClr val="B84E00"/>
+                </a:solidFill>
+                <a:latin typeface="Consolas"/>
+                <a:ea typeface="Consolas"/>
+                <a:cs typeface="Consolas"/>
+              </a:rPr>
+              <a:t>--version</a:t>
+            </a:r>
+          </a:p>
+          <a:p xmlns:a="http://schemas.openxmlformats.org/drawingml/2006/main">
+            <a:pPr>
+              <a:lnSpc>
+                <a:spcPct val="120000"/>
+              </a:lnSpc>
+              <a:defRPr sz="1725" b="0">
+                <a:solidFill>
                   <a:srgbClr val="005968"/>
                 </a:solidFill>
                 <a:latin typeface="Consolas"/>
                 <a:ea typeface="Consolas"/>
                 <a:cs typeface="Consolas"/>
-              </a:rPr>
-              <a:t>python -m pip check</a:t>
-            </a:r>
-          </a:p>
-          <a:p xmlns:a="http://schemas.openxmlformats.org/drawingml/2006/main">
-            <a:pPr>
-              <a:lnSpc>
-                <a:spcPct val="120000"/>
-              </a:lnSpc>
-              <a:defRPr sz="1725" b="0">
-                <a:solidFill>
-                  <a:srgbClr val="005968"/>
-                </a:solidFill>
-                <a:latin typeface="Consolas"/>
-                <a:ea typeface="Consolas"/>
-                <a:cs typeface="Consolas"/>
               </a:defRPr>
             </a:pPr>
             <a:r>
               <a:rPr sz="1725" b="0">
                 <a:solidFill>
-                  <a:srgbClr val="005968"/>
-                </a:solidFill>
-                <a:latin typeface="Consolas"/>
-                <a:ea typeface="Consolas"/>
-                <a:cs typeface="Consolas"/>
-              </a:rPr>
-              <a:t>west --version</a:t>
-            </a:r>
-          </a:p>
-          <a:p xmlns:a="http://schemas.openxmlformats.org/drawingml/2006/main">
-            <a:pPr>
-              <a:lnSpc>
-                <a:spcPct val="120000"/>
-              </a:lnSpc>
-              <a:defRPr sz="1725" b="0">
-                <a:solidFill>
-                  <a:srgbClr val="005968"/>
-                </a:solidFill>
-                <a:latin typeface="Consolas"/>
-                <a:ea typeface="Consolas"/>
-                <a:cs typeface="Consolas"/>
-              </a:defRPr>
-            </a:pPr>
+                  <a:srgbClr val="A02B93"/>
+                </a:solidFill>
+                <a:latin typeface="Consolas"/>
+                <a:ea typeface="Consolas"/>
+                <a:cs typeface="Consolas"/>
+              </a:rPr>
+              <a:t>dtc</a:t>
+            </a:r>
             <a:r>
               <a:rPr sz="1725" b="0">
                 <a:solidFill>
-                  <a:srgbClr val="005968"/>
-                </a:solidFill>
-                <a:latin typeface="Consolas"/>
-                <a:ea typeface="Consolas"/>
-                <a:cs typeface="Consolas"/>
-              </a:rPr>
-              <a:t>west topdir</a:t>
-            </a:r>
-          </a:p>
-          <a:p xmlns:a="http://schemas.openxmlformats.org/drawingml/2006/main">
-            <a:pPr>
-              <a:lnSpc>
-                <a:spcPct val="120000"/>
-              </a:lnSpc>
-              <a:defRPr sz="1725" b="0">
-                <a:solidFill>
-                  <a:srgbClr val="005968"/>
-                </a:solidFill>
-                <a:latin typeface="Consolas"/>
-                <a:ea typeface="Consolas"/>
-                <a:cs typeface="Consolas"/>
-              </a:defRPr>
-            </a:pPr>
+                  <a:srgbClr val="29263B"/>
+                </a:solidFill>
+                <a:latin typeface="Consolas"/>
+                <a:ea typeface="Consolas"/>
+                <a:cs typeface="Consolas"/>
+              </a:rPr>
+              <a:t> </a:t>
+            </a:r>
             <a:r>
               <a:rPr sz="1725" b="0">
                 <a:solidFill>
-                  <a:srgbClr val="005968"/>
-                </a:solidFill>
-                <a:latin typeface="Consolas"/>
-                <a:ea typeface="Consolas"/>
-                <a:cs typeface="Consolas"/>
-              </a:rPr>
-              <a:t>west sdk list</a:t>
-            </a:r>
-          </a:p>
-          <a:p xmlns:a="http://schemas.openxmlformats.org/drawingml/2006/main">
-            <a:pPr>
-              <a:lnSpc>
-                <a:spcPct val="120000"/>
-              </a:lnSpc>
-              <a:defRPr sz="1725" b="0">
-                <a:solidFill>
-                  <a:srgbClr val="005968"/>
-                </a:solidFill>
-                <a:latin typeface="Consolas"/>
-                <a:ea typeface="Consolas"/>
-                <a:cs typeface="Consolas"/>
-              </a:defRPr>
-            </a:pPr>
-            <a:r>
-              <a:rPr sz="1725" b="0">
-                <a:solidFill>
-                  <a:srgbClr val="005968"/>
-                </a:solidFill>
-                <a:latin typeface="Consolas"/>
-                <a:ea typeface="Consolas"/>
-                <a:cs typeface="Consolas"/>
-              </a:rPr>
-              <a:t>cmake --version</a:t>
-            </a:r>
-          </a:p>
-          <a:p xmlns:a="http://schemas.openxmlformats.org/drawingml/2006/main">
-            <a:pPr>
-              <a:lnSpc>
-                <a:spcPct val="120000"/>
-              </a:lnSpc>
-              <a:defRPr sz="1725" b="0">
-                <a:solidFill>
-                  <a:srgbClr val="005968"/>
-                </a:solidFill>
-                <a:latin typeface="Consolas"/>
-                <a:ea typeface="Consolas"/>
-                <a:cs typeface="Consolas"/>
-              </a:defRPr>
-            </a:pPr>
-            <a:r>
-              <a:rPr sz="1725" b="0">
-                <a:solidFill>
-                  <a:srgbClr val="005968"/>
-                </a:solidFill>
-                <a:latin typeface="Consolas"/>
-                <a:ea typeface="Consolas"/>
-                <a:cs typeface="Consolas"/>
-              </a:rPr>
-              <a:t>dtc --version</a:t>
+                  <a:srgbClr val="B84E00"/>
+                </a:solidFill>
+                <a:latin typeface="Consolas"/>
+                <a:ea typeface="Consolas"/>
+                <a:cs typeface="Consolas"/>
+              </a:rPr>
+              <a:t>--version</a:t>
             </a:r>
           </a:p>
         </p:txBody>
@@ -20134,13 +21093,61 @@
             <a:r>
               <a:rPr sz="1875" b="0">
                 <a:solidFill>
+                  <a:srgbClr val="646173"/>
+                </a:solidFill>
+                <a:latin typeface="Consolas"/>
+                <a:ea typeface="Consolas"/>
+                <a:cs typeface="Consolas"/>
+              </a:rPr>
+              <a:t># 终端：Linux Bash；任意目录。只读检查。</a:t>
+            </a:r>
+          </a:p>
+          <a:p xmlns:a="http://schemas.openxmlformats.org/drawingml/2006/main">
+            <a:pPr>
+              <a:lnSpc>
+                <a:spcPct val="120000"/>
+              </a:lnSpc>
+              <a:defRPr sz="1875" b="0">
+                <a:solidFill>
                   <a:srgbClr val="005968"/>
                 </a:solidFill>
                 <a:latin typeface="Consolas"/>
                 <a:ea typeface="Consolas"/>
                 <a:cs typeface="Consolas"/>
-              </a:rPr>
-              <a:t># 终端：Linux Bash；任意目录。只读检查。</a:t>
+              </a:defRPr>
+            </a:pPr>
+            <a:r>
+              <a:rPr sz="1875" b="0">
+                <a:solidFill>
+                  <a:srgbClr val="A02B93"/>
+                </a:solidFill>
+                <a:latin typeface="Consolas"/>
+                <a:ea typeface="Consolas"/>
+                <a:cs typeface="Consolas"/>
+              </a:rPr>
+              <a:t>cat</a:t>
+            </a:r>
+            <a:r>
+              <a:rPr sz="1875" b="0">
+                <a:solidFill>
+                  <a:srgbClr val="29263B"/>
+                </a:solidFill>
+                <a:latin typeface="Consolas"/>
+                <a:ea typeface="Consolas"/>
+                <a:cs typeface="Consolas"/>
+              </a:rPr>
+              <a:t> </a:t>
+            </a:r>
+            <a:r>
+              <a:rPr sz="1875" b="0">
+                <a:solidFill>
+                  <a:srgbClr val="0070C0"/>
+                </a:solidFill>
+                <a:latin typeface="Consolas"/>
+                <a:ea typeface="Consolas"/>
+                <a:cs typeface="Consolas"/>
+              </a:rPr>
+              <a:t>/etc/os-release</a:t>
             </a:r>
           </a:p>
           <a:p xmlns:a="http://schemas.openxmlformats.org/drawingml/2006/main">
@@ -20160,39 +21167,35 @@
             <a:r>
               <a:rPr sz="1875" b="0">
                 <a:solidFill>
-                  <a:srgbClr val="005968"/>
-                </a:solidFill>
-                <a:latin typeface="Consolas"/>
-                <a:ea typeface="Consolas"/>
-                <a:cs typeface="Consolas"/>
-              </a:rPr>
-              <a:t>cat /etc/os-release</a:t>
-            </a:r>
-          </a:p>
-          <a:p xmlns:a="http://schemas.openxmlformats.org/drawingml/2006/main">
-            <a:pPr>
-              <a:lnSpc>
-                <a:spcPct val="120000"/>
-              </a:lnSpc>
-              <a:defRPr sz="1875" b="0">
-                <a:solidFill>
-                  <a:srgbClr val="005968"/>
-                </a:solidFill>
-                <a:latin typeface="Consolas"/>
-                <a:ea typeface="Consolas"/>
-                <a:cs typeface="Consolas"/>
-              </a:defRPr>
-            </a:pPr>
+                  <a:srgbClr val="A02B93"/>
+                </a:solidFill>
+                <a:latin typeface="Consolas"/>
+                <a:ea typeface="Consolas"/>
+                <a:cs typeface="Consolas"/>
+              </a:rPr>
+              <a:t>uname</a:t>
+            </a:r>
             <a:r>
               <a:rPr sz="1875" b="0">
                 <a:solidFill>
-                  <a:srgbClr val="005968"/>
-                </a:solidFill>
-                <a:latin typeface="Consolas"/>
-                <a:ea typeface="Consolas"/>
-                <a:cs typeface="Consolas"/>
-              </a:rPr>
-              <a:t>uname -m</a:t>
+                  <a:srgbClr val="29263B"/>
+                </a:solidFill>
+                <a:latin typeface="Consolas"/>
+                <a:ea typeface="Consolas"/>
+                <a:cs typeface="Consolas"/>
+              </a:rPr>
+              <a:t> </a:t>
+            </a:r>
+            <a:r>
+              <a:rPr sz="1875" b="0">
+                <a:solidFill>
+                  <a:srgbClr val="B84E00"/>
+                </a:solidFill>
+                <a:latin typeface="Consolas"/>
+                <a:ea typeface="Consolas"/>
+                <a:cs typeface="Consolas"/>
+              </a:rPr>
+              <a:t>-m</a:t>
             </a:r>
           </a:p>
         </p:txBody>
@@ -20630,13 +21633,72 @@
             <a:r>
               <a:rPr sz="1725" b="0">
                 <a:solidFill>
+                  <a:srgbClr val="646173"/>
+                </a:solidFill>
+                <a:latin typeface="Consolas"/>
+                <a:ea typeface="Consolas"/>
+                <a:cs typeface="Consolas"/>
+              </a:rPr>
+              <a:t># 终端：Ubuntu 22.04 Bash；任意目录。</a:t>
+            </a:r>
+          </a:p>
+          <a:p xmlns:a="http://schemas.openxmlformats.org/drawingml/2006/main">
+            <a:pPr>
+              <a:lnSpc>
+                <a:spcPct val="120000"/>
+              </a:lnSpc>
+              <a:defRPr sz="1725" b="0">
+                <a:solidFill>
                   <a:srgbClr val="005968"/>
                 </a:solidFill>
                 <a:latin typeface="Consolas"/>
                 <a:ea typeface="Consolas"/>
                 <a:cs typeface="Consolas"/>
-              </a:rPr>
-              <a:t># 终端：Ubuntu 22.04 Bash；任意目录。</a:t>
+              </a:defRPr>
+            </a:pPr>
+            <a:r>
+              <a:rPr sz="1725" b="0">
+                <a:solidFill>
+                  <a:srgbClr val="A02B93"/>
+                </a:solidFill>
+                <a:latin typeface="Consolas"/>
+                <a:ea typeface="Consolas"/>
+                <a:cs typeface="Consolas"/>
+              </a:rPr>
+              <a:t>sudo</a:t>
+            </a:r>
+            <a:r>
+              <a:rPr sz="1725" b="0">
+                <a:solidFill>
+                  <a:srgbClr val="29263B"/>
+                </a:solidFill>
+                <a:latin typeface="Consolas"/>
+                <a:ea typeface="Consolas"/>
+                <a:cs typeface="Consolas"/>
+              </a:rPr>
+              <a:t> </a:t>
+            </a:r>
+            <a:r>
+              <a:rPr sz="1725" b="0">
+                <a:solidFill>
+                  <a:srgbClr val="A02B93"/>
+                </a:solidFill>
+                <a:latin typeface="Consolas"/>
+                <a:ea typeface="Consolas"/>
+                <a:cs typeface="Consolas"/>
+              </a:rPr>
+              <a:t>apt</a:t>
+            </a:r>
+            <a:r>
+              <a:rPr sz="1725" b="0">
+                <a:solidFill>
+                  <a:srgbClr val="29263B"/>
+                </a:solidFill>
+                <a:latin typeface="Consolas"/>
+                <a:ea typeface="Consolas"/>
+                <a:cs typeface="Consolas"/>
+              </a:rPr>
+              <a:t> update</a:t>
             </a:r>
           </a:p>
           <a:p xmlns:a="http://schemas.openxmlformats.org/drawingml/2006/main">
@@ -20656,13 +21718,182 @@
             <a:r>
               <a:rPr sz="1725" b="0">
                 <a:solidFill>
+                  <a:srgbClr val="A02B93"/>
+                </a:solidFill>
+                <a:latin typeface="Consolas"/>
+                <a:ea typeface="Consolas"/>
+                <a:cs typeface="Consolas"/>
+              </a:rPr>
+              <a:t>sudo</a:t>
+            </a:r>
+            <a:r>
+              <a:rPr sz="1725" b="0">
+                <a:solidFill>
+                  <a:srgbClr val="29263B"/>
+                </a:solidFill>
+                <a:latin typeface="Consolas"/>
+                <a:ea typeface="Consolas"/>
+                <a:cs typeface="Consolas"/>
+              </a:rPr>
+              <a:t> </a:t>
+            </a:r>
+            <a:r>
+              <a:rPr sz="1725" b="0">
+                <a:solidFill>
+                  <a:srgbClr val="A02B93"/>
+                </a:solidFill>
+                <a:latin typeface="Consolas"/>
+                <a:ea typeface="Consolas"/>
+                <a:cs typeface="Consolas"/>
+              </a:rPr>
+              <a:t>apt</a:t>
+            </a:r>
+            <a:r>
+              <a:rPr sz="1725" b="0">
+                <a:solidFill>
+                  <a:srgbClr val="29263B"/>
+                </a:solidFill>
+                <a:latin typeface="Consolas"/>
+                <a:ea typeface="Consolas"/>
+                <a:cs typeface="Consolas"/>
+              </a:rPr>
+              <a:t> install </a:t>
+            </a:r>
+            <a:r>
+              <a:rPr sz="1725" b="0">
+                <a:solidFill>
+                  <a:srgbClr val="B84E00"/>
+                </a:solidFill>
+                <a:latin typeface="Consolas"/>
+                <a:ea typeface="Consolas"/>
+                <a:cs typeface="Consolas"/>
+              </a:rPr>
+              <a:t>--no-install-recommends</a:t>
+            </a:r>
+            <a:r>
+              <a:rPr sz="1725" b="0">
+                <a:solidFill>
+                  <a:srgbClr val="29263B"/>
+                </a:solidFill>
+                <a:latin typeface="Consolas"/>
+                <a:ea typeface="Consolas"/>
+                <a:cs typeface="Consolas"/>
+              </a:rPr>
+              <a:t> </a:t>
+            </a:r>
+            <a:r>
+              <a:rPr sz="1725" b="0">
+                <a:solidFill>
+                  <a:srgbClr val="A02B93"/>
+                </a:solidFill>
+                <a:latin typeface="Consolas"/>
+                <a:ea typeface="Consolas"/>
+                <a:cs typeface="Consolas"/>
+              </a:rPr>
+              <a:t>git</a:t>
+            </a:r>
+            <a:r>
+              <a:rPr sz="1725" b="0">
+                <a:solidFill>
+                  <a:srgbClr val="29263B"/>
+                </a:solidFill>
+                <a:latin typeface="Consolas"/>
+                <a:ea typeface="Consolas"/>
+                <a:cs typeface="Consolas"/>
+              </a:rPr>
+              <a:t> </a:t>
+            </a:r>
+            <a:r>
+              <a:rPr sz="1725" b="0">
+                <a:solidFill>
+                  <a:srgbClr val="A02B93"/>
+                </a:solidFill>
+                <a:latin typeface="Consolas"/>
+                <a:ea typeface="Consolas"/>
+                <a:cs typeface="Consolas"/>
+              </a:rPr>
+              <a:t>cmake</a:t>
+            </a:r>
+            <a:r>
+              <a:rPr sz="1725" b="0">
+                <a:solidFill>
+                  <a:srgbClr val="29263B"/>
+                </a:solidFill>
+                <a:latin typeface="Consolas"/>
+                <a:ea typeface="Consolas"/>
+                <a:cs typeface="Consolas"/>
+              </a:rPr>
+              <a:t> ninja-build </a:t>
+            </a:r>
+            <a:r>
+              <a:rPr sz="1725" b="0">
+                <a:solidFill>
+                  <a:srgbClr val="A02B93"/>
+                </a:solidFill>
+                <a:latin typeface="Consolas"/>
+                <a:ea typeface="Consolas"/>
+                <a:cs typeface="Consolas"/>
+              </a:rPr>
+              <a:t>gperf</a:t>
+            </a:r>
+            <a:r>
+              <a:rPr sz="1725" b="0">
+                <a:solidFill>
+                  <a:srgbClr val="29263B"/>
+                </a:solidFill>
+                <a:latin typeface="Consolas"/>
+                <a:ea typeface="Consolas"/>
+                <a:cs typeface="Consolas"/>
+              </a:rPr>
+              <a:t> \</a:t>
+            </a:r>
+          </a:p>
+          <a:p xmlns:a="http://schemas.openxmlformats.org/drawingml/2006/main">
+            <a:pPr>
+              <a:lnSpc>
+                <a:spcPct val="120000"/>
+              </a:lnSpc>
+              <a:defRPr sz="1725" b="0">
+                <a:solidFill>
                   <a:srgbClr val="005968"/>
                 </a:solidFill>
                 <a:latin typeface="Consolas"/>
                 <a:ea typeface="Consolas"/>
                 <a:cs typeface="Consolas"/>
-              </a:rPr>
-              <a:t>sudo apt update</a:t>
+              </a:defRPr>
+            </a:pPr>
+            <a:r>
+              <a:rPr sz="1725" b="0">
+                <a:solidFill>
+                  <a:srgbClr val="29263B"/>
+                </a:solidFill>
+                <a:latin typeface="Consolas"/>
+                <a:ea typeface="Consolas"/>
+                <a:cs typeface="Consolas"/>
+              </a:rPr>
+              <a:t>  ccache dfu-util device-tree-compiler </a:t>
+            </a:r>
+            <a:r>
+              <a:rPr sz="1725" b="0">
+                <a:solidFill>
+                  <a:srgbClr val="A02B93"/>
+                </a:solidFill>
+                <a:latin typeface="Consolas"/>
+                <a:ea typeface="Consolas"/>
+                <a:cs typeface="Consolas"/>
+              </a:rPr>
+              <a:t>wget</a:t>
+            </a:r>
+            <a:r>
+              <a:rPr sz="1725" b="0">
+                <a:solidFill>
+                  <a:srgbClr val="29263B"/>
+                </a:solidFill>
+                <a:latin typeface="Consolas"/>
+                <a:ea typeface="Consolas"/>
+                <a:cs typeface="Consolas"/>
+              </a:rPr>
+              <a:t> python3-dev python3-venv python3-tk \</a:t>
             </a:r>
           </a:p>
           <a:p xmlns:a="http://schemas.openxmlformats.org/drawingml/2006/main">
@@ -20682,13 +21913,83 @@
             <a:r>
               <a:rPr sz="1725" b="0">
                 <a:solidFill>
+                  <a:srgbClr val="29263B"/>
+                </a:solidFill>
+                <a:latin typeface="Consolas"/>
+                <a:ea typeface="Consolas"/>
+                <a:cs typeface="Consolas"/>
+              </a:rPr>
+              <a:t>  xz-utils file </a:t>
+            </a:r>
+            <a:r>
+              <a:rPr sz="1725" b="0">
+                <a:solidFill>
+                  <a:srgbClr val="A02B93"/>
+                </a:solidFill>
+                <a:latin typeface="Consolas"/>
+                <a:ea typeface="Consolas"/>
+                <a:cs typeface="Consolas"/>
+              </a:rPr>
+              <a:t>make</a:t>
+            </a:r>
+            <a:r>
+              <a:rPr sz="1725" b="0">
+                <a:solidFill>
+                  <a:srgbClr val="29263B"/>
+                </a:solidFill>
+                <a:latin typeface="Consolas"/>
+                <a:ea typeface="Consolas"/>
+                <a:cs typeface="Consolas"/>
+              </a:rPr>
+              <a:t> gcc gcc-multilib g++-multilib libsdl2-dev libmagic1</a:t>
+            </a:r>
+          </a:p>
+          <a:p xmlns:a="http://schemas.openxmlformats.org/drawingml/2006/main">
+            <a:pPr>
+              <a:lnSpc>
+                <a:spcPct val="120000"/>
+              </a:lnSpc>
+              <a:defRPr sz="1725" b="0">
+                <a:solidFill>
                   <a:srgbClr val="005968"/>
                 </a:solidFill>
                 <a:latin typeface="Consolas"/>
                 <a:ea typeface="Consolas"/>
                 <a:cs typeface="Consolas"/>
-              </a:rPr>
-              <a:t>sudo apt install --no-install-recommends git cmake ninja-build gperf \</a:t>
+              </a:defRPr>
+            </a:pPr>
+            <a:r>
+              <a:rPr sz="1725" b="0">
+                <a:solidFill>
+                  <a:srgbClr val="A02B93"/>
+                </a:solidFill>
+                <a:latin typeface="Consolas"/>
+                <a:ea typeface="Consolas"/>
+                <a:cs typeface="Consolas"/>
+              </a:rPr>
+              <a:t>cmake</a:t>
+            </a:r>
+            <a:r>
+              <a:rPr sz="1725" b="0">
+                <a:solidFill>
+                  <a:srgbClr val="29263B"/>
+                </a:solidFill>
+                <a:latin typeface="Consolas"/>
+                <a:ea typeface="Consolas"/>
+                <a:cs typeface="Consolas"/>
+              </a:rPr>
+              <a:t> </a:t>
+            </a:r>
+            <a:r>
+              <a:rPr sz="1725" b="0">
+                <a:solidFill>
+                  <a:srgbClr val="B84E00"/>
+                </a:solidFill>
+                <a:latin typeface="Consolas"/>
+                <a:ea typeface="Consolas"/>
+                <a:cs typeface="Consolas"/>
+              </a:rPr>
+              <a:t>--version</a:t>
             </a:r>
           </a:p>
           <a:p xmlns:a="http://schemas.openxmlformats.org/drawingml/2006/main">
@@ -20708,13 +22009,83 @@
             <a:r>
               <a:rPr sz="1725" b="0">
                 <a:solidFill>
+                  <a:srgbClr val="A02B93"/>
+                </a:solidFill>
+                <a:latin typeface="Consolas"/>
+                <a:ea typeface="Consolas"/>
+                <a:cs typeface="Consolas"/>
+              </a:rPr>
+              <a:t>python3</a:t>
+            </a:r>
+            <a:r>
+              <a:rPr sz="1725" b="0">
+                <a:solidFill>
+                  <a:srgbClr val="29263B"/>
+                </a:solidFill>
+                <a:latin typeface="Consolas"/>
+                <a:ea typeface="Consolas"/>
+                <a:cs typeface="Consolas"/>
+              </a:rPr>
+              <a:t> </a:t>
+            </a:r>
+            <a:r>
+              <a:rPr sz="1725" b="0">
+                <a:solidFill>
+                  <a:srgbClr val="B84E00"/>
+                </a:solidFill>
+                <a:latin typeface="Consolas"/>
+                <a:ea typeface="Consolas"/>
+                <a:cs typeface="Consolas"/>
+              </a:rPr>
+              <a:t>--version</a:t>
+            </a:r>
+          </a:p>
+          <a:p xmlns:a="http://schemas.openxmlformats.org/drawingml/2006/main">
+            <a:pPr>
+              <a:lnSpc>
+                <a:spcPct val="120000"/>
+              </a:lnSpc>
+              <a:defRPr sz="1725" b="0">
+                <a:solidFill>
                   <a:srgbClr val="005968"/>
                 </a:solidFill>
                 <a:latin typeface="Consolas"/>
                 <a:ea typeface="Consolas"/>
                 <a:cs typeface="Consolas"/>
-              </a:rPr>
-              <a:t>  ccache dfu-util device-tree-compiler wget python3-dev python3-venv python3-tk \</a:t>
+              </a:defRPr>
+            </a:pPr>
+            <a:r>
+              <a:rPr sz="1725" b="0">
+                <a:solidFill>
+                  <a:srgbClr val="A02B93"/>
+                </a:solidFill>
+                <a:latin typeface="Consolas"/>
+                <a:ea typeface="Consolas"/>
+                <a:cs typeface="Consolas"/>
+              </a:rPr>
+              <a:t>dtc</a:t>
+            </a:r>
+            <a:r>
+              <a:rPr sz="1725" b="0">
+                <a:solidFill>
+                  <a:srgbClr val="29263B"/>
+                </a:solidFill>
+                <a:latin typeface="Consolas"/>
+                <a:ea typeface="Consolas"/>
+                <a:cs typeface="Consolas"/>
+              </a:rPr>
+              <a:t> </a:t>
+            </a:r>
+            <a:r>
+              <a:rPr sz="1725" b="0">
+                <a:solidFill>
+                  <a:srgbClr val="B84E00"/>
+                </a:solidFill>
+                <a:latin typeface="Consolas"/>
+                <a:ea typeface="Consolas"/>
+                <a:cs typeface="Consolas"/>
+              </a:rPr>
+              <a:t>--version</a:t>
             </a:r>
           </a:p>
           <a:p xmlns:a="http://schemas.openxmlformats.org/drawingml/2006/main">
@@ -20734,117 +22105,145 @@
             <a:r>
               <a:rPr sz="1725" b="0">
                 <a:solidFill>
-                  <a:srgbClr val="005968"/>
-                </a:solidFill>
-                <a:latin typeface="Consolas"/>
-                <a:ea typeface="Consolas"/>
-                <a:cs typeface="Consolas"/>
-              </a:rPr>
-              <a:t>  xz-utils file make gcc gcc-multilib g++-multilib libsdl2-dev libmagic1</a:t>
-            </a:r>
-          </a:p>
-          <a:p xmlns:a="http://schemas.openxmlformats.org/drawingml/2006/main">
-            <a:pPr>
-              <a:lnSpc>
-                <a:spcPct val="120000"/>
-              </a:lnSpc>
-              <a:defRPr sz="1725" b="0">
-                <a:solidFill>
-                  <a:srgbClr val="005968"/>
-                </a:solidFill>
-                <a:latin typeface="Consolas"/>
-                <a:ea typeface="Consolas"/>
-                <a:cs typeface="Consolas"/>
-              </a:defRPr>
-            </a:pPr>
+                  <a:srgbClr val="A02B93"/>
+                </a:solidFill>
+                <a:latin typeface="Consolas"/>
+                <a:ea typeface="Consolas"/>
+                <a:cs typeface="Consolas"/>
+              </a:rPr>
+              <a:t>type</a:t>
+            </a:r>
             <a:r>
               <a:rPr sz="1725" b="0">
                 <a:solidFill>
-                  <a:srgbClr val="005968"/>
-                </a:solidFill>
-                <a:latin typeface="Consolas"/>
-                <a:ea typeface="Consolas"/>
-                <a:cs typeface="Consolas"/>
-              </a:rPr>
-              <a:t>cmake --version</a:t>
-            </a:r>
-          </a:p>
-          <a:p xmlns:a="http://schemas.openxmlformats.org/drawingml/2006/main">
-            <a:pPr>
-              <a:lnSpc>
-                <a:spcPct val="120000"/>
-              </a:lnSpc>
-              <a:defRPr sz="1725" b="0">
-                <a:solidFill>
-                  <a:srgbClr val="005968"/>
-                </a:solidFill>
-                <a:latin typeface="Consolas"/>
-                <a:ea typeface="Consolas"/>
-                <a:cs typeface="Consolas"/>
-              </a:defRPr>
-            </a:pPr>
+                  <a:srgbClr val="29263B"/>
+                </a:solidFill>
+                <a:latin typeface="Consolas"/>
+                <a:ea typeface="Consolas"/>
+                <a:cs typeface="Consolas"/>
+              </a:rPr>
+              <a:t> </a:t>
+            </a:r>
             <a:r>
               <a:rPr sz="1725" b="0">
                 <a:solidFill>
-                  <a:srgbClr val="005968"/>
-                </a:solidFill>
-                <a:latin typeface="Consolas"/>
-                <a:ea typeface="Consolas"/>
-                <a:cs typeface="Consolas"/>
-              </a:rPr>
-              <a:t>python3 --version</a:t>
-            </a:r>
-          </a:p>
-          <a:p xmlns:a="http://schemas.openxmlformats.org/drawingml/2006/main">
-            <a:pPr>
-              <a:lnSpc>
-                <a:spcPct val="120000"/>
-              </a:lnSpc>
-              <a:defRPr sz="1725" b="0">
-                <a:solidFill>
-                  <a:srgbClr val="005968"/>
-                </a:solidFill>
-                <a:latin typeface="Consolas"/>
-                <a:ea typeface="Consolas"/>
-                <a:cs typeface="Consolas"/>
-              </a:defRPr>
-            </a:pPr>
+                  <a:srgbClr val="B84E00"/>
+                </a:solidFill>
+                <a:latin typeface="Consolas"/>
+                <a:ea typeface="Consolas"/>
+                <a:cs typeface="Consolas"/>
+              </a:rPr>
+              <a:t>-a</a:t>
+            </a:r>
             <a:r>
               <a:rPr sz="1725" b="0">
                 <a:solidFill>
-                  <a:srgbClr val="005968"/>
-                </a:solidFill>
-                <a:latin typeface="Consolas"/>
-                <a:ea typeface="Consolas"/>
-                <a:cs typeface="Consolas"/>
-              </a:rPr>
-              <a:t>dtc --version</a:t>
-            </a:r>
-          </a:p>
-          <a:p xmlns:a="http://schemas.openxmlformats.org/drawingml/2006/main">
-            <a:pPr>
-              <a:lnSpc>
-                <a:spcPct val="120000"/>
-              </a:lnSpc>
-              <a:defRPr sz="1725" b="0">
-                <a:solidFill>
-                  <a:srgbClr val="005968"/>
-                </a:solidFill>
-                <a:latin typeface="Consolas"/>
-                <a:ea typeface="Consolas"/>
-                <a:cs typeface="Consolas"/>
-              </a:defRPr>
-            </a:pPr>
+                  <a:srgbClr val="29263B"/>
+                </a:solidFill>
+                <a:latin typeface="Consolas"/>
+                <a:ea typeface="Consolas"/>
+                <a:cs typeface="Consolas"/>
+              </a:rPr>
+              <a:t> </a:t>
+            </a:r>
             <a:r>
               <a:rPr sz="1725" b="0">
                 <a:solidFill>
-                  <a:srgbClr val="005968"/>
-                </a:solidFill>
-                <a:latin typeface="Consolas"/>
-                <a:ea typeface="Consolas"/>
-                <a:cs typeface="Consolas"/>
-              </a:rPr>
-              <a:t>type -a cmake ninja python3 dtc gperf</a:t>
+                  <a:srgbClr val="A02B93"/>
+                </a:solidFill>
+                <a:latin typeface="Consolas"/>
+                <a:ea typeface="Consolas"/>
+                <a:cs typeface="Consolas"/>
+              </a:rPr>
+              <a:t>cmake</a:t>
+            </a:r>
+            <a:r>
+              <a:rPr sz="1725" b="0">
+                <a:solidFill>
+                  <a:srgbClr val="29263B"/>
+                </a:solidFill>
+                <a:latin typeface="Consolas"/>
+                <a:ea typeface="Consolas"/>
+                <a:cs typeface="Consolas"/>
+              </a:rPr>
+              <a:t> </a:t>
+            </a:r>
+            <a:r>
+              <a:rPr sz="1725" b="0">
+                <a:solidFill>
+                  <a:srgbClr val="A02B93"/>
+                </a:solidFill>
+                <a:latin typeface="Consolas"/>
+                <a:ea typeface="Consolas"/>
+                <a:cs typeface="Consolas"/>
+              </a:rPr>
+              <a:t>ninja</a:t>
+            </a:r>
+            <a:r>
+              <a:rPr sz="1725" b="0">
+                <a:solidFill>
+                  <a:srgbClr val="29263B"/>
+                </a:solidFill>
+                <a:latin typeface="Consolas"/>
+                <a:ea typeface="Consolas"/>
+                <a:cs typeface="Consolas"/>
+              </a:rPr>
+              <a:t> </a:t>
+            </a:r>
+            <a:r>
+              <a:rPr sz="1725" b="0">
+                <a:solidFill>
+                  <a:srgbClr val="A02B93"/>
+                </a:solidFill>
+                <a:latin typeface="Consolas"/>
+                <a:ea typeface="Consolas"/>
+                <a:cs typeface="Consolas"/>
+              </a:rPr>
+              <a:t>python3</a:t>
+            </a:r>
+            <a:r>
+              <a:rPr sz="1725" b="0">
+                <a:solidFill>
+                  <a:srgbClr val="29263B"/>
+                </a:solidFill>
+                <a:latin typeface="Consolas"/>
+                <a:ea typeface="Consolas"/>
+                <a:cs typeface="Consolas"/>
+              </a:rPr>
+              <a:t> </a:t>
+            </a:r>
+            <a:r>
+              <a:rPr sz="1725" b="0">
+                <a:solidFill>
+                  <a:srgbClr val="A02B93"/>
+                </a:solidFill>
+                <a:latin typeface="Consolas"/>
+                <a:ea typeface="Consolas"/>
+                <a:cs typeface="Consolas"/>
+              </a:rPr>
+              <a:t>dtc</a:t>
+            </a:r>
+            <a:r>
+              <a:rPr sz="1725" b="0">
+                <a:solidFill>
+                  <a:srgbClr val="29263B"/>
+                </a:solidFill>
+                <a:latin typeface="Consolas"/>
+                <a:ea typeface="Consolas"/>
+                <a:cs typeface="Consolas"/>
+              </a:rPr>
+              <a:t> </a:t>
+            </a:r>
+            <a:r>
+              <a:rPr sz="1725" b="0">
+                <a:solidFill>
+                  <a:srgbClr val="A02B93"/>
+                </a:solidFill>
+                <a:latin typeface="Consolas"/>
+                <a:ea typeface="Consolas"/>
+                <a:cs typeface="Consolas"/>
+              </a:rPr>
+              <a:t>gperf</a:t>
             </a:r>
           </a:p>
         </p:txBody>
@@ -21282,13 +22681,72 @@
             <a:r>
               <a:rPr sz="1875" b="0">
                 <a:solidFill>
+                  <a:srgbClr val="646173"/>
+                </a:solidFill>
+                <a:latin typeface="Consolas"/>
+                <a:ea typeface="Consolas"/>
+                <a:cs typeface="Consolas"/>
+              </a:rPr>
+              <a:t># 终端：Ubuntu 22.04 Bash；任意目录。只适用于 jammy。</a:t>
+            </a:r>
+          </a:p>
+          <a:p xmlns:a="http://schemas.openxmlformats.org/drawingml/2006/main">
+            <a:pPr>
+              <a:lnSpc>
+                <a:spcPct val="120000"/>
+              </a:lnSpc>
+              <a:defRPr sz="1875" b="0">
+                <a:solidFill>
                   <a:srgbClr val="005968"/>
                 </a:solidFill>
                 <a:latin typeface="Consolas"/>
                 <a:ea typeface="Consolas"/>
                 <a:cs typeface="Consolas"/>
-              </a:rPr>
-              <a:t># 终端：Ubuntu 22.04 Bash；任意目录。只适用于 jammy。</a:t>
+              </a:defRPr>
+            </a:pPr>
+            <a:r>
+              <a:rPr sz="1875" b="0">
+                <a:solidFill>
+                  <a:srgbClr val="A02B93"/>
+                </a:solidFill>
+                <a:latin typeface="Consolas"/>
+                <a:ea typeface="Consolas"/>
+                <a:cs typeface="Consolas"/>
+              </a:rPr>
+              <a:t>sudo</a:t>
+            </a:r>
+            <a:r>
+              <a:rPr sz="1875" b="0">
+                <a:solidFill>
+                  <a:srgbClr val="29263B"/>
+                </a:solidFill>
+                <a:latin typeface="Consolas"/>
+                <a:ea typeface="Consolas"/>
+                <a:cs typeface="Consolas"/>
+              </a:rPr>
+              <a:t> </a:t>
+            </a:r>
+            <a:r>
+              <a:rPr sz="1875" b="0">
+                <a:solidFill>
+                  <a:srgbClr val="A02B93"/>
+                </a:solidFill>
+                <a:latin typeface="Consolas"/>
+                <a:ea typeface="Consolas"/>
+                <a:cs typeface="Consolas"/>
+              </a:rPr>
+              <a:t>apt-get</a:t>
+            </a:r>
+            <a:r>
+              <a:rPr sz="1875" b="0">
+                <a:solidFill>
+                  <a:srgbClr val="29263B"/>
+                </a:solidFill>
+                <a:latin typeface="Consolas"/>
+                <a:ea typeface="Consolas"/>
+                <a:cs typeface="Consolas"/>
+              </a:rPr>
+              <a:t> update</a:t>
             </a:r>
           </a:p>
           <a:p xmlns:a="http://schemas.openxmlformats.org/drawingml/2006/main">
@@ -21308,13 +22766,160 @@
             <a:r>
               <a:rPr sz="1875" b="0">
                 <a:solidFill>
+                  <a:srgbClr val="A02B93"/>
+                </a:solidFill>
+                <a:latin typeface="Consolas"/>
+                <a:ea typeface="Consolas"/>
+                <a:cs typeface="Consolas"/>
+              </a:rPr>
+              <a:t>sudo</a:t>
+            </a:r>
+            <a:r>
+              <a:rPr sz="1875" b="0">
+                <a:solidFill>
+                  <a:srgbClr val="29263B"/>
+                </a:solidFill>
+                <a:latin typeface="Consolas"/>
+                <a:ea typeface="Consolas"/>
+                <a:cs typeface="Consolas"/>
+              </a:rPr>
+              <a:t> </a:t>
+            </a:r>
+            <a:r>
+              <a:rPr sz="1875" b="0">
+                <a:solidFill>
+                  <a:srgbClr val="A02B93"/>
+                </a:solidFill>
+                <a:latin typeface="Consolas"/>
+                <a:ea typeface="Consolas"/>
+                <a:cs typeface="Consolas"/>
+              </a:rPr>
+              <a:t>apt-get</a:t>
+            </a:r>
+            <a:r>
+              <a:rPr sz="1875" b="0">
+                <a:solidFill>
+                  <a:srgbClr val="29263B"/>
+                </a:solidFill>
+                <a:latin typeface="Consolas"/>
+                <a:ea typeface="Consolas"/>
+                <a:cs typeface="Consolas"/>
+              </a:rPr>
+              <a:t> install ca-certificates </a:t>
+            </a:r>
+            <a:r>
+              <a:rPr sz="1875" b="0">
+                <a:solidFill>
+                  <a:srgbClr val="A02B93"/>
+                </a:solidFill>
+                <a:latin typeface="Consolas"/>
+                <a:ea typeface="Consolas"/>
+                <a:cs typeface="Consolas"/>
+              </a:rPr>
+              <a:t>gpg</a:t>
+            </a:r>
+            <a:r>
+              <a:rPr sz="1875" b="0">
+                <a:solidFill>
+                  <a:srgbClr val="29263B"/>
+                </a:solidFill>
+                <a:latin typeface="Consolas"/>
+                <a:ea typeface="Consolas"/>
+                <a:cs typeface="Consolas"/>
+              </a:rPr>
+              <a:t> </a:t>
+            </a:r>
+            <a:r>
+              <a:rPr sz="1875" b="0">
+                <a:solidFill>
+                  <a:srgbClr val="A02B93"/>
+                </a:solidFill>
+                <a:latin typeface="Consolas"/>
+                <a:ea typeface="Consolas"/>
+                <a:cs typeface="Consolas"/>
+              </a:rPr>
+              <a:t>wget</a:t>
+            </a:r>
+          </a:p>
+          <a:p xmlns:a="http://schemas.openxmlformats.org/drawingml/2006/main">
+            <a:pPr>
+              <a:lnSpc>
+                <a:spcPct val="120000"/>
+              </a:lnSpc>
+              <a:defRPr sz="1875" b="0">
+                <a:solidFill>
                   <a:srgbClr val="005968"/>
                 </a:solidFill>
                 <a:latin typeface="Consolas"/>
                 <a:ea typeface="Consolas"/>
                 <a:cs typeface="Consolas"/>
-              </a:rPr>
-              <a:t>sudo apt-get update</a:t>
+              </a:defRPr>
+            </a:pPr>
+            <a:r>
+              <a:rPr sz="1875" b="0">
+                <a:solidFill>
+                  <a:srgbClr val="A02B93"/>
+                </a:solidFill>
+                <a:latin typeface="Consolas"/>
+                <a:ea typeface="Consolas"/>
+                <a:cs typeface="Consolas"/>
+              </a:rPr>
+              <a:t>test</a:t>
+            </a:r>
+            <a:r>
+              <a:rPr sz="1875" b="0">
+                <a:solidFill>
+                  <a:srgbClr val="29263B"/>
+                </a:solidFill>
+                <a:latin typeface="Consolas"/>
+                <a:ea typeface="Consolas"/>
+                <a:cs typeface="Consolas"/>
+              </a:rPr>
+              <a:t> </a:t>
+            </a:r>
+            <a:r>
+              <a:rPr sz="1875" b="0">
+                <a:solidFill>
+                  <a:srgbClr val="B84E00"/>
+                </a:solidFill>
+                <a:latin typeface="Consolas"/>
+                <a:ea typeface="Consolas"/>
+                <a:cs typeface="Consolas"/>
+              </a:rPr>
+              <a:t>-f</a:t>
+            </a:r>
+            <a:r>
+              <a:rPr sz="1875" b="0">
+                <a:solidFill>
+                  <a:srgbClr val="29263B"/>
+                </a:solidFill>
+                <a:latin typeface="Consolas"/>
+                <a:ea typeface="Consolas"/>
+                <a:cs typeface="Consolas"/>
+              </a:rPr>
+              <a:t> </a:t>
+            </a:r>
+            <a:r>
+              <a:rPr sz="1875" b="0">
+                <a:solidFill>
+                  <a:srgbClr val="0070C0"/>
+                </a:solidFill>
+                <a:latin typeface="Consolas"/>
+                <a:ea typeface="Consolas"/>
+                <a:cs typeface="Consolas"/>
+              </a:rPr>
+              <a:t>/usr/share/doc/kitware-archive-keyring/copyright</a:t>
+            </a:r>
+            <a:r>
+              <a:rPr sz="1875" b="0">
+                <a:solidFill>
+                  <a:srgbClr val="29263B"/>
+                </a:solidFill>
+                <a:latin typeface="Consolas"/>
+                <a:ea typeface="Consolas"/>
+                <a:cs typeface="Consolas"/>
+              </a:rPr>
+              <a:t> || \</a:t>
             </a:r>
           </a:p>
           <a:p xmlns:a="http://schemas.openxmlformats.org/drawingml/2006/main">
@@ -21334,91 +22939,215 @@
             <a:r>
               <a:rPr sz="1875" b="0">
                 <a:solidFill>
+                  <a:srgbClr val="29263B"/>
+                </a:solidFill>
+                <a:latin typeface="Consolas"/>
+                <a:ea typeface="Consolas"/>
+                <a:cs typeface="Consolas"/>
+              </a:rPr>
+              <a:t>  </a:t>
+            </a:r>
+            <a:r>
+              <a:rPr sz="1875" b="0">
+                <a:solidFill>
+                  <a:srgbClr val="A02B93"/>
+                </a:solidFill>
+                <a:latin typeface="Consolas"/>
+                <a:ea typeface="Consolas"/>
+                <a:cs typeface="Consolas"/>
+              </a:rPr>
+              <a:t>wget</a:t>
+            </a:r>
+            <a:r>
+              <a:rPr sz="1875" b="0">
+                <a:solidFill>
+                  <a:srgbClr val="29263B"/>
+                </a:solidFill>
+                <a:latin typeface="Consolas"/>
+                <a:ea typeface="Consolas"/>
+                <a:cs typeface="Consolas"/>
+              </a:rPr>
+              <a:t> </a:t>
+            </a:r>
+            <a:r>
+              <a:rPr sz="1875" b="0">
+                <a:solidFill>
+                  <a:srgbClr val="B84E00"/>
+                </a:solidFill>
+                <a:latin typeface="Consolas"/>
+                <a:ea typeface="Consolas"/>
+                <a:cs typeface="Consolas"/>
+              </a:rPr>
+              <a:t>-O</a:t>
+            </a:r>
+            <a:r>
+              <a:rPr sz="1875" b="0">
+                <a:solidFill>
+                  <a:srgbClr val="29263B"/>
+                </a:solidFill>
+                <a:latin typeface="Consolas"/>
+                <a:ea typeface="Consolas"/>
+                <a:cs typeface="Consolas"/>
+              </a:rPr>
+              <a:t> - </a:t>
+            </a:r>
+            <a:r>
+              <a:rPr sz="1875" b="0">
+                <a:solidFill>
+                  <a:srgbClr val="0070C0"/>
+                </a:solidFill>
+                <a:latin typeface="Consolas"/>
+                <a:ea typeface="Consolas"/>
+                <a:cs typeface="Consolas"/>
+              </a:rPr>
+              <a:t>https://apt.kitware.com/keys/kitware-archive-latest.asc</a:t>
+            </a:r>
+            <a:r>
+              <a:rPr sz="1875" b="0">
+                <a:solidFill>
+                  <a:srgbClr val="29263B"/>
+                </a:solidFill>
+                <a:latin typeface="Consolas"/>
+                <a:ea typeface="Consolas"/>
+                <a:cs typeface="Consolas"/>
+              </a:rPr>
+              <a:t> | \</a:t>
+            </a:r>
+          </a:p>
+          <a:p xmlns:a="http://schemas.openxmlformats.org/drawingml/2006/main">
+            <a:pPr>
+              <a:lnSpc>
+                <a:spcPct val="120000"/>
+              </a:lnSpc>
+              <a:defRPr sz="1875" b="0">
+                <a:solidFill>
                   <a:srgbClr val="005968"/>
                 </a:solidFill>
                 <a:latin typeface="Consolas"/>
                 <a:ea typeface="Consolas"/>
                 <a:cs typeface="Consolas"/>
-              </a:rPr>
-              <a:t>sudo apt-get install ca-certificates gpg wget</a:t>
-            </a:r>
-          </a:p>
-          <a:p xmlns:a="http://schemas.openxmlformats.org/drawingml/2006/main">
-            <a:pPr>
-              <a:lnSpc>
-                <a:spcPct val="120000"/>
-              </a:lnSpc>
-              <a:defRPr sz="1875" b="0">
-                <a:solidFill>
-                  <a:srgbClr val="005968"/>
-                </a:solidFill>
-                <a:latin typeface="Consolas"/>
-                <a:ea typeface="Consolas"/>
-                <a:cs typeface="Consolas"/>
               </a:defRPr>
             </a:pPr>
             <a:r>
               <a:rPr sz="1875" b="0">
                 <a:solidFill>
-                  <a:srgbClr val="005968"/>
-                </a:solidFill>
-                <a:latin typeface="Consolas"/>
-                <a:ea typeface="Consolas"/>
-                <a:cs typeface="Consolas"/>
-              </a:rPr>
-              <a:t>test -f /usr/share/doc/kitware-archive-keyring/copyright || \</a:t>
-            </a:r>
-          </a:p>
-          <a:p xmlns:a="http://schemas.openxmlformats.org/drawingml/2006/main">
-            <a:pPr>
-              <a:lnSpc>
-                <a:spcPct val="120000"/>
-              </a:lnSpc>
-              <a:defRPr sz="1875" b="0">
-                <a:solidFill>
-                  <a:srgbClr val="005968"/>
-                </a:solidFill>
-                <a:latin typeface="Consolas"/>
-                <a:ea typeface="Consolas"/>
-                <a:cs typeface="Consolas"/>
-              </a:defRPr>
-            </a:pPr>
+                  <a:srgbClr val="29263B"/>
+                </a:solidFill>
+                <a:latin typeface="Consolas"/>
+                <a:ea typeface="Consolas"/>
+                <a:cs typeface="Consolas"/>
+              </a:rPr>
+              <a:t>  </a:t>
+            </a:r>
             <a:r>
               <a:rPr sz="1875" b="0">
                 <a:solidFill>
-                  <a:srgbClr val="005968"/>
-                </a:solidFill>
-                <a:latin typeface="Consolas"/>
-                <a:ea typeface="Consolas"/>
-                <a:cs typeface="Consolas"/>
-              </a:rPr>
-              <a:t>  wget -O - https://apt.kitware.com/keys/kitware-archive-latest.asc | \</a:t>
-            </a:r>
-          </a:p>
-          <a:p xmlns:a="http://schemas.openxmlformats.org/drawingml/2006/main">
-            <a:pPr>
-              <a:lnSpc>
-                <a:spcPct val="120000"/>
-              </a:lnSpc>
-              <a:defRPr sz="1875" b="0">
-                <a:solidFill>
-                  <a:srgbClr val="005968"/>
-                </a:solidFill>
-                <a:latin typeface="Consolas"/>
-                <a:ea typeface="Consolas"/>
-                <a:cs typeface="Consolas"/>
-              </a:defRPr>
-            </a:pPr>
+                  <a:srgbClr val="A02B93"/>
+                </a:solidFill>
+                <a:latin typeface="Consolas"/>
+                <a:ea typeface="Consolas"/>
+                <a:cs typeface="Consolas"/>
+              </a:rPr>
+              <a:t>gpg</a:t>
+            </a:r>
             <a:r>
               <a:rPr sz="1875" b="0">
                 <a:solidFill>
-                  <a:srgbClr val="005968"/>
-                </a:solidFill>
-                <a:latin typeface="Consolas"/>
-                <a:ea typeface="Consolas"/>
-                <a:cs typeface="Consolas"/>
-              </a:rPr>
-              <a:t>  gpg --dearmor - | sudo tee /usr/share/keyrings/kitware-archive-keyring.gpg &gt;/dev/null</a:t>
+                  <a:srgbClr val="29263B"/>
+                </a:solidFill>
+                <a:latin typeface="Consolas"/>
+                <a:ea typeface="Consolas"/>
+                <a:cs typeface="Consolas"/>
+              </a:rPr>
+              <a:t> </a:t>
+            </a:r>
+            <a:r>
+              <a:rPr sz="1875" b="0">
+                <a:solidFill>
+                  <a:srgbClr val="B84E00"/>
+                </a:solidFill>
+                <a:latin typeface="Consolas"/>
+                <a:ea typeface="Consolas"/>
+                <a:cs typeface="Consolas"/>
+              </a:rPr>
+              <a:t>--dearmor</a:t>
+            </a:r>
+            <a:r>
+              <a:rPr sz="1875" b="0">
+                <a:solidFill>
+                  <a:srgbClr val="29263B"/>
+                </a:solidFill>
+                <a:latin typeface="Consolas"/>
+                <a:ea typeface="Consolas"/>
+                <a:cs typeface="Consolas"/>
+              </a:rPr>
+              <a:t> - | </a:t>
+            </a:r>
+            <a:r>
+              <a:rPr sz="1875" b="0">
+                <a:solidFill>
+                  <a:srgbClr val="A02B93"/>
+                </a:solidFill>
+                <a:latin typeface="Consolas"/>
+                <a:ea typeface="Consolas"/>
+                <a:cs typeface="Consolas"/>
+              </a:rPr>
+              <a:t>sudo</a:t>
+            </a:r>
+            <a:r>
+              <a:rPr sz="1875" b="0">
+                <a:solidFill>
+                  <a:srgbClr val="29263B"/>
+                </a:solidFill>
+                <a:latin typeface="Consolas"/>
+                <a:ea typeface="Consolas"/>
+                <a:cs typeface="Consolas"/>
+              </a:rPr>
+              <a:t> </a:t>
+            </a:r>
+            <a:r>
+              <a:rPr sz="1875" b="0">
+                <a:solidFill>
+                  <a:srgbClr val="A02B93"/>
+                </a:solidFill>
+                <a:latin typeface="Consolas"/>
+                <a:ea typeface="Consolas"/>
+                <a:cs typeface="Consolas"/>
+              </a:rPr>
+              <a:t>tee</a:t>
+            </a:r>
+            <a:r>
+              <a:rPr sz="1875" b="0">
+                <a:solidFill>
+                  <a:srgbClr val="29263B"/>
+                </a:solidFill>
+                <a:latin typeface="Consolas"/>
+                <a:ea typeface="Consolas"/>
+                <a:cs typeface="Consolas"/>
+              </a:rPr>
+              <a:t> </a:t>
+            </a:r>
+            <a:r>
+              <a:rPr sz="1875" b="0">
+                <a:solidFill>
+                  <a:srgbClr val="0070C0"/>
+                </a:solidFill>
+                <a:latin typeface="Consolas"/>
+                <a:ea typeface="Consolas"/>
+                <a:cs typeface="Consolas"/>
+              </a:rPr>
+              <a:t>/usr/share/keyrings/kitware-archive-keyring.gpg</a:t>
+            </a:r>
+            <a:r>
+              <a:rPr sz="1875" b="0">
+                <a:solidFill>
+                  <a:srgbClr val="29263B"/>
+                </a:solidFill>
+                <a:latin typeface="Consolas"/>
+                <a:ea typeface="Consolas"/>
+                <a:cs typeface="Consolas"/>
+              </a:rPr>
+              <a:t> &gt;/dev/null</a:t>
             </a:r>
           </a:p>
         </p:txBody>
@@ -21882,13 +23611,24 @@
             <a:r>
               <a:rPr sz="2175" b="0">
                 <a:solidFill>
+                  <a:srgbClr val="0070C0"/>
+                </a:solidFill>
+                <a:latin typeface="Microsoft YaHei"/>
+                <a:ea typeface="Microsoft YaHei"/>
+                <a:cs typeface="Microsoft YaHei"/>
+              </a:rPr>
+              <a:t>kitware.list</a:t>
+            </a:r>
+            <a:r>
+              <a:rPr sz="2175" b="0">
+                <a:solidFill>
                   <a:srgbClr val="29263B"/>
                 </a:solidFill>
                 <a:latin typeface="Microsoft YaHei"/>
                 <a:ea typeface="Microsoft YaHei"/>
                 <a:cs typeface="Microsoft YaHei"/>
               </a:rPr>
-              <a:t>kitware.list 是新建源配置；先刷新索引，再用正式 keyring 包接管临时密钥。</a:t>
+              <a:t> 是新建源配置；先刷新索引，再用正式 keyring 包接管临时密钥。</a:t>
             </a:r>
           </a:p>
           <a:p xmlns:a="http://schemas.openxmlformats.org/drawingml/2006/main">
@@ -21914,7 +23654,29 @@
                 <a:ea typeface="Microsoft YaHei"/>
                 <a:cs typeface="Microsoft YaHei"/>
               </a:rPr>
-              <a:t>最后安装 CMake，并用 apt-cache policy 核对包来源。</a:t>
+              <a:t>最后安装 CMake，并用 </a:t>
+            </a:r>
+            <a:r>
+              <a:rPr sz="2175" b="0">
+                <a:solidFill>
+                  <a:srgbClr val="A02B93"/>
+                </a:solidFill>
+                <a:latin typeface="Microsoft YaHei"/>
+                <a:ea typeface="Microsoft YaHei"/>
+                <a:cs typeface="Microsoft YaHei"/>
+              </a:rPr>
+              <a:t>apt-cache</a:t>
+            </a:r>
+            <a:r>
+              <a:rPr sz="2175" b="0">
+                <a:solidFill>
+                  <a:srgbClr val="29263B"/>
+                </a:solidFill>
+                <a:latin typeface="Microsoft YaHei"/>
+                <a:ea typeface="Microsoft YaHei"/>
+                <a:cs typeface="Microsoft YaHei"/>
+              </a:rPr>
+              <a:t> policy 核对包来源。</a:t>
             </a:r>
           </a:p>
           <a:p xmlns:a="http://schemas.openxmlformats.org/drawingml/2006/main">
@@ -22703,13 +24465,72 @@
             <a:r>
               <a:rPr sz="1875" b="0">
                 <a:solidFill>
+                  <a:srgbClr val="646173"/>
+                </a:solidFill>
+                <a:latin typeface="Consolas"/>
+                <a:ea typeface="Consolas"/>
+                <a:cs typeface="Consolas"/>
+              </a:rPr>
+              <a:t># 终端：Ubuntu 22.04 Bash；任意目录。</a:t>
+            </a:r>
+          </a:p>
+          <a:p xmlns:a="http://schemas.openxmlformats.org/drawingml/2006/main">
+            <a:pPr>
+              <a:lnSpc>
+                <a:spcPct val="120000"/>
+              </a:lnSpc>
+              <a:defRPr sz="1875" b="0">
+                <a:solidFill>
                   <a:srgbClr val="005968"/>
                 </a:solidFill>
                 <a:latin typeface="Consolas"/>
                 <a:ea typeface="Consolas"/>
                 <a:cs typeface="Consolas"/>
-              </a:rPr>
-              <a:t># 终端：Ubuntu 22.04 Bash；任意目录。</a:t>
+              </a:defRPr>
+            </a:pPr>
+            <a:r>
+              <a:rPr sz="1875" b="0">
+                <a:solidFill>
+                  <a:srgbClr val="A02B93"/>
+                </a:solidFill>
+                <a:latin typeface="Consolas"/>
+                <a:ea typeface="Consolas"/>
+                <a:cs typeface="Consolas"/>
+              </a:rPr>
+              <a:t>sudo</a:t>
+            </a:r>
+            <a:r>
+              <a:rPr sz="1875" b="0">
+                <a:solidFill>
+                  <a:srgbClr val="29263B"/>
+                </a:solidFill>
+                <a:latin typeface="Consolas"/>
+                <a:ea typeface="Consolas"/>
+                <a:cs typeface="Consolas"/>
+              </a:rPr>
+              <a:t> </a:t>
+            </a:r>
+            <a:r>
+              <a:rPr sz="1875" b="0">
+                <a:solidFill>
+                  <a:srgbClr val="A02B93"/>
+                </a:solidFill>
+                <a:latin typeface="Consolas"/>
+                <a:ea typeface="Consolas"/>
+                <a:cs typeface="Consolas"/>
+              </a:rPr>
+              <a:t>apt-get</a:t>
+            </a:r>
+            <a:r>
+              <a:rPr sz="1875" b="0">
+                <a:solidFill>
+                  <a:srgbClr val="29263B"/>
+                </a:solidFill>
+                <a:latin typeface="Consolas"/>
+                <a:ea typeface="Consolas"/>
+                <a:cs typeface="Consolas"/>
+              </a:rPr>
+              <a:t> install build-essential pkg-config libssl-dev zlib1g-dev \</a:t>
             </a:r>
           </a:p>
           <a:p xmlns:a="http://schemas.openxmlformats.org/drawingml/2006/main">
@@ -22729,59 +24550,33 @@
             <a:r>
               <a:rPr sz="1875" b="0">
                 <a:solidFill>
+                  <a:srgbClr val="29263B"/>
+                </a:solidFill>
+                <a:latin typeface="Consolas"/>
+                <a:ea typeface="Consolas"/>
+                <a:cs typeface="Consolas"/>
+              </a:rPr>
+              <a:t>  libbz2-dev libreadline-dev libsqlite3-dev libffi-dev liblzma-dev \</a:t>
+            </a:r>
+          </a:p>
+          <a:p xmlns:a="http://schemas.openxmlformats.org/drawingml/2006/main">
+            <a:pPr>
+              <a:lnSpc>
+                <a:spcPct val="120000"/>
+              </a:lnSpc>
+              <a:defRPr sz="1875" b="0">
+                <a:solidFill>
                   <a:srgbClr val="005968"/>
                 </a:solidFill>
                 <a:latin typeface="Consolas"/>
                 <a:ea typeface="Consolas"/>
                 <a:cs typeface="Consolas"/>
-              </a:rPr>
-              <a:t>sudo apt-get install build-essential pkg-config libssl-dev zlib1g-dev \</a:t>
-            </a:r>
-          </a:p>
-          <a:p xmlns:a="http://schemas.openxmlformats.org/drawingml/2006/main">
-            <a:pPr>
-              <a:lnSpc>
-                <a:spcPct val="120000"/>
-              </a:lnSpc>
-              <a:defRPr sz="1875" b="0">
-                <a:solidFill>
-                  <a:srgbClr val="005968"/>
-                </a:solidFill>
-                <a:latin typeface="Consolas"/>
-                <a:ea typeface="Consolas"/>
-                <a:cs typeface="Consolas"/>
               </a:defRPr>
             </a:pPr>
             <a:r>
               <a:rPr sz="1875" b="0">
                 <a:solidFill>
-                  <a:srgbClr val="005968"/>
-                </a:solidFill>
-                <a:latin typeface="Consolas"/>
-                <a:ea typeface="Consolas"/>
-                <a:cs typeface="Consolas"/>
-              </a:rPr>
-              <a:t>  libbz2-dev libreadline-dev libsqlite3-dev libffi-dev liblzma-dev \</a:t>
-            </a:r>
-          </a:p>
-          <a:p xmlns:a="http://schemas.openxmlformats.org/drawingml/2006/main">
-            <a:pPr>
-              <a:lnSpc>
-                <a:spcPct val="120000"/>
-              </a:lnSpc>
-              <a:defRPr sz="1875" b="0">
-                <a:solidFill>
-                  <a:srgbClr val="005968"/>
-                </a:solidFill>
-                <a:latin typeface="Consolas"/>
-                <a:ea typeface="Consolas"/>
-                <a:cs typeface="Consolas"/>
-              </a:defRPr>
-            </a:pPr>
-            <a:r>
-              <a:rPr sz="1875" b="0">
-                <a:solidFill>
-                  <a:srgbClr val="005968"/>
+                  <a:srgbClr val="29263B"/>
                 </a:solidFill>
                 <a:latin typeface="Consolas"/>
                 <a:ea typeface="Consolas"/>
@@ -23891,7 +25686,7 @@
                       <a:r>
                         <a:rPr sz="1800" b="0">
                           <a:solidFill>
-                            <a:srgbClr val="29263B"/>
+                            <a:srgbClr val="0070C0"/>
                           </a:solidFill>
                           <a:latin typeface="Microsoft YaHei"/>
                           <a:ea typeface="Microsoft YaHei"/>
@@ -23955,7 +25750,7 @@
                       <a:r>
                         <a:rPr sz="1800" b="0">
                           <a:solidFill>
-                            <a:srgbClr val="29263B"/>
+                            <a:srgbClr val="0070C0"/>
                           </a:solidFill>
                           <a:latin typeface="Microsoft YaHei"/>
                           <a:ea typeface="Microsoft YaHei"/>
@@ -24025,7 +25820,18 @@
                           <a:ea typeface="Microsoft YaHei"/>
                           <a:cs typeface="Microsoft YaHei"/>
                         </a:rPr>
-                        <a:t>Python-3.12.10 / python3.12</a:t>
+                        <a:t>Python-3.12.10 / </a:t>
+                      </a:r>
+                      <a:r>
+                        <a:rPr sz="1800" b="0">
+                          <a:solidFill>
+                            <a:srgbClr val="A02B93"/>
+                          </a:solidFill>
+                          <a:latin typeface="Microsoft YaHei"/>
+                          <a:ea typeface="Microsoft YaHei"/>
+                          <a:cs typeface="Microsoft YaHei"/>
+                        </a:rPr>
+                        <a:t>python3.12</a:t>
                       </a:r>
                     </a:p>
                   </a:txBody>
@@ -24083,13 +25889,35 @@
                       <a:r>
                         <a:rPr sz="1800" b="0">
                           <a:solidFill>
+                            <a:srgbClr val="0070C0"/>
+                          </a:solidFill>
+                          <a:latin typeface="Microsoft YaHei"/>
+                          <a:ea typeface="Microsoft YaHei"/>
+                          <a:cs typeface="Microsoft YaHei"/>
+                        </a:rPr>
+                        <a:t>.venv</a:t>
+                      </a:r>
+                      <a:r>
+                        <a:rPr sz="1800" b="0">
+                          <a:solidFill>
                             <a:srgbClr val="29263B"/>
                           </a:solidFill>
                           <a:latin typeface="Microsoft YaHei"/>
                           <a:ea typeface="Microsoft YaHei"/>
                           <a:cs typeface="Microsoft YaHei"/>
                         </a:rPr>
-                        <a:t>.venv / .west</a:t>
+                        <a:t> / </a:t>
+                      </a:r>
+                      <a:r>
+                        <a:rPr sz="1800" b="0">
+                          <a:solidFill>
+                            <a:srgbClr val="0070C0"/>
+                          </a:solidFill>
+                          <a:latin typeface="Microsoft YaHei"/>
+                          <a:ea typeface="Microsoft YaHei"/>
+                          <a:cs typeface="Microsoft YaHei"/>
+                        </a:rPr>
+                        <a:t>.west</a:t>
                       </a:r>
                     </a:p>
                   </a:txBody>
@@ -24120,7 +25948,29 @@
                           <a:ea typeface="Microsoft YaHei"/>
                           <a:cs typeface="Microsoft YaHei"/>
                         </a:rPr>
-                        <a:t>Python venv / west init</a:t>
+                        <a:t>Python venv / </a:t>
+                      </a:r>
+                      <a:r>
+                        <a:rPr sz="1800" b="0">
+                          <a:solidFill>
+                            <a:srgbClr val="A02B93"/>
+                          </a:solidFill>
+                          <a:latin typeface="Microsoft YaHei"/>
+                          <a:ea typeface="Microsoft YaHei"/>
+                          <a:cs typeface="Microsoft YaHei"/>
+                        </a:rPr>
+                        <a:t>west</a:t>
+                      </a:r>
+                      <a:r>
+                        <a:rPr sz="1800" b="0">
+                          <a:solidFill>
+                            <a:srgbClr val="29263B"/>
+                          </a:solidFill>
+                          <a:latin typeface="Microsoft YaHei"/>
+                          <a:ea typeface="Microsoft YaHei"/>
+                          <a:cs typeface="Microsoft YaHei"/>
+                        </a:rPr>
+                        <a:t> init</a:t>
                       </a:r>
                     </a:p>
                   </a:txBody>
@@ -24178,13 +26028,24 @@
                       <a:r>
                         <a:rPr sz="1800" b="0">
                           <a:solidFill>
+                            <a:srgbClr val="A02B93"/>
+                          </a:solidFill>
+                          <a:latin typeface="Microsoft YaHei"/>
+                          <a:ea typeface="Microsoft YaHei"/>
+                          <a:cs typeface="Microsoft YaHei"/>
+                        </a:rPr>
+                        <a:t>west</a:t>
+                      </a:r>
+                      <a:r>
+                        <a:rPr sz="1800" b="0">
+                          <a:solidFill>
                             <a:srgbClr val="29263B"/>
                           </a:solidFill>
                           <a:latin typeface="Microsoft YaHei"/>
                           <a:ea typeface="Microsoft YaHei"/>
                           <a:cs typeface="Microsoft YaHei"/>
                         </a:rPr>
-                        <a:t>west 取得的主源码与外部项目</a:t>
+                        <a:t> 取得的主源码与外部项目</a:t>
                       </a:r>
                     </a:p>
                   </a:txBody>
@@ -24492,39 +26353,61 @@
             <a:r>
               <a:rPr sz="1875" b="0">
                 <a:solidFill>
+                  <a:srgbClr val="646173"/>
+                </a:solidFill>
+                <a:latin typeface="Consolas"/>
+                <a:ea typeface="Consolas"/>
+                <a:cs typeface="Consolas"/>
+              </a:rPr>
+              <a:t># Ubuntu 22.04 Bash；先检查，缺少所需版本才继续安装。</a:t>
+            </a:r>
+          </a:p>
+          <a:p xmlns:a="http://schemas.openxmlformats.org/drawingml/2006/main">
+            <a:pPr>
+              <a:lnSpc>
+                <a:spcPct val="120000"/>
+              </a:lnSpc>
+              <a:defRPr sz="1875" b="0">
+                <a:solidFill>
                   <a:srgbClr val="005968"/>
                 </a:solidFill>
                 <a:latin typeface="Consolas"/>
                 <a:ea typeface="Consolas"/>
                 <a:cs typeface="Consolas"/>
-              </a:rPr>
-              <a:t># Ubuntu 22.04 Bash；先检查，缺少所需版本才继续安装。</a:t>
-            </a:r>
-          </a:p>
-          <a:p xmlns:a="http://schemas.openxmlformats.org/drawingml/2006/main">
-            <a:pPr>
-              <a:lnSpc>
-                <a:spcPct val="120000"/>
-              </a:lnSpc>
-              <a:defRPr sz="1875" b="0">
-                <a:solidFill>
-                  <a:srgbClr val="005968"/>
-                </a:solidFill>
-                <a:latin typeface="Consolas"/>
-                <a:ea typeface="Consolas"/>
-                <a:cs typeface="Consolas"/>
               </a:defRPr>
             </a:pPr>
             <a:r>
               <a:rPr sz="1875" b="0">
                 <a:solidFill>
-                  <a:srgbClr val="005968"/>
-                </a:solidFill>
-                <a:latin typeface="Consolas"/>
-                <a:ea typeface="Consolas"/>
-                <a:cs typeface="Consolas"/>
-              </a:rPr>
-              <a:t>python3.12 --version</a:t>
+                  <a:srgbClr val="A02B93"/>
+                </a:solidFill>
+                <a:latin typeface="Consolas"/>
+                <a:ea typeface="Consolas"/>
+                <a:cs typeface="Consolas"/>
+              </a:rPr>
+              <a:t>python3.12</a:t>
+            </a:r>
+            <a:r>
+              <a:rPr sz="1875" b="0">
+                <a:solidFill>
+                  <a:srgbClr val="29263B"/>
+                </a:solidFill>
+                <a:latin typeface="Consolas"/>
+                <a:ea typeface="Consolas"/>
+                <a:cs typeface="Consolas"/>
+              </a:rPr>
+              <a:t> </a:t>
+            </a:r>
+            <a:r>
+              <a:rPr sz="1875" b="0">
+                <a:solidFill>
+                  <a:srgbClr val="B84E00"/>
+                </a:solidFill>
+                <a:latin typeface="Consolas"/>
+                <a:ea typeface="Consolas"/>
+                <a:cs typeface="Consolas"/>
+              </a:rPr>
+              <a:t>--version</a:t>
             </a:r>
           </a:p>
         </p:txBody>
@@ -24595,7 +26478,29 @@
                 <a:ea typeface="Microsoft YaHei"/>
                 <a:cs typeface="Microsoft YaHei"/>
               </a:rPr>
-              <a:t>已有 3.12.10 就进入第 12 页，已有 .venv 则激活继续。</a:t>
+              <a:t>已有 3.12.10 就进入第 12 页，已有 </a:t>
+            </a:r>
+            <a:r>
+              <a:rPr sz="1875" b="0">
+                <a:solidFill>
+                  <a:srgbClr val="0070C0"/>
+                </a:solidFill>
+                <a:latin typeface="Microsoft YaHei"/>
+                <a:ea typeface="Microsoft YaHei"/>
+                <a:cs typeface="Microsoft YaHei"/>
+              </a:rPr>
+              <a:t>.venv</a:t>
+            </a:r>
+            <a:r>
+              <a:rPr sz="1875" b="0">
+                <a:solidFill>
+                  <a:srgbClr val="29263B"/>
+                </a:solidFill>
+                <a:latin typeface="Microsoft YaHei"/>
+                <a:ea typeface="Microsoft YaHei"/>
+                <a:cs typeface="Microsoft YaHei"/>
+              </a:rPr>
+              <a:t> 则激活继续。</a:t>
             </a:r>
           </a:p>
           <a:p xmlns:a="http://schemas.openxmlformats.org/drawingml/2006/main">
@@ -24647,7 +26552,29 @@
                 <a:ea typeface="Microsoft YaHei"/>
                 <a:cs typeface="Microsoft YaHei"/>
               </a:rPr>
-              <a:t>源码安装后使用 python3.12，不要求复现作者的安装位置。</a:t>
+              <a:t>源码安装后使用 </a:t>
+            </a:r>
+            <a:r>
+              <a:rPr sz="1875" b="0">
+                <a:solidFill>
+                  <a:srgbClr val="A02B93"/>
+                </a:solidFill>
+                <a:latin typeface="Microsoft YaHei"/>
+                <a:ea typeface="Microsoft YaHei"/>
+                <a:cs typeface="Microsoft YaHei"/>
+              </a:rPr>
+              <a:t>python3.12</a:t>
+            </a:r>
+            <a:r>
+              <a:rPr sz="1875" b="0">
+                <a:solidFill>
+                  <a:srgbClr val="29263B"/>
+                </a:solidFill>
+                <a:latin typeface="Microsoft YaHei"/>
+                <a:ea typeface="Microsoft YaHei"/>
+                <a:cs typeface="Microsoft YaHei"/>
+              </a:rPr>
+              <a:t>，不要求复现作者的安装位置。</a:t>
             </a:r>
           </a:p>
         </p:txBody>
@@ -24945,13 +26872,83 @@
             <a:r>
               <a:rPr sz="1725" b="0">
                 <a:solidFill>
+                  <a:srgbClr val="646173"/>
+                </a:solidFill>
+                <a:latin typeface="Consolas"/>
+                <a:ea typeface="Consolas"/>
+                <a:cs typeface="Consolas"/>
+              </a:rPr>
+              <a:t># 终端：Ubuntu 22.04 Bash；先进入 Python 下载目录。</a:t>
+            </a:r>
+          </a:p>
+          <a:p xmlns:a="http://schemas.openxmlformats.org/drawingml/2006/main">
+            <a:pPr>
+              <a:lnSpc>
+                <a:spcPct val="120000"/>
+              </a:lnSpc>
+              <a:defRPr sz="1725" b="0">
+                <a:solidFill>
                   <a:srgbClr val="005968"/>
                 </a:solidFill>
                 <a:latin typeface="Consolas"/>
                 <a:ea typeface="Consolas"/>
                 <a:cs typeface="Consolas"/>
-              </a:rPr>
-              <a:t># 终端：Ubuntu 22.04 Bash；先进入 Python 下载目录。</a:t>
+              </a:defRPr>
+            </a:pPr>
+            <a:r>
+              <a:rPr sz="1725" b="0">
+                <a:solidFill>
+                  <a:srgbClr val="A02B93"/>
+                </a:solidFill>
+                <a:latin typeface="Consolas"/>
+                <a:ea typeface="Consolas"/>
+                <a:cs typeface="Consolas"/>
+              </a:rPr>
+              <a:t>mkdir</a:t>
+            </a:r>
+            <a:r>
+              <a:rPr sz="1725" b="0">
+                <a:solidFill>
+                  <a:srgbClr val="29263B"/>
+                </a:solidFill>
+                <a:latin typeface="Consolas"/>
+                <a:ea typeface="Consolas"/>
+                <a:cs typeface="Consolas"/>
+              </a:rPr>
+              <a:t> </a:t>
+            </a:r>
+            <a:r>
+              <a:rPr sz="1725" b="0">
+                <a:solidFill>
+                  <a:srgbClr val="B84E00"/>
+                </a:solidFill>
+                <a:latin typeface="Consolas"/>
+                <a:ea typeface="Consolas"/>
+                <a:cs typeface="Consolas"/>
+              </a:rPr>
+              <a:t>-p</a:t>
+            </a:r>
+            <a:r>
+              <a:rPr sz="1725" b="0">
+                <a:solidFill>
+                  <a:srgbClr val="29263B"/>
+                </a:solidFill>
+                <a:latin typeface="Consolas"/>
+                <a:ea typeface="Consolas"/>
+                <a:cs typeface="Consolas"/>
+              </a:rPr>
+              <a:t> </a:t>
+            </a:r>
+            <a:r>
+              <a:rPr sz="1725" b="0">
+                <a:solidFill>
+                  <a:srgbClr val="0070C0"/>
+                </a:solidFill>
+                <a:latin typeface="Consolas"/>
+                <a:ea typeface="Consolas"/>
+                <a:cs typeface="Consolas"/>
+              </a:rPr>
+              <a:t>~/zephyr-tools/src</a:t>
             </a:r>
           </a:p>
           <a:p xmlns:a="http://schemas.openxmlformats.org/drawingml/2006/main">
@@ -24971,13 +26968,83 @@
             <a:r>
               <a:rPr sz="1725" b="0">
                 <a:solidFill>
+                  <a:srgbClr val="A02B93"/>
+                </a:solidFill>
+                <a:latin typeface="Consolas"/>
+                <a:ea typeface="Consolas"/>
+                <a:cs typeface="Consolas"/>
+              </a:rPr>
+              <a:t>cd</a:t>
+            </a:r>
+            <a:r>
+              <a:rPr sz="1725" b="0">
+                <a:solidFill>
+                  <a:srgbClr val="29263B"/>
+                </a:solidFill>
+                <a:latin typeface="Consolas"/>
+                <a:ea typeface="Consolas"/>
+                <a:cs typeface="Consolas"/>
+              </a:rPr>
+              <a:t> </a:t>
+            </a:r>
+            <a:r>
+              <a:rPr sz="1725" b="0">
+                <a:solidFill>
+                  <a:srgbClr val="0070C0"/>
+                </a:solidFill>
+                <a:latin typeface="Consolas"/>
+                <a:ea typeface="Consolas"/>
+                <a:cs typeface="Consolas"/>
+              </a:rPr>
+              <a:t>~/zephyr-tools/src</a:t>
+            </a:r>
+          </a:p>
+          <a:p xmlns:a="http://schemas.openxmlformats.org/drawingml/2006/main">
+            <a:pPr>
+              <a:lnSpc>
+                <a:spcPct val="120000"/>
+              </a:lnSpc>
+              <a:defRPr sz="1725" b="0">
+                <a:solidFill>
                   <a:srgbClr val="005968"/>
                 </a:solidFill>
                 <a:latin typeface="Consolas"/>
                 <a:ea typeface="Consolas"/>
                 <a:cs typeface="Consolas"/>
-              </a:rPr>
-              <a:t>mkdir -p ~/zephyr-tools/src</a:t>
+              </a:defRPr>
+            </a:pPr>
+            <a:r>
+              <a:rPr sz="1725" b="0">
+                <a:solidFill>
+                  <a:srgbClr val="A02B93"/>
+                </a:solidFill>
+                <a:latin typeface="Consolas"/>
+                <a:ea typeface="Consolas"/>
+                <a:cs typeface="Consolas"/>
+              </a:rPr>
+              <a:t>wget</a:t>
+            </a:r>
+            <a:r>
+              <a:rPr sz="1725" b="0">
+                <a:solidFill>
+                  <a:srgbClr val="29263B"/>
+                </a:solidFill>
+                <a:latin typeface="Consolas"/>
+                <a:ea typeface="Consolas"/>
+                <a:cs typeface="Consolas"/>
+              </a:rPr>
+              <a:t> </a:t>
+            </a:r>
+            <a:r>
+              <a:rPr sz="1725" b="0">
+                <a:solidFill>
+                  <a:srgbClr val="0070C0"/>
+                </a:solidFill>
+                <a:latin typeface="Consolas"/>
+                <a:ea typeface="Consolas"/>
+                <a:cs typeface="Consolas"/>
+              </a:rPr>
+              <a:t>https://www.python.org/ftp/python/3.12.10/Python-3.12.10.tgz</a:t>
             </a:r>
           </a:p>
           <a:p xmlns:a="http://schemas.openxmlformats.org/drawingml/2006/main">
@@ -24997,13 +27064,94 @@
             <a:r>
               <a:rPr sz="1725" b="0">
                 <a:solidFill>
+                  <a:srgbClr val="A02B93"/>
+                </a:solidFill>
+                <a:latin typeface="Consolas"/>
+                <a:ea typeface="Consolas"/>
+                <a:cs typeface="Consolas"/>
+              </a:rPr>
+              <a:t>tar</a:t>
+            </a:r>
+            <a:r>
+              <a:rPr sz="1725" b="0">
+                <a:solidFill>
+                  <a:srgbClr val="29263B"/>
+                </a:solidFill>
+                <a:latin typeface="Consolas"/>
+                <a:ea typeface="Consolas"/>
+                <a:cs typeface="Consolas"/>
+              </a:rPr>
+              <a:t> </a:t>
+            </a:r>
+            <a:r>
+              <a:rPr sz="1725" b="0">
+                <a:solidFill>
+                  <a:srgbClr val="B84E00"/>
+                </a:solidFill>
+                <a:latin typeface="Consolas"/>
+                <a:ea typeface="Consolas"/>
+                <a:cs typeface="Consolas"/>
+              </a:rPr>
+              <a:t>-xzf</a:t>
+            </a:r>
+            <a:r>
+              <a:rPr sz="1725" b="0">
+                <a:solidFill>
+                  <a:srgbClr val="29263B"/>
+                </a:solidFill>
+                <a:latin typeface="Consolas"/>
+                <a:ea typeface="Consolas"/>
+                <a:cs typeface="Consolas"/>
+              </a:rPr>
+              <a:t> </a:t>
+            </a:r>
+            <a:r>
+              <a:rPr sz="1725" b="0">
+                <a:solidFill>
+                  <a:srgbClr val="0070C0"/>
+                </a:solidFill>
+                <a:latin typeface="Consolas"/>
+                <a:ea typeface="Consolas"/>
+                <a:cs typeface="Consolas"/>
+              </a:rPr>
+              <a:t>Python-3.12.10.tgz</a:t>
+            </a:r>
+          </a:p>
+          <a:p xmlns:a="http://schemas.openxmlformats.org/drawingml/2006/main">
+            <a:pPr>
+              <a:lnSpc>
+                <a:spcPct val="120000"/>
+              </a:lnSpc>
+              <a:defRPr sz="1725" b="0">
+                <a:solidFill>
                   <a:srgbClr val="005968"/>
                 </a:solidFill>
                 <a:latin typeface="Consolas"/>
                 <a:ea typeface="Consolas"/>
                 <a:cs typeface="Consolas"/>
-              </a:rPr>
-              <a:t>cd ~/zephyr-tools/src</a:t>
+              </a:defRPr>
+            </a:pPr>
+            <a:r>
+              <a:rPr sz="1725" b="0">
+                <a:solidFill>
+                  <a:srgbClr val="A02B93"/>
+                </a:solidFill>
+                <a:latin typeface="Consolas"/>
+                <a:ea typeface="Consolas"/>
+                <a:cs typeface="Consolas"/>
+              </a:rPr>
+              <a:t>cd</a:t>
+            </a:r>
+            <a:r>
+              <a:rPr sz="1725" b="0">
+                <a:solidFill>
+                  <a:srgbClr val="29263B"/>
+                </a:solidFill>
+                <a:latin typeface="Consolas"/>
+                <a:ea typeface="Consolas"/>
+                <a:cs typeface="Consolas"/>
+              </a:rPr>
+              <a:t> Python-3.12.10</a:t>
             </a:r>
           </a:p>
           <a:p xmlns:a="http://schemas.openxmlformats.org/drawingml/2006/main">
@@ -25023,13 +27171,94 @@
             <a:r>
               <a:rPr sz="1725" b="0">
                 <a:solidFill>
+                  <a:srgbClr val="0070C0"/>
+                </a:solidFill>
+                <a:latin typeface="Consolas"/>
+                <a:ea typeface="Consolas"/>
+                <a:cs typeface="Consolas"/>
+              </a:rPr>
+              <a:t>./configure</a:t>
+            </a:r>
+            <a:r>
+              <a:rPr sz="1725" b="0">
+                <a:solidFill>
+                  <a:srgbClr val="29263B"/>
+                </a:solidFill>
+                <a:latin typeface="Consolas"/>
+                <a:ea typeface="Consolas"/>
+                <a:cs typeface="Consolas"/>
+              </a:rPr>
+              <a:t> </a:t>
+            </a:r>
+            <a:r>
+              <a:rPr sz="1725" b="0">
+                <a:solidFill>
+                  <a:srgbClr val="B84E00"/>
+                </a:solidFill>
+                <a:latin typeface="Consolas"/>
+                <a:ea typeface="Consolas"/>
+                <a:cs typeface="Consolas"/>
+              </a:rPr>
+              <a:t>--with-ensurepip</a:t>
+            </a:r>
+            <a:r>
+              <a:rPr sz="1725" b="0">
+                <a:solidFill>
+                  <a:srgbClr val="29263B"/>
+                </a:solidFill>
+                <a:latin typeface="Consolas"/>
+                <a:ea typeface="Consolas"/>
+                <a:cs typeface="Consolas"/>
+              </a:rPr>
+              <a:t>=install</a:t>
+            </a:r>
+          </a:p>
+          <a:p xmlns:a="http://schemas.openxmlformats.org/drawingml/2006/main">
+            <a:pPr>
+              <a:lnSpc>
+                <a:spcPct val="120000"/>
+              </a:lnSpc>
+              <a:defRPr sz="1725" b="0">
+                <a:solidFill>
                   <a:srgbClr val="005968"/>
                 </a:solidFill>
                 <a:latin typeface="Consolas"/>
                 <a:ea typeface="Consolas"/>
                 <a:cs typeface="Consolas"/>
-              </a:rPr>
-              <a:t>wget https://www.python.org/ftp/python/3.12.10/Python-3.12.10.tgz</a:t>
+              </a:defRPr>
+            </a:pPr>
+            <a:r>
+              <a:rPr sz="1725" b="0">
+                <a:solidFill>
+                  <a:srgbClr val="A02B93"/>
+                </a:solidFill>
+                <a:latin typeface="Consolas"/>
+                <a:ea typeface="Consolas"/>
+                <a:cs typeface="Consolas"/>
+              </a:rPr>
+              <a:t>make</a:t>
+            </a:r>
+            <a:r>
+              <a:rPr sz="1725" b="0">
+                <a:solidFill>
+                  <a:srgbClr val="29263B"/>
+                </a:solidFill>
+                <a:latin typeface="Consolas"/>
+                <a:ea typeface="Consolas"/>
+                <a:cs typeface="Consolas"/>
+              </a:rPr>
+              <a:t> </a:t>
+            </a:r>
+            <a:r>
+              <a:rPr sz="1725" b="0">
+                <a:solidFill>
+                  <a:srgbClr val="B84E00"/>
+                </a:solidFill>
+                <a:latin typeface="Consolas"/>
+                <a:ea typeface="Consolas"/>
+                <a:cs typeface="Consolas"/>
+              </a:rPr>
+              <a:t>-j2</a:t>
             </a:r>
           </a:p>
           <a:p xmlns:a="http://schemas.openxmlformats.org/drawingml/2006/main">
@@ -25049,117 +27278,46 @@
             <a:r>
               <a:rPr sz="1725" b="0">
                 <a:solidFill>
-                  <a:srgbClr val="005968"/>
-                </a:solidFill>
-                <a:latin typeface="Consolas"/>
-                <a:ea typeface="Consolas"/>
-                <a:cs typeface="Consolas"/>
-              </a:rPr>
-              <a:t>tar -xzf Python-3.12.10.tgz</a:t>
-            </a:r>
-          </a:p>
-          <a:p xmlns:a="http://schemas.openxmlformats.org/drawingml/2006/main">
-            <a:pPr>
-              <a:lnSpc>
-                <a:spcPct val="120000"/>
-              </a:lnSpc>
-              <a:defRPr sz="1725" b="0">
-                <a:solidFill>
-                  <a:srgbClr val="005968"/>
-                </a:solidFill>
-                <a:latin typeface="Consolas"/>
-                <a:ea typeface="Consolas"/>
-                <a:cs typeface="Consolas"/>
-              </a:defRPr>
-            </a:pPr>
+                  <a:srgbClr val="A02B93"/>
+                </a:solidFill>
+                <a:latin typeface="Consolas"/>
+                <a:ea typeface="Consolas"/>
+                <a:cs typeface="Consolas"/>
+              </a:rPr>
+              <a:t>sudo</a:t>
+            </a:r>
             <a:r>
               <a:rPr sz="1725" b="0">
                 <a:solidFill>
-                  <a:srgbClr val="005968"/>
-                </a:solidFill>
-                <a:latin typeface="Consolas"/>
-                <a:ea typeface="Consolas"/>
-                <a:cs typeface="Consolas"/>
-              </a:rPr>
-              <a:t>cd Python-3.12.10</a:t>
-            </a:r>
-          </a:p>
-          <a:p xmlns:a="http://schemas.openxmlformats.org/drawingml/2006/main">
-            <a:pPr>
-              <a:lnSpc>
-                <a:spcPct val="120000"/>
-              </a:lnSpc>
-              <a:defRPr sz="1725" b="0">
-                <a:solidFill>
-                  <a:srgbClr val="005968"/>
-                </a:solidFill>
-                <a:latin typeface="Consolas"/>
-                <a:ea typeface="Consolas"/>
-                <a:cs typeface="Consolas"/>
-              </a:defRPr>
-            </a:pPr>
+                  <a:srgbClr val="29263B"/>
+                </a:solidFill>
+                <a:latin typeface="Consolas"/>
+                <a:ea typeface="Consolas"/>
+                <a:cs typeface="Consolas"/>
+              </a:rPr>
+              <a:t> </a:t>
+            </a:r>
             <a:r>
               <a:rPr sz="1725" b="0">
                 <a:solidFill>
-                  <a:srgbClr val="005968"/>
-                </a:solidFill>
-                <a:latin typeface="Consolas"/>
-                <a:ea typeface="Consolas"/>
-                <a:cs typeface="Consolas"/>
-              </a:rPr>
-              <a:t>./configure --with-ensurepip=install</a:t>
-            </a:r>
-          </a:p>
-          <a:p xmlns:a="http://schemas.openxmlformats.org/drawingml/2006/main">
-            <a:pPr>
-              <a:lnSpc>
-                <a:spcPct val="120000"/>
-              </a:lnSpc>
-              <a:defRPr sz="1725" b="0">
-                <a:solidFill>
-                  <a:srgbClr val="005968"/>
-                </a:solidFill>
-                <a:latin typeface="Consolas"/>
-                <a:ea typeface="Consolas"/>
-                <a:cs typeface="Consolas"/>
-              </a:defRPr>
-            </a:pPr>
+                  <a:srgbClr val="A02B93"/>
+                </a:solidFill>
+                <a:latin typeface="Consolas"/>
+                <a:ea typeface="Consolas"/>
+                <a:cs typeface="Consolas"/>
+              </a:rPr>
+              <a:t>make</a:t>
+            </a:r>
             <a:r>
               <a:rPr sz="1725" b="0">
                 <a:solidFill>
-                  <a:srgbClr val="005968"/>
-                </a:solidFill>
-                <a:latin typeface="Consolas"/>
-                <a:ea typeface="Consolas"/>
-                <a:cs typeface="Consolas"/>
-              </a:rPr>
-              <a:t>make -j2</a:t>
-            </a:r>
-          </a:p>
-          <a:p xmlns:a="http://schemas.openxmlformats.org/drawingml/2006/main">
-            <a:pPr>
-              <a:lnSpc>
-                <a:spcPct val="120000"/>
-              </a:lnSpc>
-              <a:defRPr sz="1725" b="0">
-                <a:solidFill>
-                  <a:srgbClr val="005968"/>
-                </a:solidFill>
-                <a:latin typeface="Consolas"/>
-                <a:ea typeface="Consolas"/>
-                <a:cs typeface="Consolas"/>
-              </a:defRPr>
-            </a:pPr>
-            <a:r>
-              <a:rPr sz="1725" b="0">
-                <a:solidFill>
-                  <a:srgbClr val="005968"/>
-                </a:solidFill>
-                <a:latin typeface="Consolas"/>
-                <a:ea typeface="Consolas"/>
-                <a:cs typeface="Consolas"/>
-              </a:rPr>
-              <a:t>sudo make altinstall</a:t>
+                  <a:srgbClr val="29263B"/>
+                </a:solidFill>
+                <a:latin typeface="Consolas"/>
+                <a:ea typeface="Consolas"/>
+                <a:cs typeface="Consolas"/>
+              </a:rPr>
+              <a:t> altinstall</a:t>
             </a:r>
           </a:p>
         </p:txBody>
@@ -25230,7 +27388,51 @@
                 <a:ea typeface="Microsoft YaHei"/>
                 <a:cs typeface="Microsoft YaHei"/>
               </a:rPr>
-              <a:t>源码目录只保存构建输入。altinstall 提供 python3.12，保留系统 python3。</a:t>
+              <a:t>源码目录只保存构建输入。altinstall 提供 </a:t>
+            </a:r>
+            <a:r>
+              <a:rPr sz="1875" b="0">
+                <a:solidFill>
+                  <a:srgbClr val="A02B93"/>
+                </a:solidFill>
+                <a:latin typeface="Microsoft YaHei"/>
+                <a:ea typeface="Microsoft YaHei"/>
+                <a:cs typeface="Microsoft YaHei"/>
+              </a:rPr>
+              <a:t>python3.12</a:t>
+            </a:r>
+            <a:r>
+              <a:rPr sz="1875" b="0">
+                <a:solidFill>
+                  <a:srgbClr val="29263B"/>
+                </a:solidFill>
+                <a:latin typeface="Microsoft YaHei"/>
+                <a:ea typeface="Microsoft YaHei"/>
+                <a:cs typeface="Microsoft YaHei"/>
+              </a:rPr>
+              <a:t>，保留系统 </a:t>
+            </a:r>
+            <a:r>
+              <a:rPr sz="1875" b="0">
+                <a:solidFill>
+                  <a:srgbClr val="A02B93"/>
+                </a:solidFill>
+                <a:latin typeface="Microsoft YaHei"/>
+                <a:ea typeface="Microsoft YaHei"/>
+                <a:cs typeface="Microsoft YaHei"/>
+              </a:rPr>
+              <a:t>python3</a:t>
+            </a:r>
+            <a:r>
+              <a:rPr sz="1875" b="0">
+                <a:solidFill>
+                  <a:srgbClr val="29263B"/>
+                </a:solidFill>
+                <a:latin typeface="Microsoft YaHei"/>
+                <a:ea typeface="Microsoft YaHei"/>
+                <a:cs typeface="Microsoft YaHei"/>
+              </a:rPr>
+              <a:t>。</a:t>
             </a:r>
           </a:p>
         </p:txBody>
@@ -25597,13 +27799,39 @@
             <a:r>
               <a:rPr sz="1875" b="0">
                 <a:solidFill>
+                  <a:srgbClr val="646173"/>
+                </a:solidFill>
+                <a:latin typeface="Consolas"/>
+                <a:ea typeface="Consolas"/>
+                <a:cs typeface="Consolas"/>
+              </a:rPr>
+              <a:t># 终端：Ubuntu 22.04 Bash；任意目录。</a:t>
+            </a:r>
+          </a:p>
+          <a:p xmlns:a="http://schemas.openxmlformats.org/drawingml/2006/main">
+            <a:pPr>
+              <a:lnSpc>
+                <a:spcPct val="120000"/>
+              </a:lnSpc>
+              <a:defRPr sz="1875" b="0">
+                <a:solidFill>
                   <a:srgbClr val="005968"/>
                 </a:solidFill>
                 <a:latin typeface="Consolas"/>
                 <a:ea typeface="Consolas"/>
                 <a:cs typeface="Consolas"/>
-              </a:rPr>
-              <a:t># 终端：Ubuntu 22.04 Bash；任意目录。</a:t>
+              </a:defRPr>
+            </a:pPr>
+            <a:r>
+              <a:rPr sz="1875" b="0">
+                <a:solidFill>
+                  <a:srgbClr val="646173"/>
+                </a:solidFill>
+                <a:latin typeface="Consolas"/>
+                <a:ea typeface="Consolas"/>
+                <a:cs typeface="Consolas"/>
+              </a:rPr>
+              <a:t># 使用已安装的带版本命令；不按教程自定义目录查找 Python。</a:t>
             </a:r>
           </a:p>
           <a:p xmlns:a="http://schemas.openxmlformats.org/drawingml/2006/main">
@@ -25623,13 +27851,94 @@
             <a:r>
               <a:rPr sz="1875" b="0">
                 <a:solidFill>
+                  <a:srgbClr val="A02B93"/>
+                </a:solidFill>
+                <a:latin typeface="Consolas"/>
+                <a:ea typeface="Consolas"/>
+                <a:cs typeface="Consolas"/>
+              </a:rPr>
+              <a:t>python3.12</a:t>
+            </a:r>
+            <a:r>
+              <a:rPr sz="1875" b="0">
+                <a:solidFill>
+                  <a:srgbClr val="29263B"/>
+                </a:solidFill>
+                <a:latin typeface="Consolas"/>
+                <a:ea typeface="Consolas"/>
+                <a:cs typeface="Consolas"/>
+              </a:rPr>
+              <a:t> </a:t>
+            </a:r>
+            <a:r>
+              <a:rPr sz="1875" b="0">
+                <a:solidFill>
+                  <a:srgbClr val="B84E00"/>
+                </a:solidFill>
+                <a:latin typeface="Consolas"/>
+                <a:ea typeface="Consolas"/>
+                <a:cs typeface="Consolas"/>
+              </a:rPr>
+              <a:t>--version</a:t>
+            </a:r>
+          </a:p>
+          <a:p xmlns:a="http://schemas.openxmlformats.org/drawingml/2006/main">
+            <a:pPr>
+              <a:lnSpc>
+                <a:spcPct val="120000"/>
+              </a:lnSpc>
+              <a:defRPr sz="1875" b="0">
+                <a:solidFill>
                   <a:srgbClr val="005968"/>
                 </a:solidFill>
                 <a:latin typeface="Consolas"/>
                 <a:ea typeface="Consolas"/>
                 <a:cs typeface="Consolas"/>
-              </a:rPr>
-              <a:t># 使用已安装的带版本命令；不按教程自定义目录查找 Python。</a:t>
+              </a:defRPr>
+            </a:pPr>
+            <a:r>
+              <a:rPr sz="1875" b="0">
+                <a:solidFill>
+                  <a:srgbClr val="A02B93"/>
+                </a:solidFill>
+                <a:latin typeface="Consolas"/>
+                <a:ea typeface="Consolas"/>
+                <a:cs typeface="Consolas"/>
+              </a:rPr>
+              <a:t>python3.12</a:t>
+            </a:r>
+            <a:r>
+              <a:rPr sz="1875" b="0">
+                <a:solidFill>
+                  <a:srgbClr val="29263B"/>
+                </a:solidFill>
+                <a:latin typeface="Consolas"/>
+                <a:ea typeface="Consolas"/>
+                <a:cs typeface="Consolas"/>
+              </a:rPr>
+              <a:t> </a:t>
+            </a:r>
+            <a:r>
+              <a:rPr sz="1875" b="0">
+                <a:solidFill>
+                  <a:srgbClr val="B84E00"/>
+                </a:solidFill>
+                <a:latin typeface="Consolas"/>
+                <a:ea typeface="Consolas"/>
+                <a:cs typeface="Consolas"/>
+              </a:rPr>
+              <a:t>-c</a:t>
+            </a:r>
+            <a:r>
+              <a:rPr sz="1875" b="0">
+                <a:solidFill>
+                  <a:srgbClr val="29263B"/>
+                </a:solidFill>
+                <a:latin typeface="Consolas"/>
+                <a:ea typeface="Consolas"/>
+                <a:cs typeface="Consolas"/>
+              </a:rPr>
+              <a:t> \</a:t>
             </a:r>
           </a:p>
           <a:p xmlns:a="http://schemas.openxmlformats.org/drawingml/2006/main">
@@ -25649,91 +27958,105 @@
             <a:r>
               <a:rPr sz="1875" b="0">
                 <a:solidFill>
+                  <a:srgbClr val="29263B"/>
+                </a:solidFill>
+                <a:latin typeface="Consolas"/>
+                <a:ea typeface="Consolas"/>
+                <a:cs typeface="Consolas"/>
+              </a:rPr>
+              <a:t>  'import ssl, sqlite3, bz2, lzma, ctypes, venv; </a:t>
+            </a:r>
+            <a:r>
+              <a:rPr sz="1875" b="0">
+                <a:solidFill>
+                  <a:srgbClr val="087B3D"/>
+                </a:solidFill>
+                <a:latin typeface="Consolas"/>
+                <a:ea typeface="Consolas"/>
+                <a:cs typeface="Consolas"/>
+              </a:rPr>
+              <a:t>print</a:t>
+            </a:r>
+            <a:r>
+              <a:rPr sz="1875" b="0">
+                <a:solidFill>
+                  <a:srgbClr val="29263B"/>
+                </a:solidFill>
+                <a:latin typeface="Consolas"/>
+                <a:ea typeface="Consolas"/>
+                <a:cs typeface="Consolas"/>
+              </a:rPr>
+              <a:t>(ssl.OPENSSL_VERSION)'</a:t>
+            </a:r>
+          </a:p>
+          <a:p xmlns:a="http://schemas.openxmlformats.org/drawingml/2006/main">
+            <a:pPr>
+              <a:lnSpc>
+                <a:spcPct val="120000"/>
+              </a:lnSpc>
+              <a:defRPr sz="1875" b="0">
+                <a:solidFill>
                   <a:srgbClr val="005968"/>
                 </a:solidFill>
                 <a:latin typeface="Consolas"/>
                 <a:ea typeface="Consolas"/>
                 <a:cs typeface="Consolas"/>
-              </a:rPr>
-              <a:t>python3.12 --version</a:t>
-            </a:r>
-          </a:p>
-          <a:p xmlns:a="http://schemas.openxmlformats.org/drawingml/2006/main">
-            <a:pPr>
-              <a:lnSpc>
-                <a:spcPct val="120000"/>
-              </a:lnSpc>
-              <a:defRPr sz="1875" b="0">
-                <a:solidFill>
-                  <a:srgbClr val="005968"/>
-                </a:solidFill>
-                <a:latin typeface="Consolas"/>
-                <a:ea typeface="Consolas"/>
-                <a:cs typeface="Consolas"/>
               </a:defRPr>
             </a:pPr>
             <a:r>
               <a:rPr sz="1875" b="0">
                 <a:solidFill>
-                  <a:srgbClr val="005968"/>
-                </a:solidFill>
-                <a:latin typeface="Consolas"/>
-                <a:ea typeface="Consolas"/>
-                <a:cs typeface="Consolas"/>
-              </a:rPr>
-              <a:t>python3.12 -c \</a:t>
-            </a:r>
-          </a:p>
-          <a:p xmlns:a="http://schemas.openxmlformats.org/drawingml/2006/main">
-            <a:pPr>
-              <a:lnSpc>
-                <a:spcPct val="120000"/>
-              </a:lnSpc>
-              <a:defRPr sz="1875" b="0">
-                <a:solidFill>
-                  <a:srgbClr val="005968"/>
-                </a:solidFill>
-                <a:latin typeface="Consolas"/>
-                <a:ea typeface="Consolas"/>
-                <a:cs typeface="Consolas"/>
-              </a:defRPr>
-            </a:pPr>
+                  <a:srgbClr val="A02B93"/>
+                </a:solidFill>
+                <a:latin typeface="Consolas"/>
+                <a:ea typeface="Consolas"/>
+                <a:cs typeface="Consolas"/>
+              </a:rPr>
+              <a:t>python3.12</a:t>
+            </a:r>
             <a:r>
               <a:rPr sz="1875" b="0">
                 <a:solidFill>
-                  <a:srgbClr val="005968"/>
-                </a:solidFill>
-                <a:latin typeface="Consolas"/>
-                <a:ea typeface="Consolas"/>
-                <a:cs typeface="Consolas"/>
-              </a:rPr>
-              <a:t>  'import ssl, sqlite3, bz2, lzma, ctypes, venv; print(ssl.OPENSSL_VERSION)'</a:t>
-            </a:r>
-          </a:p>
-          <a:p xmlns:a="http://schemas.openxmlformats.org/drawingml/2006/main">
-            <a:pPr>
-              <a:lnSpc>
-                <a:spcPct val="120000"/>
-              </a:lnSpc>
-              <a:defRPr sz="1875" b="0">
-                <a:solidFill>
-                  <a:srgbClr val="005968"/>
-                </a:solidFill>
-                <a:latin typeface="Consolas"/>
-                <a:ea typeface="Consolas"/>
-                <a:cs typeface="Consolas"/>
-              </a:defRPr>
-            </a:pPr>
+                  <a:srgbClr val="29263B"/>
+                </a:solidFill>
+                <a:latin typeface="Consolas"/>
+                <a:ea typeface="Consolas"/>
+                <a:cs typeface="Consolas"/>
+              </a:rPr>
+              <a:t> </a:t>
+            </a:r>
             <a:r>
               <a:rPr sz="1875" b="0">
                 <a:solidFill>
-                  <a:srgbClr val="005968"/>
-                </a:solidFill>
-                <a:latin typeface="Consolas"/>
-                <a:ea typeface="Consolas"/>
-                <a:cs typeface="Consolas"/>
-              </a:rPr>
-              <a:t>python3.12 -m pip --version</a:t>
+                  <a:srgbClr val="B84E00"/>
+                </a:solidFill>
+                <a:latin typeface="Consolas"/>
+                <a:ea typeface="Consolas"/>
+                <a:cs typeface="Consolas"/>
+              </a:rPr>
+              <a:t>-m</a:t>
+            </a:r>
+            <a:r>
+              <a:rPr sz="1875" b="0">
+                <a:solidFill>
+                  <a:srgbClr val="29263B"/>
+                </a:solidFill>
+                <a:latin typeface="Consolas"/>
+                <a:ea typeface="Consolas"/>
+                <a:cs typeface="Consolas"/>
+              </a:rPr>
+              <a:t> pip </a:t>
+            </a:r>
+            <a:r>
+              <a:rPr sz="1875" b="0">
+                <a:solidFill>
+                  <a:srgbClr val="B84E00"/>
+                </a:solidFill>
+                <a:latin typeface="Consolas"/>
+                <a:ea typeface="Consolas"/>
+                <a:cs typeface="Consolas"/>
+              </a:rPr>
+              <a:t>--version</a:t>
             </a:r>
           </a:p>
         </p:txBody>
@@ -25804,7 +28127,29 @@
                 <a:ea typeface="Microsoft YaHei"/>
                 <a:cs typeface="Microsoft YaHei"/>
               </a:rPr>
-              <a:t>应显示 3.12.10 且模块导入成功。系统 python3 仍为 3.10 可以共存。</a:t>
+              <a:t>应显示 3.12.10 且模块导入成功。系统 </a:t>
+            </a:r>
+            <a:r>
+              <a:rPr sz="1875" b="0">
+                <a:solidFill>
+                  <a:srgbClr val="A02B93"/>
+                </a:solidFill>
+                <a:latin typeface="Microsoft YaHei"/>
+                <a:ea typeface="Microsoft YaHei"/>
+                <a:cs typeface="Microsoft YaHei"/>
+              </a:rPr>
+              <a:t>python3</a:t>
+            </a:r>
+            <a:r>
+              <a:rPr sz="1875" b="0">
+                <a:solidFill>
+                  <a:srgbClr val="29263B"/>
+                </a:solidFill>
+                <a:latin typeface="Microsoft YaHei"/>
+                <a:ea typeface="Microsoft YaHei"/>
+                <a:cs typeface="Microsoft YaHei"/>
+              </a:rPr>
+              <a:t> 仍为 3.10 可以共存。</a:t>
             </a:r>
           </a:p>
         </p:txBody>
@@ -26171,13 +28516,39 @@
             <a:r>
               <a:rPr sz="1875" b="0">
                 <a:solidFill>
+                  <a:srgbClr val="646173"/>
+                </a:solidFill>
+                <a:latin typeface="Consolas"/>
+                <a:ea typeface="Consolas"/>
+                <a:cs typeface="Consolas"/>
+              </a:rPr>
+              <a:t># 终端：Linux Bash；任意目录。路径沿用官方示例。</a:t>
+            </a:r>
+          </a:p>
+          <a:p xmlns:a="http://schemas.openxmlformats.org/drawingml/2006/main">
+            <a:pPr>
+              <a:lnSpc>
+                <a:spcPct val="120000"/>
+              </a:lnSpc>
+              <a:defRPr sz="1875" b="0">
+                <a:solidFill>
                   <a:srgbClr val="005968"/>
                 </a:solidFill>
                 <a:latin typeface="Consolas"/>
                 <a:ea typeface="Consolas"/>
                 <a:cs typeface="Consolas"/>
-              </a:rPr>
-              <a:t># 终端：Linux Bash；任意目录。路径沿用官方示例。</a:t>
+              </a:defRPr>
+            </a:pPr>
+            <a:r>
+              <a:rPr sz="1875" b="0">
+                <a:solidFill>
+                  <a:srgbClr val="646173"/>
+                </a:solidFill>
+                <a:latin typeface="Consolas"/>
+                <a:ea typeface="Consolas"/>
+                <a:cs typeface="Consolas"/>
+              </a:rPr>
+              <a:t># 使用 1.2.3 安装的解释器，创建 Zephyr 工作区的独立环境。</a:t>
             </a:r>
           </a:p>
           <a:p xmlns:a="http://schemas.openxmlformats.org/drawingml/2006/main">
@@ -26197,13 +28568,105 @@
             <a:r>
               <a:rPr sz="1875" b="0">
                 <a:solidFill>
+                  <a:srgbClr val="A02B93"/>
+                </a:solidFill>
+                <a:latin typeface="Consolas"/>
+                <a:ea typeface="Consolas"/>
+                <a:cs typeface="Consolas"/>
+              </a:rPr>
+              <a:t>python3.12</a:t>
+            </a:r>
+            <a:r>
+              <a:rPr sz="1875" b="0">
+                <a:solidFill>
+                  <a:srgbClr val="29263B"/>
+                </a:solidFill>
+                <a:latin typeface="Consolas"/>
+                <a:ea typeface="Consolas"/>
+                <a:cs typeface="Consolas"/>
+              </a:rPr>
+              <a:t> </a:t>
+            </a:r>
+            <a:r>
+              <a:rPr sz="1875" b="0">
+                <a:solidFill>
+                  <a:srgbClr val="B84E00"/>
+                </a:solidFill>
+                <a:latin typeface="Consolas"/>
+                <a:ea typeface="Consolas"/>
+                <a:cs typeface="Consolas"/>
+              </a:rPr>
+              <a:t>-m</a:t>
+            </a:r>
+            <a:r>
+              <a:rPr sz="1875" b="0">
+                <a:solidFill>
+                  <a:srgbClr val="29263B"/>
+                </a:solidFill>
+                <a:latin typeface="Consolas"/>
+                <a:ea typeface="Consolas"/>
+                <a:cs typeface="Consolas"/>
+              </a:rPr>
+              <a:t> venv </a:t>
+            </a:r>
+            <a:r>
+              <a:rPr sz="1875" b="0">
+                <a:solidFill>
+                  <a:srgbClr val="0070C0"/>
+                </a:solidFill>
+                <a:latin typeface="Consolas"/>
+                <a:ea typeface="Consolas"/>
+                <a:cs typeface="Consolas"/>
+              </a:rPr>
+              <a:t>~/zephyrproject/.venv</a:t>
+            </a:r>
+          </a:p>
+          <a:p xmlns:a="http://schemas.openxmlformats.org/drawingml/2006/main">
+            <a:pPr>
+              <a:lnSpc>
+                <a:spcPct val="120000"/>
+              </a:lnSpc>
+              <a:defRPr sz="1875" b="0">
+                <a:solidFill>
                   <a:srgbClr val="005968"/>
                 </a:solidFill>
                 <a:latin typeface="Consolas"/>
                 <a:ea typeface="Consolas"/>
                 <a:cs typeface="Consolas"/>
-              </a:rPr>
-              <a:t># 使用 1.2.3 安装的解释器，创建 Zephyr 工作区的独立环境。</a:t>
+              </a:defRPr>
+            </a:pPr>
+            <a:r>
+              <a:rPr sz="1875" b="0">
+                <a:solidFill>
+                  <a:srgbClr val="A02B93"/>
+                </a:solidFill>
+                <a:latin typeface="Consolas"/>
+                <a:ea typeface="Consolas"/>
+                <a:cs typeface="Consolas"/>
+              </a:rPr>
+              <a:t>source</a:t>
+            </a:r>
+            <a:r>
+              <a:rPr sz="1875" b="0">
+                <a:solidFill>
+                  <a:srgbClr val="29263B"/>
+                </a:solidFill>
+                <a:latin typeface="Consolas"/>
+                <a:ea typeface="Consolas"/>
+                <a:cs typeface="Consolas"/>
+              </a:rPr>
+              <a:t> </a:t>
+            </a:r>
+            <a:r>
+              <a:rPr sz="1875" b="0">
+                <a:solidFill>
+                  <a:srgbClr val="0070C0"/>
+                </a:solidFill>
+                <a:latin typeface="Consolas"/>
+                <a:ea typeface="Consolas"/>
+                <a:cs typeface="Consolas"/>
+              </a:rPr>
+              <a:t>~/zephyrproject/.venv/bin/activate</a:t>
             </a:r>
           </a:p>
           <a:p xmlns:a="http://schemas.openxmlformats.org/drawingml/2006/main">
@@ -26223,13 +28686,138 @@
             <a:r>
               <a:rPr sz="1875" b="0">
                 <a:solidFill>
+                  <a:srgbClr val="A02B93"/>
+                </a:solidFill>
+                <a:latin typeface="Consolas"/>
+                <a:ea typeface="Consolas"/>
+                <a:cs typeface="Consolas"/>
+              </a:rPr>
+              <a:t>python</a:t>
+            </a:r>
+            <a:r>
+              <a:rPr sz="1875" b="0">
+                <a:solidFill>
+                  <a:srgbClr val="29263B"/>
+                </a:solidFill>
+                <a:latin typeface="Consolas"/>
+                <a:ea typeface="Consolas"/>
+                <a:cs typeface="Consolas"/>
+              </a:rPr>
+              <a:t> </a:t>
+            </a:r>
+            <a:r>
+              <a:rPr sz="1875" b="0">
+                <a:solidFill>
+                  <a:srgbClr val="B84E00"/>
+                </a:solidFill>
+                <a:latin typeface="Consolas"/>
+                <a:ea typeface="Consolas"/>
+                <a:cs typeface="Consolas"/>
+              </a:rPr>
+              <a:t>--version</a:t>
+            </a:r>
+          </a:p>
+          <a:p xmlns:a="http://schemas.openxmlformats.org/drawingml/2006/main">
+            <a:pPr>
+              <a:lnSpc>
+                <a:spcPct val="120000"/>
+              </a:lnSpc>
+              <a:defRPr sz="1875" b="0">
+                <a:solidFill>
                   <a:srgbClr val="005968"/>
                 </a:solidFill>
                 <a:latin typeface="Consolas"/>
                 <a:ea typeface="Consolas"/>
                 <a:cs typeface="Consolas"/>
-              </a:rPr>
-              <a:t>python3.12 -m venv ~/zephyrproject/.venv</a:t>
+              </a:defRPr>
+            </a:pPr>
+            <a:r>
+              <a:rPr sz="1875" b="0">
+                <a:solidFill>
+                  <a:srgbClr val="A02B93"/>
+                </a:solidFill>
+                <a:latin typeface="Consolas"/>
+                <a:ea typeface="Consolas"/>
+                <a:cs typeface="Consolas"/>
+              </a:rPr>
+              <a:t>python</a:t>
+            </a:r>
+            <a:r>
+              <a:rPr sz="1875" b="0">
+                <a:solidFill>
+                  <a:srgbClr val="29263B"/>
+                </a:solidFill>
+                <a:latin typeface="Consolas"/>
+                <a:ea typeface="Consolas"/>
+                <a:cs typeface="Consolas"/>
+              </a:rPr>
+              <a:t> </a:t>
+            </a:r>
+            <a:r>
+              <a:rPr sz="1875" b="0">
+                <a:solidFill>
+                  <a:srgbClr val="B84E00"/>
+                </a:solidFill>
+                <a:latin typeface="Consolas"/>
+                <a:ea typeface="Consolas"/>
+                <a:cs typeface="Consolas"/>
+              </a:rPr>
+              <a:t>-c</a:t>
+            </a:r>
+            <a:r>
+              <a:rPr sz="1875" b="0">
+                <a:solidFill>
+                  <a:srgbClr val="29263B"/>
+                </a:solidFill>
+                <a:latin typeface="Consolas"/>
+                <a:ea typeface="Consolas"/>
+                <a:cs typeface="Consolas"/>
+              </a:rPr>
+              <a:t> 'import sys; </a:t>
+            </a:r>
+            <a:r>
+              <a:rPr sz="1875" b="0">
+                <a:solidFill>
+                  <a:srgbClr val="087B3D"/>
+                </a:solidFill>
+                <a:latin typeface="Consolas"/>
+                <a:ea typeface="Consolas"/>
+                <a:cs typeface="Consolas"/>
+              </a:rPr>
+              <a:t>print</a:t>
+            </a:r>
+            <a:r>
+              <a:rPr sz="1875" b="0">
+                <a:solidFill>
+                  <a:srgbClr val="29263B"/>
+                </a:solidFill>
+                <a:latin typeface="Consolas"/>
+                <a:ea typeface="Consolas"/>
+                <a:cs typeface="Consolas"/>
+              </a:rPr>
+              <a:t>(sys.executable); </a:t>
+            </a:r>
+            <a:r>
+              <a:rPr sz="1875" b="0">
+                <a:solidFill>
+                  <a:srgbClr val="087B3D"/>
+                </a:solidFill>
+                <a:latin typeface="Consolas"/>
+                <a:ea typeface="Consolas"/>
+                <a:cs typeface="Consolas"/>
+              </a:rPr>
+              <a:t>print</a:t>
+            </a:r>
+            <a:r>
+              <a:rPr sz="1875" b="0">
+                <a:solidFill>
+                  <a:srgbClr val="29263B"/>
+                </a:solidFill>
+                <a:latin typeface="Consolas"/>
+                <a:ea typeface="Consolas"/>
+                <a:cs typeface="Consolas"/>
+              </a:rPr>
+              <a:t>(sys.platform)'</a:t>
             </a:r>
           </a:p>
           <a:p xmlns:a="http://schemas.openxmlformats.org/drawingml/2006/main">
@@ -26249,117 +28837,105 @@
             <a:r>
               <a:rPr sz="1875" b="0">
                 <a:solidFill>
+                  <a:srgbClr val="A02B93"/>
+                </a:solidFill>
+                <a:latin typeface="Consolas"/>
+                <a:ea typeface="Consolas"/>
+                <a:cs typeface="Consolas"/>
+              </a:rPr>
+              <a:t>python</a:t>
+            </a:r>
+            <a:r>
+              <a:rPr sz="1875" b="0">
+                <a:solidFill>
+                  <a:srgbClr val="29263B"/>
+                </a:solidFill>
+                <a:latin typeface="Consolas"/>
+                <a:ea typeface="Consolas"/>
+                <a:cs typeface="Consolas"/>
+              </a:rPr>
+              <a:t> </a:t>
+            </a:r>
+            <a:r>
+              <a:rPr sz="1875" b="0">
+                <a:solidFill>
+                  <a:srgbClr val="B84E00"/>
+                </a:solidFill>
+                <a:latin typeface="Consolas"/>
+                <a:ea typeface="Consolas"/>
+                <a:cs typeface="Consolas"/>
+              </a:rPr>
+              <a:t>-m</a:t>
+            </a:r>
+            <a:r>
+              <a:rPr sz="1875" b="0">
+                <a:solidFill>
+                  <a:srgbClr val="29263B"/>
+                </a:solidFill>
+                <a:latin typeface="Consolas"/>
+                <a:ea typeface="Consolas"/>
+                <a:cs typeface="Consolas"/>
+              </a:rPr>
+              <a:t> pip install </a:t>
+            </a:r>
+            <a:r>
+              <a:rPr sz="1875" b="0">
+                <a:solidFill>
+                  <a:srgbClr val="A02B93"/>
+                </a:solidFill>
+                <a:latin typeface="Consolas"/>
+                <a:ea typeface="Consolas"/>
+                <a:cs typeface="Consolas"/>
+              </a:rPr>
+              <a:t>west</a:t>
+            </a:r>
+          </a:p>
+          <a:p xmlns:a="http://schemas.openxmlformats.org/drawingml/2006/main">
+            <a:pPr>
+              <a:lnSpc>
+                <a:spcPct val="120000"/>
+              </a:lnSpc>
+              <a:defRPr sz="1875" b="0">
+                <a:solidFill>
                   <a:srgbClr val="005968"/>
                 </a:solidFill>
                 <a:latin typeface="Consolas"/>
                 <a:ea typeface="Consolas"/>
                 <a:cs typeface="Consolas"/>
-              </a:rPr>
-              <a:t>source ~/zephyrproject/.venv/bin/activate</a:t>
-            </a:r>
-          </a:p>
-          <a:p xmlns:a="http://schemas.openxmlformats.org/drawingml/2006/main">
-            <a:pPr>
-              <a:lnSpc>
-                <a:spcPct val="120000"/>
-              </a:lnSpc>
-              <a:defRPr sz="1875" b="0">
-                <a:solidFill>
-                  <a:srgbClr val="005968"/>
-                </a:solidFill>
-                <a:latin typeface="Consolas"/>
-                <a:ea typeface="Consolas"/>
-                <a:cs typeface="Consolas"/>
               </a:defRPr>
             </a:pPr>
             <a:r>
               <a:rPr sz="1875" b="0">
                 <a:solidFill>
-                  <a:srgbClr val="005968"/>
-                </a:solidFill>
-                <a:latin typeface="Consolas"/>
-                <a:ea typeface="Consolas"/>
-                <a:cs typeface="Consolas"/>
-              </a:rPr>
-              <a:t>python --version</a:t>
-            </a:r>
-          </a:p>
-          <a:p xmlns:a="http://schemas.openxmlformats.org/drawingml/2006/main">
-            <a:pPr>
-              <a:lnSpc>
-                <a:spcPct val="120000"/>
-              </a:lnSpc>
-              <a:defRPr sz="1875" b="0">
-                <a:solidFill>
-                  <a:srgbClr val="005968"/>
-                </a:solidFill>
-                <a:latin typeface="Consolas"/>
-                <a:ea typeface="Consolas"/>
-                <a:cs typeface="Consolas"/>
-              </a:defRPr>
-            </a:pPr>
+                  <a:srgbClr val="A02B93"/>
+                </a:solidFill>
+                <a:latin typeface="Consolas"/>
+                <a:ea typeface="Consolas"/>
+                <a:cs typeface="Consolas"/>
+              </a:rPr>
+              <a:t>west</a:t>
+            </a:r>
             <a:r>
               <a:rPr sz="1875" b="0">
                 <a:solidFill>
-                  <a:srgbClr val="005968"/>
-                </a:solidFill>
-                <a:latin typeface="Consolas"/>
-                <a:ea typeface="Consolas"/>
-                <a:cs typeface="Consolas"/>
-              </a:rPr>
-              <a:t>python -c 'import sys; print(sys.executable); print(sys.platform)'</a:t>
-            </a:r>
-          </a:p>
-          <a:p xmlns:a="http://schemas.openxmlformats.org/drawingml/2006/main">
-            <a:pPr>
-              <a:lnSpc>
-                <a:spcPct val="120000"/>
-              </a:lnSpc>
-              <a:defRPr sz="1875" b="0">
-                <a:solidFill>
-                  <a:srgbClr val="005968"/>
-                </a:solidFill>
-                <a:latin typeface="Consolas"/>
-                <a:ea typeface="Consolas"/>
-                <a:cs typeface="Consolas"/>
-              </a:defRPr>
-            </a:pPr>
+                  <a:srgbClr val="29263B"/>
+                </a:solidFill>
+                <a:latin typeface="Consolas"/>
+                <a:ea typeface="Consolas"/>
+                <a:cs typeface="Consolas"/>
+              </a:rPr>
+              <a:t> </a:t>
+            </a:r>
             <a:r>
               <a:rPr sz="1875" b="0">
                 <a:solidFill>
-                  <a:srgbClr val="005968"/>
-                </a:solidFill>
-                <a:latin typeface="Consolas"/>
-                <a:ea typeface="Consolas"/>
-                <a:cs typeface="Consolas"/>
-              </a:rPr>
-              <a:t>python -m pip install west</a:t>
-            </a:r>
-          </a:p>
-          <a:p xmlns:a="http://schemas.openxmlformats.org/drawingml/2006/main">
-            <a:pPr>
-              <a:lnSpc>
-                <a:spcPct val="120000"/>
-              </a:lnSpc>
-              <a:defRPr sz="1875" b="0">
-                <a:solidFill>
-                  <a:srgbClr val="005968"/>
-                </a:solidFill>
-                <a:latin typeface="Consolas"/>
-                <a:ea typeface="Consolas"/>
-                <a:cs typeface="Consolas"/>
-              </a:defRPr>
-            </a:pPr>
-            <a:r>
-              <a:rPr sz="1875" b="0">
-                <a:solidFill>
-                  <a:srgbClr val="005968"/>
-                </a:solidFill>
-                <a:latin typeface="Consolas"/>
-                <a:ea typeface="Consolas"/>
-                <a:cs typeface="Consolas"/>
-              </a:rPr>
-              <a:t>west --version</a:t>
+                  <a:srgbClr val="B84E00"/>
+                </a:solidFill>
+                <a:latin typeface="Consolas"/>
+                <a:ea typeface="Consolas"/>
+                <a:cs typeface="Consolas"/>
+              </a:rPr>
+              <a:t>--version</a:t>
             </a:r>
           </a:p>
         </p:txBody>
@@ -26430,7 +29006,29 @@
                 <a:ea typeface="Microsoft YaHei"/>
                 <a:cs typeface="Microsoft YaHei"/>
               </a:rPr>
-              <a:t>创建时选择版本，激活后统一 python。</a:t>
+              <a:t>创建时选择版本，激活后统一 </a:t>
+            </a:r>
+            <a:r>
+              <a:rPr sz="1875" b="0">
+                <a:solidFill>
+                  <a:srgbClr val="A02B93"/>
+                </a:solidFill>
+                <a:latin typeface="Microsoft YaHei"/>
+                <a:ea typeface="Microsoft YaHei"/>
+                <a:cs typeface="Microsoft YaHei"/>
+              </a:rPr>
+              <a:t>python</a:t>
+            </a:r>
+            <a:r>
+              <a:rPr sz="1875" b="0">
+                <a:solidFill>
+                  <a:srgbClr val="29263B"/>
+                </a:solidFill>
+                <a:latin typeface="Microsoft YaHei"/>
+                <a:ea typeface="Microsoft YaHei"/>
+                <a:cs typeface="Microsoft YaHei"/>
+              </a:rPr>
+              <a:t>。</a:t>
             </a:r>
           </a:p>
           <a:p xmlns:a="http://schemas.openxmlformats.org/drawingml/2006/main">
@@ -26450,13 +29048,24 @@
             <a:r>
               <a:rPr sz="1875" b="0">
                 <a:solidFill>
+                  <a:srgbClr val="0070C0"/>
+                </a:solidFill>
+                <a:latin typeface="Microsoft YaHei"/>
+                <a:ea typeface="Microsoft YaHei"/>
+                <a:cs typeface="Microsoft YaHei"/>
+              </a:rPr>
+              <a:t>.venv</a:t>
+            </a:r>
+            <a:r>
+              <a:rPr sz="1875" b="0">
+                <a:solidFill>
                   <a:srgbClr val="29263B"/>
                 </a:solidFill>
                 <a:latin typeface="Microsoft YaHei"/>
                 <a:ea typeface="Microsoft YaHei"/>
                 <a:cs typeface="Microsoft YaHei"/>
               </a:rPr>
-              <a:t>.venv 隔离项目包；无需每次写基础解释器的完整路径。</a:t>
+              <a:t> 隔离项目包；无需每次写基础解释器的完整路径。</a:t>
             </a:r>
           </a:p>
         </p:txBody>
@@ -26823,13 +29432,90 @@
             <a:r>
               <a:rPr sz="2175" b="0">
                 <a:solidFill>
+                  <a:srgbClr val="0070C0"/>
+                </a:solidFill>
+                <a:latin typeface="Microsoft YaHei"/>
+                <a:ea typeface="Microsoft YaHei"/>
+                <a:cs typeface="Microsoft YaHei"/>
+              </a:rPr>
+              <a:t>setup.sh</a:t>
+            </a:r>
+            <a:r>
+              <a:rPr sz="2175" b="0">
+                <a:solidFill>
                   <a:srgbClr val="29263B"/>
                 </a:solidFill>
                 <a:latin typeface="Microsoft YaHei"/>
                 <a:ea typeface="Microsoft YaHei"/>
                 <a:cs typeface="Microsoft YaHei"/>
               </a:rPr>
-              <a:t>setup.sh -c 把 SDK cmake 目录写入 ~/.cmake/packages/Zephyr-sdk。</a:t>
+              <a:t> </a:t>
+            </a:r>
+            <a:r>
+              <a:rPr sz="2175" b="0">
+                <a:solidFill>
+                  <a:srgbClr val="B84E00"/>
+                </a:solidFill>
+                <a:latin typeface="Microsoft YaHei"/>
+                <a:ea typeface="Microsoft YaHei"/>
+                <a:cs typeface="Microsoft YaHei"/>
+              </a:rPr>
+              <a:t>-c</a:t>
+            </a:r>
+            <a:r>
+              <a:rPr sz="2175" b="0">
+                <a:solidFill>
+                  <a:srgbClr val="29263B"/>
+                </a:solidFill>
+                <a:latin typeface="Microsoft YaHei"/>
+                <a:ea typeface="Microsoft YaHei"/>
+                <a:cs typeface="Microsoft YaHei"/>
+              </a:rPr>
+              <a:t> 把 SDK </a:t>
+            </a:r>
+            <a:r>
+              <a:rPr sz="2175" b="0">
+                <a:solidFill>
+                  <a:srgbClr val="0070C0"/>
+                </a:solidFill>
+                <a:latin typeface="Microsoft YaHei"/>
+                <a:ea typeface="Microsoft YaHei"/>
+                <a:cs typeface="Microsoft YaHei"/>
+              </a:rPr>
+              <a:t>cmake</a:t>
+            </a:r>
+            <a:r>
+              <a:rPr sz="2175" b="0">
+                <a:solidFill>
+                  <a:srgbClr val="29263B"/>
+                </a:solidFill>
+                <a:latin typeface="Microsoft YaHei"/>
+                <a:ea typeface="Microsoft YaHei"/>
+                <a:cs typeface="Microsoft YaHei"/>
+              </a:rPr>
+              <a:t> 目录写入 </a:t>
+            </a:r>
+            <a:r>
+              <a:rPr sz="2175" b="0">
+                <a:solidFill>
+                  <a:srgbClr val="0070C0"/>
+                </a:solidFill>
+                <a:latin typeface="Microsoft YaHei"/>
+                <a:ea typeface="Microsoft YaHei"/>
+                <a:cs typeface="Microsoft YaHei"/>
+              </a:rPr>
+              <a:t>~/.cmake/packages/Zephyr-sdk</a:t>
+            </a:r>
+            <a:r>
+              <a:rPr sz="2175" b="0">
+                <a:solidFill>
+                  <a:srgbClr val="29263B"/>
+                </a:solidFill>
+                <a:latin typeface="Microsoft YaHei"/>
+                <a:ea typeface="Microsoft YaHei"/>
+                <a:cs typeface="Microsoft YaHei"/>
+              </a:rPr>
+              <a:t>。</a:t>
             </a:r>
           </a:p>
           <a:p xmlns:a="http://schemas.openxmlformats.org/drawingml/2006/main">
@@ -26875,13 +29561,46 @@
             <a:r>
               <a:rPr sz="2175" b="0">
                 <a:solidFill>
+                  <a:srgbClr val="A02B93"/>
+                </a:solidFill>
+                <a:latin typeface="Microsoft YaHei"/>
+                <a:ea typeface="Microsoft YaHei"/>
+                <a:cs typeface="Microsoft YaHei"/>
+              </a:rPr>
+              <a:t>export</a:t>
+            </a:r>
+            <a:r>
+              <a:rPr sz="2175" b="0">
+                <a:solidFill>
                   <a:srgbClr val="29263B"/>
                 </a:solidFill>
                 <a:latin typeface="Microsoft YaHei"/>
                 <a:ea typeface="Microsoft YaHei"/>
                 <a:cs typeface="Microsoft YaHei"/>
               </a:rPr>
-              <a:t>export 只设置当前 Bash，-D 选择保存进各自构建缓存。</a:t>
+              <a:t> 只设置当前 Bash，</a:t>
+            </a:r>
+            <a:r>
+              <a:rPr sz="2175" b="0">
+                <a:solidFill>
+                  <a:srgbClr val="B84E00"/>
+                </a:solidFill>
+                <a:latin typeface="Microsoft YaHei"/>
+                <a:ea typeface="Microsoft YaHei"/>
+                <a:cs typeface="Microsoft YaHei"/>
+              </a:rPr>
+              <a:t>-D</a:t>
+            </a:r>
+            <a:r>
+              <a:rPr sz="2175" b="0">
+                <a:solidFill>
+                  <a:srgbClr val="29263B"/>
+                </a:solidFill>
+                <a:latin typeface="Microsoft YaHei"/>
+                <a:ea typeface="Microsoft YaHei"/>
+                <a:cs typeface="Microsoft YaHei"/>
+              </a:rPr>
+              <a:t> 选择保存进各自构建缓存。</a:t>
             </a:r>
           </a:p>
           <a:p xmlns:a="http://schemas.openxmlformats.org/drawingml/2006/main">
@@ -26901,13 +29620,46 @@
             <a:r>
               <a:rPr sz="2175" b="0">
                 <a:solidFill>
+                  <a:srgbClr val="0070C0"/>
+                </a:solidFill>
+                <a:latin typeface="Microsoft YaHei"/>
+                <a:ea typeface="Microsoft YaHei"/>
+                <a:cs typeface="Microsoft YaHei"/>
+              </a:rPr>
+              <a:t>.venv</a:t>
+            </a:r>
+            <a:r>
+              <a:rPr sz="2175" b="0">
+                <a:solidFill>
                   <a:srgbClr val="29263B"/>
                 </a:solidFill>
                 <a:latin typeface="Microsoft YaHei"/>
                 <a:ea typeface="Microsoft YaHei"/>
                 <a:cs typeface="Microsoft YaHei"/>
               </a:rPr>
-              <a:t>.venv 不自动设置 SDK；工程长期输入可用 CMakeUserPresets.json。</a:t>
+              <a:t> 不自动设置 SDK；工程长期输入可用 </a:t>
+            </a:r>
+            <a:r>
+              <a:rPr sz="2175" b="0">
+                <a:solidFill>
+                  <a:srgbClr val="0070C0"/>
+                </a:solidFill>
+                <a:latin typeface="Microsoft YaHei"/>
+                <a:ea typeface="Microsoft YaHei"/>
+                <a:cs typeface="Microsoft YaHei"/>
+              </a:rPr>
+              <a:t>CMakeUserPresets.json</a:t>
+            </a:r>
+            <a:r>
+              <a:rPr sz="2175" b="0">
+                <a:solidFill>
+                  <a:srgbClr val="29263B"/>
+                </a:solidFill>
+                <a:latin typeface="Microsoft YaHei"/>
+                <a:ea typeface="Microsoft YaHei"/>
+                <a:cs typeface="Microsoft YaHei"/>
+              </a:rPr>
+              <a:t>。</a:t>
             </a:r>
           </a:p>
         </p:txBody>
@@ -27205,13 +29957,61 @@
             <a:r>
               <a:rPr sz="1875" b="0">
                 <a:solidFill>
+                  <a:srgbClr val="646173"/>
+                </a:solidFill>
+                <a:latin typeface="Consolas"/>
+                <a:ea typeface="Consolas"/>
+                <a:cs typeface="Consolas"/>
+              </a:rPr>
+              <a:t># Ubuntu 22.04 Bash；手动分支，浏览器已经下载并核对同版 SHA-256。</a:t>
+            </a:r>
+          </a:p>
+          <a:p xmlns:a="http://schemas.openxmlformats.org/drawingml/2006/main">
+            <a:pPr>
+              <a:lnSpc>
+                <a:spcPct val="120000"/>
+              </a:lnSpc>
+              <a:defRPr sz="1875" b="0">
+                <a:solidFill>
                   <a:srgbClr val="005968"/>
                 </a:solidFill>
                 <a:latin typeface="Consolas"/>
                 <a:ea typeface="Consolas"/>
                 <a:cs typeface="Consolas"/>
-              </a:rPr>
-              <a:t># Ubuntu 22.04 Bash；手动分支，浏览器已经下载并核对同版 SHA-256。</a:t>
+              </a:defRPr>
+            </a:pPr>
+            <a:r>
+              <a:rPr sz="1875" b="0">
+                <a:solidFill>
+                  <a:srgbClr val="A02B93"/>
+                </a:solidFill>
+                <a:latin typeface="Consolas"/>
+                <a:ea typeface="Consolas"/>
+                <a:cs typeface="Consolas"/>
+              </a:rPr>
+              <a:t>cd</a:t>
+            </a:r>
+            <a:r>
+              <a:rPr sz="1875" b="0">
+                <a:solidFill>
+                  <a:srgbClr val="29263B"/>
+                </a:solidFill>
+                <a:latin typeface="Consolas"/>
+                <a:ea typeface="Consolas"/>
+                <a:cs typeface="Consolas"/>
+              </a:rPr>
+              <a:t> </a:t>
+            </a:r>
+            <a:r>
+              <a:rPr sz="1875" b="0">
+                <a:solidFill>
+                  <a:srgbClr val="0070C0"/>
+                </a:solidFill>
+                <a:latin typeface="Consolas"/>
+                <a:ea typeface="Consolas"/>
+                <a:cs typeface="Consolas"/>
+              </a:rPr>
+              <a:t>~/Downloads</a:t>
             </a:r>
           </a:p>
           <a:p xmlns:a="http://schemas.openxmlformats.org/drawingml/2006/main">
@@ -27231,13 +30031,138 @@
             <a:r>
               <a:rPr sz="1875" b="0">
                 <a:solidFill>
+                  <a:srgbClr val="646173"/>
+                </a:solidFill>
+                <a:latin typeface="Consolas"/>
+                <a:ea typeface="Consolas"/>
+                <a:cs typeface="Consolas"/>
+              </a:rPr>
+              <a:t># SDK 根由解压生成；已有同名安装时先停止并核对。</a:t>
+            </a:r>
+          </a:p>
+          <a:p xmlns:a="http://schemas.openxmlformats.org/drawingml/2006/main">
+            <a:pPr>
+              <a:lnSpc>
+                <a:spcPct val="120000"/>
+              </a:lnSpc>
+              <a:defRPr sz="1875" b="0">
+                <a:solidFill>
                   <a:srgbClr val="005968"/>
                 </a:solidFill>
                 <a:latin typeface="Consolas"/>
                 <a:ea typeface="Consolas"/>
                 <a:cs typeface="Consolas"/>
-              </a:rPr>
-              <a:t>cd ~/Downloads</a:t>
+              </a:defRPr>
+            </a:pPr>
+            <a:r>
+              <a:rPr sz="1875" b="0">
+                <a:solidFill>
+                  <a:srgbClr val="A02B93"/>
+                </a:solidFill>
+                <a:latin typeface="Consolas"/>
+                <a:ea typeface="Consolas"/>
+                <a:cs typeface="Consolas"/>
+              </a:rPr>
+              <a:t>tar</a:t>
+            </a:r>
+            <a:r>
+              <a:rPr sz="1875" b="0">
+                <a:solidFill>
+                  <a:srgbClr val="29263B"/>
+                </a:solidFill>
+                <a:latin typeface="Consolas"/>
+                <a:ea typeface="Consolas"/>
+                <a:cs typeface="Consolas"/>
+              </a:rPr>
+              <a:t> </a:t>
+            </a:r>
+            <a:r>
+              <a:rPr sz="1875" b="0">
+                <a:solidFill>
+                  <a:srgbClr val="B84E00"/>
+                </a:solidFill>
+                <a:latin typeface="Consolas"/>
+                <a:ea typeface="Consolas"/>
+                <a:cs typeface="Consolas"/>
+              </a:rPr>
+              <a:t>-xf</a:t>
+            </a:r>
+            <a:r>
+              <a:rPr sz="1875" b="0">
+                <a:solidFill>
+                  <a:srgbClr val="29263B"/>
+                </a:solidFill>
+                <a:latin typeface="Consolas"/>
+                <a:ea typeface="Consolas"/>
+                <a:cs typeface="Consolas"/>
+              </a:rPr>
+              <a:t> </a:t>
+            </a:r>
+            <a:r>
+              <a:rPr sz="1875" b="0">
+                <a:solidFill>
+                  <a:srgbClr val="0070C0"/>
+                </a:solidFill>
+                <a:latin typeface="Consolas"/>
+                <a:ea typeface="Consolas"/>
+                <a:cs typeface="Consolas"/>
+              </a:rPr>
+              <a:t>zephyr-sdk-1.0.1_linux-x86_64_minimal.tar.xz</a:t>
+            </a:r>
+            <a:r>
+              <a:rPr sz="1875" b="0">
+                <a:solidFill>
+                  <a:srgbClr val="29263B"/>
+                </a:solidFill>
+                <a:latin typeface="Consolas"/>
+                <a:ea typeface="Consolas"/>
+                <a:cs typeface="Consolas"/>
+              </a:rPr>
+              <a:t> </a:t>
+            </a:r>
+            <a:r>
+              <a:rPr sz="1875" b="0">
+                <a:solidFill>
+                  <a:srgbClr val="B84E00"/>
+                </a:solidFill>
+                <a:latin typeface="Consolas"/>
+                <a:ea typeface="Consolas"/>
+                <a:cs typeface="Consolas"/>
+              </a:rPr>
+              <a:t>-C</a:t>
+            </a:r>
+            <a:r>
+              <a:rPr sz="1875" b="0">
+                <a:solidFill>
+                  <a:srgbClr val="29263B"/>
+                </a:solidFill>
+                <a:latin typeface="Consolas"/>
+                <a:ea typeface="Consolas"/>
+                <a:cs typeface="Consolas"/>
+              </a:rPr>
+              <a:t> "</a:t>
+            </a:r>
+            <a:r>
+              <a:rPr sz="1875" b="0">
+                <a:solidFill>
+                  <a:srgbClr val="B84E00"/>
+                </a:solidFill>
+                <a:latin typeface="Consolas"/>
+                <a:ea typeface="Consolas"/>
+                <a:cs typeface="Consolas"/>
+              </a:rPr>
+              <a:t>$HOME</a:t>
+            </a:r>
+            <a:r>
+              <a:rPr sz="1875" b="0">
+                <a:solidFill>
+                  <a:srgbClr val="29263B"/>
+                </a:solidFill>
+                <a:latin typeface="Consolas"/>
+                <a:ea typeface="Consolas"/>
+                <a:cs typeface="Consolas"/>
+              </a:rPr>
+              <a:t>"</a:t>
             </a:r>
           </a:p>
           <a:p xmlns:a="http://schemas.openxmlformats.org/drawingml/2006/main">
@@ -27257,13 +30182,61 @@
             <a:r>
               <a:rPr sz="1875" b="0">
                 <a:solidFill>
+                  <a:srgbClr val="A02B93"/>
+                </a:solidFill>
+                <a:latin typeface="Consolas"/>
+                <a:ea typeface="Consolas"/>
+                <a:cs typeface="Consolas"/>
+              </a:rPr>
+              <a:t>cd</a:t>
+            </a:r>
+            <a:r>
+              <a:rPr sz="1875" b="0">
+                <a:solidFill>
+                  <a:srgbClr val="29263B"/>
+                </a:solidFill>
+                <a:latin typeface="Consolas"/>
+                <a:ea typeface="Consolas"/>
+                <a:cs typeface="Consolas"/>
+              </a:rPr>
+              <a:t> </a:t>
+            </a:r>
+            <a:r>
+              <a:rPr sz="1875" b="0">
+                <a:solidFill>
+                  <a:srgbClr val="0070C0"/>
+                </a:solidFill>
+                <a:latin typeface="Consolas"/>
+                <a:ea typeface="Consolas"/>
+                <a:cs typeface="Consolas"/>
+              </a:rPr>
+              <a:t>~/zephyr-sdk-1.0.1</a:t>
+            </a:r>
+          </a:p>
+          <a:p xmlns:a="http://schemas.openxmlformats.org/drawingml/2006/main">
+            <a:pPr>
+              <a:lnSpc>
+                <a:spcPct val="120000"/>
+              </a:lnSpc>
+              <a:defRPr sz="1875" b="0">
+                <a:solidFill>
                   <a:srgbClr val="005968"/>
                 </a:solidFill>
                 <a:latin typeface="Consolas"/>
                 <a:ea typeface="Consolas"/>
                 <a:cs typeface="Consolas"/>
-              </a:rPr>
-              <a:t># SDK 根由解压生成；已有同名安装时先停止并核对。</a:t>
+              </a:defRPr>
+            </a:pPr>
+            <a:r>
+              <a:rPr sz="1875" b="0">
+                <a:solidFill>
+                  <a:srgbClr val="646173"/>
+                </a:solidFill>
+                <a:latin typeface="Consolas"/>
+                <a:ea typeface="Consolas"/>
+                <a:cs typeface="Consolas"/>
+              </a:rPr>
+              <a:t># 官方 setup.sh：-t 安装 ARM；-c 把 SDK 路径保存到当前 Linux 用户的包索引。</a:t>
             </a:r>
           </a:p>
           <a:p xmlns:a="http://schemas.openxmlformats.org/drawingml/2006/main">
@@ -27283,117 +30256,105 @@
             <a:r>
               <a:rPr sz="1875" b="0">
                 <a:solidFill>
+                  <a:srgbClr val="0070C0"/>
+                </a:solidFill>
+                <a:latin typeface="Consolas"/>
+                <a:ea typeface="Consolas"/>
+                <a:cs typeface="Consolas"/>
+              </a:rPr>
+              <a:t>./setup.sh</a:t>
+            </a:r>
+            <a:r>
+              <a:rPr sz="1875" b="0">
+                <a:solidFill>
+                  <a:srgbClr val="29263B"/>
+                </a:solidFill>
+                <a:latin typeface="Consolas"/>
+                <a:ea typeface="Consolas"/>
+                <a:cs typeface="Consolas"/>
+              </a:rPr>
+              <a:t> </a:t>
+            </a:r>
+            <a:r>
+              <a:rPr sz="1875" b="0">
+                <a:solidFill>
+                  <a:srgbClr val="B84E00"/>
+                </a:solidFill>
+                <a:latin typeface="Consolas"/>
+                <a:ea typeface="Consolas"/>
+                <a:cs typeface="Consolas"/>
+              </a:rPr>
+              <a:t>-t</a:t>
+            </a:r>
+            <a:r>
+              <a:rPr sz="1875" b="0">
+                <a:solidFill>
+                  <a:srgbClr val="29263B"/>
+                </a:solidFill>
+                <a:latin typeface="Consolas"/>
+                <a:ea typeface="Consolas"/>
+                <a:cs typeface="Consolas"/>
+              </a:rPr>
+              <a:t> arm-zephyr-eabi </a:t>
+            </a:r>
+            <a:r>
+              <a:rPr sz="1875" b="0">
+                <a:solidFill>
+                  <a:srgbClr val="B84E00"/>
+                </a:solidFill>
+                <a:latin typeface="Consolas"/>
+                <a:ea typeface="Consolas"/>
+                <a:cs typeface="Consolas"/>
+              </a:rPr>
+              <a:t>-c</a:t>
+            </a:r>
+          </a:p>
+          <a:p xmlns:a="http://schemas.openxmlformats.org/drawingml/2006/main">
+            <a:pPr>
+              <a:lnSpc>
+                <a:spcPct val="120000"/>
+              </a:lnSpc>
+              <a:defRPr sz="1875" b="0">
+                <a:solidFill>
                   <a:srgbClr val="005968"/>
                 </a:solidFill>
                 <a:latin typeface="Consolas"/>
                 <a:ea typeface="Consolas"/>
                 <a:cs typeface="Consolas"/>
-              </a:rPr>
-              <a:t>tar -xf zephyr-sdk-1.0.1_linux-x86_64_minimal.tar.xz -C "$HOME"</a:t>
-            </a:r>
-          </a:p>
-          <a:p xmlns:a="http://schemas.openxmlformats.org/drawingml/2006/main">
-            <a:pPr>
-              <a:lnSpc>
-                <a:spcPct val="120000"/>
-              </a:lnSpc>
-              <a:defRPr sz="1875" b="0">
-                <a:solidFill>
-                  <a:srgbClr val="005968"/>
-                </a:solidFill>
-                <a:latin typeface="Consolas"/>
-                <a:ea typeface="Consolas"/>
-                <a:cs typeface="Consolas"/>
               </a:defRPr>
             </a:pPr>
             <a:r>
               <a:rPr sz="1875" b="0">
                 <a:solidFill>
-                  <a:srgbClr val="005968"/>
-                </a:solidFill>
-                <a:latin typeface="Consolas"/>
-                <a:ea typeface="Consolas"/>
-                <a:cs typeface="Consolas"/>
-              </a:rPr>
-              <a:t>cd ~/zephyr-sdk-1.0.1</a:t>
-            </a:r>
-          </a:p>
-          <a:p xmlns:a="http://schemas.openxmlformats.org/drawingml/2006/main">
-            <a:pPr>
-              <a:lnSpc>
-                <a:spcPct val="120000"/>
-              </a:lnSpc>
-              <a:defRPr sz="1875" b="0">
-                <a:solidFill>
-                  <a:srgbClr val="005968"/>
-                </a:solidFill>
-                <a:latin typeface="Consolas"/>
-                <a:ea typeface="Consolas"/>
-                <a:cs typeface="Consolas"/>
-              </a:defRPr>
-            </a:pPr>
+                  <a:srgbClr val="0070C0"/>
+                </a:solidFill>
+                <a:latin typeface="Consolas"/>
+                <a:ea typeface="Consolas"/>
+                <a:cs typeface="Consolas"/>
+              </a:rPr>
+              <a:t>./gnu/arm-zephyr-eabi/bin/arm-zephyr-eabi-gcc</a:t>
+            </a:r>
             <a:r>
               <a:rPr sz="1875" b="0">
                 <a:solidFill>
-                  <a:srgbClr val="005968"/>
-                </a:solidFill>
-                <a:latin typeface="Consolas"/>
-                <a:ea typeface="Consolas"/>
-                <a:cs typeface="Consolas"/>
-              </a:rPr>
-              <a:t># 官方 setup.sh：-t 安装 ARM；-c 把 SDK 路径保存到当前 Linux 用户的包索引。</a:t>
-            </a:r>
-          </a:p>
-          <a:p xmlns:a="http://schemas.openxmlformats.org/drawingml/2006/main">
-            <a:pPr>
-              <a:lnSpc>
-                <a:spcPct val="120000"/>
-              </a:lnSpc>
-              <a:defRPr sz="1875" b="0">
-                <a:solidFill>
-                  <a:srgbClr val="005968"/>
-                </a:solidFill>
-                <a:latin typeface="Consolas"/>
-                <a:ea typeface="Consolas"/>
-                <a:cs typeface="Consolas"/>
-              </a:defRPr>
-            </a:pPr>
+                  <a:srgbClr val="29263B"/>
+                </a:solidFill>
+                <a:latin typeface="Consolas"/>
+                <a:ea typeface="Consolas"/>
+                <a:cs typeface="Consolas"/>
+              </a:rPr>
+              <a:t> </a:t>
+            </a:r>
             <a:r>
               <a:rPr sz="1875" b="0">
                 <a:solidFill>
-                  <a:srgbClr val="005968"/>
-                </a:solidFill>
-                <a:latin typeface="Consolas"/>
-                <a:ea typeface="Consolas"/>
-                <a:cs typeface="Consolas"/>
-              </a:rPr>
-              <a:t>./setup.sh -t arm-zephyr-eabi -c</a:t>
-            </a:r>
-          </a:p>
-          <a:p xmlns:a="http://schemas.openxmlformats.org/drawingml/2006/main">
-            <a:pPr>
-              <a:lnSpc>
-                <a:spcPct val="120000"/>
-              </a:lnSpc>
-              <a:defRPr sz="1875" b="0">
-                <a:solidFill>
-                  <a:srgbClr val="005968"/>
-                </a:solidFill>
-                <a:latin typeface="Consolas"/>
-                <a:ea typeface="Consolas"/>
-                <a:cs typeface="Consolas"/>
-              </a:defRPr>
-            </a:pPr>
-            <a:r>
-              <a:rPr sz="1875" b="0">
-                <a:solidFill>
-                  <a:srgbClr val="005968"/>
-                </a:solidFill>
-                <a:latin typeface="Consolas"/>
-                <a:ea typeface="Consolas"/>
-                <a:cs typeface="Consolas"/>
-              </a:rPr>
-              <a:t>./gnu/arm-zephyr-eabi/bin/arm-zephyr-eabi-gcc --version</a:t>
+                  <a:srgbClr val="B84E00"/>
+                </a:solidFill>
+                <a:latin typeface="Consolas"/>
+                <a:ea typeface="Consolas"/>
+                <a:cs typeface="Consolas"/>
+              </a:rPr>
+              <a:t>--version</a:t>
             </a:r>
           </a:p>
         </p:txBody>
@@ -27458,13 +30419,46 @@
             <a:r>
               <a:rPr sz="1875" b="0">
                 <a:solidFill>
+                  <a:srgbClr val="B84E00"/>
+                </a:solidFill>
+                <a:latin typeface="Microsoft YaHei"/>
+                <a:ea typeface="Microsoft YaHei"/>
+                <a:cs typeface="Microsoft YaHei"/>
+              </a:rPr>
+              <a:t>-t</a:t>
+            </a:r>
+            <a:r>
+              <a:rPr sz="1875" b="0">
+                <a:solidFill>
                   <a:srgbClr val="29263B"/>
                 </a:solidFill>
                 <a:latin typeface="Microsoft YaHei"/>
                 <a:ea typeface="Microsoft YaHei"/>
                 <a:cs typeface="Microsoft YaHei"/>
               </a:rPr>
-              <a:t>-t 安装工具链；-c 保存当前 Linux 用户的 SDK 查找地址。</a:t>
+              <a:t> 安装工具链；</a:t>
+            </a:r>
+            <a:r>
+              <a:rPr sz="1875" b="0">
+                <a:solidFill>
+                  <a:srgbClr val="B84E00"/>
+                </a:solidFill>
+                <a:latin typeface="Microsoft YaHei"/>
+                <a:ea typeface="Microsoft YaHei"/>
+                <a:cs typeface="Microsoft YaHei"/>
+              </a:rPr>
+              <a:t>-c</a:t>
+            </a:r>
+            <a:r>
+              <a:rPr sz="1875" b="0">
+                <a:solidFill>
+                  <a:srgbClr val="29263B"/>
+                </a:solidFill>
+                <a:latin typeface="Microsoft YaHei"/>
+                <a:ea typeface="Microsoft YaHei"/>
+                <a:cs typeface="Microsoft YaHei"/>
+              </a:rPr>
+              <a:t> 保存当前 Linux 用户的 SDK 查找地址。</a:t>
             </a:r>
           </a:p>
           <a:p xmlns:a="http://schemas.openxmlformats.org/drawingml/2006/main">
@@ -27863,7 +30857,51 @@
                 <a:ea typeface="Microsoft YaHei"/>
                 <a:cs typeface="Microsoft YaHei"/>
               </a:rPr>
-              <a:t>GNU 包已有目标工具，Minimal 通过 setup.sh -t 补齐。</a:t>
+              <a:t>GNU 包已有目标工具，Minimal 通过 </a:t>
+            </a:r>
+            <a:r>
+              <a:rPr sz="2175" b="0">
+                <a:solidFill>
+                  <a:srgbClr val="0070C0"/>
+                </a:solidFill>
+                <a:latin typeface="Microsoft YaHei"/>
+                <a:ea typeface="Microsoft YaHei"/>
+                <a:cs typeface="Microsoft YaHei"/>
+              </a:rPr>
+              <a:t>setup.sh</a:t>
+            </a:r>
+            <a:r>
+              <a:rPr sz="2175" b="0">
+                <a:solidFill>
+                  <a:srgbClr val="29263B"/>
+                </a:solidFill>
+                <a:latin typeface="Microsoft YaHei"/>
+                <a:ea typeface="Microsoft YaHei"/>
+                <a:cs typeface="Microsoft YaHei"/>
+              </a:rPr>
+              <a:t> </a:t>
+            </a:r>
+            <a:r>
+              <a:rPr sz="2175" b="0">
+                <a:solidFill>
+                  <a:srgbClr val="B84E00"/>
+                </a:solidFill>
+                <a:latin typeface="Microsoft YaHei"/>
+                <a:ea typeface="Microsoft YaHei"/>
+                <a:cs typeface="Microsoft YaHei"/>
+              </a:rPr>
+              <a:t>-t</a:t>
+            </a:r>
+            <a:r>
+              <a:rPr sz="2175" b="0">
+                <a:solidFill>
+                  <a:srgbClr val="29263B"/>
+                </a:solidFill>
+                <a:latin typeface="Microsoft YaHei"/>
+                <a:ea typeface="Microsoft YaHei"/>
+                <a:cs typeface="Microsoft YaHei"/>
+              </a:rPr>
+              <a:t> 补齐。</a:t>
             </a:r>
           </a:p>
           <a:p xmlns:a="http://schemas.openxmlformats.org/drawingml/2006/main">

--- a/learning/P01_zephyr_make_project/slides/P001_官方环境安装与源码准备_Linux.pptx
+++ b/learning/P01_zephyr_make_project/slides/P001_官方环境安装与源码准备_Linux.pptx
@@ -12,27 +12,29 @@
     <p:notesMasterId xmlns:r="http://schemas.openxmlformats.org/officeDocument/2006/relationships" r:id="R9b9f2624dfec4b0a"/>
   </p:notesMasterIdLst>
   <p:sldIdLst>
-    <p:sldId id="256" r:id="rIdSdkScopePage1"/>
-    <p:sldId id="257" r:id="rIdSdkScopePage2"/>
-    <p:sldId id="258" r:id="rIdSdkScopePage3"/>
-    <p:sldId id="259" r:id="rIdSdkScopePage4"/>
-    <p:sldId id="260" r:id="rIdSdkScopePage5"/>
-    <p:sldId id="261" r:id="rIdSdkScopePage6"/>
-    <p:sldId id="262" r:id="rIdSdkScopePage7"/>
-    <p:sldId id="263" r:id="rIdSdkScopePage8"/>
-    <p:sldId id="264" r:id="rIdSdkScopePage9"/>
-    <p:sldId id="265" r:id="rIdSdkScopePage10"/>
-    <p:sldId id="266" r:id="rIdSdkScopePage11"/>
-    <p:sldId id="267" r:id="rIdSdkScopePage12"/>
-    <p:sldId id="268" r:id="rIdSdkScopePage13"/>
-    <p:sldId id="269" r:id="rIdSdkScopePage14"/>
-    <p:sldId id="270" r:id="rIdSdkScopePage15"/>
-    <p:sldId id="271" r:id="rIdSdkScopePage16"/>
-    <p:sldId id="272" r:id="rIdSdkScopePage17"/>
-    <p:sldId id="273" r:id="rIdSdkScopePage18"/>
-    <p:sldId id="274" r:id="rIdSdkScopePage19"/>
-    <p:sldId id="275" r:id="rIdSdkScopePage20"/>
-    <p:sldId id="276" r:id="rIdSdkScopePage21"/>
+    <p:sldId id="801" r:id="rIdGuideOrder1"/>
+    <p:sldId id="802" r:id="rIdGuideOrder2"/>
+    <p:sldId id="803" r:id="rIdGuideOrder3"/>
+    <p:sldId id="804" r:id="rIdGuideOrder4"/>
+    <p:sldId id="805" r:id="rIdGuideOrder5"/>
+    <p:sldId id="806" r:id="rIdGuideOrder6"/>
+    <p:sldId id="807" r:id="rIdGuideOrder7"/>
+    <p:sldId id="808" r:id="rIdGuideOrder8"/>
+    <p:sldId id="809" r:id="rIdGuideOrder9"/>
+    <p:sldId id="810" r:id="rIdGuideOrder10"/>
+    <p:sldId id="811" r:id="rIdGuideOrder11"/>
+    <p:sldId id="812" r:id="rIdGuideOrder12"/>
+    <p:sldId id="813" r:id="rIdGuideOrder13"/>
+    <p:sldId id="814" r:id="rIdGuideOrder14"/>
+    <p:sldId id="815" r:id="rIdGuideOrder15"/>
+    <p:sldId id="816" r:id="rIdGuideOrder16"/>
+    <p:sldId id="817" r:id="rIdGuideOrder17"/>
+    <p:sldId id="818" r:id="rIdGuideOrder18"/>
+    <p:sldId id="819" r:id="rIdGuideOrder19"/>
+    <p:sldId id="820" r:id="rIdGuideOrder20"/>
+    <p:sldId id="821" r:id="rIdGuideOrder21"/>
+    <p:sldId id="822" r:id="rIdGuideOrder22"/>
+    <p:sldId id="823" r:id="rIdGuideOrder23"/>
   </p:sldIdLst>
   <p:sldSz cx="12192000" cy="6858000"/>
   <p:notesSz cx="6858000" cy="9144000"/>
@@ -79,7 +81,7 @@
           <a:lstStyle xmlns:a="http://schemas.openxmlformats.org/drawingml/2006/main"/>
           <a:p xmlns:a="http://schemas.openxmlformats.org/drawingml/2006/main">
             <a:r>
-              <a:t>对应正文：P001_Linux，本章只准备环境，编译仍由 P011 解释</a:t>
+              <a:t>对应正文：P001_Linux，先准备 hello_world + mps2/an386 的输入，再进入工程与构建</a:t>
             </a:r>
           </a:p>
           <a:p xmlns:a="http://schemas.openxmlformats.org/drawingml/2006/main">
@@ -94,7 +96,7 @@
           </a:p>
           <a:p xmlns:a="http://schemas.openxmlformats.org/drawingml/2006/main">
             <a:r>
-              <a:t>west 建工作区、取模块；SDK 提供目标编译工具。</a:t>
+              <a:t>west 建工作区并按清单取 CMSIS_6；SDK 提供 ARM 编译工具。</a:t>
             </a:r>
           </a:p>
           <a:p xmlns:a="http://schemas.openxmlformats.org/drawingml/2006/main">
@@ -4786,6 +4788,191 @@
     </a:fmtScheme>
   </a:themeElements>
 </a:theme>
+</file>
+
+<file path=ppt/notesSlides/guide3.xml><?xml version="1.0" encoding="utf-8"?>
+<p:notes xmlns:p="http://schemas.openxmlformats.org/presentationml/2006/main">
+  <p:cSld>
+    <p:spTree>
+      <p:nvGrpSpPr>
+        <p:cNvPr id="1" name=""/>
+        <p:cNvGrpSpPr/>
+        <p:nvPr/>
+      </p:nvGrpSpPr>
+      <p:grpSpPr>
+        <a:xfrm xmlns:a="http://schemas.openxmlformats.org/drawingml/2006/main"/>
+      </p:grpSpPr>
+      <p:sp>
+        <p:nvSpPr>
+          <p:cNvPr id="2" name="Slide Image Placeholder 1"/>
+          <p:cNvSpPr>
+            <a:spLocks xmlns:a="http://schemas.openxmlformats.org/drawingml/2006/main" noGrp="1"/>
+          </p:cNvSpPr>
+          <p:nvPr>
+            <p:ph type="sldImg" idx="0"/>
+          </p:nvPr>
+        </p:nvSpPr>
+        <p:spPr/>
+      </p:sp>
+      <p:sp>
+        <p:nvSpPr>
+          <p:cNvPr id="3" name="Notes Placeholder 2"/>
+          <p:cNvSpPr>
+            <a:spLocks xmlns:a="http://schemas.openxmlformats.org/drawingml/2006/main" noGrp="1"/>
+          </p:cNvSpPr>
+          <p:nvPr>
+            <p:ph type="body" idx="1"/>
+          </p:nvPr>
+        </p:nvSpPr>
+        <p:spPr/>
+        <p:txBody>
+          <a:bodyPr xmlns:a="http://schemas.openxmlformats.org/drawingml/2006/main"/>
+          <a:lstStyle xmlns:a="http://schemas.openxmlformats.org/drawingml/2006/main"/>
+          <ns0:p xmlns:ns0="http://schemas.openxmlformats.org/drawingml/2006/main">
+            <ns0:r>
+              <ns0:t>对应配套正文 P001 Linux 开篇与 1.4。</ns0:t>
+            </ns0:r>
+          </ns0:p>
+          <ns1:p xmlns:ns1="http://schemas.openxmlformats.org/drawingml/2006/main">
+            <ns1:r>
+              <ns1:t>从 Ubuntu 22.04 出发，先为 hello_world + mps2/an386 准备环境；换到 HC32 时再补所需芯片支持，应用保持可比较。</ns1:t>
+            </ns1:r>
+          </ns1:p>
+          <ns2:p xmlns:ns2="http://schemas.openxmlformats.org/drawingml/2006/main">
+            <ns2:r>
+              <ns2:t>hello_world 应用由 CMakeLists.txt、prj.conf 与 main.c 组成；mps2/an386 是 Arm MPS2 FPGA 平台的 Cortex-M4F 目标。同板换应用或同应用换板时，使用各自的构建目录。</ns2:t>
+            </ns2:r>
+          </ns2:p>
+          <ns3:p xmlns:ns3="http://schemas.openxmlformats.org/drawingml/2006/main">
+            <ns3:r>
+              <ns3:t>主机工具在 Linux 执行，ARM 工具链生成目标指令。~/zephyrproject 是 west 工作区，zephyr 子目录才是主源码，.venv 放在工作区父层。</ns3:t>
+            </ns3:r>
+          </ns3:p>
+          <ns4:p xmlns:ns4="http://schemas.openxmlformats.org/drawingml/2006/main">
+            <ns4:r>
+              <ns4:t>MPS2 的板、SoC 与架构/驱动已在主仓；CMSIS Core 按当前清单取得。本轮不先下载华大 HAL。</ns4:t>
+            </ns4:r>
+          </ns4:p>
+          <ns5:p xmlns:ns5="http://schemas.openxmlformats.org/drawingml/2006/main">
+            <ns5:r>
+              <ns5:t>P001 Linux 开篇与 1.4</ns5:t>
+            </ns5:r>
+          </ns5:p>
+        </p:txBody>
+      </p:sp>
+      <p:sp>
+        <p:nvSpPr>
+          <p:cNvPr id="4" name="Slide Number Placeholder 3"/>
+          <p:cNvSpPr>
+            <a:spLocks xmlns:a="http://schemas.openxmlformats.org/drawingml/2006/main" noGrp="1"/>
+          </p:cNvSpPr>
+          <p:nvPr>
+            <p:ph type="sldNum" idx="5"/>
+          </p:nvPr>
+        </p:nvSpPr>
+        <p:spPr/>
+        <p:txBody>
+          <a:bodyPr xmlns:a="http://schemas.openxmlformats.org/drawingml/2006/main"/>
+          <a:lstStyle xmlns:a="http://schemas.openxmlformats.org/drawingml/2006/main"/>
+          <a:p xmlns:a="http://schemas.openxmlformats.org/drawingml/2006/main"/>
+        </p:txBody>
+      </p:sp>
+    </p:spTree>
+  </p:cSld>
+  <p:clrMapOvr>
+    <a:masterClrMapping xmlns:a="http://schemas.openxmlformats.org/drawingml/2006/main"/>
+  </p:clrMapOvr>
+</p:notes>
+</file>
+
+<file path=ppt/notesSlides/guide4.xml><?xml version="1.0" encoding="utf-8"?>
+<p:notes xmlns:p="http://schemas.openxmlformats.org/presentationml/2006/main">
+  <p:cSld>
+    <p:spTree>
+      <p:nvGrpSpPr>
+        <p:cNvPr id="1" name=""/>
+        <p:cNvGrpSpPr/>
+        <p:nvPr/>
+      </p:nvGrpSpPr>
+      <p:grpSpPr>
+        <a:xfrm xmlns:a="http://schemas.openxmlformats.org/drawingml/2006/main"/>
+      </p:grpSpPr>
+      <p:sp>
+        <p:nvSpPr>
+          <p:cNvPr id="2" name="Slide Image Placeholder 1"/>
+          <p:cNvSpPr>
+            <a:spLocks xmlns:a="http://schemas.openxmlformats.org/drawingml/2006/main" noGrp="1"/>
+          </p:cNvSpPr>
+          <p:nvPr>
+            <p:ph type="sldImg" idx="0"/>
+          </p:nvPr>
+        </p:nvSpPr>
+        <p:spPr/>
+      </p:sp>
+      <p:sp>
+        <p:nvSpPr>
+          <p:cNvPr id="3" name="Notes Placeholder 2"/>
+          <p:cNvSpPr>
+            <a:spLocks xmlns:a="http://schemas.openxmlformats.org/drawingml/2006/main" noGrp="1"/>
+          </p:cNvSpPr>
+          <p:nvPr>
+            <p:ph type="body" idx="1"/>
+          </p:nvPr>
+        </p:nvSpPr>
+        <p:spPr/>
+        <p:txBody>
+          <a:bodyPr xmlns:a="http://schemas.openxmlformats.org/drawingml/2006/main"/>
+          <a:lstStyle xmlns:a="http://schemas.openxmlformats.org/drawingml/2006/main"/>
+          <ns0:p xmlns:ns0="http://schemas.openxmlformats.org/drawingml/2006/main">
+            <ns0:r>
+              <ns0:t>对应配套正文 P001 Linux 1.4。</ns0:t>
+            </ns0:r>
+          </ns0:p>
+          <ns1:p xmlns:ns1="http://schemas.openxmlformats.org/drawingml/2006/main">
+            <ns1:r>
+              <ns1:t>AN386 的 Cortex-M4 配置需要 CMSIS Core；west list cmsis_6 显示当前版本锁定的仓库、提交与落点，west update cmsis_6 才执行获取。</ns1:t>
+            </ns1:r>
+          </ns1:p>
+          <ns2:p xmlns:ns2="http://schemas.openxmlformats.org/drawingml/2006/main">
+            <ns2:r>
+              <ns2:t>MPS2 的硬件支持由 Zephyr 内置的板、SoC、架构和驱动承担。Arm Keil 另外提供 BSP/Pack，但这条 Zephyr 构建路线不把它作为输入。</ns2:t>
+            </ns2:r>
+          </ns2:p>
+          <ns3:p xmlns:ns3="http://schemas.openxmlformats.org/drawingml/2006/main">
+            <ns3:r>
+              <ns3:t>清单不是 BOARD 的自动依赖解析结果。换板或增加功能时，沿设备节点、驱动与 CMake 条件继续查；全量下载并不能替代这次判断。</ns3:t>
+            </ns3:r>
+          </ns3:p>
+          <ns4:p xmlns:ns4="http://schemas.openxmlformats.org/drawingml/2006/main">
+            <ns4:r>
+              <ns4:t>P001 Linux 1.4；P005 5.3.5</ns4:t>
+            </ns4:r>
+          </ns4:p>
+        </p:txBody>
+      </p:sp>
+      <p:sp>
+        <p:nvSpPr>
+          <p:cNvPr id="4" name="Slide Number Placeholder 3"/>
+          <p:cNvSpPr>
+            <a:spLocks xmlns:a="http://schemas.openxmlformats.org/drawingml/2006/main" noGrp="1"/>
+          </p:cNvSpPr>
+          <p:nvPr>
+            <p:ph type="sldNum" idx="5"/>
+          </p:nvPr>
+        </p:nvSpPr>
+        <p:spPr/>
+        <p:txBody>
+          <a:bodyPr xmlns:a="http://schemas.openxmlformats.org/drawingml/2006/main"/>
+          <a:lstStyle xmlns:a="http://schemas.openxmlformats.org/drawingml/2006/main"/>
+          <a:p xmlns:a="http://schemas.openxmlformats.org/drawingml/2006/main"/>
+        </p:txBody>
+      </p:sp>
+    </p:spTree>
+  </p:cSld>
+  <p:clrMapOvr>
+    <a:masterClrMapping xmlns:a="http://schemas.openxmlformats.org/drawingml/2006/main"/>
+  </p:clrMapOvr>
+</p:notes>
 </file>
 
 <file path=ppt/notesSlides/notesSlide1.xml><?xml version="1.0" encoding="utf-8"?>
@@ -13815,7 +14002,7 @@
                 <a:ea typeface="Microsoft YaHei"/>
                 <a:cs typeface="Microsoft YaHei"/>
               </a:rPr>
-              <a:t>本章只准备环境，编译仍由 P011 解释</a:t>
+              <a:t>先准备 hello_world + mps2/an386 的输入，再进入工程与构建</a:t>
             </a:r>
           </a:p>
         </p:txBody>
@@ -13960,7 +14147,7 @@
                 <a:ea typeface="Microsoft YaHei"/>
                 <a:cs typeface="Microsoft YaHei"/>
               </a:rPr>
-              <a:t> 建工作区、取模块；SDK 提供目标编译工具。</a:t>
+              <a:t> 建工作区并按清单取 CMSIS_6；SDK 提供 ARM 编译工具。</a:t>
             </a:r>
           </a:p>
         </p:txBody>
@@ -14047,7 +14234,7 @@
                 <a:cs typeface="Microsoft YaHei"/>
               </a:defRPr>
             </a:pPr>
-            <a:fld id="{3DA64D4F-D5A5-499D-9F28-280778CE8D3B}" type="slidenum">
+            <a:fld id="{B0DC45A6-5B60-44B7-BA24-042E85B76940}" type="slidenum">
               <a:rPr sz="1350">
                 <a:solidFill>
                   <a:srgbClr val="646173"/>
@@ -15803,7 +15990,7 @@
                 <a:cs typeface="Microsoft YaHei"/>
               </a:defRPr>
             </a:pPr>
-            <a:fld id="{8E3D7A61-4C4E-4E07-A019-45C32A607E27}" type="slidenum">
+            <a:fld id="{AFAE35E0-17BD-495A-BBC9-CDECF97193DE}" type="slidenum">
               <a:rPr sz="1350">
                 <a:solidFill>
                   <a:srgbClr val="646173"/>
@@ -15812,7 +15999,7 @@
                 <a:ea typeface="Microsoft YaHei"/>
                 <a:cs typeface="Microsoft YaHei"/>
               </a:rPr>
-              <a:t>13</a:t>
+              <a:t>14</a:t>
             </a:fld>
           </a:p>
         </p:txBody>
@@ -15909,7 +16096,7 @@
                 <a:ea typeface="Microsoft YaHei"/>
                 <a:cs typeface="Microsoft YaHei"/>
               </a:rPr>
-              <a:t>取得官方源码及其配套模块</a:t>
+              <a:t>先取得主仓库，确认要使用的清单</a:t>
             </a:r>
           </a:p>
         </p:txBody>
@@ -16048,7 +16235,7 @@
                 <a:ea typeface="Consolas"/>
                 <a:cs typeface="Consolas"/>
               </a:rPr>
-              <a:t># 终端：Linux Bash；上一步 .venv 已激活。</a:t>
+              <a:t># Linux Bash；venv 已激活；仅新建工作区时执行 init。</a:t>
             </a:r>
           </a:p>
           <a:p xmlns:a="http://schemas.openxmlformats.org/drawingml/2006/main">
@@ -16085,18 +16272,33 @@
                 <a:ea typeface="Consolas"/>
                 <a:cs typeface="Consolas"/>
               </a:rPr>
-              <a:t> init </a:t>
-            </a:r>
+              <a:t> init -m https://github.com/zephyrproject-rtos/zephyr ~/zephyrproject</a:t>
+            </a:r>
+          </a:p>
+          <a:p xmlns:a="http://schemas.openxmlformats.org/drawingml/2006/main">
+            <a:pPr>
+              <a:lnSpc>
+                <a:spcPct val="120000"/>
+              </a:lnSpc>
+              <a:defRPr sz="1875" b="0">
+                <a:solidFill>
+                  <a:srgbClr val="005968"/>
+                </a:solidFill>
+                <a:latin typeface="Consolas"/>
+                <a:ea typeface="Consolas"/>
+                <a:cs typeface="Consolas"/>
+              </a:defRPr>
+            </a:pPr>
             <a:r>
               <a:rPr sz="1875" b="0">
                 <a:solidFill>
-                  <a:srgbClr val="B84E00"/>
-                </a:solidFill>
-                <a:latin typeface="Consolas"/>
-                <a:ea typeface="Consolas"/>
-                <a:cs typeface="Consolas"/>
-              </a:rPr>
-              <a:t>-m</a:t>
+                  <a:srgbClr val="A02B93"/>
+                </a:solidFill>
+                <a:latin typeface="Consolas"/>
+                <a:ea typeface="Consolas"/>
+                <a:cs typeface="Consolas"/>
+              </a:rPr>
+              <a:t>cd</a:t>
             </a:r>
             <a:r>
               <a:rPr sz="1875" b="0">
@@ -16107,18 +16309,33 @@
                 <a:ea typeface="Consolas"/>
                 <a:cs typeface="Consolas"/>
               </a:rPr>
-              <a:t> </a:t>
-            </a:r>
+              <a:t> ~/zephyrproject/zephyr</a:t>
+            </a:r>
+          </a:p>
+          <a:p xmlns:a="http://schemas.openxmlformats.org/drawingml/2006/main">
+            <a:pPr>
+              <a:lnSpc>
+                <a:spcPct val="120000"/>
+              </a:lnSpc>
+              <a:defRPr sz="1875" b="0">
+                <a:solidFill>
+                  <a:srgbClr val="005968"/>
+                </a:solidFill>
+                <a:latin typeface="Consolas"/>
+                <a:ea typeface="Consolas"/>
+                <a:cs typeface="Consolas"/>
+              </a:defRPr>
+            </a:pPr>
             <a:r>
               <a:rPr sz="1875" b="0">
                 <a:solidFill>
-                  <a:srgbClr val="0070C0"/>
-                </a:solidFill>
-                <a:latin typeface="Consolas"/>
-                <a:ea typeface="Consolas"/>
-                <a:cs typeface="Consolas"/>
-              </a:rPr>
-              <a:t>https://github.com/zephyrproject-rtos/zephyr</a:t>
+                  <a:srgbClr val="A02B93"/>
+                </a:solidFill>
+                <a:latin typeface="Consolas"/>
+                <a:ea typeface="Consolas"/>
+                <a:cs typeface="Consolas"/>
+              </a:rPr>
+              <a:t>git</a:t>
             </a:r>
             <a:r>
               <a:rPr sz="1875" b="0">
@@ -16129,18 +16346,33 @@
                 <a:ea typeface="Consolas"/>
                 <a:cs typeface="Consolas"/>
               </a:rPr>
-              <a:t> </a:t>
-            </a:r>
+              <a:t> rev-parse HEAD</a:t>
+            </a:r>
+          </a:p>
+          <a:p xmlns:a="http://schemas.openxmlformats.org/drawingml/2006/main">
+            <a:pPr>
+              <a:lnSpc>
+                <a:spcPct val="120000"/>
+              </a:lnSpc>
+              <a:defRPr sz="1875" b="0">
+                <a:solidFill>
+                  <a:srgbClr val="005968"/>
+                </a:solidFill>
+                <a:latin typeface="Consolas"/>
+                <a:ea typeface="Consolas"/>
+                <a:cs typeface="Consolas"/>
+              </a:defRPr>
+            </a:pPr>
             <a:r>
               <a:rPr sz="1875" b="0">
                 <a:solidFill>
-                  <a:srgbClr val="0070C0"/>
-                </a:solidFill>
-                <a:latin typeface="Consolas"/>
-                <a:ea typeface="Consolas"/>
-                <a:cs typeface="Consolas"/>
-              </a:rPr>
-              <a:t>~/zephyrproject</a:t>
+                  <a:srgbClr val="29263B"/>
+                </a:solidFill>
+                <a:latin typeface="Consolas"/>
+                <a:ea typeface="Consolas"/>
+                <a:cs typeface="Consolas"/>
+              </a:rPr>
+              <a:t>cat VERSION</a:t>
             </a:r>
           </a:p>
           <a:p xmlns:a="http://schemas.openxmlformats.org/drawingml/2006/main">
@@ -16160,242 +16392,13 @@
             <a:r>
               <a:rPr sz="1875" b="0">
                 <a:solidFill>
-                  <a:srgbClr val="A02B93"/>
-                </a:solidFill>
-                <a:latin typeface="Consolas"/>
-                <a:ea typeface="Consolas"/>
-                <a:cs typeface="Consolas"/>
-              </a:rPr>
-              <a:t>cd</a:t>
-            </a:r>
-            <a:r>
-              <a:rPr sz="1875" b="0">
-                <a:solidFill>
                   <a:srgbClr val="29263B"/>
                 </a:solidFill>
                 <a:latin typeface="Consolas"/>
                 <a:ea typeface="Consolas"/>
                 <a:cs typeface="Consolas"/>
               </a:rPr>
-              <a:t> </a:t>
-            </a:r>
-            <a:r>
-              <a:rPr sz="1875" b="0">
-                <a:solidFill>
-                  <a:srgbClr val="0070C0"/>
-                </a:solidFill>
-                <a:latin typeface="Consolas"/>
-                <a:ea typeface="Consolas"/>
-                <a:cs typeface="Consolas"/>
-              </a:rPr>
-              <a:t>~/zephyrproject</a:t>
-            </a:r>
-          </a:p>
-          <a:p xmlns:a="http://schemas.openxmlformats.org/drawingml/2006/main">
-            <a:pPr>
-              <a:lnSpc>
-                <a:spcPct val="120000"/>
-              </a:lnSpc>
-              <a:defRPr sz="1875" b="0">
-                <a:solidFill>
-                  <a:srgbClr val="005968"/>
-                </a:solidFill>
-                <a:latin typeface="Consolas"/>
-                <a:ea typeface="Consolas"/>
-                <a:cs typeface="Consolas"/>
-              </a:defRPr>
-            </a:pPr>
-            <a:r>
-              <a:rPr sz="1875" b="0">
-                <a:solidFill>
-                  <a:srgbClr val="A02B93"/>
-                </a:solidFill>
-                <a:latin typeface="Consolas"/>
-                <a:ea typeface="Consolas"/>
-                <a:cs typeface="Consolas"/>
-              </a:rPr>
-              <a:t>west</a:t>
-            </a:r>
-            <a:r>
-              <a:rPr sz="1875" b="0">
-                <a:solidFill>
-                  <a:srgbClr val="29263B"/>
-                </a:solidFill>
-                <a:latin typeface="Consolas"/>
-                <a:ea typeface="Consolas"/>
-                <a:cs typeface="Consolas"/>
-              </a:rPr>
-              <a:t> update</a:t>
-            </a:r>
-          </a:p>
-          <a:p xmlns:a="http://schemas.openxmlformats.org/drawingml/2006/main">
-            <a:pPr>
-              <a:lnSpc>
-                <a:spcPct val="120000"/>
-              </a:lnSpc>
-              <a:defRPr sz="1875" b="0">
-                <a:solidFill>
-                  <a:srgbClr val="005968"/>
-                </a:solidFill>
-                <a:latin typeface="Consolas"/>
-                <a:ea typeface="Consolas"/>
-                <a:cs typeface="Consolas"/>
-              </a:defRPr>
-            </a:pPr>
-            <a:r>
-              <a:rPr sz="1875" b="0">
-                <a:solidFill>
-                  <a:srgbClr val="A02B93"/>
-                </a:solidFill>
-                <a:latin typeface="Consolas"/>
-                <a:ea typeface="Consolas"/>
-                <a:cs typeface="Consolas"/>
-              </a:rPr>
-              <a:t>cd</a:t>
-            </a:r>
-            <a:r>
-              <a:rPr sz="1875" b="0">
-                <a:solidFill>
-                  <a:srgbClr val="29263B"/>
-                </a:solidFill>
-                <a:latin typeface="Consolas"/>
-                <a:ea typeface="Consolas"/>
-                <a:cs typeface="Consolas"/>
-              </a:rPr>
-              <a:t> zephyr</a:t>
-            </a:r>
-          </a:p>
-          <a:p xmlns:a="http://schemas.openxmlformats.org/drawingml/2006/main">
-            <a:pPr>
-              <a:lnSpc>
-                <a:spcPct val="120000"/>
-              </a:lnSpc>
-              <a:defRPr sz="1875" b="0">
-                <a:solidFill>
-                  <a:srgbClr val="005968"/>
-                </a:solidFill>
-                <a:latin typeface="Consolas"/>
-                <a:ea typeface="Consolas"/>
-                <a:cs typeface="Consolas"/>
-              </a:defRPr>
-            </a:pPr>
-            <a:r>
-              <a:rPr sz="1875" b="0">
-                <a:solidFill>
-                  <a:srgbClr val="A02B93"/>
-                </a:solidFill>
-                <a:latin typeface="Consolas"/>
-                <a:ea typeface="Consolas"/>
-                <a:cs typeface="Consolas"/>
-              </a:rPr>
-              <a:t>git</a:t>
-            </a:r>
-            <a:r>
-              <a:rPr sz="1875" b="0">
-                <a:solidFill>
-                  <a:srgbClr val="29263B"/>
-                </a:solidFill>
-                <a:latin typeface="Consolas"/>
-                <a:ea typeface="Consolas"/>
-                <a:cs typeface="Consolas"/>
-              </a:rPr>
-              <a:t> rev-parse HEAD</a:t>
-            </a:r>
-          </a:p>
-          <a:p xmlns:a="http://schemas.openxmlformats.org/drawingml/2006/main">
-            <a:pPr>
-              <a:lnSpc>
-                <a:spcPct val="120000"/>
-              </a:lnSpc>
-              <a:defRPr sz="1875" b="0">
-                <a:solidFill>
-                  <a:srgbClr val="005968"/>
-                </a:solidFill>
-                <a:latin typeface="Consolas"/>
-                <a:ea typeface="Consolas"/>
-                <a:cs typeface="Consolas"/>
-              </a:defRPr>
-            </a:pPr>
-            <a:r>
-              <a:rPr sz="1875" b="0">
-                <a:solidFill>
-                  <a:srgbClr val="A02B93"/>
-                </a:solidFill>
-                <a:latin typeface="Consolas"/>
-                <a:ea typeface="Consolas"/>
-                <a:cs typeface="Consolas"/>
-              </a:rPr>
-              <a:t>cat</a:t>
-            </a:r>
-            <a:r>
-              <a:rPr sz="1875" b="0">
-                <a:solidFill>
-                  <a:srgbClr val="29263B"/>
-                </a:solidFill>
-                <a:latin typeface="Consolas"/>
-                <a:ea typeface="Consolas"/>
-                <a:cs typeface="Consolas"/>
-              </a:rPr>
-              <a:t> </a:t>
-            </a:r>
-            <a:r>
-              <a:rPr sz="1875" b="0">
-                <a:solidFill>
-                  <a:srgbClr val="0070C0"/>
-                </a:solidFill>
-                <a:latin typeface="Consolas"/>
-                <a:ea typeface="Consolas"/>
-                <a:cs typeface="Consolas"/>
-              </a:rPr>
-              <a:t>VERSION</a:t>
-            </a:r>
-          </a:p>
-          <a:p xmlns:a="http://schemas.openxmlformats.org/drawingml/2006/main">
-            <a:pPr>
-              <a:lnSpc>
-                <a:spcPct val="120000"/>
-              </a:lnSpc>
-              <a:defRPr sz="1875" b="0">
-                <a:solidFill>
-                  <a:srgbClr val="005968"/>
-                </a:solidFill>
-                <a:latin typeface="Consolas"/>
-                <a:ea typeface="Consolas"/>
-                <a:cs typeface="Consolas"/>
-              </a:defRPr>
-            </a:pPr>
-            <a:r>
-              <a:rPr sz="1875" b="0">
-                <a:solidFill>
-                  <a:srgbClr val="A02B93"/>
-                </a:solidFill>
-                <a:latin typeface="Consolas"/>
-                <a:ea typeface="Consolas"/>
-                <a:cs typeface="Consolas"/>
-              </a:rPr>
-              <a:t>cat</a:t>
-            </a:r>
-            <a:r>
-              <a:rPr sz="1875" b="0">
-                <a:solidFill>
-                  <a:srgbClr val="29263B"/>
-                </a:solidFill>
-                <a:latin typeface="Consolas"/>
-                <a:ea typeface="Consolas"/>
-                <a:cs typeface="Consolas"/>
-              </a:rPr>
-              <a:t> </a:t>
-            </a:r>
-            <a:r>
-              <a:rPr sz="1875" b="0">
-                <a:solidFill>
-                  <a:srgbClr val="0070C0"/>
-                </a:solidFill>
-                <a:latin typeface="Consolas"/>
-                <a:ea typeface="Consolas"/>
-                <a:cs typeface="Consolas"/>
-              </a:rPr>
-              <a:t>SDK_VERSION</a:t>
+              <a:t>cat SDK_VERSION</a:t>
             </a:r>
           </a:p>
         </p:txBody>
@@ -16594,7 +16597,7 @@
                 <a:cs typeface="Microsoft YaHei"/>
               </a:defRPr>
             </a:pPr>
-            <a:fld id="{EAF73962-4BC3-4613-8294-1F66C06DAB58}" type="slidenum">
+            <a:fld id="{85711E7F-05FE-40E3-B28F-9AAD13C01D5F}" type="slidenum">
               <a:rPr sz="1350">
                 <a:solidFill>
                   <a:srgbClr val="646173"/>
@@ -16603,7 +16606,7 @@
                 <a:ea typeface="Microsoft YaHei"/>
                 <a:cs typeface="Microsoft YaHei"/>
               </a:rPr>
-              <a:t>14</a:t>
+              <a:t>15</a:t>
             </a:fld>
           </a:p>
         </p:txBody>
@@ -16700,7 +16703,7 @@
                 <a:ea typeface="Microsoft YaHei"/>
                 <a:cs typeface="Microsoft YaHei"/>
               </a:rPr>
-              <a:t>检查 CMSIS 是从哪里来的</a:t>
+              <a:t>按当前清单下载并核对 CMSIS_6</a:t>
             </a:r>
           </a:p>
         </p:txBody>
@@ -16839,7 +16842,7 @@
                 <a:ea typeface="Consolas"/>
                 <a:cs typeface="Consolas"/>
               </a:rPr>
-              <a:t># Ubuntu 22.04 Bash；1.4 的 west init/update 已完成，venv 已激活。</a:t>
+              <a:t># Ubuntu 22.04 Bash；官方工作区已建立，venv 已激活。</a:t>
             </a:r>
           </a:p>
           <a:p xmlns:a="http://schemas.openxmlformats.org/drawingml/2006/main">
@@ -16876,18 +16879,177 @@
                 <a:ea typeface="Consolas"/>
                 <a:cs typeface="Consolas"/>
               </a:rPr>
-              <a:t> </a:t>
-            </a:r>
+              <a:t> ~/zephyrproject/zephyr</a:t>
+            </a:r>
+          </a:p>
+          <a:p xmlns:a="http://schemas.openxmlformats.org/drawingml/2006/main">
+            <a:pPr>
+              <a:lnSpc>
+                <a:spcPct val="120000"/>
+              </a:lnSpc>
+              <a:defRPr sz="1875" b="0">
+                <a:solidFill>
+                  <a:srgbClr val="005968"/>
+                </a:solidFill>
+                <a:latin typeface="Consolas"/>
+                <a:ea typeface="Consolas"/>
+                <a:cs typeface="Consolas"/>
+              </a:defRPr>
+            </a:pPr>
             <a:r>
               <a:rPr sz="1875" b="0">
                 <a:solidFill>
+                  <a:srgbClr val="A02B93"/>
+                </a:solidFill>
+                <a:latin typeface="Consolas"/>
+                <a:ea typeface="Consolas"/>
+                <a:cs typeface="Consolas"/>
+              </a:rPr>
+              <a:t>west</a:t>
+            </a:r>
+            <a:r>
+              <a:rPr sz="1875" b="0">
+                <a:solidFill>
+                  <a:srgbClr val="29263B"/>
+                </a:solidFill>
+                <a:latin typeface="Consolas"/>
+                <a:ea typeface="Consolas"/>
+                <a:cs typeface="Consolas"/>
+              </a:rPr>
+              <a:t> topdir &amp;&amp;</a:t>
+            </a:r>
+          </a:p>
+          <a:p xmlns:a="http://schemas.openxmlformats.org/drawingml/2006/main">
+            <a:pPr>
+              <a:lnSpc>
+                <a:spcPct val="120000"/>
+              </a:lnSpc>
+              <a:defRPr sz="1875" b="0">
+                <a:solidFill>
+                  <a:srgbClr val="005968"/>
+                </a:solidFill>
+                <a:latin typeface="Consolas"/>
+                <a:ea typeface="Consolas"/>
+                <a:cs typeface="Consolas"/>
+              </a:defRPr>
+            </a:pPr>
+            <a:r>
+              <a:rPr sz="1875" b="0">
+                <a:solidFill>
+                  <a:srgbClr val="A02B93"/>
+                </a:solidFill>
+                <a:latin typeface="Consolas"/>
+                <a:ea typeface="Consolas"/>
+                <a:cs typeface="Consolas"/>
+              </a:rPr>
+              <a:t>west</a:t>
+            </a:r>
+            <a:r>
+              <a:rPr sz="1875" b="0">
+                <a:solidFill>
+                  <a:srgbClr val="29263B"/>
+                </a:solidFill>
+                <a:latin typeface="Consolas"/>
+                <a:ea typeface="Consolas"/>
+                <a:cs typeface="Consolas"/>
+              </a:rPr>
+              <a:t> list cmsis_6 -f '{url} {revision} {abspath}' &amp;&amp;</a:t>
+            </a:r>
+          </a:p>
+          <a:p xmlns:a="http://schemas.openxmlformats.org/drawingml/2006/main">
+            <a:pPr>
+              <a:lnSpc>
+                <a:spcPct val="120000"/>
+              </a:lnSpc>
+              <a:defRPr sz="1875" b="0">
+                <a:solidFill>
+                  <a:srgbClr val="005968"/>
+                </a:solidFill>
+                <a:latin typeface="Consolas"/>
+                <a:ea typeface="Consolas"/>
+                <a:cs typeface="Consolas"/>
+              </a:defRPr>
+            </a:pPr>
+            <a:r>
+              <a:rPr sz="1875" b="0">
+                <a:solidFill>
+                  <a:srgbClr val="A02B93"/>
+                </a:solidFill>
+                <a:latin typeface="Consolas"/>
+                <a:ea typeface="Consolas"/>
+                <a:cs typeface="Consolas"/>
+              </a:rPr>
+              <a:t>west</a:t>
+            </a:r>
+            <a:r>
+              <a:rPr sz="1875" b="0">
+                <a:solidFill>
+                  <a:srgbClr val="29263B"/>
+                </a:solidFill>
+                <a:latin typeface="Consolas"/>
+                <a:ea typeface="Consolas"/>
+                <a:cs typeface="Consolas"/>
+              </a:rPr>
+              <a:t> update cmsis_6 &amp;&amp;</a:t>
+            </a:r>
+          </a:p>
+          <a:p xmlns:a="http://schemas.openxmlformats.org/drawingml/2006/main">
+            <a:pPr>
+              <a:lnSpc>
+                <a:spcPct val="120000"/>
+              </a:lnSpc>
+              <a:defRPr sz="1875" b="0">
+                <a:solidFill>
+                  <a:srgbClr val="005968"/>
+                </a:solidFill>
+                <a:latin typeface="Consolas"/>
+                <a:ea typeface="Consolas"/>
+                <a:cs typeface="Consolas"/>
+              </a:defRPr>
+            </a:pPr>
+            <a:r>
+              <a:rPr sz="1875" b="0">
+                <a:solidFill>
+                  <a:srgbClr val="A02B93"/>
+                </a:solidFill>
+                <a:latin typeface="Consolas"/>
+                <a:ea typeface="Consolas"/>
+                <a:cs typeface="Consolas"/>
+              </a:rPr>
+              <a:t>test</a:t>
+            </a:r>
+            <a:r>
+              <a:rPr sz="1875" b="0">
+                <a:solidFill>
+                  <a:srgbClr val="29263B"/>
+                </a:solidFill>
+                <a:latin typeface="Consolas"/>
+                <a:ea typeface="Consolas"/>
+                <a:cs typeface="Consolas"/>
+              </a:rPr>
+              <a:t> -f </a:t>
+            </a:r>
+            <a:r>
+              <a:rPr sz="1875" b="0">
+                <a:solidFill>
                   <a:srgbClr val="0070C0"/>
                 </a:solidFill>
                 <a:latin typeface="Consolas"/>
                 <a:ea typeface="Consolas"/>
                 <a:cs typeface="Consolas"/>
               </a:rPr>
-              <a:t>~/zephyrproject/zephyr</a:t>
+              <a:t>../modules/hal/cmsis_6/CMSIS/Core/Include/core_cm4.h</a:t>
+            </a:r>
+            <a:r>
+              <a:rPr sz="1875" b="0">
+                <a:solidFill>
+                  <a:srgbClr val="29263B"/>
+                </a:solidFill>
+                <a:latin typeface="Consolas"/>
+                <a:ea typeface="Consolas"/>
+                <a:cs typeface="Consolas"/>
+              </a:rPr>
+              <a:t> &amp;&amp;</a:t>
             </a:r>
           </a:p>
           <a:p xmlns:a="http://schemas.openxmlformats.org/drawingml/2006/main">
@@ -16907,120 +17069,13 @@
             <a:r>
               <a:rPr sz="1875" b="0">
                 <a:solidFill>
-                  <a:srgbClr val="A02B93"/>
-                </a:solidFill>
-                <a:latin typeface="Consolas"/>
-                <a:ea typeface="Consolas"/>
-                <a:cs typeface="Consolas"/>
-              </a:rPr>
-              <a:t>west</a:t>
-            </a:r>
-            <a:r>
-              <a:rPr sz="1875" b="0">
-                <a:solidFill>
                   <a:srgbClr val="29263B"/>
                 </a:solidFill>
                 <a:latin typeface="Consolas"/>
                 <a:ea typeface="Consolas"/>
                 <a:cs typeface="Consolas"/>
               </a:rPr>
-              <a:t> topdir</a:t>
-            </a:r>
-          </a:p>
-          <a:p xmlns:a="http://schemas.openxmlformats.org/drawingml/2006/main">
-            <a:pPr>
-              <a:lnSpc>
-                <a:spcPct val="120000"/>
-              </a:lnSpc>
-              <a:defRPr sz="1875" b="0">
-                <a:solidFill>
-                  <a:srgbClr val="005968"/>
-                </a:solidFill>
-                <a:latin typeface="Consolas"/>
-                <a:ea typeface="Consolas"/>
-                <a:cs typeface="Consolas"/>
-              </a:defRPr>
-            </a:pPr>
-            <a:r>
-              <a:rPr sz="1875" b="0">
-                <a:solidFill>
-                  <a:srgbClr val="A02B93"/>
-                </a:solidFill>
-                <a:latin typeface="Consolas"/>
-                <a:ea typeface="Consolas"/>
-                <a:cs typeface="Consolas"/>
-              </a:rPr>
-              <a:t>west</a:t>
-            </a:r>
-            <a:r>
-              <a:rPr sz="1875" b="0">
-                <a:solidFill>
-                  <a:srgbClr val="29263B"/>
-                </a:solidFill>
-                <a:latin typeface="Consolas"/>
-                <a:ea typeface="Consolas"/>
-                <a:cs typeface="Consolas"/>
-              </a:rPr>
-              <a:t> list cmsis_6 </a:t>
-            </a:r>
-            <a:r>
-              <a:rPr sz="1875" b="0">
-                <a:solidFill>
-                  <a:srgbClr val="B84E00"/>
-                </a:solidFill>
-                <a:latin typeface="Consolas"/>
-                <a:ea typeface="Consolas"/>
-                <a:cs typeface="Consolas"/>
-              </a:rPr>
-              <a:t>-f</a:t>
-            </a:r>
-            <a:r>
-              <a:rPr sz="1875" b="0">
-                <a:solidFill>
-                  <a:srgbClr val="29263B"/>
-                </a:solidFill>
-                <a:latin typeface="Consolas"/>
-                <a:ea typeface="Consolas"/>
-                <a:cs typeface="Consolas"/>
-              </a:rPr>
-              <a:t> '{url} {revision} {abspath}'</a:t>
-            </a:r>
-          </a:p>
-          <a:p xmlns:a="http://schemas.openxmlformats.org/drawingml/2006/main">
-            <a:pPr>
-              <a:lnSpc>
-                <a:spcPct val="120000"/>
-              </a:lnSpc>
-              <a:defRPr sz="1875" b="0">
-                <a:solidFill>
-                  <a:srgbClr val="005968"/>
-                </a:solidFill>
-                <a:latin typeface="Consolas"/>
-                <a:ea typeface="Consolas"/>
-                <a:cs typeface="Consolas"/>
-              </a:defRPr>
-            </a:pPr>
-            <a:r>
-              <a:rPr sz="1875" b="0">
-                <a:solidFill>
-                  <a:srgbClr val="A02B93"/>
-                </a:solidFill>
-                <a:latin typeface="Consolas"/>
-                <a:ea typeface="Consolas"/>
-                <a:cs typeface="Consolas"/>
-              </a:rPr>
-              <a:t>cat</a:t>
-            </a:r>
-            <a:r>
-              <a:rPr sz="1875" b="0">
-                <a:solidFill>
-                  <a:srgbClr val="29263B"/>
-                </a:solidFill>
-                <a:latin typeface="Consolas"/>
-                <a:ea typeface="Consolas"/>
-                <a:cs typeface="Consolas"/>
-              </a:rPr>
-              <a:t> </a:t>
+              <a:t>cat </a:t>
             </a:r>
             <a:r>
               <a:rPr sz="1875" b="0">
@@ -17102,18 +17157,18 @@
                 <a:ea typeface="Microsoft YaHei"/>
                 <a:cs typeface="Microsoft YaHei"/>
               </a:rPr>
-              <a:t>打开输出 URL 的固定 revision 网页，查看 Code → Download ZIP；</a:t>
+              <a:t>版本与路径由清单决定；应取得 </a:t>
             </a:r>
             <a:r>
               <a:rPr sz="1875" b="0">
                 <a:solidFill>
-                  <a:srgbClr val="A02B93"/>
-                </a:solidFill>
-                <a:latin typeface="Microsoft YaHei"/>
-                <a:ea typeface="Microsoft YaHei"/>
-                <a:cs typeface="Microsoft YaHei"/>
-              </a:rPr>
-              <a:t>west</a:t>
+                  <a:srgbClr val="0070C0"/>
+                </a:solidFill>
+                <a:latin typeface="Microsoft YaHei"/>
+                <a:ea typeface="Microsoft YaHei"/>
+                <a:cs typeface="Microsoft YaHei"/>
+              </a:rPr>
+              <a:t>module.yml</a:t>
             </a:r>
             <a:r>
               <a:rPr sz="1875" b="0">
@@ -17124,7 +17179,7 @@
                 <a:ea typeface="Microsoft YaHei"/>
                 <a:cs typeface="Microsoft YaHei"/>
               </a:rPr>
-              <a:t> 已下载则不重复覆盖。</a:t>
+              <a:t> 和 Core 头文件，不再下载第二份覆盖。</a:t>
             </a:r>
           </a:p>
         </p:txBody>
@@ -17252,7 +17307,7 @@
                 <a:cs typeface="Microsoft YaHei"/>
               </a:defRPr>
             </a:pPr>
-            <a:fld id="{50AD0635-345D-4D55-9C10-C3F382ACBE37}" type="slidenum">
+            <a:fld id="{608FC0BD-75D4-4BBE-9262-36588A61BD9B}" type="slidenum">
               <a:rPr sz="1350">
                 <a:solidFill>
                   <a:srgbClr val="646173"/>
@@ -17261,7 +17316,7 @@
                 <a:ea typeface="Microsoft YaHei"/>
                 <a:cs typeface="Microsoft YaHei"/>
               </a:rPr>
-              <a:t>15</a:t>
+              <a:t>16</a:t>
             </a:fld>
           </a:p>
         </p:txBody>
@@ -18280,7 +18335,7 @@
                 <a:cs typeface="Microsoft YaHei"/>
               </a:defRPr>
             </a:pPr>
-            <a:fld id="{F590055F-1249-4EFB-B468-5BA66A5298C3}" type="slidenum">
+            <a:fld id="{FBB458D9-694D-4D0E-9C55-8F2F4FF6DF32}" type="slidenum">
               <a:rPr sz="1350">
                 <a:solidFill>
                   <a:srgbClr val="646173"/>
@@ -18289,7 +18344,7 @@
                 <a:ea typeface="Microsoft YaHei"/>
                 <a:cs typeface="Microsoft YaHei"/>
               </a:rPr>
-              <a:t>18</a:t>
+              <a:t>20</a:t>
             </a:fld>
           </a:p>
         </p:txBody>
@@ -18750,7 +18805,7 @@
                 <a:cs typeface="Microsoft YaHei"/>
               </a:defRPr>
             </a:pPr>
-            <a:fld id="{F546DE4C-3275-450D-8461-33785757ECB4}" type="slidenum">
+            <a:fld id="{F75460A6-C564-4B45-8EB3-25A8B7D80A34}" type="slidenum">
               <a:rPr sz="1350">
                 <a:solidFill>
                   <a:srgbClr val="646173"/>
@@ -18759,7 +18814,7 @@
                 <a:ea typeface="Microsoft YaHei"/>
                 <a:cs typeface="Microsoft YaHei"/>
               </a:rPr>
-              <a:t>19</a:t>
+              <a:t>21</a:t>
             </a:fld>
           </a:p>
         </p:txBody>
@@ -20269,7 +20324,7 @@
                 <a:cs typeface="Microsoft YaHei"/>
               </a:defRPr>
             </a:pPr>
-            <a:fld id="{F13FFDA2-2458-4F03-861F-03246DD837A0}" type="slidenum">
+            <a:fld id="{562F9C17-42B8-4493-A363-2C9E0F4BE9FE}" type="slidenum">
               <a:rPr sz="1350">
                 <a:solidFill>
                   <a:srgbClr val="646173"/>
@@ -20278,7 +20333,7 @@
                 <a:ea typeface="Microsoft YaHei"/>
                 <a:cs typeface="Microsoft YaHei"/>
               </a:rPr>
-              <a:t>21</a:t>
+              <a:t>23</a:t>
             </a:fld>
           </a:p>
         </p:txBody>
@@ -21394,7 +21449,7 @@
                 <a:cs typeface="Microsoft YaHei"/>
               </a:defRPr>
             </a:pPr>
-            <a:fld id="{658442AC-0C64-4D89-86F1-20A3AFE48CB5}" type="slidenum">
+            <a:fld id="{3176A2CE-B367-4B48-A3FF-56B6D5113856}" type="slidenum">
               <a:rPr sz="1350">
                 <a:solidFill>
                   <a:srgbClr val="646173"/>
@@ -21403,7 +21458,7 @@
                 <a:ea typeface="Microsoft YaHei"/>
                 <a:cs typeface="Microsoft YaHei"/>
               </a:rPr>
-              <a:t>4</a:t>
+              <a:t>5</a:t>
             </a:fld>
           </a:p>
         </p:txBody>
@@ -22442,7 +22497,7 @@
                 <a:cs typeface="Microsoft YaHei"/>
               </a:defRPr>
             </a:pPr>
-            <a:fld id="{D23BCC72-303F-4B00-BC63-7B465D29F56A}" type="slidenum">
+            <a:fld id="{4E41E833-018E-4B7D-8655-D480C3E50B95}" type="slidenum">
               <a:rPr sz="1350">
                 <a:solidFill>
                   <a:srgbClr val="646173"/>
@@ -22451,7 +22506,7 @@
                 <a:ea typeface="Microsoft YaHei"/>
                 <a:cs typeface="Microsoft YaHei"/>
               </a:rPr>
-              <a:t>5</a:t>
+              <a:t>6</a:t>
             </a:fld>
           </a:p>
         </p:txBody>
@@ -23346,7 +23401,7 @@
                 <a:cs typeface="Microsoft YaHei"/>
               </a:defRPr>
             </a:pPr>
-            <a:fld id="{6B5742A7-FDCB-4328-B5E8-92EC1FCB5497}" type="slidenum">
+            <a:fld id="{CD06ED10-B65E-4A29-817E-70427CD455EC}" type="slidenum">
               <a:rPr sz="1350">
                 <a:solidFill>
                   <a:srgbClr val="646173"/>
@@ -23355,7 +23410,7 @@
                 <a:ea typeface="Microsoft YaHei"/>
                 <a:cs typeface="Microsoft YaHei"/>
               </a:rPr>
-              <a:t>6</a:t>
+              <a:t>7</a:t>
             </a:fld>
           </a:p>
         </p:txBody>
@@ -23856,7 +23911,7 @@
                 <a:cs typeface="Microsoft YaHei"/>
               </a:defRPr>
             </a:pPr>
-            <a:fld id="{4CD1BE79-C88E-44F5-9C2B-647CEAB4DB82}" type="slidenum">
+            <a:fld id="{92E3BAA3-5B4A-4F63-93AE-DE43DC45F874}" type="slidenum">
               <a:rPr sz="1350">
                 <a:solidFill>
                   <a:srgbClr val="646173"/>
@@ -23865,7 +23920,7 @@
                 <a:ea typeface="Microsoft YaHei"/>
                 <a:cs typeface="Microsoft YaHei"/>
               </a:rPr>
-              <a:t>7</a:t>
+              <a:t>8</a:t>
             </a:fld>
           </a:p>
         </p:txBody>
@@ -24781,7 +24836,7 @@
                 <a:cs typeface="Microsoft YaHei"/>
               </a:defRPr>
             </a:pPr>
-            <a:fld id="{D31844F6-DE1D-4CF0-B123-971D6D89A6E2}" type="slidenum">
+            <a:fld id="{9D099CD3-AF09-43FB-97A2-0340FD7C068C}" type="slidenum">
               <a:rPr sz="1350">
                 <a:solidFill>
                   <a:srgbClr val="646173"/>
@@ -24790,7 +24845,7 @@
                 <a:ea typeface="Microsoft YaHei"/>
                 <a:cs typeface="Microsoft YaHei"/>
               </a:rPr>
-              <a:t>9</a:t>
+              <a:t>10</a:t>
             </a:fld>
           </a:p>
         </p:txBody>
@@ -25423,6 +25478,1068 @@
         <p14:creationId xmlns:p14="http://schemas.microsoft.com/office/powerpoint/2010/main" val="349842777"/>
       </p:ext>
     </p:extLst>
+  </p:cSld>
+</p:sld>
+</file>
+
+<file path=ppt/slides/guide3.xml><?xml version="1.0" encoding="utf-8"?>
+<p:sld xmlns:p="http://schemas.openxmlformats.org/presentationml/2006/main" showMasterSp="1">
+  <p:cSld>
+    <p:bg>
+      <p:bgPr>
+        <a:solidFill xmlns:a="http://schemas.openxmlformats.org/drawingml/2006/main">
+          <a:srgbClr val="FFFFFF"/>
+        </a:solidFill>
+      </p:bgPr>
+    </p:bg>
+    <p:spTree>
+      <p:nvGrpSpPr>
+        <p:cNvPr id="1" name=""/>
+        <p:cNvGrpSpPr/>
+        <p:nvPr/>
+      </p:nvGrpSpPr>
+      <p:grpSpPr>
+        <a:xfrm xmlns:a="http://schemas.openxmlformats.org/drawingml/2006/main"/>
+      </p:grpSpPr>
+      <p:sp>
+        <p:nvSpPr>
+          <p:cNvPr id="2" name="Title"/>
+          <p:cNvSpPr>
+            <a:spLocks xmlns:a="http://schemas.openxmlformats.org/drawingml/2006/main" noGrp="1"/>
+          </p:cNvSpPr>
+          <p:nvPr/>
+        </p:nvSpPr>
+        <p:spPr>
+          <a:xfrm xmlns:a="http://schemas.openxmlformats.org/drawingml/2006/main">
+            <a:off x="609600" y="400050"/>
+            <a:ext cx="10972800" cy="723900"/>
+          </a:xfrm>
+          <a:prstGeom xmlns:a="http://schemas.openxmlformats.org/drawingml/2006/main" prst="rect">
+            <a:avLst/>
+          </a:prstGeom>
+          <a:noFill xmlns:a="http://schemas.openxmlformats.org/drawingml/2006/main"/>
+          <a:ln xmlns:a="http://schemas.openxmlformats.org/drawingml/2006/main" w="0">
+            <a:noFill/>
+          </a:ln>
+        </p:spPr>
+        <p:txBody>
+          <a:bodyPr xmlns:a="http://schemas.openxmlformats.org/drawingml/2006/main" lIns="0" tIns="0" rIns="0" bIns="0" anchor="t">
+            <a:noAutofit/>
+          </a:bodyPr>
+          <a:lstStyle xmlns:a="http://schemas.openxmlformats.org/drawingml/2006/main">
+            <a:defPPr>
+              <a:defRPr sz="3000" b="1">
+                <a:solidFill>
+                  <a:srgbClr val="29263B"/>
+                </a:solidFill>
+                <a:latin typeface="Microsoft YaHei"/>
+                <a:ea typeface="Microsoft YaHei"/>
+                <a:cs typeface="Microsoft YaHei"/>
+              </a:defRPr>
+            </a:defPPr>
+          </a:lstStyle>
+          <a:p xmlns:a="http://schemas.openxmlformats.org/drawingml/2006/main">
+            <a:pPr>
+              <a:lnSpc>
+                <a:spcPct val="120000"/>
+              </a:lnSpc>
+              <a:spcAft>
+                <a:spcPts val="0"/>
+              </a:spcAft>
+              <a:defRPr sz="3000" b="1">
+                <a:solidFill>
+                  <a:srgbClr val="29263B"/>
+                </a:solidFill>
+                <a:latin typeface="Microsoft YaHei"/>
+                <a:ea typeface="Microsoft YaHei"/>
+                <a:cs typeface="Microsoft YaHei"/>
+              </a:defRPr>
+            </a:pPr>
+            <a:r>
+              <a:t>Linux 路线仍围绕同一个应用与目标</a:t>
+            </a:r>
+          </a:p>
+        </p:txBody>
+      </p:sp>
+      <p:sp>
+        <p:nvSpPr>
+          <p:cNvPr id="3" name="Stage"/>
+          <p:cNvSpPr>
+            <a:spLocks xmlns:a="http://schemas.openxmlformats.org/drawingml/2006/main" noGrp="1"/>
+          </p:cNvSpPr>
+          <p:nvPr/>
+        </p:nvSpPr>
+        <p:spPr>
+          <a:xfrm xmlns:a="http://schemas.openxmlformats.org/drawingml/2006/main">
+            <a:off x="609600" y="1209675"/>
+            <a:ext cx="10972800" cy="333375"/>
+          </a:xfrm>
+          <a:prstGeom xmlns:a="http://schemas.openxmlformats.org/drawingml/2006/main" prst="rect">
+            <a:avLst/>
+          </a:prstGeom>
+          <a:noFill xmlns:a="http://schemas.openxmlformats.org/drawingml/2006/main"/>
+          <a:ln xmlns:a="http://schemas.openxmlformats.org/drawingml/2006/main" w="0">
+            <a:noFill/>
+          </a:ln>
+        </p:spPr>
+        <p:txBody>
+          <a:bodyPr xmlns:a="http://schemas.openxmlformats.org/drawingml/2006/main" lIns="0" tIns="0" rIns="0" bIns="0" anchor="t">
+            <a:noAutofit/>
+          </a:bodyPr>
+          <a:lstStyle xmlns:a="http://schemas.openxmlformats.org/drawingml/2006/main">
+            <a:defPPr>
+              <a:defRPr sz="1650" b="0">
+                <a:solidFill>
+                  <a:srgbClr val="7350BC"/>
+                </a:solidFill>
+                <a:latin typeface="Microsoft YaHei"/>
+                <a:ea typeface="Microsoft YaHei"/>
+                <a:cs typeface="Microsoft YaHei"/>
+              </a:defRPr>
+            </a:defPPr>
+          </a:lstStyle>
+          <a:p xmlns:a="http://schemas.openxmlformats.org/drawingml/2006/main">
+            <a:pPr>
+              <a:lnSpc>
+                <a:spcPct val="120000"/>
+              </a:lnSpc>
+              <a:spcAft>
+                <a:spcPts val="0"/>
+              </a:spcAft>
+              <a:defRPr sz="1650" b="0">
+                <a:solidFill>
+                  <a:srgbClr val="7350BC"/>
+                </a:solidFill>
+                <a:latin typeface="Microsoft YaHei"/>
+                <a:ea typeface="Microsoft YaHei"/>
+                <a:cs typeface="Microsoft YaHei"/>
+              </a:defRPr>
+            </a:pPr>
+            <a:r>
+              <a:rPr>
+                <a:solidFill>
+                  <a:srgbClr val="7350BC"/>
+                </a:solidFill>
+                <a:ea typeface="Microsoft YaHei"/>
+              </a:rPr>
+              <a:t>P001 Linux 开篇与 1.4 · 从当前任务理解工程组织</a:t>
+            </a:r>
+          </a:p>
+        </p:txBody>
+      </p:sp>
+      <p:sp>
+        <p:nvSpPr>
+          <p:cNvPr id="4" name="Body 0"/>
+          <p:cNvSpPr>
+            <a:spLocks xmlns:a="http://schemas.openxmlformats.org/drawingml/2006/main" noGrp="1"/>
+          </p:cNvSpPr>
+          <p:nvPr/>
+        </p:nvSpPr>
+        <p:spPr>
+          <a:xfrm xmlns:a="http://schemas.openxmlformats.org/drawingml/2006/main">
+            <a:off x="609600" y="1771650"/>
+            <a:ext cx="10972800" cy="792480"/>
+          </a:xfrm>
+          <a:prstGeom xmlns:a="http://schemas.openxmlformats.org/drawingml/2006/main" prst="rect">
+            <a:avLst/>
+          </a:prstGeom>
+          <a:noFill xmlns:a="http://schemas.openxmlformats.org/drawingml/2006/main"/>
+          <a:ln xmlns:a="http://schemas.openxmlformats.org/drawingml/2006/main" w="0">
+            <a:noFill/>
+          </a:ln>
+        </p:spPr>
+        <p:txBody>
+          <a:bodyPr xmlns:a="http://schemas.openxmlformats.org/drawingml/2006/main" lIns="0" tIns="0" rIns="0" bIns="0" anchor="t">
+            <a:noAutofit/>
+          </a:bodyPr>
+          <a:lstStyle xmlns:a="http://schemas.openxmlformats.org/drawingml/2006/main">
+            <a:defPPr>
+              <a:defRPr sz="2250" b="0">
+                <a:solidFill>
+                  <a:srgbClr val="29263B"/>
+                </a:solidFill>
+                <a:latin typeface="Microsoft YaHei"/>
+                <a:ea typeface="Microsoft YaHei"/>
+                <a:cs typeface="Microsoft YaHei"/>
+              </a:defRPr>
+            </a:defPPr>
+          </a:lstStyle>
+          <a:p xmlns:a="http://schemas.openxmlformats.org/drawingml/2006/main">
+            <a:pPr>
+              <a:lnSpc>
+                <a:spcPct val="120000"/>
+              </a:lnSpc>
+              <a:spcAft>
+                <a:spcPts val="0"/>
+              </a:spcAft>
+              <a:defRPr sz="2250" b="0">
+                <a:solidFill>
+                  <a:srgbClr val="29263B"/>
+                </a:solidFill>
+                <a:latin typeface="Microsoft YaHei"/>
+                <a:ea typeface="Microsoft YaHei"/>
+                <a:cs typeface="Microsoft YaHei"/>
+              </a:defRPr>
+            </a:pPr>
+            <a:r>
+              <a:t>从 Ubuntu 22.04 出发，先为 hello_world + mps2/an386 准备环境；换到 HC32 时再补所需芯片支持，应用保持可比较。</a:t>
+            </a:r>
+          </a:p>
+        </p:txBody>
+      </p:sp>
+      <p:sp>
+        <p:nvSpPr>
+          <p:cNvPr id="5" name="Body 1"/>
+          <p:cNvSpPr>
+            <a:spLocks xmlns:a="http://schemas.openxmlformats.org/drawingml/2006/main" noGrp="1"/>
+          </p:cNvSpPr>
+          <p:nvPr/>
+        </p:nvSpPr>
+        <p:spPr>
+          <a:xfrm xmlns:a="http://schemas.openxmlformats.org/drawingml/2006/main">
+            <a:off x="609600" y="2735580"/>
+            <a:ext cx="10972800" cy="1169670"/>
+          </a:xfrm>
+          <a:prstGeom xmlns:a="http://schemas.openxmlformats.org/drawingml/2006/main" prst="rect">
+            <a:avLst/>
+          </a:prstGeom>
+          <a:noFill xmlns:a="http://schemas.openxmlformats.org/drawingml/2006/main"/>
+          <a:ln xmlns:a="http://schemas.openxmlformats.org/drawingml/2006/main" w="0">
+            <a:noFill/>
+          </a:ln>
+        </p:spPr>
+        <p:txBody>
+          <a:bodyPr xmlns:a="http://schemas.openxmlformats.org/drawingml/2006/main" lIns="0" tIns="0" rIns="0" bIns="0" anchor="t">
+            <a:noAutofit/>
+          </a:bodyPr>
+          <a:lstStyle xmlns:a="http://schemas.openxmlformats.org/drawingml/2006/main">
+            <a:defPPr>
+              <a:defRPr sz="2250" b="0">
+                <a:solidFill>
+                  <a:srgbClr val="29263B"/>
+                </a:solidFill>
+                <a:latin typeface="Microsoft YaHei"/>
+                <a:ea typeface="Microsoft YaHei"/>
+                <a:cs typeface="Microsoft YaHei"/>
+              </a:defRPr>
+            </a:defPPr>
+          </a:lstStyle>
+          <a:p xmlns:a="http://schemas.openxmlformats.org/drawingml/2006/main">
+            <a:pPr>
+              <a:lnSpc>
+                <a:spcPct val="120000"/>
+              </a:lnSpc>
+              <a:spcAft>
+                <a:spcPts val="0"/>
+              </a:spcAft>
+              <a:defRPr sz="2250" b="0">
+                <a:solidFill>
+                  <a:srgbClr val="29263B"/>
+                </a:solidFill>
+                <a:latin typeface="Microsoft YaHei"/>
+                <a:ea typeface="Microsoft YaHei"/>
+                <a:cs typeface="Microsoft YaHei"/>
+              </a:defRPr>
+            </a:pPr>
+            <a:r>
+              <a:t>hello_world 应用由 </a:t>
+            </a:r>
+            <a:r>
+              <a:rPr>
+                <a:solidFill>
+                  <a:srgbClr val="0070C0"/>
+                </a:solidFill>
+                <a:ea typeface="Microsoft YaHei"/>
+              </a:rPr>
+              <a:t>CMakeLists.txt</a:t>
+            </a:r>
+            <a:r>
+              <a:t>、</a:t>
+            </a:r>
+            <a:r>
+              <a:rPr>
+                <a:solidFill>
+                  <a:srgbClr val="0070C0"/>
+                </a:solidFill>
+                <a:ea typeface="Microsoft YaHei"/>
+              </a:rPr>
+              <a:t>prj.conf</a:t>
+            </a:r>
+            <a:r>
+              <a:t> 与 </a:t>
+            </a:r>
+            <a:r>
+              <a:rPr>
+                <a:solidFill>
+                  <a:srgbClr val="0070C0"/>
+                </a:solidFill>
+                <a:ea typeface="Microsoft YaHei"/>
+              </a:rPr>
+              <a:t>main.c</a:t>
+            </a:r>
+            <a:r>
+              <a:t> 组成；mps2/an386 是 Arm MPS2 FPGA 平台的 Cortex-M4F 目标。同板换应用或同应用换板时，使用各自的构建目录。</a:t>
+            </a:r>
+          </a:p>
+        </p:txBody>
+      </p:sp>
+      <p:sp>
+        <p:nvSpPr>
+          <p:cNvPr id="6" name="Body 2"/>
+          <p:cNvSpPr>
+            <a:spLocks xmlns:a="http://schemas.openxmlformats.org/drawingml/2006/main" noGrp="1"/>
+          </p:cNvSpPr>
+          <p:nvPr/>
+        </p:nvSpPr>
+        <p:spPr>
+          <a:xfrm xmlns:a="http://schemas.openxmlformats.org/drawingml/2006/main">
+            <a:off x="609600" y="4076700"/>
+            <a:ext cx="10972800" cy="792480"/>
+          </a:xfrm>
+          <a:prstGeom xmlns:a="http://schemas.openxmlformats.org/drawingml/2006/main" prst="rect">
+            <a:avLst/>
+          </a:prstGeom>
+          <a:noFill xmlns:a="http://schemas.openxmlformats.org/drawingml/2006/main"/>
+          <a:ln xmlns:a="http://schemas.openxmlformats.org/drawingml/2006/main" w="0">
+            <a:noFill/>
+          </a:ln>
+        </p:spPr>
+        <p:txBody>
+          <a:bodyPr xmlns:a="http://schemas.openxmlformats.org/drawingml/2006/main" lIns="0" tIns="0" rIns="0" bIns="0" anchor="t">
+            <a:noAutofit/>
+          </a:bodyPr>
+          <a:lstStyle xmlns:a="http://schemas.openxmlformats.org/drawingml/2006/main">
+            <a:defPPr>
+              <a:defRPr sz="2250" b="0">
+                <a:solidFill>
+                  <a:srgbClr val="29263B"/>
+                </a:solidFill>
+                <a:latin typeface="Microsoft YaHei"/>
+                <a:ea typeface="Microsoft YaHei"/>
+                <a:cs typeface="Microsoft YaHei"/>
+              </a:defRPr>
+            </a:defPPr>
+          </a:lstStyle>
+          <a:p xmlns:a="http://schemas.openxmlformats.org/drawingml/2006/main">
+            <a:pPr>
+              <a:lnSpc>
+                <a:spcPct val="120000"/>
+              </a:lnSpc>
+              <a:spcAft>
+                <a:spcPts val="0"/>
+              </a:spcAft>
+              <a:defRPr sz="2250" b="0">
+                <a:solidFill>
+                  <a:srgbClr val="29263B"/>
+                </a:solidFill>
+                <a:latin typeface="Microsoft YaHei"/>
+                <a:ea typeface="Microsoft YaHei"/>
+                <a:cs typeface="Microsoft YaHei"/>
+              </a:defRPr>
+            </a:pPr>
+            <a:r>
+              <a:t>主机工具在 Linux 执行，ARM 工具链生成目标指令。~/zephyrproject 是 </a:t>
+            </a:r>
+            <a:r>
+              <a:rPr>
+                <a:solidFill>
+                  <a:srgbClr val="A02B93"/>
+                </a:solidFill>
+                <a:ea typeface="Microsoft YaHei"/>
+              </a:rPr>
+              <a:t>west</a:t>
+            </a:r>
+            <a:r>
+              <a:t> 工作区，zephyr 子目录才是主源码，.venv 放在工作区父层。</a:t>
+            </a:r>
+          </a:p>
+        </p:txBody>
+      </p:sp>
+      <p:sp>
+        <p:nvSpPr>
+          <p:cNvPr id="7" name="Body 3"/>
+          <p:cNvSpPr>
+            <a:spLocks xmlns:a="http://schemas.openxmlformats.org/drawingml/2006/main" noGrp="1"/>
+          </p:cNvSpPr>
+          <p:nvPr/>
+        </p:nvSpPr>
+        <p:spPr>
+          <a:xfrm xmlns:a="http://schemas.openxmlformats.org/drawingml/2006/main">
+            <a:off x="609600" y="5040630"/>
+            <a:ext cx="10972800" cy="792480"/>
+          </a:xfrm>
+          <a:prstGeom xmlns:a="http://schemas.openxmlformats.org/drawingml/2006/main" prst="rect">
+            <a:avLst/>
+          </a:prstGeom>
+          <a:noFill xmlns:a="http://schemas.openxmlformats.org/drawingml/2006/main"/>
+          <a:ln xmlns:a="http://schemas.openxmlformats.org/drawingml/2006/main" w="0">
+            <a:noFill/>
+          </a:ln>
+        </p:spPr>
+        <p:txBody>
+          <a:bodyPr xmlns:a="http://schemas.openxmlformats.org/drawingml/2006/main" lIns="0" tIns="0" rIns="0" bIns="0" anchor="t">
+            <a:noAutofit/>
+          </a:bodyPr>
+          <a:lstStyle xmlns:a="http://schemas.openxmlformats.org/drawingml/2006/main">
+            <a:defPPr>
+              <a:defRPr sz="2250" b="0">
+                <a:solidFill>
+                  <a:srgbClr val="29263B"/>
+                </a:solidFill>
+                <a:latin typeface="Microsoft YaHei"/>
+                <a:ea typeface="Microsoft YaHei"/>
+                <a:cs typeface="Microsoft YaHei"/>
+              </a:defRPr>
+            </a:defPPr>
+          </a:lstStyle>
+          <a:p xmlns:a="http://schemas.openxmlformats.org/drawingml/2006/main">
+            <a:pPr>
+              <a:lnSpc>
+                <a:spcPct val="120000"/>
+              </a:lnSpc>
+              <a:spcAft>
+                <a:spcPts val="0"/>
+              </a:spcAft>
+              <a:defRPr sz="2250" b="0">
+                <a:solidFill>
+                  <a:srgbClr val="29263B"/>
+                </a:solidFill>
+                <a:latin typeface="Microsoft YaHei"/>
+                <a:ea typeface="Microsoft YaHei"/>
+                <a:cs typeface="Microsoft YaHei"/>
+              </a:defRPr>
+            </a:pPr>
+            <a:r>
+              <a:t>MPS2 的板、SoC 与架构/驱动已在主仓；CMSIS Core 按当前清单取得。本轮不先下载华大 HAL。</a:t>
+            </a:r>
+          </a:p>
+        </p:txBody>
+      </p:sp>
+      <p:sp>
+        <p:nvSpPr>
+          <p:cNvPr id="8" name="Reading link"/>
+          <p:cNvSpPr>
+            <a:spLocks xmlns:a="http://schemas.openxmlformats.org/drawingml/2006/main" noGrp="1"/>
+          </p:cNvSpPr>
+          <p:nvPr/>
+        </p:nvSpPr>
+        <p:spPr>
+          <a:xfrm xmlns:a="http://schemas.openxmlformats.org/drawingml/2006/main">
+            <a:off x="609600" y="6105525"/>
+            <a:ext cx="10972800" cy="257175"/>
+          </a:xfrm>
+          <a:prstGeom xmlns:a="http://schemas.openxmlformats.org/drawingml/2006/main" prst="rect">
+            <a:avLst/>
+          </a:prstGeom>
+          <a:noFill xmlns:a="http://schemas.openxmlformats.org/drawingml/2006/main"/>
+          <a:ln xmlns:a="http://schemas.openxmlformats.org/drawingml/2006/main" w="0">
+            <a:noFill/>
+          </a:ln>
+        </p:spPr>
+        <p:txBody>
+          <a:bodyPr xmlns:a="http://schemas.openxmlformats.org/drawingml/2006/main" lIns="0" tIns="0" rIns="0" bIns="0" anchor="t">
+            <a:noAutofit/>
+          </a:bodyPr>
+          <a:lstStyle xmlns:a="http://schemas.openxmlformats.org/drawingml/2006/main">
+            <a:defPPr>
+              <a:defRPr sz="1275" b="0">
+                <a:solidFill>
+                  <a:srgbClr val="347D95"/>
+                </a:solidFill>
+                <a:latin typeface="Microsoft YaHei"/>
+                <a:ea typeface="Microsoft YaHei"/>
+                <a:cs typeface="Microsoft YaHei"/>
+              </a:defRPr>
+            </a:defPPr>
+          </a:lstStyle>
+          <a:p xmlns:a="http://schemas.openxmlformats.org/drawingml/2006/main">
+            <a:pPr>
+              <a:lnSpc>
+                <a:spcPct val="120000"/>
+              </a:lnSpc>
+              <a:spcAft>
+                <a:spcPts val="0"/>
+              </a:spcAft>
+              <a:defRPr sz="1275" b="0">
+                <a:solidFill>
+                  <a:srgbClr val="347D95"/>
+                </a:solidFill>
+                <a:latin typeface="Microsoft YaHei"/>
+                <a:ea typeface="Microsoft YaHei"/>
+                <a:cs typeface="Microsoft YaHei"/>
+              </a:defRPr>
+            </a:pPr>
+            <a:r>
+              <a:rPr>
+                <a:solidFill>
+                  <a:srgbClr val="347D95"/>
+                </a:solidFill>
+                <a:ea typeface="Microsoft YaHei"/>
+                <a:hlinkClick xmlns:ns0="http://schemas.openxmlformats.org/officeDocument/2006/relationships" ns0:id="rIdReading"/>
+              </a:rPr>
+              <a:t>完整解释与操作：配套 Markdown P001 Linux 开篇与 1.4</a:t>
+            </a:r>
+          </a:p>
+        </p:txBody>
+      </p:sp>
+      <p:sp>
+        <p:nvSpPr>
+          <p:cNvPr id="9" name="PageNumber"/>
+          <p:cNvSpPr>
+            <a:spLocks xmlns:a="http://schemas.openxmlformats.org/drawingml/2006/main" noGrp="1"/>
+          </p:cNvSpPr>
+          <p:nvPr/>
+        </p:nvSpPr>
+        <p:spPr>
+          <a:xfrm xmlns:a="http://schemas.openxmlformats.org/drawingml/2006/main">
+            <a:off x="10858500" y="6438900"/>
+            <a:ext cx="723900" cy="266700"/>
+          </a:xfrm>
+          <a:prstGeom xmlns:a="http://schemas.openxmlformats.org/drawingml/2006/main" prst="rect">
+            <a:avLst/>
+          </a:prstGeom>
+          <a:noFill xmlns:a="http://schemas.openxmlformats.org/drawingml/2006/main"/>
+          <a:ln xmlns:a="http://schemas.openxmlformats.org/drawingml/2006/main" w="0">
+            <a:noFill/>
+          </a:ln>
+        </p:spPr>
+        <p:txBody>
+          <a:bodyPr xmlns:a="http://schemas.openxmlformats.org/drawingml/2006/main" anchor="ctr" lIns="0" rIns="0" tIns="0" bIns="0">
+            <a:noAutofit/>
+          </a:bodyPr>
+          <a:lstStyle xmlns:a="http://schemas.openxmlformats.org/drawingml/2006/main">
+            <a:defPPr algn="r">
+              <a:defRPr sz="1350">
+                <a:solidFill>
+                  <a:srgbClr val="646173"/>
+                </a:solidFill>
+                <a:latin typeface="Microsoft YaHei"/>
+                <a:ea typeface="Microsoft YaHei"/>
+                <a:cs typeface="Microsoft YaHei"/>
+              </a:defRPr>
+            </a:defPPr>
+          </a:lstStyle>
+          <a:p xmlns:a="http://schemas.openxmlformats.org/drawingml/2006/main">
+            <a:pPr algn="r">
+              <a:defRPr sz="1350">
+                <a:solidFill>
+                  <a:srgbClr val="646173"/>
+                </a:solidFill>
+                <a:latin typeface="Microsoft YaHei"/>
+                <a:ea typeface="Microsoft YaHei"/>
+                <a:cs typeface="Microsoft YaHei"/>
+              </a:defRPr>
+            </a:pPr>
+            <a:fld id="{1E6E508B-B8F8-468F-9C31-11C6E755B5FB}" type="slidenum">
+              <a:rPr sz="1350">
+                <a:solidFill>
+                  <a:srgbClr val="646173"/>
+                </a:solidFill>
+                <a:latin typeface="Microsoft YaHei"/>
+                <a:ea typeface="Microsoft YaHei"/>
+                <a:cs typeface="Microsoft YaHei"/>
+              </a:rPr>
+              <a:t>3</a:t>
+            </a:fld>
+          </a:p>
+        </p:txBody>
+      </p:sp>
+    </p:spTree>
+  </p:cSld>
+</p:sld>
+</file>
+
+<file path=ppt/slides/guide4.xml><?xml version="1.0" encoding="utf-8"?>
+<p:sld xmlns:p="http://schemas.openxmlformats.org/presentationml/2006/main" showMasterSp="1">
+  <p:cSld>
+    <p:bg>
+      <p:bgPr>
+        <a:solidFill xmlns:a="http://schemas.openxmlformats.org/drawingml/2006/main">
+          <a:srgbClr val="FFFFFF"/>
+        </a:solidFill>
+      </p:bgPr>
+    </p:bg>
+    <p:spTree>
+      <p:nvGrpSpPr>
+        <p:cNvPr id="1" name=""/>
+        <p:cNvGrpSpPr/>
+        <p:nvPr/>
+      </p:nvGrpSpPr>
+      <p:grpSpPr>
+        <a:xfrm xmlns:a="http://schemas.openxmlformats.org/drawingml/2006/main"/>
+      </p:grpSpPr>
+      <p:sp>
+        <p:nvSpPr>
+          <p:cNvPr id="2" name="Title"/>
+          <p:cNvSpPr>
+            <a:spLocks xmlns:a="http://schemas.openxmlformats.org/drawingml/2006/main" noGrp="1"/>
+          </p:cNvSpPr>
+          <p:nvPr/>
+        </p:nvSpPr>
+        <p:spPr>
+          <a:xfrm xmlns:a="http://schemas.openxmlformats.org/drawingml/2006/main">
+            <a:off x="609600" y="400050"/>
+            <a:ext cx="10972800" cy="723900"/>
+          </a:xfrm>
+          <a:prstGeom xmlns:a="http://schemas.openxmlformats.org/drawingml/2006/main" prst="rect">
+            <a:avLst/>
+          </a:prstGeom>
+          <a:noFill xmlns:a="http://schemas.openxmlformats.org/drawingml/2006/main"/>
+          <a:ln xmlns:a="http://schemas.openxmlformats.org/drawingml/2006/main" w="0">
+            <a:noFill/>
+          </a:ln>
+        </p:spPr>
+        <p:txBody>
+          <a:bodyPr xmlns:a="http://schemas.openxmlformats.org/drawingml/2006/main" lIns="0" tIns="0" rIns="0" bIns="0" anchor="t">
+            <a:noAutofit/>
+          </a:bodyPr>
+          <a:lstStyle xmlns:a="http://schemas.openxmlformats.org/drawingml/2006/main">
+            <a:defPPr>
+              <a:defRPr sz="3000" b="1">
+                <a:solidFill>
+                  <a:srgbClr val="29263B"/>
+                </a:solidFill>
+                <a:latin typeface="Microsoft YaHei"/>
+                <a:ea typeface="Microsoft YaHei"/>
+                <a:cs typeface="Microsoft YaHei"/>
+              </a:defRPr>
+            </a:defPPr>
+          </a:lstStyle>
+          <a:p xmlns:a="http://schemas.openxmlformats.org/drawingml/2006/main">
+            <a:pPr>
+              <a:lnSpc>
+                <a:spcPct val="120000"/>
+              </a:lnSpc>
+              <a:spcAft>
+                <a:spcPts val="0"/>
+              </a:spcAft>
+              <a:defRPr sz="3000" b="1">
+                <a:solidFill>
+                  <a:srgbClr val="29263B"/>
+                </a:solidFill>
+                <a:latin typeface="Microsoft YaHei"/>
+                <a:ea typeface="Microsoft YaHei"/>
+                <a:cs typeface="Microsoft YaHei"/>
+              </a:defRPr>
+            </a:pPr>
+            <a:r>
+              <a:t>看到外部项目清单，还要判断当前目标用什么</a:t>
+            </a:r>
+          </a:p>
+        </p:txBody>
+      </p:sp>
+      <p:sp>
+        <p:nvSpPr>
+          <p:cNvPr id="3" name="Stage"/>
+          <p:cNvSpPr>
+            <a:spLocks xmlns:a="http://schemas.openxmlformats.org/drawingml/2006/main" noGrp="1"/>
+          </p:cNvSpPr>
+          <p:nvPr/>
+        </p:nvSpPr>
+        <p:spPr>
+          <a:xfrm xmlns:a="http://schemas.openxmlformats.org/drawingml/2006/main">
+            <a:off x="609600" y="1209675"/>
+            <a:ext cx="10972800" cy="333375"/>
+          </a:xfrm>
+          <a:prstGeom xmlns:a="http://schemas.openxmlformats.org/drawingml/2006/main" prst="rect">
+            <a:avLst/>
+          </a:prstGeom>
+          <a:noFill xmlns:a="http://schemas.openxmlformats.org/drawingml/2006/main"/>
+          <a:ln xmlns:a="http://schemas.openxmlformats.org/drawingml/2006/main" w="0">
+            <a:noFill/>
+          </a:ln>
+        </p:spPr>
+        <p:txBody>
+          <a:bodyPr xmlns:a="http://schemas.openxmlformats.org/drawingml/2006/main" lIns="0" tIns="0" rIns="0" bIns="0" anchor="t">
+            <a:noAutofit/>
+          </a:bodyPr>
+          <a:lstStyle xmlns:a="http://schemas.openxmlformats.org/drawingml/2006/main">
+            <a:defPPr>
+              <a:defRPr sz="1650" b="0">
+                <a:solidFill>
+                  <a:srgbClr val="7350BC"/>
+                </a:solidFill>
+                <a:latin typeface="Microsoft YaHei"/>
+                <a:ea typeface="Microsoft YaHei"/>
+                <a:cs typeface="Microsoft YaHei"/>
+              </a:defRPr>
+            </a:defPPr>
+          </a:lstStyle>
+          <a:p xmlns:a="http://schemas.openxmlformats.org/drawingml/2006/main">
+            <a:pPr>
+              <a:lnSpc>
+                <a:spcPct val="120000"/>
+              </a:lnSpc>
+              <a:spcAft>
+                <a:spcPts val="0"/>
+              </a:spcAft>
+              <a:defRPr sz="1650" b="0">
+                <a:solidFill>
+                  <a:srgbClr val="7350BC"/>
+                </a:solidFill>
+                <a:latin typeface="Microsoft YaHei"/>
+                <a:ea typeface="Microsoft YaHei"/>
+                <a:cs typeface="Microsoft YaHei"/>
+              </a:defRPr>
+            </a:pPr>
+            <a:r>
+              <a:rPr>
+                <a:solidFill>
+                  <a:srgbClr val="7350BC"/>
+                </a:solidFill>
+                <a:ea typeface="Microsoft YaHei"/>
+              </a:rPr>
+              <a:t>P001 Linux 1.4 · 从当前任务理解工程组织</a:t>
+            </a:r>
+          </a:p>
+        </p:txBody>
+      </p:sp>
+      <p:sp>
+        <p:nvSpPr>
+          <p:cNvPr id="4" name="Body 0"/>
+          <p:cNvSpPr>
+            <a:spLocks xmlns:a="http://schemas.openxmlformats.org/drawingml/2006/main" noGrp="1"/>
+          </p:cNvSpPr>
+          <p:nvPr/>
+        </p:nvSpPr>
+        <p:spPr>
+          <a:xfrm xmlns:a="http://schemas.openxmlformats.org/drawingml/2006/main">
+            <a:off x="609600" y="1771650"/>
+            <a:ext cx="10972800" cy="792480"/>
+          </a:xfrm>
+          <a:prstGeom xmlns:a="http://schemas.openxmlformats.org/drawingml/2006/main" prst="rect">
+            <a:avLst/>
+          </a:prstGeom>
+          <a:noFill xmlns:a="http://schemas.openxmlformats.org/drawingml/2006/main"/>
+          <a:ln xmlns:a="http://schemas.openxmlformats.org/drawingml/2006/main" w="0">
+            <a:noFill/>
+          </a:ln>
+        </p:spPr>
+        <p:txBody>
+          <a:bodyPr xmlns:a="http://schemas.openxmlformats.org/drawingml/2006/main" lIns="0" tIns="0" rIns="0" bIns="0" anchor="t">
+            <a:noAutofit/>
+          </a:bodyPr>
+          <a:lstStyle xmlns:a="http://schemas.openxmlformats.org/drawingml/2006/main">
+            <a:defPPr>
+              <a:defRPr sz="2250" b="0">
+                <a:solidFill>
+                  <a:srgbClr val="29263B"/>
+                </a:solidFill>
+                <a:latin typeface="Microsoft YaHei"/>
+                <a:ea typeface="Microsoft YaHei"/>
+                <a:cs typeface="Microsoft YaHei"/>
+              </a:defRPr>
+            </a:defPPr>
+          </a:lstStyle>
+          <a:p xmlns:a="http://schemas.openxmlformats.org/drawingml/2006/main">
+            <a:pPr>
+              <a:lnSpc>
+                <a:spcPct val="120000"/>
+              </a:lnSpc>
+              <a:spcAft>
+                <a:spcPts val="0"/>
+              </a:spcAft>
+              <a:defRPr sz="2250" b="0">
+                <a:solidFill>
+                  <a:srgbClr val="29263B"/>
+                </a:solidFill>
+                <a:latin typeface="Microsoft YaHei"/>
+                <a:ea typeface="Microsoft YaHei"/>
+                <a:cs typeface="Microsoft YaHei"/>
+              </a:defRPr>
+            </a:pPr>
+            <a:r>
+              <a:t>AN386 的 Cortex-M4 配置需要 CMSIS Core；</a:t>
+            </a:r>
+            <a:r>
+              <a:rPr>
+                <a:solidFill>
+                  <a:srgbClr val="A02B93"/>
+                </a:solidFill>
+                <a:ea typeface="Microsoft YaHei"/>
+              </a:rPr>
+              <a:t>west</a:t>
+            </a:r>
+            <a:r>
+              <a:t> list cmsis_6 显示当前版本锁定的仓库、提交与落点，</a:t>
+            </a:r>
+            <a:r>
+              <a:rPr>
+                <a:solidFill>
+                  <a:srgbClr val="A02B93"/>
+                </a:solidFill>
+                <a:ea typeface="Microsoft YaHei"/>
+              </a:rPr>
+              <a:t>west</a:t>
+            </a:r>
+            <a:r>
+              <a:t> update cmsis_6 才执行获取。</a:t>
+            </a:r>
+          </a:p>
+        </p:txBody>
+      </p:sp>
+      <p:sp>
+        <p:nvSpPr>
+          <p:cNvPr id="5" name="Body 1"/>
+          <p:cNvSpPr>
+            <a:spLocks xmlns:a="http://schemas.openxmlformats.org/drawingml/2006/main" noGrp="1"/>
+          </p:cNvSpPr>
+          <p:nvPr/>
+        </p:nvSpPr>
+        <p:spPr>
+          <a:xfrm xmlns:a="http://schemas.openxmlformats.org/drawingml/2006/main">
+            <a:off x="609600" y="2735580"/>
+            <a:ext cx="10972800" cy="792480"/>
+          </a:xfrm>
+          <a:prstGeom xmlns:a="http://schemas.openxmlformats.org/drawingml/2006/main" prst="rect">
+            <a:avLst/>
+          </a:prstGeom>
+          <a:noFill xmlns:a="http://schemas.openxmlformats.org/drawingml/2006/main"/>
+          <a:ln xmlns:a="http://schemas.openxmlformats.org/drawingml/2006/main" w="0">
+            <a:noFill/>
+          </a:ln>
+        </p:spPr>
+        <p:txBody>
+          <a:bodyPr xmlns:a="http://schemas.openxmlformats.org/drawingml/2006/main" lIns="0" tIns="0" rIns="0" bIns="0" anchor="t">
+            <a:noAutofit/>
+          </a:bodyPr>
+          <a:lstStyle xmlns:a="http://schemas.openxmlformats.org/drawingml/2006/main">
+            <a:defPPr>
+              <a:defRPr sz="2250" b="0">
+                <a:solidFill>
+                  <a:srgbClr val="29263B"/>
+                </a:solidFill>
+                <a:latin typeface="Microsoft YaHei"/>
+                <a:ea typeface="Microsoft YaHei"/>
+                <a:cs typeface="Microsoft YaHei"/>
+              </a:defRPr>
+            </a:defPPr>
+          </a:lstStyle>
+          <a:p xmlns:a="http://schemas.openxmlformats.org/drawingml/2006/main">
+            <a:pPr>
+              <a:lnSpc>
+                <a:spcPct val="120000"/>
+              </a:lnSpc>
+              <a:spcAft>
+                <a:spcPts val="0"/>
+              </a:spcAft>
+              <a:defRPr sz="2250" b="0">
+                <a:solidFill>
+                  <a:srgbClr val="29263B"/>
+                </a:solidFill>
+                <a:latin typeface="Microsoft YaHei"/>
+                <a:ea typeface="Microsoft YaHei"/>
+                <a:cs typeface="Microsoft YaHei"/>
+              </a:defRPr>
+            </a:pPr>
+            <a:r>
+              <a:t>MPS2 的硬件支持由 Zephyr 内置的板、SoC、架构和驱动承担。Arm Keil 另外提供 BSP/Pack，但这条 Zephyr 构建路线不把它作为输入。</a:t>
+            </a:r>
+          </a:p>
+        </p:txBody>
+      </p:sp>
+      <p:sp>
+        <p:nvSpPr>
+          <p:cNvPr id="6" name="Body 2"/>
+          <p:cNvSpPr>
+            <a:spLocks xmlns:a="http://schemas.openxmlformats.org/drawingml/2006/main" noGrp="1"/>
+          </p:cNvSpPr>
+          <p:nvPr/>
+        </p:nvSpPr>
+        <p:spPr>
+          <a:xfrm xmlns:a="http://schemas.openxmlformats.org/drawingml/2006/main">
+            <a:off x="609600" y="3699510"/>
+            <a:ext cx="10972800" cy="792480"/>
+          </a:xfrm>
+          <a:prstGeom xmlns:a="http://schemas.openxmlformats.org/drawingml/2006/main" prst="rect">
+            <a:avLst/>
+          </a:prstGeom>
+          <a:noFill xmlns:a="http://schemas.openxmlformats.org/drawingml/2006/main"/>
+          <a:ln xmlns:a="http://schemas.openxmlformats.org/drawingml/2006/main" w="0">
+            <a:noFill/>
+          </a:ln>
+        </p:spPr>
+        <p:txBody>
+          <a:bodyPr xmlns:a="http://schemas.openxmlformats.org/drawingml/2006/main" lIns="0" tIns="0" rIns="0" bIns="0" anchor="t">
+            <a:noAutofit/>
+          </a:bodyPr>
+          <a:lstStyle xmlns:a="http://schemas.openxmlformats.org/drawingml/2006/main">
+            <a:defPPr>
+              <a:defRPr sz="2250" b="0">
+                <a:solidFill>
+                  <a:srgbClr val="29263B"/>
+                </a:solidFill>
+                <a:latin typeface="Microsoft YaHei"/>
+                <a:ea typeface="Microsoft YaHei"/>
+                <a:cs typeface="Microsoft YaHei"/>
+              </a:defRPr>
+            </a:defPPr>
+          </a:lstStyle>
+          <a:p xmlns:a="http://schemas.openxmlformats.org/drawingml/2006/main">
+            <a:pPr>
+              <a:lnSpc>
+                <a:spcPct val="120000"/>
+              </a:lnSpc>
+              <a:spcAft>
+                <a:spcPts val="0"/>
+              </a:spcAft>
+              <a:defRPr sz="2250" b="0">
+                <a:solidFill>
+                  <a:srgbClr val="29263B"/>
+                </a:solidFill>
+                <a:latin typeface="Microsoft YaHei"/>
+                <a:ea typeface="Microsoft YaHei"/>
+                <a:cs typeface="Microsoft YaHei"/>
+              </a:defRPr>
+            </a:pPr>
+            <a:r>
+              <a:t>清单不是 </a:t>
+            </a:r>
+            <a:r>
+              <a:rPr>
+                <a:solidFill>
+                  <a:srgbClr val="B84E00"/>
+                </a:solidFill>
+                <a:ea typeface="Microsoft YaHei"/>
+              </a:rPr>
+              <a:t>BOARD</a:t>
+            </a:r>
+            <a:r>
+              <a:t> 的自动依赖解析结果。换板或增加功能时，沿设备节点、驱动与 CMake 条件继续查；全量下载并不能替代这次判断。</a:t>
+            </a:r>
+          </a:p>
+        </p:txBody>
+      </p:sp>
+      <p:sp>
+        <p:nvSpPr>
+          <p:cNvPr id="7" name="Reading link"/>
+          <p:cNvSpPr>
+            <a:spLocks xmlns:a="http://schemas.openxmlformats.org/drawingml/2006/main" noGrp="1"/>
+          </p:cNvSpPr>
+          <p:nvPr/>
+        </p:nvSpPr>
+        <p:spPr>
+          <a:xfrm xmlns:a="http://schemas.openxmlformats.org/drawingml/2006/main">
+            <a:off x="609600" y="6105525"/>
+            <a:ext cx="10972800" cy="257175"/>
+          </a:xfrm>
+          <a:prstGeom xmlns:a="http://schemas.openxmlformats.org/drawingml/2006/main" prst="rect">
+            <a:avLst/>
+          </a:prstGeom>
+          <a:noFill xmlns:a="http://schemas.openxmlformats.org/drawingml/2006/main"/>
+          <a:ln xmlns:a="http://schemas.openxmlformats.org/drawingml/2006/main" w="0">
+            <a:noFill/>
+          </a:ln>
+        </p:spPr>
+        <p:txBody>
+          <a:bodyPr xmlns:a="http://schemas.openxmlformats.org/drawingml/2006/main" lIns="0" tIns="0" rIns="0" bIns="0" anchor="t">
+            <a:noAutofit/>
+          </a:bodyPr>
+          <a:lstStyle xmlns:a="http://schemas.openxmlformats.org/drawingml/2006/main">
+            <a:defPPr>
+              <a:defRPr sz="1275" b="0">
+                <a:solidFill>
+                  <a:srgbClr val="347D95"/>
+                </a:solidFill>
+                <a:latin typeface="Microsoft YaHei"/>
+                <a:ea typeface="Microsoft YaHei"/>
+                <a:cs typeface="Microsoft YaHei"/>
+              </a:defRPr>
+            </a:defPPr>
+          </a:lstStyle>
+          <a:p xmlns:a="http://schemas.openxmlformats.org/drawingml/2006/main">
+            <a:pPr>
+              <a:lnSpc>
+                <a:spcPct val="120000"/>
+              </a:lnSpc>
+              <a:spcAft>
+                <a:spcPts val="0"/>
+              </a:spcAft>
+              <a:defRPr sz="1275" b="0">
+                <a:solidFill>
+                  <a:srgbClr val="347D95"/>
+                </a:solidFill>
+                <a:latin typeface="Microsoft YaHei"/>
+                <a:ea typeface="Microsoft YaHei"/>
+                <a:cs typeface="Microsoft YaHei"/>
+              </a:defRPr>
+            </a:pPr>
+            <a:r>
+              <a:rPr>
+                <a:solidFill>
+                  <a:srgbClr val="347D95"/>
+                </a:solidFill>
+                <a:ea typeface="Microsoft YaHei"/>
+                <a:hlinkClick xmlns:ns0="http://schemas.openxmlformats.org/officeDocument/2006/relationships" ns0:id="rIdReading"/>
+              </a:rPr>
+              <a:t>完整解释与操作：配套 Markdown P001 Linux 1.4</a:t>
+            </a:r>
+          </a:p>
+        </p:txBody>
+      </p:sp>
+      <p:sp>
+        <p:nvSpPr>
+          <p:cNvPr id="8" name="PageNumber"/>
+          <p:cNvSpPr>
+            <a:spLocks xmlns:a="http://schemas.openxmlformats.org/drawingml/2006/main" noGrp="1"/>
+          </p:cNvSpPr>
+          <p:nvPr/>
+        </p:nvSpPr>
+        <p:spPr>
+          <a:xfrm xmlns:a="http://schemas.openxmlformats.org/drawingml/2006/main">
+            <a:off x="10858500" y="6438900"/>
+            <a:ext cx="723900" cy="266700"/>
+          </a:xfrm>
+          <a:prstGeom xmlns:a="http://schemas.openxmlformats.org/drawingml/2006/main" prst="rect">
+            <a:avLst/>
+          </a:prstGeom>
+          <a:noFill xmlns:a="http://schemas.openxmlformats.org/drawingml/2006/main"/>
+          <a:ln xmlns:a="http://schemas.openxmlformats.org/drawingml/2006/main" w="0">
+            <a:noFill/>
+          </a:ln>
+        </p:spPr>
+        <p:txBody>
+          <a:bodyPr xmlns:a="http://schemas.openxmlformats.org/drawingml/2006/main" anchor="ctr" lIns="0" rIns="0" tIns="0" bIns="0">
+            <a:noAutofit/>
+          </a:bodyPr>
+          <a:lstStyle xmlns:a="http://schemas.openxmlformats.org/drawingml/2006/main">
+            <a:defPPr algn="r">
+              <a:defRPr sz="1350">
+                <a:solidFill>
+                  <a:srgbClr val="646173"/>
+                </a:solidFill>
+                <a:latin typeface="Microsoft YaHei"/>
+                <a:ea typeface="Microsoft YaHei"/>
+                <a:cs typeface="Microsoft YaHei"/>
+              </a:defRPr>
+            </a:defPPr>
+          </a:lstStyle>
+          <a:p xmlns:a="http://schemas.openxmlformats.org/drawingml/2006/main">
+            <a:pPr algn="r">
+              <a:defRPr sz="1350">
+                <a:solidFill>
+                  <a:srgbClr val="646173"/>
+                </a:solidFill>
+                <a:latin typeface="Microsoft YaHei"/>
+                <a:ea typeface="Microsoft YaHei"/>
+                <a:cs typeface="Microsoft YaHei"/>
+              </a:defRPr>
+            </a:pPr>
+            <a:fld id="{3EBA1216-0E7A-4019-9E51-747BFC129F18}" type="slidenum">
+              <a:rPr sz="1350">
+                <a:solidFill>
+                  <a:srgbClr val="646173"/>
+                </a:solidFill>
+                <a:latin typeface="Microsoft YaHei"/>
+                <a:ea typeface="Microsoft YaHei"/>
+                <a:cs typeface="Microsoft YaHei"/>
+              </a:rPr>
+              <a:t>17</a:t>
+            </a:fld>
+          </a:p>
+        </p:txBody>
+      </p:sp>
+    </p:spTree>
   </p:cSld>
 </p:sld>
 </file>
@@ -26114,7 +27231,7 @@
                 <a:cs typeface="Microsoft YaHei"/>
               </a:defRPr>
             </a:pPr>
-            <a:fld id="{295182E8-2891-430B-AD55-CE32D1DF0AF9}" type="slidenum">
+            <a:fld id="{63993F0E-8CC0-4840-9CB2-F370482BFCE5}" type="slidenum">
               <a:rPr sz="1350">
                 <a:solidFill>
                   <a:srgbClr val="646173"/>
@@ -26123,7 +27240,7 @@
                 <a:ea typeface="Microsoft YaHei"/>
                 <a:cs typeface="Microsoft YaHei"/>
               </a:rPr>
-              <a:t>3</a:t>
+              <a:t>4</a:t>
             </a:fld>
           </a:p>
         </p:txBody>
@@ -26633,7 +27750,7 @@
                 <a:cs typeface="Microsoft YaHei"/>
               </a:defRPr>
             </a:pPr>
-            <a:fld id="{D17699B8-00C9-4F05-A26E-1CD1AB370489}" type="slidenum">
+            <a:fld id="{F868F6C3-9AC3-40A1-8A37-4EDA27352A5A}" type="slidenum">
               <a:rPr sz="1350">
                 <a:solidFill>
                   <a:srgbClr val="646173"/>
@@ -26642,7 +27759,7 @@
                 <a:ea typeface="Microsoft YaHei"/>
                 <a:cs typeface="Microsoft YaHei"/>
               </a:rPr>
-              <a:t>8</a:t>
+              <a:t>9</a:t>
             </a:fld>
           </a:p>
         </p:txBody>
@@ -27560,7 +28677,7 @@
                 <a:cs typeface="Microsoft YaHei"/>
               </a:defRPr>
             </a:pPr>
-            <a:fld id="{70D3F01D-C72A-404D-BB72-875EAB446154}" type="slidenum">
+            <a:fld id="{A2574708-590C-456B-88FB-29FC0E61B4CC}" type="slidenum">
               <a:rPr sz="1350">
                 <a:solidFill>
                   <a:srgbClr val="646173"/>
@@ -27569,7 +28686,7 @@
                 <a:ea typeface="Microsoft YaHei"/>
                 <a:cs typeface="Microsoft YaHei"/>
               </a:rPr>
-              <a:t>10</a:t>
+              <a:t>11</a:t>
             </a:fld>
           </a:p>
         </p:txBody>
@@ -28277,7 +29394,7 @@
                 <a:cs typeface="Microsoft YaHei"/>
               </a:defRPr>
             </a:pPr>
-            <a:fld id="{0E0384DD-12B3-46F8-B222-EB42A48ACD82}" type="slidenum">
+            <a:fld id="{655739DE-3DD4-4FC1-A845-DE3DF1C087D1}" type="slidenum">
               <a:rPr sz="1350">
                 <a:solidFill>
                   <a:srgbClr val="646173"/>
@@ -28286,7 +29403,7 @@
                 <a:ea typeface="Microsoft YaHei"/>
                 <a:cs typeface="Microsoft YaHei"/>
               </a:rPr>
-              <a:t>11</a:t>
+              <a:t>12</a:t>
             </a:fld>
           </a:p>
         </p:txBody>
@@ -29193,7 +30310,7 @@
                 <a:cs typeface="Microsoft YaHei"/>
               </a:defRPr>
             </a:pPr>
-            <a:fld id="{703B147B-5E94-4459-8997-AC43EC26249D}" type="slidenum">
+            <a:fld id="{8D859A62-EC2B-4D28-A1A5-03356FF4CC85}" type="slidenum">
               <a:rPr sz="1350">
                 <a:solidFill>
                   <a:srgbClr val="646173"/>
@@ -29202,7 +30319,7 @@
                 <a:ea typeface="Microsoft YaHei"/>
                 <a:cs typeface="Microsoft YaHei"/>
               </a:rPr>
-              <a:t>12</a:t>
+              <a:t>13</a:t>
             </a:fld>
           </a:p>
         </p:txBody>
@@ -29718,7 +30835,7 @@
                 <a:cs typeface="Microsoft YaHei"/>
               </a:defRPr>
             </a:pPr>
-            <a:fld id="{571872F5-9C3A-4AB6-9840-89F129085E13}" type="slidenum">
+            <a:fld id="{3CA4AFED-9F18-4F37-B04D-FC89BE7134F9}" type="slidenum">
               <a:rPr sz="1350">
                 <a:solidFill>
                   <a:srgbClr val="646173"/>
@@ -29727,7 +30844,7 @@
                 <a:ea typeface="Microsoft YaHei"/>
                 <a:cs typeface="Microsoft YaHei"/>
               </a:rPr>
-              <a:t>16</a:t>
+              <a:t>18</a:t>
             </a:fld>
           </a:p>
         </p:txBody>
@@ -30612,7 +31729,7 @@
                 <a:cs typeface="Microsoft YaHei"/>
               </a:defRPr>
             </a:pPr>
-            <a:fld id="{247F0D38-57D9-4E76-B9E1-E6594D67BBD2}" type="slidenum">
+            <a:fld id="{DD7ED86A-FD4B-447B-AA9E-FB575A2C2232}" type="slidenum">
               <a:rPr sz="1350">
                 <a:solidFill>
                   <a:srgbClr val="646173"/>
@@ -30621,7 +31738,7 @@
                 <a:ea typeface="Microsoft YaHei"/>
                 <a:cs typeface="Microsoft YaHei"/>
               </a:rPr>
-              <a:t>20</a:t>
+              <a:t>22</a:t>
             </a:fld>
           </a:p>
         </p:txBody>
@@ -31066,7 +32183,7 @@
                 <a:cs typeface="Microsoft YaHei"/>
               </a:defRPr>
             </a:pPr>
-            <a:fld id="{7CAFE4FE-8407-40E5-8B56-8412EFE1D66C}" type="slidenum">
+            <a:fld id="{DFB9059A-93EE-481B-9CD9-EEA1979500CE}" type="slidenum">
               <a:rPr sz="1350">
                 <a:solidFill>
                   <a:srgbClr val="646173"/>
@@ -31075,7 +32192,7 @@
                 <a:ea typeface="Microsoft YaHei"/>
                 <a:cs typeface="Microsoft YaHei"/>
               </a:rPr>
-              <a:t>17</a:t>
+              <a:t>19</a:t>
             </a:fld>
           </a:p>
         </p:txBody>
@@ -37555,7 +38672,7 @@
                 <a:ea typeface="Noto Sans SC"/>
                 <a:cs typeface="Noto Sans SC"/>
               </a:rPr>
-              <a:t>P011 共用编译知识；现有详细命令标注为 Windows 实验</a:t>
+              <a:t>P012 共用编译知识；现有详细命令标注为 Windows 实验</a:t>
             </a:r>
           </a:p>
         </p:txBody>

--- a/learning/P01_zephyr_make_project/slides/P001_官方环境安装与源码准备_Linux.pptx
+++ b/learning/P01_zephyr_make_project/slides/P001_官方环境安装与源码准备_Linux.pptx
@@ -30921,29 +30921,29 @@
               </a:defRPr>
             </a:defPPr>
           </a:lstStyle>
-          <a:p xmlns:a="http://schemas.openxmlformats.org/drawingml/2006/main">
-            <a:pPr>
-              <a:defRPr sz="3150" b="1">
-                <a:solidFill>
-                  <a:srgbClr val="29263B"/>
-                </a:solidFill>
-                <a:latin typeface="Microsoft YaHei"/>
-                <a:ea typeface="Microsoft YaHei"/>
-                <a:cs typeface="Microsoft YaHei"/>
-              </a:defRPr>
-            </a:pPr>
-            <a:r>
-              <a:rPr sz="3150" b="1">
-                <a:solidFill>
-                  <a:srgbClr val="29263B"/>
-                </a:solidFill>
-                <a:latin typeface="Microsoft YaHei"/>
-                <a:ea typeface="Microsoft YaHei"/>
-                <a:cs typeface="Microsoft YaHei"/>
-              </a:rPr>
-              <a:t>手动路线：安装 ARM 并保存用户包地址</a:t>
-            </a:r>
-          </a:p>
+          <ns0:p xmlns:ns0="http://schemas.openxmlformats.org/drawingml/2006/main">
+            <ns0:pPr>
+              <ns0:defRPr sz="3150" b="1">
+                <ns0:solidFill>
+                  <ns0:srgbClr val="29263B"/>
+                </ns0:solidFill>
+                <ns0:latin typeface="Microsoft YaHei"/>
+                <ns0:ea typeface="Microsoft YaHei"/>
+                <ns0:cs typeface="Microsoft YaHei"/>
+              </ns0:defRPr>
+            </ns0:pPr>
+            <ns0:r>
+              <ns0:rPr sz="3150" b="1">
+                <ns0:solidFill>
+                  <ns0:srgbClr val="29263B"/>
+                </ns0:solidFill>
+                <ns0:latin typeface="Microsoft YaHei"/>
+                <ns0:ea typeface="Microsoft YaHei"/>
+                <ns0:cs typeface="Microsoft YaHei"/>
+              </ns0:rPr>
+              <ns0:t>手动路线：安装工具并保存用户包地址</ns0:t>
+            </ns0:r>
+          </ns0:p>
         </p:txBody>
       </p:sp>
       <p:sp>
@@ -31031,7 +31031,7 @@
         <p:spPr>
           <a:xfrm xmlns:a="http://schemas.openxmlformats.org/drawingml/2006/main">
             <a:off x="609600" y="1838325"/>
-            <a:ext cx="10972800" cy="2832100"/>
+            <a:ext cx="10972800" cy="3333750"/>
           </a:xfrm>
           <a:prstGeom xmlns:a="http://schemas.openxmlformats.org/drawingml/2006/main" prst="rect">
             <a:avLst/>
@@ -31057,423 +31057,548 @@
               </a:defRPr>
             </a:defPPr>
           </a:lstStyle>
-          <a:p xmlns:a="http://schemas.openxmlformats.org/drawingml/2006/main">
-            <a:pPr>
-              <a:lnSpc>
-                <a:spcPct val="120000"/>
-              </a:lnSpc>
-              <a:defRPr sz="1875" b="0">
-                <a:solidFill>
-                  <a:srgbClr val="005968"/>
-                </a:solidFill>
-                <a:latin typeface="Consolas"/>
-                <a:ea typeface="Consolas"/>
-                <a:cs typeface="Consolas"/>
-              </a:defRPr>
-            </a:pPr>
-            <a:r>
-              <a:rPr sz="1875" b="0">
-                <a:solidFill>
-                  <a:srgbClr val="646173"/>
-                </a:solidFill>
-                <a:latin typeface="Consolas"/>
-                <a:ea typeface="Consolas"/>
-                <a:cs typeface="Consolas"/>
-              </a:rPr>
-              <a:t># Ubuntu 22.04 Bash；手动分支，浏览器已经下载并核对同版 SHA-256。</a:t>
-            </a:r>
-          </a:p>
-          <a:p xmlns:a="http://schemas.openxmlformats.org/drawingml/2006/main">
-            <a:pPr>
-              <a:lnSpc>
-                <a:spcPct val="120000"/>
-              </a:lnSpc>
-              <a:defRPr sz="1875" b="0">
-                <a:solidFill>
-                  <a:srgbClr val="005968"/>
-                </a:solidFill>
-                <a:latin typeface="Consolas"/>
-                <a:ea typeface="Consolas"/>
-                <a:cs typeface="Consolas"/>
-              </a:defRPr>
-            </a:pPr>
-            <a:r>
-              <a:rPr sz="1875" b="0">
-                <a:solidFill>
-                  <a:srgbClr val="A02B93"/>
-                </a:solidFill>
-                <a:latin typeface="Consolas"/>
-                <a:ea typeface="Consolas"/>
-                <a:cs typeface="Consolas"/>
-              </a:rPr>
-              <a:t>cd</a:t>
-            </a:r>
-            <a:r>
-              <a:rPr sz="1875" b="0">
-                <a:solidFill>
-                  <a:srgbClr val="29263B"/>
-                </a:solidFill>
-                <a:latin typeface="Consolas"/>
-                <a:ea typeface="Consolas"/>
-                <a:cs typeface="Consolas"/>
-              </a:rPr>
-              <a:t> </a:t>
-            </a:r>
-            <a:r>
-              <a:rPr sz="1875" b="0">
-                <a:solidFill>
-                  <a:srgbClr val="0070C0"/>
-                </a:solidFill>
-                <a:latin typeface="Consolas"/>
-                <a:ea typeface="Consolas"/>
-                <a:cs typeface="Consolas"/>
-              </a:rPr>
-              <a:t>~/Downloads</a:t>
-            </a:r>
-          </a:p>
-          <a:p xmlns:a="http://schemas.openxmlformats.org/drawingml/2006/main">
-            <a:pPr>
-              <a:lnSpc>
-                <a:spcPct val="120000"/>
-              </a:lnSpc>
-              <a:defRPr sz="1875" b="0">
-                <a:solidFill>
-                  <a:srgbClr val="005968"/>
-                </a:solidFill>
-                <a:latin typeface="Consolas"/>
-                <a:ea typeface="Consolas"/>
-                <a:cs typeface="Consolas"/>
-              </a:defRPr>
-            </a:pPr>
-            <a:r>
-              <a:rPr sz="1875" b="0">
-                <a:solidFill>
-                  <a:srgbClr val="646173"/>
-                </a:solidFill>
-                <a:latin typeface="Consolas"/>
-                <a:ea typeface="Consolas"/>
-                <a:cs typeface="Consolas"/>
-              </a:rPr>
-              <a:t># SDK 根由解压生成；已有同名安装时先停止并核对。</a:t>
-            </a:r>
-          </a:p>
-          <a:p xmlns:a="http://schemas.openxmlformats.org/drawingml/2006/main">
-            <a:pPr>
-              <a:lnSpc>
-                <a:spcPct val="120000"/>
-              </a:lnSpc>
-              <a:defRPr sz="1875" b="0">
-                <a:solidFill>
-                  <a:srgbClr val="005968"/>
-                </a:solidFill>
-                <a:latin typeface="Consolas"/>
-                <a:ea typeface="Consolas"/>
-                <a:cs typeface="Consolas"/>
-              </a:defRPr>
-            </a:pPr>
-            <a:r>
-              <a:rPr sz="1875" b="0">
-                <a:solidFill>
-                  <a:srgbClr val="A02B93"/>
-                </a:solidFill>
-                <a:latin typeface="Consolas"/>
-                <a:ea typeface="Consolas"/>
-                <a:cs typeface="Consolas"/>
-              </a:rPr>
-              <a:t>tar</a:t>
-            </a:r>
-            <a:r>
-              <a:rPr sz="1875" b="0">
-                <a:solidFill>
-                  <a:srgbClr val="29263B"/>
-                </a:solidFill>
-                <a:latin typeface="Consolas"/>
-                <a:ea typeface="Consolas"/>
-                <a:cs typeface="Consolas"/>
-              </a:rPr>
-              <a:t> </a:t>
-            </a:r>
-            <a:r>
-              <a:rPr sz="1875" b="0">
-                <a:solidFill>
-                  <a:srgbClr val="B84E00"/>
-                </a:solidFill>
-                <a:latin typeface="Consolas"/>
-                <a:ea typeface="Consolas"/>
-                <a:cs typeface="Consolas"/>
-              </a:rPr>
-              <a:t>-xf</a:t>
-            </a:r>
-            <a:r>
-              <a:rPr sz="1875" b="0">
-                <a:solidFill>
-                  <a:srgbClr val="29263B"/>
-                </a:solidFill>
-                <a:latin typeface="Consolas"/>
-                <a:ea typeface="Consolas"/>
-                <a:cs typeface="Consolas"/>
-              </a:rPr>
-              <a:t> </a:t>
-            </a:r>
-            <a:r>
-              <a:rPr sz="1875" b="0">
-                <a:solidFill>
-                  <a:srgbClr val="0070C0"/>
-                </a:solidFill>
-                <a:latin typeface="Consolas"/>
-                <a:ea typeface="Consolas"/>
-                <a:cs typeface="Consolas"/>
-              </a:rPr>
-              <a:t>zephyr-sdk-1.0.1_linux-x86_64_minimal.tar.xz</a:t>
-            </a:r>
-            <a:r>
-              <a:rPr sz="1875" b="0">
-                <a:solidFill>
-                  <a:srgbClr val="29263B"/>
-                </a:solidFill>
-                <a:latin typeface="Consolas"/>
-                <a:ea typeface="Consolas"/>
-                <a:cs typeface="Consolas"/>
-              </a:rPr>
-              <a:t> </a:t>
-            </a:r>
-            <a:r>
-              <a:rPr sz="1875" b="0">
-                <a:solidFill>
-                  <a:srgbClr val="B84E00"/>
-                </a:solidFill>
-                <a:latin typeface="Consolas"/>
-                <a:ea typeface="Consolas"/>
-                <a:cs typeface="Consolas"/>
-              </a:rPr>
-              <a:t>-C</a:t>
-            </a:r>
-            <a:r>
-              <a:rPr sz="1875" b="0">
-                <a:solidFill>
-                  <a:srgbClr val="29263B"/>
-                </a:solidFill>
-                <a:latin typeface="Consolas"/>
-                <a:ea typeface="Consolas"/>
-                <a:cs typeface="Consolas"/>
-              </a:rPr>
-              <a:t> "</a:t>
-            </a:r>
-            <a:r>
-              <a:rPr sz="1875" b="0">
-                <a:solidFill>
-                  <a:srgbClr val="B84E00"/>
-                </a:solidFill>
-                <a:latin typeface="Consolas"/>
-                <a:ea typeface="Consolas"/>
-                <a:cs typeface="Consolas"/>
-              </a:rPr>
-              <a:t>$HOME</a:t>
-            </a:r>
-            <a:r>
-              <a:rPr sz="1875" b="0">
-                <a:solidFill>
-                  <a:srgbClr val="29263B"/>
-                </a:solidFill>
-                <a:latin typeface="Consolas"/>
-                <a:ea typeface="Consolas"/>
-                <a:cs typeface="Consolas"/>
-              </a:rPr>
-              <a:t>"</a:t>
-            </a:r>
-          </a:p>
-          <a:p xmlns:a="http://schemas.openxmlformats.org/drawingml/2006/main">
-            <a:pPr>
-              <a:lnSpc>
-                <a:spcPct val="120000"/>
-              </a:lnSpc>
-              <a:defRPr sz="1875" b="0">
-                <a:solidFill>
-                  <a:srgbClr val="005968"/>
-                </a:solidFill>
-                <a:latin typeface="Consolas"/>
-                <a:ea typeface="Consolas"/>
-                <a:cs typeface="Consolas"/>
-              </a:defRPr>
-            </a:pPr>
-            <a:r>
-              <a:rPr sz="1875" b="0">
-                <a:solidFill>
-                  <a:srgbClr val="A02B93"/>
-                </a:solidFill>
-                <a:latin typeface="Consolas"/>
-                <a:ea typeface="Consolas"/>
-                <a:cs typeface="Consolas"/>
-              </a:rPr>
-              <a:t>cd</a:t>
-            </a:r>
-            <a:r>
-              <a:rPr sz="1875" b="0">
-                <a:solidFill>
-                  <a:srgbClr val="29263B"/>
-                </a:solidFill>
-                <a:latin typeface="Consolas"/>
-                <a:ea typeface="Consolas"/>
-                <a:cs typeface="Consolas"/>
-              </a:rPr>
-              <a:t> </a:t>
-            </a:r>
-            <a:r>
-              <a:rPr sz="1875" b="0">
-                <a:solidFill>
-                  <a:srgbClr val="0070C0"/>
-                </a:solidFill>
-                <a:latin typeface="Consolas"/>
-                <a:ea typeface="Consolas"/>
-                <a:cs typeface="Consolas"/>
-              </a:rPr>
-              <a:t>~/zephyr-sdk-1.0.1</a:t>
-            </a:r>
-          </a:p>
-          <a:p xmlns:a="http://schemas.openxmlformats.org/drawingml/2006/main">
-            <a:pPr>
-              <a:lnSpc>
-                <a:spcPct val="120000"/>
-              </a:lnSpc>
-              <a:defRPr sz="1875" b="0">
-                <a:solidFill>
-                  <a:srgbClr val="005968"/>
-                </a:solidFill>
-                <a:latin typeface="Consolas"/>
-                <a:ea typeface="Consolas"/>
-                <a:cs typeface="Consolas"/>
-              </a:defRPr>
-            </a:pPr>
-            <a:r>
-              <a:rPr sz="1875" b="0">
-                <a:solidFill>
-                  <a:srgbClr val="646173"/>
-                </a:solidFill>
-                <a:latin typeface="Consolas"/>
-                <a:ea typeface="Consolas"/>
-                <a:cs typeface="Consolas"/>
-              </a:rPr>
-              <a:t># 官方 setup.sh：-t 安装 ARM；-c 把 SDK 路径保存到当前 Linux 用户的包索引。</a:t>
-            </a:r>
-          </a:p>
-          <a:p xmlns:a="http://schemas.openxmlformats.org/drawingml/2006/main">
-            <a:pPr>
-              <a:lnSpc>
-                <a:spcPct val="120000"/>
-              </a:lnSpc>
-              <a:defRPr sz="1875" b="0">
-                <a:solidFill>
-                  <a:srgbClr val="005968"/>
-                </a:solidFill>
-                <a:latin typeface="Consolas"/>
-                <a:ea typeface="Consolas"/>
-                <a:cs typeface="Consolas"/>
-              </a:defRPr>
-            </a:pPr>
-            <a:r>
-              <a:rPr sz="1875" b="0">
-                <a:solidFill>
-                  <a:srgbClr val="0070C0"/>
-                </a:solidFill>
-                <a:latin typeface="Consolas"/>
-                <a:ea typeface="Consolas"/>
-                <a:cs typeface="Consolas"/>
-              </a:rPr>
-              <a:t>./setup.sh</a:t>
-            </a:r>
-            <a:r>
-              <a:rPr sz="1875" b="0">
-                <a:solidFill>
-                  <a:srgbClr val="29263B"/>
-                </a:solidFill>
-                <a:latin typeface="Consolas"/>
-                <a:ea typeface="Consolas"/>
-                <a:cs typeface="Consolas"/>
-              </a:rPr>
-              <a:t> </a:t>
-            </a:r>
-            <a:r>
-              <a:rPr sz="1875" b="0">
-                <a:solidFill>
-                  <a:srgbClr val="B84E00"/>
-                </a:solidFill>
-                <a:latin typeface="Consolas"/>
-                <a:ea typeface="Consolas"/>
-                <a:cs typeface="Consolas"/>
-              </a:rPr>
-              <a:t>-t</a:t>
-            </a:r>
-            <a:r>
-              <a:rPr sz="1875" b="0">
-                <a:solidFill>
-                  <a:srgbClr val="29263B"/>
-                </a:solidFill>
-                <a:latin typeface="Consolas"/>
-                <a:ea typeface="Consolas"/>
-                <a:cs typeface="Consolas"/>
-              </a:rPr>
-              <a:t> arm-zephyr-eabi </a:t>
-            </a:r>
-            <a:r>
-              <a:rPr sz="1875" b="0">
-                <a:solidFill>
-                  <a:srgbClr val="B84E00"/>
-                </a:solidFill>
-                <a:latin typeface="Consolas"/>
-                <a:ea typeface="Consolas"/>
-                <a:cs typeface="Consolas"/>
-              </a:rPr>
-              <a:t>-c</a:t>
-            </a:r>
-          </a:p>
-          <a:p xmlns:a="http://schemas.openxmlformats.org/drawingml/2006/main">
-            <a:pPr>
-              <a:lnSpc>
-                <a:spcPct val="120000"/>
-              </a:lnSpc>
-              <a:defRPr sz="1875" b="0">
-                <a:solidFill>
-                  <a:srgbClr val="005968"/>
-                </a:solidFill>
-                <a:latin typeface="Consolas"/>
-                <a:ea typeface="Consolas"/>
-                <a:cs typeface="Consolas"/>
-              </a:defRPr>
-            </a:pPr>
-            <a:r>
-              <a:rPr sz="1875" b="0">
-                <a:solidFill>
-                  <a:srgbClr val="0070C0"/>
-                </a:solidFill>
-                <a:latin typeface="Consolas"/>
-                <a:ea typeface="Consolas"/>
-                <a:cs typeface="Consolas"/>
-              </a:rPr>
-              <a:t>./gnu/arm-zephyr-eabi/bin/arm-zephyr-eabi-gcc</a:t>
-            </a:r>
-            <a:r>
-              <a:rPr sz="1875" b="0">
-                <a:solidFill>
-                  <a:srgbClr val="29263B"/>
-                </a:solidFill>
-                <a:latin typeface="Consolas"/>
-                <a:ea typeface="Consolas"/>
-                <a:cs typeface="Consolas"/>
-              </a:rPr>
-              <a:t> </a:t>
-            </a:r>
-            <a:r>
-              <a:rPr sz="1875" b="0">
-                <a:solidFill>
-                  <a:srgbClr val="B84E00"/>
-                </a:solidFill>
-                <a:latin typeface="Consolas"/>
-                <a:ea typeface="Consolas"/>
-                <a:cs typeface="Consolas"/>
-              </a:rPr>
-              <a:t>--version</a:t>
-            </a:r>
-          </a:p>
+          <ns0:p xmlns:ns0="http://schemas.openxmlformats.org/drawingml/2006/main">
+            <ns0:pPr>
+              <ns0:lnSpc>
+                <ns0:spcPct val="120000"/>
+              </ns0:lnSpc>
+              <ns0:defRPr sz="1875" b="0">
+                <ns0:solidFill>
+                  <ns0:srgbClr val="005968"/>
+                </ns0:solidFill>
+                <ns0:latin typeface="Consolas"/>
+                <ns0:ea typeface="Consolas"/>
+                <ns0:cs typeface="Consolas"/>
+              </ns0:defRPr>
+            </ns0:pPr>
+            <ns0:r>
+              <ns0:rPr sz="1875" b="0">
+                <ns0:solidFill>
+                  <ns0:srgbClr val="646173"/>
+                </ns0:solidFill>
+                <ns0:latin typeface="Consolas"/>
+                <ns0:ea typeface="Consolas"/>
+                <ns0:cs typeface="Consolas"/>
+              </ns0:rPr>
+              <ns0:t># Ubuntu 22.04 Bash；手动分支，浏览器已经下载并核对同版 SHA-256。</ns0:t>
+            </ns0:r>
+          </ns0:p>
+          <ns0:p xmlns:ns0="http://schemas.openxmlformats.org/drawingml/2006/main">
+            <ns0:pPr>
+              <ns0:lnSpc>
+                <ns0:spcPct val="120000"/>
+              </ns0:lnSpc>
+              <ns0:defRPr sz="1875" b="0">
+                <ns0:solidFill>
+                  <ns0:srgbClr val="005968"/>
+                </ns0:solidFill>
+                <ns0:latin typeface="Consolas"/>
+                <ns0:ea typeface="Consolas"/>
+                <ns0:cs typeface="Consolas"/>
+              </ns0:defRPr>
+            </ns0:pPr>
+            <ns0:r>
+              <ns0:rPr sz="1875" b="0">
+                <ns0:solidFill>
+                  <ns0:srgbClr val="A02B93"/>
+                </ns0:solidFill>
+                <ns0:latin typeface="Consolas"/>
+                <ns0:ea typeface="Consolas"/>
+                <ns0:cs typeface="Consolas"/>
+              </ns0:rPr>
+              <ns0:t>cd</ns0:t>
+            </ns0:r>
+            <ns0:r>
+              <ns0:rPr sz="1875" b="0">
+                <ns0:solidFill>
+                  <ns0:srgbClr val="29263B"/>
+                </ns0:solidFill>
+                <ns0:latin typeface="Consolas"/>
+                <ns0:ea typeface="Consolas"/>
+                <ns0:cs typeface="Consolas"/>
+              </ns0:rPr>
+              <ns0:t xml:space="preserve"> </ns0:t>
+            </ns0:r>
+            <ns0:r>
+              <ns0:rPr sz="1875" b="0">
+                <ns0:solidFill>
+                  <ns0:srgbClr val="0070C0"/>
+                </ns0:solidFill>
+                <ns0:latin typeface="Consolas"/>
+                <ns0:ea typeface="Consolas"/>
+                <ns0:cs typeface="Consolas"/>
+              </ns0:rPr>
+              <ns0:t>~/Downloads</ns0:t>
+            </ns0:r>
+          </ns0:p>
+          <ns0:p xmlns:ns0="http://schemas.openxmlformats.org/drawingml/2006/main">
+            <ns0:pPr>
+              <ns0:lnSpc>
+                <ns0:spcPct val="120000"/>
+              </ns0:lnSpc>
+              <ns0:defRPr sz="1875" b="0">
+                <ns0:solidFill>
+                  <ns0:srgbClr val="005968"/>
+                </ns0:solidFill>
+                <ns0:latin typeface="Consolas"/>
+                <ns0:ea typeface="Consolas"/>
+                <ns0:cs typeface="Consolas"/>
+              </ns0:defRPr>
+            </ns0:pPr>
+            <ns0:r>
+              <ns0:rPr sz="1875" b="0">
+                <ns0:solidFill>
+                  <ns0:srgbClr val="646173"/>
+                </ns0:solidFill>
+                <ns0:latin typeface="Consolas"/>
+                <ns0:ea typeface="Consolas"/>
+                <ns0:cs typeface="Consolas"/>
+              </ns0:rPr>
+              <ns0:t># SDK 根由解压生成；已有同名安装时先停止并核对。</ns0:t>
+            </ns0:r>
+          </ns0:p>
+          <ns0:p xmlns:ns0="http://schemas.openxmlformats.org/drawingml/2006/main">
+            <ns0:pPr>
+              <ns0:lnSpc>
+                <ns0:spcPct val="120000"/>
+              </ns0:lnSpc>
+              <ns0:defRPr sz="1875" b="0">
+                <ns0:solidFill>
+                  <ns0:srgbClr val="005968"/>
+                </ns0:solidFill>
+                <ns0:latin typeface="Consolas"/>
+                <ns0:ea typeface="Consolas"/>
+                <ns0:cs typeface="Consolas"/>
+              </ns0:defRPr>
+            </ns0:pPr>
+            <ns0:r>
+              <ns0:rPr sz="1875" b="0">
+                <ns0:solidFill>
+                  <ns0:srgbClr val="A02B93"/>
+                </ns0:solidFill>
+                <ns0:latin typeface="Consolas"/>
+                <ns0:ea typeface="Consolas"/>
+                <ns0:cs typeface="Consolas"/>
+              </ns0:rPr>
+              <ns0:t>tar</ns0:t>
+            </ns0:r>
+            <ns0:r>
+              <ns0:rPr sz="1875" b="0">
+                <ns0:solidFill>
+                  <ns0:srgbClr val="29263B"/>
+                </ns0:solidFill>
+                <ns0:latin typeface="Consolas"/>
+                <ns0:ea typeface="Consolas"/>
+                <ns0:cs typeface="Consolas"/>
+              </ns0:rPr>
+              <ns0:t xml:space="preserve"> </ns0:t>
+            </ns0:r>
+            <ns0:r>
+              <ns0:rPr sz="1875" b="0">
+                <ns0:solidFill>
+                  <ns0:srgbClr val="B84E00"/>
+                </ns0:solidFill>
+                <ns0:latin typeface="Consolas"/>
+                <ns0:ea typeface="Consolas"/>
+                <ns0:cs typeface="Consolas"/>
+              </ns0:rPr>
+              <ns0:t>-xf</ns0:t>
+            </ns0:r>
+            <ns0:r>
+              <ns0:rPr sz="1875" b="0">
+                <ns0:solidFill>
+                  <ns0:srgbClr val="29263B"/>
+                </ns0:solidFill>
+                <ns0:latin typeface="Consolas"/>
+                <ns0:ea typeface="Consolas"/>
+                <ns0:cs typeface="Consolas"/>
+              </ns0:rPr>
+              <ns0:t xml:space="preserve"> </ns0:t>
+            </ns0:r>
+            <ns0:r>
+              <ns0:rPr sz="1875" b="0">
+                <ns0:solidFill>
+                  <ns0:srgbClr val="0070C0"/>
+                </ns0:solidFill>
+                <ns0:latin typeface="Consolas"/>
+                <ns0:ea typeface="Consolas"/>
+                <ns0:cs typeface="Consolas"/>
+              </ns0:rPr>
+              <ns0:t>zephyr-sdk-1.0.1_linux-x86_64_minimal.tar.xz</ns0:t>
+            </ns0:r>
+            <ns0:r>
+              <ns0:rPr sz="1875" b="0">
+                <ns0:solidFill>
+                  <ns0:srgbClr val="29263B"/>
+                </ns0:solidFill>
+                <ns0:latin typeface="Consolas"/>
+                <ns0:ea typeface="Consolas"/>
+                <ns0:cs typeface="Consolas"/>
+              </ns0:rPr>
+              <ns0:t xml:space="preserve"> </ns0:t>
+            </ns0:r>
+            <ns0:r>
+              <ns0:rPr sz="1875" b="0">
+                <ns0:solidFill>
+                  <ns0:srgbClr val="B84E00"/>
+                </ns0:solidFill>
+                <ns0:latin typeface="Consolas"/>
+                <ns0:ea typeface="Consolas"/>
+                <ns0:cs typeface="Consolas"/>
+              </ns0:rPr>
+              <ns0:t>-C</ns0:t>
+            </ns0:r>
+            <ns0:r>
+              <ns0:rPr sz="1875" b="0">
+                <ns0:solidFill>
+                  <ns0:srgbClr val="29263B"/>
+                </ns0:solidFill>
+                <ns0:latin typeface="Consolas"/>
+                <ns0:ea typeface="Consolas"/>
+                <ns0:cs typeface="Consolas"/>
+              </ns0:rPr>
+              <ns0:t xml:space="preserve"> "</ns0:t>
+            </ns0:r>
+            <ns0:r>
+              <ns0:rPr sz="1875" b="0">
+                <ns0:solidFill>
+                  <ns0:srgbClr val="B84E00"/>
+                </ns0:solidFill>
+                <ns0:latin typeface="Consolas"/>
+                <ns0:ea typeface="Consolas"/>
+                <ns0:cs typeface="Consolas"/>
+              </ns0:rPr>
+              <ns0:t>$HOME</ns0:t>
+            </ns0:r>
+            <ns0:r>
+              <ns0:rPr sz="1875" b="0">
+                <ns0:solidFill>
+                  <ns0:srgbClr val="29263B"/>
+                </ns0:solidFill>
+                <ns0:latin typeface="Consolas"/>
+                <ns0:ea typeface="Consolas"/>
+                <ns0:cs typeface="Consolas"/>
+              </ns0:rPr>
+              <ns0:t>"</ns0:t>
+            </ns0:r>
+          </ns0:p>
+          <ns0:p xmlns:ns0="http://schemas.openxmlformats.org/drawingml/2006/main">
+            <ns0:pPr>
+              <ns0:lnSpc>
+                <ns0:spcPct val="120000"/>
+              </ns0:lnSpc>
+              <ns0:defRPr sz="1875" b="0">
+                <ns0:solidFill>
+                  <ns0:srgbClr val="005968"/>
+                </ns0:solidFill>
+                <ns0:latin typeface="Consolas"/>
+                <ns0:ea typeface="Consolas"/>
+                <ns0:cs typeface="Consolas"/>
+              </ns0:defRPr>
+            </ns0:pPr>
+            <ns0:r>
+              <ns0:rPr sz="1875" b="0">
+                <ns0:solidFill>
+                  <ns0:srgbClr val="A02B93"/>
+                </ns0:solidFill>
+                <ns0:latin typeface="Consolas"/>
+                <ns0:ea typeface="Consolas"/>
+                <ns0:cs typeface="Consolas"/>
+              </ns0:rPr>
+              <ns0:t>cd</ns0:t>
+            </ns0:r>
+            <ns0:r>
+              <ns0:rPr sz="1875" b="0">
+                <ns0:solidFill>
+                  <ns0:srgbClr val="29263B"/>
+                </ns0:solidFill>
+                <ns0:latin typeface="Consolas"/>
+                <ns0:ea typeface="Consolas"/>
+                <ns0:cs typeface="Consolas"/>
+              </ns0:rPr>
+              <ns0:t xml:space="preserve"> </ns0:t>
+            </ns0:r>
+            <ns0:r>
+              <ns0:rPr sz="1875" b="0">
+                <ns0:solidFill>
+                  <ns0:srgbClr val="0070C0"/>
+                </ns0:solidFill>
+                <ns0:latin typeface="Consolas"/>
+                <ns0:ea typeface="Consolas"/>
+                <ns0:cs typeface="Consolas"/>
+              </ns0:rPr>
+              <ns0:t>~/zephyr-sdk-1.0.1</ns0:t>
+            </ns0:r>
+          </ns0:p>
+          <ns0:p xmlns:ns0="http://schemas.openxmlformats.org/drawingml/2006/main">
+            <ns0:pPr>
+              <ns0:lnSpc>
+                <ns0:spcPct val="120000"/>
+              </ns0:lnSpc>
+              <ns0:defRPr sz="1875" b="0">
+                <ns0:solidFill>
+                  <ns0:srgbClr val="005968"/>
+                </ns0:solidFill>
+                <ns0:latin typeface="Consolas"/>
+                <ns0:ea typeface="Consolas"/>
+                <ns0:cs typeface="Consolas"/>
+              </ns0:defRPr>
+            </ns0:pPr>
+            <ns0:r>
+              <ns0:rPr sz="1875" b="0">
+                <ns0:solidFill>
+                  <ns0:srgbClr val="646173"/>
+                </ns0:solidFill>
+                <ns0:latin typeface="Consolas"/>
+                <ns0:ea typeface="Consolas"/>
+                <ns0:cs typeface="Consolas"/>
+              </ns0:rPr>
+              <ns0:t># 官方 setup.sh：-t 安装 ARM；-h 初始化主机工具；-c 保存用户包地址。</ns0:t>
+            </ns0:r>
+          </ns0:p>
+          <ns0:p xmlns:ns0="http://schemas.openxmlformats.org/drawingml/2006/main">
+            <ns0:pPr>
+              <ns0:lnSpc>
+                <ns0:spcPct val="120000"/>
+              </ns0:lnSpc>
+              <ns0:defRPr sz="1875" b="0">
+                <ns0:solidFill>
+                  <ns0:srgbClr val="005968"/>
+                </ns0:solidFill>
+                <ns0:latin typeface="Consolas"/>
+                <ns0:ea typeface="Consolas"/>
+                <ns0:cs typeface="Consolas"/>
+              </ns0:defRPr>
+            </ns0:pPr>
+            <ns0:r>
+              <ns0:rPr sz="1875" b="0">
+                <ns0:solidFill>
+                  <ns0:srgbClr val="0070C0"/>
+                </ns0:solidFill>
+                <ns0:latin typeface="Consolas"/>
+                <ns0:ea typeface="Consolas"/>
+                <ns0:cs typeface="Consolas"/>
+              </ns0:rPr>
+              <ns0:t>./setup.sh</ns0:t>
+            </ns0:r>
+            <ns0:r>
+              <ns0:rPr sz="1875" b="0">
+                <ns0:solidFill>
+                  <ns0:srgbClr val="29263B"/>
+                </ns0:solidFill>
+                <ns0:latin typeface="Consolas"/>
+                <ns0:ea typeface="Consolas"/>
+                <ns0:cs typeface="Consolas"/>
+              </ns0:rPr>
+              <ns0:t xml:space="preserve"> </ns0:t>
+            </ns0:r>
+            <ns0:r>
+              <ns0:rPr sz="1875" b="0">
+                <ns0:solidFill>
+                  <ns0:srgbClr val="B84E00"/>
+                </ns0:solidFill>
+                <ns0:latin typeface="Consolas"/>
+                <ns0:ea typeface="Consolas"/>
+                <ns0:cs typeface="Consolas"/>
+              </ns0:rPr>
+              <ns0:t>-t</ns0:t>
+            </ns0:r>
+            <ns0:r>
+              <ns0:rPr sz="1875" b="0">
+                <ns0:solidFill>
+                  <ns0:srgbClr val="29263B"/>
+                </ns0:solidFill>
+                <ns0:latin typeface="Consolas"/>
+                <ns0:ea typeface="Consolas"/>
+                <ns0:cs typeface="Consolas"/>
+              </ns0:rPr>
+              <ns0:t xml:space="preserve"> arm-zephyr-eabi </ns0:t>
+            </ns0:r>
+            <ns0:r>
+              <ns0:rPr sz="1875" b="0">
+                <ns0:solidFill>
+                  <ns0:srgbClr val="B84E00"/>
+                </ns0:solidFill>
+                <ns0:latin typeface="Consolas"/>
+                <ns0:ea typeface="Consolas"/>
+                <ns0:cs typeface="Consolas"/>
+              </ns0:rPr>
+              <ns0:t>-h</ns0:t>
+            </ns0:r>
+            <ns0:r>
+              <ns0:rPr sz="1875" b="0">
+                <ns0:solidFill>
+                  <ns0:srgbClr val="29263B"/>
+                </ns0:solidFill>
+                <ns0:latin typeface="Consolas"/>
+                <ns0:ea typeface="Consolas"/>
+                <ns0:cs typeface="Consolas"/>
+              </ns0:rPr>
+              <ns0:t xml:space="preserve"> </ns0:t>
+            </ns0:r>
+            <ns0:r>
+              <ns0:rPr sz="1875" b="0">
+                <ns0:solidFill>
+                  <ns0:srgbClr val="B84E00"/>
+                </ns0:solidFill>
+                <ns0:latin typeface="Consolas"/>
+                <ns0:ea typeface="Consolas"/>
+                <ns0:cs typeface="Consolas"/>
+              </ns0:rPr>
+              <ns0:t>-c</ns0:t>
+            </ns0:r>
+          </ns0:p>
+          <ns0:p xmlns:ns0="http://schemas.openxmlformats.org/drawingml/2006/main">
+            <ns0:pPr>
+              <ns0:lnSpc>
+                <ns0:spcPct val="120000"/>
+              </ns0:lnSpc>
+              <ns0:defRPr sz="1875" b="0">
+                <ns0:solidFill>
+                  <ns0:srgbClr val="005968"/>
+                </ns0:solidFill>
+                <ns0:latin typeface="Consolas"/>
+                <ns0:ea typeface="Consolas"/>
+                <ns0:cs typeface="Consolas"/>
+              </ns0:defRPr>
+            </ns0:pPr>
+            <ns0:r>
+              <ns0:rPr sz="1875" b="0">
+                <ns0:solidFill>
+                  <ns0:srgbClr val="0070C0"/>
+                </ns0:solidFill>
+                <ns0:latin typeface="Consolas"/>
+                <ns0:ea typeface="Consolas"/>
+                <ns0:cs typeface="Consolas"/>
+              </ns0:rPr>
+              <ns0:t>./gnu/arm-zephyr-eabi/bin/arm-zephyr-eabi-gcc</ns0:t>
+            </ns0:r>
+            <ns0:r>
+              <ns0:rPr sz="1875" b="0">
+                <ns0:solidFill>
+                  <ns0:srgbClr val="29263B"/>
+                </ns0:solidFill>
+                <ns0:latin typeface="Consolas"/>
+                <ns0:ea typeface="Consolas"/>
+                <ns0:cs typeface="Consolas"/>
+              </ns0:rPr>
+              <ns0:t xml:space="preserve"> </ns0:t>
+            </ns0:r>
+            <ns0:r>
+              <ns0:rPr sz="1875" b="0">
+                <ns0:solidFill>
+                  <ns0:srgbClr val="B84E00"/>
+                </ns0:solidFill>
+                <ns0:latin typeface="Consolas"/>
+                <ns0:ea typeface="Consolas"/>
+                <ns0:cs typeface="Consolas"/>
+              </ns0:rPr>
+              <ns0:t>--version</ns0:t>
+            </ns0:r>
+          </ns0:p>
+          <ns0:p xmlns:ns0="http://schemas.openxmlformats.org/drawingml/2006/main">
+            <ns0:pPr>
+              <ns0:lnSpc>
+                <ns0:spcPct val="120000"/>
+              </ns0:lnSpc>
+              <ns0:defRPr sz="1875" b="0">
+                <ns0:solidFill>
+                  <ns0:srgbClr val="005968"/>
+                </ns0:solidFill>
+                <ns0:latin typeface="Consolas"/>
+                <ns0:ea typeface="Consolas"/>
+                <ns0:cs typeface="Consolas"/>
+              </ns0:defRPr>
+            </ns0:pPr>
+            <ns0:r>
+              <ns0:rPr sz="1875" b="0">
+                <ns0:solidFill>
+                  <ns0:srgbClr val="A02B93"/>
+                </ns0:solidFill>
+                <ns0:latin typeface="Consolas"/>
+                <ns0:ea typeface="Consolas"/>
+                <ns0:cs typeface="Consolas"/>
+              </ns0:rPr>
+              <ns0:t>test</ns0:t>
+            </ns0:r>
+            <ns0:r>
+              <ns0:rPr sz="1875" b="0">
+                <ns0:solidFill>
+                  <ns0:srgbClr val="29263B"/>
+                </ns0:solidFill>
+                <ns0:latin typeface="Consolas"/>
+                <ns0:ea typeface="Consolas"/>
+                <ns0:cs typeface="Consolas"/>
+              </ns0:rPr>
+              <ns0:t xml:space="preserve"> </ns0:t>
+            </ns0:r>
+            <ns0:r>
+              <ns0:rPr sz="1875" b="0">
+                <ns0:solidFill>
+                  <ns0:srgbClr val="B84E00"/>
+                </ns0:solidFill>
+                <ns0:latin typeface="Consolas"/>
+                <ns0:ea typeface="Consolas"/>
+                <ns0:cs typeface="Consolas"/>
+              </ns0:rPr>
+              <ns0:t>-d</ns0:t>
+            </ns0:r>
+            <ns0:r>
+              <ns0:rPr sz="1875" b="0">
+                <ns0:solidFill>
+                  <ns0:srgbClr val="29263B"/>
+                </ns0:solidFill>
+                <ns0:latin typeface="Consolas"/>
+                <ns0:ea typeface="Consolas"/>
+                <ns0:cs typeface="Consolas"/>
+              </ns0:rPr>
+              <ns0:t xml:space="preserve"> </ns0:t>
+            </ns0:r>
+            <ns0:r>
+              <ns0:rPr sz="1875" b="0">
+                <ns0:solidFill>
+                  <ns0:srgbClr val="0070C0"/>
+                </ns0:solidFill>
+                <ns0:latin typeface="Consolas"/>
+                <ns0:ea typeface="Consolas"/>
+                <ns0:cs typeface="Consolas"/>
+              </ns0:rPr>
+              <ns0:t>hosttools/sysroots</ns0:t>
+            </ns0:r>
+            <ns0:r>
+              <ns0:rPr sz="1875" b="0">
+                <ns0:solidFill>
+                  <ns0:srgbClr val="29263B"/>
+                </ns0:solidFill>
+                <ns0:latin typeface="Consolas"/>
+                <ns0:ea typeface="Consolas"/>
+                <ns0:cs typeface="Consolas"/>
+              </ns0:rPr>
+              <ns0:t xml:space="preserve"> &amp;&amp; </ns0:t>
+            </ns0:r>
+            <ns0:r>
+              <ns0:rPr sz="1875" b="0">
+                <ns0:solidFill>
+                  <ns0:srgbClr val="A02B93"/>
+                </ns0:solidFill>
+                <ns0:latin typeface="Consolas"/>
+                <ns0:ea typeface="Consolas"/>
+                <ns0:cs typeface="Consolas"/>
+              </ns0:rPr>
+              <ns0:t>printf</ns0:t>
+            </ns0:r>
+            <ns0:r>
+              <ns0:rPr sz="1875" b="0">
+                <ns0:solidFill>
+                  <ns0:srgbClr val="29263B"/>
+                </ns0:solidFill>
+                <ns0:latin typeface="Consolas"/>
+                <ns0:ea typeface="Consolas"/>
+                <ns0:cs typeface="Consolas"/>
+              </ns0:rPr>
+              <ns0:t xml:space="preserve"> 'Linux SDK 主机工具已展开。\n'</ns0:t>
+            </ns0:r>
+          </ns0:p>
         </p:txBody>
       </p:sp>
       <p:sp>
@@ -31492,8 +31617,8 @@
         </p:nvSpPr>
         <p:spPr>
           <a:xfrm xmlns:a="http://schemas.openxmlformats.org/drawingml/2006/main">
-            <a:off x="609600" y="4762500"/>
-            <a:ext cx="10972800" cy="1257300"/>
+            <a:off x="609600" y="5238750"/>
+            <a:ext cx="10972800" cy="762000"/>
           </a:xfrm>
           <a:prstGeom xmlns:a="http://schemas.openxmlformats.org/drawingml/2006/main" prst="rect">
             <a:avLst/>
@@ -31519,91 +31644,135 @@
               </a:defRPr>
             </a:defPPr>
           </a:lstStyle>
-          <a:p xmlns:a="http://schemas.openxmlformats.org/drawingml/2006/main">
-            <a:pPr>
-              <a:lnSpc>
-                <a:spcPct val="120000"/>
-              </a:lnSpc>
-              <a:defRPr sz="1875" b="0">
-                <a:solidFill>
-                  <a:srgbClr val="29263B"/>
-                </a:solidFill>
-                <a:latin typeface="Microsoft YaHei"/>
-                <a:ea typeface="Microsoft YaHei"/>
-                <a:cs typeface="Microsoft YaHei"/>
-              </a:defRPr>
-            </a:pPr>
-            <a:r>
-              <a:rPr sz="1875" b="0">
-                <a:solidFill>
-                  <a:srgbClr val="B84E00"/>
-                </a:solidFill>
-                <a:latin typeface="Microsoft YaHei"/>
-                <a:ea typeface="Microsoft YaHei"/>
-                <a:cs typeface="Microsoft YaHei"/>
-              </a:rPr>
-              <a:t>-t</a:t>
-            </a:r>
-            <a:r>
-              <a:rPr sz="1875" b="0">
-                <a:solidFill>
-                  <a:srgbClr val="29263B"/>
-                </a:solidFill>
-                <a:latin typeface="Microsoft YaHei"/>
-                <a:ea typeface="Microsoft YaHei"/>
-                <a:cs typeface="Microsoft YaHei"/>
-              </a:rPr>
-              <a:t> 安装工具链；</a:t>
-            </a:r>
-            <a:r>
-              <a:rPr sz="1875" b="0">
-                <a:solidFill>
-                  <a:srgbClr val="B84E00"/>
-                </a:solidFill>
-                <a:latin typeface="Microsoft YaHei"/>
-                <a:ea typeface="Microsoft YaHei"/>
-                <a:cs typeface="Microsoft YaHei"/>
-              </a:rPr>
-              <a:t>-c</a:t>
-            </a:r>
-            <a:r>
-              <a:rPr sz="1875" b="0">
-                <a:solidFill>
-                  <a:srgbClr val="29263B"/>
-                </a:solidFill>
-                <a:latin typeface="Microsoft YaHei"/>
-                <a:ea typeface="Microsoft YaHei"/>
-                <a:cs typeface="Microsoft YaHei"/>
-              </a:rPr>
-              <a:t> 保存当前 Linux 用户的 SDK 查找地址。</a:t>
-            </a:r>
-          </a:p>
-          <a:p xmlns:a="http://schemas.openxmlformats.org/drawingml/2006/main">
-            <a:pPr>
-              <a:lnSpc>
-                <a:spcPct val="120000"/>
-              </a:lnSpc>
-              <a:defRPr sz="1875" b="0">
-                <a:solidFill>
-                  <a:srgbClr val="29263B"/>
-                </a:solidFill>
-                <a:latin typeface="Microsoft YaHei"/>
-                <a:ea typeface="Microsoft YaHei"/>
-                <a:cs typeface="Microsoft YaHei"/>
-              </a:defRPr>
-            </a:pPr>
-            <a:r>
-              <a:rPr sz="1875" b="0">
-                <a:solidFill>
-                  <a:srgbClr val="29263B"/>
-                </a:solidFill>
-                <a:latin typeface="Microsoft YaHei"/>
-                <a:ea typeface="Microsoft YaHei"/>
-                <a:cs typeface="Microsoft YaHei"/>
-              </a:rPr>
-              <a:t>该记录不绑定一个工程；实际构建仍要核对配置输出。</a:t>
-            </a:r>
-          </a:p>
+          <ns0:p xmlns:ns0="http://schemas.openxmlformats.org/drawingml/2006/main">
+            <ns0:pPr>
+              <ns0:lnSpc>
+                <ns0:spcPct val="120000"/>
+              </ns0:lnSpc>
+              <ns0:defRPr sz="1875" b="0">
+                <ns0:solidFill>
+                  <ns0:srgbClr val="29263B"/>
+                </ns0:solidFill>
+                <ns0:latin typeface="Microsoft YaHei"/>
+                <ns0:ea typeface="Microsoft YaHei"/>
+                <ns0:cs typeface="Microsoft YaHei"/>
+              </ns0:defRPr>
+            </ns0:pPr>
+            <ns0:r>
+              <ns0:rPr sz="1875" b="0">
+                <ns0:solidFill>
+                  <ns0:srgbClr val="B84E00"/>
+                </ns0:solidFill>
+                <ns0:latin typeface="Microsoft YaHei"/>
+                <ns0:ea typeface="Microsoft YaHei"/>
+                <ns0:cs typeface="Microsoft YaHei"/>
+              </ns0:rPr>
+              <ns0:t>-t</ns0:t>
+            </ns0:r>
+            <ns0:r>
+              <ns0:rPr sz="1875" b="0">
+                <ns0:solidFill>
+                  <ns0:srgbClr val="29263B"/>
+                </ns0:solidFill>
+                <ns0:latin typeface="Microsoft YaHei"/>
+                <ns0:ea typeface="Microsoft YaHei"/>
+                <ns0:cs typeface="Microsoft YaHei"/>
+              </ns0:rPr>
+              <ns0:t xml:space="preserve"> 安装 ARM；</ns0:t>
+            </ns0:r>
+            <ns0:r>
+              <ns0:rPr sz="1875" b="0">
+                <ns0:solidFill>
+                  <ns0:srgbClr val="B84E00"/>
+                </ns0:solidFill>
+                <ns0:latin typeface="Microsoft YaHei"/>
+                <ns0:ea typeface="Microsoft YaHei"/>
+                <ns0:cs typeface="Microsoft YaHei"/>
+              </ns0:rPr>
+              <ns0:t>-h</ns0:t>
+            </ns0:r>
+            <ns0:r>
+              <ns0:rPr sz="1875" b="0">
+                <ns0:solidFill>
+                  <ns0:srgbClr val="29263B"/>
+                </ns0:solidFill>
+                <ns0:latin typeface="Microsoft YaHei"/>
+                <ns0:ea typeface="Microsoft YaHei"/>
+                <ns0:cs typeface="Microsoft YaHei"/>
+              </ns0:rPr>
+              <ns0:t xml:space="preserve"> 展开主机工具；</ns0:t>
+            </ns0:r>
+            <ns0:r>
+              <ns0:rPr sz="1875" b="0">
+                <ns0:solidFill>
+                  <ns0:srgbClr val="B84E00"/>
+                </ns0:solidFill>
+                <ns0:latin typeface="Microsoft YaHei"/>
+                <ns0:ea typeface="Microsoft YaHei"/>
+                <ns0:cs typeface="Microsoft YaHei"/>
+              </ns0:rPr>
+              <ns0:t>-c</ns0:t>
+            </ns0:r>
+            <ns0:r>
+              <ns0:rPr sz="1875" b="0">
+                <ns0:solidFill>
+                  <ns0:srgbClr val="29263B"/>
+                </ns0:solidFill>
+                <ns0:latin typeface="Microsoft YaHei"/>
+                <ns0:ea typeface="Microsoft YaHei"/>
+                <ns0:cs typeface="Microsoft YaHei"/>
+              </ns0:rPr>
+              <ns0:t xml:space="preserve"> 保存用户包地址。</ns0:t>
+            </ns0:r>
+          </ns0:p>
+          <ns0:p xmlns:ns0="http://schemas.openxmlformats.org/drawingml/2006/main">
+            <ns0:pPr>
+              <ns0:lnSpc>
+                <ns0:spcPct val="120000"/>
+              </ns0:lnSpc>
+              <ns0:defRPr sz="1875" b="0">
+                <ns0:solidFill>
+                  <ns0:srgbClr val="29263B"/>
+                </ns0:solidFill>
+                <ns0:latin typeface="Microsoft YaHei"/>
+                <ns0:ea typeface="Microsoft YaHei"/>
+                <ns0:cs typeface="Microsoft YaHei"/>
+              </ns0:defRPr>
+            </ns0:pPr>
+            <ns0:r>
+              <ns0:rPr sz="1875" b="0">
+                <ns0:solidFill>
+                  <ns0:srgbClr val="29263B"/>
+                </ns0:solidFill>
+                <ns0:latin typeface="Microsoft YaHei"/>
+                <ns0:ea typeface="Microsoft YaHei"/>
+                <ns0:cs typeface="Microsoft YaHei"/>
+              </ns0:rPr>
+              <ns0:t xml:space="preserve">检查 </ns0:t>
+            </ns0:r>
+            <ns0:r>
+              <ns0:rPr sz="1875" b="0">
+                <ns0:solidFill>
+                  <ns0:srgbClr val="0070C0"/>
+                </ns0:solidFill>
+                <ns0:latin typeface="Microsoft YaHei"/>
+                <ns0:ea typeface="Microsoft YaHei"/>
+                <ns0:cs typeface="Microsoft YaHei"/>
+              </ns0:rPr>
+              <ns0:t>hosttools/sysroots</ns0:t>
+            </ns0:r>
+            <ns0:r>
+              <ns0:rPr sz="1875" b="0">
+                <ns0:solidFill>
+                  <ns0:srgbClr val="29263B"/>
+                </ns0:solidFill>
+                <ns0:latin typeface="Microsoft YaHei"/>
+                <ns0:ea typeface="Microsoft YaHei"/>
+                <ns0:cs typeface="Microsoft YaHei"/>
+              </ns0:rPr>
+              <ns0:t>；找到目录不等于已运行 QEMU。</ns0:t>
+            </ns0:r>
+          </ns0:p>
         </p:txBody>
       </p:sp>
       <p:sp>
@@ -31951,184 +32120,1340 @@
               </a:defRPr>
             </a:defPPr>
           </a:lstStyle>
-          <a:p xmlns:a="http://schemas.openxmlformats.org/drawingml/2006/main">
-            <a:pPr>
-              <a:lnSpc>
-                <a:spcPct val="120000"/>
-              </a:lnSpc>
-              <a:defRPr sz="2175" b="0">
-                <a:solidFill>
-                  <a:srgbClr val="29263B"/>
-                </a:solidFill>
-                <a:latin typeface="Microsoft YaHei"/>
-                <a:ea typeface="Microsoft YaHei"/>
-                <a:cs typeface="Microsoft YaHei"/>
-              </a:defRPr>
-            </a:pPr>
-            <a:r>
-              <a:rPr sz="2175" b="0">
-                <a:solidFill>
-                  <a:srgbClr val="29263B"/>
-                </a:solidFill>
-                <a:latin typeface="Microsoft YaHei"/>
-                <a:ea typeface="Microsoft YaHei"/>
-                <a:cs typeface="Microsoft YaHei"/>
-              </a:rPr>
-              <a:t>GNU 包已有目标工具，Minimal 通过 </a:t>
-            </a:r>
-            <a:r>
-              <a:rPr sz="2175" b="0">
-                <a:solidFill>
-                  <a:srgbClr val="0070C0"/>
-                </a:solidFill>
-                <a:latin typeface="Microsoft YaHei"/>
-                <a:ea typeface="Microsoft YaHei"/>
-                <a:cs typeface="Microsoft YaHei"/>
-              </a:rPr>
-              <a:t>setup.sh</a:t>
-            </a:r>
-            <a:r>
-              <a:rPr sz="2175" b="0">
-                <a:solidFill>
-                  <a:srgbClr val="29263B"/>
-                </a:solidFill>
-                <a:latin typeface="Microsoft YaHei"/>
-                <a:ea typeface="Microsoft YaHei"/>
-                <a:cs typeface="Microsoft YaHei"/>
-              </a:rPr>
-              <a:t> </a:t>
-            </a:r>
-            <a:r>
-              <a:rPr sz="2175" b="0">
-                <a:solidFill>
-                  <a:srgbClr val="B84E00"/>
-                </a:solidFill>
-                <a:latin typeface="Microsoft YaHei"/>
-                <a:ea typeface="Microsoft YaHei"/>
-                <a:cs typeface="Microsoft YaHei"/>
-              </a:rPr>
-              <a:t>-t</a:t>
-            </a:r>
-            <a:r>
-              <a:rPr sz="2175" b="0">
-                <a:solidFill>
-                  <a:srgbClr val="29263B"/>
-                </a:solidFill>
-                <a:latin typeface="Microsoft YaHei"/>
-                <a:ea typeface="Microsoft YaHei"/>
-                <a:cs typeface="Microsoft YaHei"/>
-              </a:rPr>
-              <a:t> 补齐。</a:t>
-            </a:r>
-          </a:p>
-          <a:p xmlns:a="http://schemas.openxmlformats.org/drawingml/2006/main">
-            <a:pPr>
-              <a:lnSpc>
-                <a:spcPct val="120000"/>
-              </a:lnSpc>
-              <a:defRPr sz="2175" b="0">
-                <a:solidFill>
-                  <a:srgbClr val="29263B"/>
-                </a:solidFill>
-                <a:latin typeface="Microsoft YaHei"/>
-                <a:ea typeface="Microsoft YaHei"/>
-                <a:cs typeface="Microsoft YaHei"/>
-              </a:defRPr>
-            </a:pPr>
-            <a:r>
-              <a:rPr sz="2175" b="0">
-                <a:solidFill>
-                  <a:srgbClr val="29263B"/>
-                </a:solidFill>
-                <a:latin typeface="Microsoft YaHei"/>
-                <a:ea typeface="Microsoft YaHei"/>
-                <a:cs typeface="Microsoft YaHei"/>
-              </a:rPr>
-              <a:t>两条路线都让工程找到 SDK 根，再由板配置选 ARM。</a:t>
-            </a:r>
-          </a:p>
-          <a:p xmlns:a="http://schemas.openxmlformats.org/drawingml/2006/main">
-            <a:pPr>
-              <a:lnSpc>
-                <a:spcPct val="120000"/>
-              </a:lnSpc>
-              <a:defRPr sz="2175" b="0">
-                <a:solidFill>
-                  <a:srgbClr val="29263B"/>
-                </a:solidFill>
-                <a:latin typeface="Microsoft YaHei"/>
-                <a:ea typeface="Microsoft YaHei"/>
-                <a:cs typeface="Microsoft YaHei"/>
-              </a:defRPr>
-            </a:pPr>
-            <a:r>
-              <a:rPr sz="2175" b="0">
-                <a:solidFill>
-                  <a:srgbClr val="29263B"/>
-                </a:solidFill>
-                <a:latin typeface="Microsoft YaHei"/>
-                <a:ea typeface="Microsoft YaHei"/>
-                <a:cs typeface="Microsoft YaHei"/>
-              </a:rPr>
-              <a:t>独立工具链包不能替代 SDK 基础框架。</a:t>
-            </a:r>
-          </a:p>
-          <a:p xmlns:a="http://schemas.openxmlformats.org/drawingml/2006/main">
-            <a:pPr>
-              <a:lnSpc>
-                <a:spcPct val="120000"/>
-              </a:lnSpc>
-              <a:defRPr sz="2175" b="0">
-                <a:solidFill>
-                  <a:srgbClr val="29263B"/>
-                </a:solidFill>
-                <a:latin typeface="Microsoft YaHei"/>
-                <a:ea typeface="Microsoft YaHei"/>
-                <a:cs typeface="Microsoft YaHei"/>
-              </a:defRPr>
-            </a:pPr>
-            <a:r>
-              <a:rPr sz="2175" b="0">
-                <a:solidFill>
-                  <a:srgbClr val="29263B"/>
-                </a:solidFill>
-                <a:latin typeface="Microsoft YaHei"/>
-                <a:ea typeface="Microsoft YaHei"/>
-                <a:cs typeface="Microsoft YaHei"/>
-              </a:rPr>
-              <a:t>新增芯片支持在 Zephyr 的 SoC、板与驱动中完成。</a:t>
-            </a:r>
-          </a:p>
+          <ns0:p xmlns:ns0="http://schemas.openxmlformats.org/drawingml/2006/main">
+            <ns0:pPr>
+              <ns0:lnSpc>
+                <ns0:spcPct val="120000"/>
+              </ns0:lnSpc>
+              <ns0:defRPr sz="2175" b="0">
+                <ns0:solidFill>
+                  <ns0:srgbClr val="29263B"/>
+                </ns0:solidFill>
+                <ns0:latin typeface="Microsoft YaHei"/>
+                <ns0:ea typeface="Microsoft YaHei"/>
+                <ns0:cs typeface="Microsoft YaHei"/>
+              </ns0:defRPr>
+            </ns0:pPr>
+            <ns0:r>
+              <ns0:rPr sz="2175" b="0">
+                <ns0:solidFill>
+                  <ns0:srgbClr val="29263B"/>
+                </ns0:solidFill>
+                <ns0:latin typeface="Microsoft YaHei"/>
+                <ns0:ea typeface="Microsoft YaHei"/>
+                <ns0:cs typeface="Microsoft YaHei"/>
+              </ns0:rPr>
+              <ns0:t xml:space="preserve">GNU 预带目标工具，Minimal 用 </ns0:t>
+            </ns0:r>
+            <ns0:r>
+              <ns0:rPr sz="2175" b="0">
+                <ns0:solidFill>
+                  <ns0:srgbClr val="0070C0"/>
+                </ns0:solidFill>
+                <ns0:latin typeface="Microsoft YaHei"/>
+                <ns0:ea typeface="Microsoft YaHei"/>
+                <ns0:cs typeface="Microsoft YaHei"/>
+              </ns0:rPr>
+              <ns0:t>setup.sh</ns0:t>
+            </ns0:r>
+            <ns0:r>
+              <ns0:rPr sz="2175" b="0">
+                <ns0:solidFill>
+                  <ns0:srgbClr val="29263B"/>
+                </ns0:solidFill>
+                <ns0:latin typeface="Microsoft YaHei"/>
+                <ns0:ea typeface="Microsoft YaHei"/>
+                <ns0:cs typeface="Microsoft YaHei"/>
+              </ns0:rPr>
+              <ns0:t xml:space="preserve"> </ns0:t>
+            </ns0:r>
+            <ns0:r>
+              <ns0:rPr sz="2175" b="0">
+                <ns0:solidFill>
+                  <ns0:srgbClr val="B84E00"/>
+                </ns0:solidFill>
+                <ns0:latin typeface="Microsoft YaHei"/>
+                <ns0:ea typeface="Microsoft YaHei"/>
+                <ns0:cs typeface="Microsoft YaHei"/>
+              </ns0:rPr>
+              <ns0:t>-t</ns0:t>
+            </ns0:r>
+            <ns0:r>
+              <ns0:rPr sz="2175" b="0">
+                <ns0:solidFill>
+                  <ns0:srgbClr val="29263B"/>
+                </ns0:solidFill>
+                <ns0:latin typeface="Microsoft YaHei"/>
+                <ns0:ea typeface="Microsoft YaHei"/>
+                <ns0:cs typeface="Microsoft YaHei"/>
+              </ns0:rPr>
+              <ns0:t xml:space="preserve"> 补齐。</ns0:t>
+            </ns0:r>
+          </ns0:p>
+          <ns0:p xmlns:ns0="http://schemas.openxmlformats.org/drawingml/2006/main">
+            <ns0:pPr>
+              <ns0:lnSpc>
+                <ns0:spcPct val="120000"/>
+              </ns0:lnSpc>
+              <ns0:defRPr sz="2175" b="0">
+                <ns0:solidFill>
+                  <ns0:srgbClr val="29263B"/>
+                </ns0:solidFill>
+                <ns0:latin typeface="Microsoft YaHei"/>
+                <ns0:ea typeface="Microsoft YaHei"/>
+                <ns0:cs typeface="Microsoft YaHei"/>
+              </ns0:defRPr>
+            </ns0:pPr>
+            <ns0:r>
+              <ns0:rPr sz="2175" b="0">
+                <ns0:solidFill>
+                  <ns0:srgbClr val="29263B"/>
+                </ns0:solidFill>
+                <ns0:latin typeface="Microsoft YaHei"/>
+                <ns0:ea typeface="Microsoft YaHei"/>
+                <ns0:cs typeface="Microsoft YaHei"/>
+              </ns0:rPr>
+              <ns0:t xml:space="preserve">两种 Linux 包都须用 </ns0:t>
+            </ns0:r>
+            <ns0:r>
+              <ns0:rPr sz="2175" b="0">
+                <ns0:solidFill>
+                  <ns0:srgbClr val="B84E00"/>
+                </ns0:solidFill>
+                <ns0:latin typeface="Microsoft YaHei"/>
+                <ns0:ea typeface="Microsoft YaHei"/>
+                <ns0:cs typeface="Microsoft YaHei"/>
+              </ns0:rPr>
+              <ns0:t>-h</ns0:t>
+            </ns0:r>
+            <ns0:r>
+              <ns0:rPr sz="2175" b="0">
+                <ns0:solidFill>
+                  <ns0:srgbClr val="29263B"/>
+                </ns0:solidFill>
+                <ns0:latin typeface="Microsoft YaHei"/>
+                <ns0:ea typeface="Microsoft YaHei"/>
+                <ns0:cs typeface="Microsoft YaHei"/>
+              </ns0:rPr>
+              <ns0:t xml:space="preserve"> 初始化主机工具。</ns0:t>
+            </ns0:r>
+          </ns0:p>
+          <ns0:p xmlns:ns0="http://schemas.openxmlformats.org/drawingml/2006/main">
+            <ns0:pPr>
+              <ns0:lnSpc>
+                <ns0:spcPct val="120000"/>
+              </ns0:lnSpc>
+              <ns0:defRPr sz="2175" b="0">
+                <ns0:solidFill>
+                  <ns0:srgbClr val="29263B"/>
+                </ns0:solidFill>
+                <ns0:latin typeface="Microsoft YaHei"/>
+                <ns0:ea typeface="Microsoft YaHei"/>
+                <ns0:cs typeface="Microsoft YaHei"/>
+              </ns0:defRPr>
+            </ns0:pPr>
+            <ns0:r>
+              <ns0:rPr sz="2175" b="0">
+                <ns0:solidFill>
+                  <ns0:srgbClr val="29263B"/>
+                </ns0:solidFill>
+                <ns0:latin typeface="Microsoft YaHei"/>
+                <ns0:ea typeface="Microsoft YaHei"/>
+                <ns0:cs typeface="Microsoft YaHei"/>
+              </ns0:rPr>
+              <ns0:t>工程找到 SDK 根后，再由板配置选择 ARM。</ns0:t>
+            </ns0:r>
+          </ns0:p>
+          <ns0:p xmlns:ns0="http://schemas.openxmlformats.org/drawingml/2006/main">
+            <ns0:pPr>
+              <ns0:lnSpc>
+                <ns0:spcPct val="120000"/>
+              </ns0:lnSpc>
+              <ns0:defRPr sz="2175" b="0">
+                <ns0:solidFill>
+                  <ns0:srgbClr val="29263B"/>
+                </ns0:solidFill>
+                <ns0:latin typeface="Microsoft YaHei"/>
+                <ns0:ea typeface="Microsoft YaHei"/>
+                <ns0:cs typeface="Microsoft YaHei"/>
+              </ns0:defRPr>
+            </ns0:pPr>
+            <ns0:r>
+              <ns0:rPr sz="2175" b="0">
+                <ns0:solidFill>
+                  <ns0:srgbClr val="29263B"/>
+                </ns0:solidFill>
+                <ns0:latin typeface="Microsoft YaHei"/>
+                <ns0:ea typeface="Microsoft YaHei"/>
+                <ns0:cs typeface="Microsoft YaHei"/>
+              </ns0:rPr>
+              <ns0:t>新增芯片支持仍在 Zephyr 的 SoC、板与驱动中完成。</ns0:t>
+            </ns0:r>
+          </ns0:p>
         </p:txBody>
       </p:sp>
-      <p:pic>
-        <p:nvPicPr>
-          <p:cNvPr id="4" name="">
+      <p:cxnSp>
+        <p:nvCxnSpPr>
+          <p:cNvPr id="10" name="">
             <a:extLst xmlns:a="http://schemas.openxmlformats.org/drawingml/2006/main">
               <a:ext uri="{FF2B5EF4-FFF2-40B4-BE49-F238E27FC236}">
-                <a16:creationId xmlns:a16="http://schemas.microsoft.com/office/drawing/2014/main" id="{51B38D3C-2A55-4A59-9FB8-052C6766D9FB}"/>
+                <a16:creationId xmlns:a16="http://schemas.microsoft.com/office/drawing/2014/main" id="{C2B2C34F-8DA8-4A90-9EAA-82199CD633B8}"/>
               </a:ext>
             </a:extLst>
           </p:cNvPr>
-          <p:cNvPicPr>
-            <a:picLocks xmlns:a="http://schemas.openxmlformats.org/drawingml/2006/main" noChangeAspect="1"/>
-          </p:cNvPicPr>
+          <p:cNvCxnSpPr>
+            <a:stCxn xmlns:a="http://schemas.openxmlformats.org/drawingml/2006/main" id="19" idx="3"/>
+            <a:endCxn xmlns:a="http://schemas.openxmlformats.org/drawingml/2006/main" id="20" idx="1"/>
+          </p:cNvCxnSpPr>
           <p:nvPr/>
-        </p:nvPicPr>
-        <p:blipFill>
-          <a:blip xmlns:r="http://schemas.openxmlformats.org/officeDocument/2006/relationships" xmlns:a="http://schemas.openxmlformats.org/drawingml/2006/main" r:embed="Rcbb4fcced4ba48d0"/>
-          <a:stretch xmlns:a="http://schemas.openxmlformats.org/drawingml/2006/main"/>
-        </p:blipFill>
+        </p:nvCxnSpPr>
         <p:spPr>
           <a:xfrm xmlns:a="http://schemas.openxmlformats.org/drawingml/2006/main">
-            <a:off x="1025580" y="4143375"/>
-            <a:ext cx="10140841" cy="1809750"/>
+            <a:off x="9164255" y="5048251"/>
+            <a:ext cx="520043" cy="0"/>
+          </a:xfrm>
+          <a:prstGeom xmlns:a="http://schemas.openxmlformats.org/drawingml/2006/main" prst="straightConnector1">
+            <a:avLst/>
+          </a:prstGeom>
+          <a:ln xmlns:a="http://schemas.openxmlformats.org/drawingml/2006/main" w="11430">
+            <a:solidFill>
+              <a:srgbClr val="666666"/>
+            </a:solidFill>
+            <a:prstDash val="solid"/>
+            <a:tailEnd type="triangle" w="med" len="med"/>
+          </a:ln>
+        </p:spPr>
+      </p:cxnSp>
+      <p:cxnSp>
+        <p:nvCxnSpPr>
+          <p:cNvPr id="11" name="">
+            <a:extLst xmlns:a="http://schemas.openxmlformats.org/drawingml/2006/main">
+              <a:ext uri="{FF2B5EF4-FFF2-40B4-BE49-F238E27FC236}">
+                <a16:creationId xmlns:a16="http://schemas.microsoft.com/office/drawing/2014/main" id="{1C8A8EEB-35BD-4B22-8CB5-35B420E0BE3F}"/>
+              </a:ext>
+            </a:extLst>
+          </p:cNvPr>
+          <p:cNvCxnSpPr>
+            <a:stCxn xmlns:a="http://schemas.openxmlformats.org/drawingml/2006/main" id="18" idx="3"/>
+            <a:endCxn xmlns:a="http://schemas.openxmlformats.org/drawingml/2006/main" id="19" idx="1"/>
+          </p:cNvCxnSpPr>
+          <p:nvPr/>
+        </p:nvCxnSpPr>
+        <p:spPr>
+          <a:xfrm xmlns:a="http://schemas.openxmlformats.org/drawingml/2006/main">
+            <a:off x="7021678" y="5048251"/>
+            <a:ext cx="520042" cy="0"/>
+          </a:xfrm>
+          <a:prstGeom xmlns:a="http://schemas.openxmlformats.org/drawingml/2006/main" prst="straightConnector1">
+            <a:avLst/>
+          </a:prstGeom>
+          <a:ln xmlns:a="http://schemas.openxmlformats.org/drawingml/2006/main" w="11430">
+            <a:solidFill>
+              <a:srgbClr val="666666"/>
+            </a:solidFill>
+            <a:prstDash val="solid"/>
+            <a:tailEnd type="triangle" w="med" len="med"/>
+          </a:ln>
+        </p:spPr>
+      </p:cxnSp>
+      <p:cxnSp>
+        <p:nvCxnSpPr>
+          <p:cNvPr id="12" name="">
+            <a:extLst xmlns:a="http://schemas.openxmlformats.org/drawingml/2006/main">
+              <a:ext uri="{FF2B5EF4-FFF2-40B4-BE49-F238E27FC236}">
+                <a16:creationId xmlns:a16="http://schemas.microsoft.com/office/drawing/2014/main" id="{CAACDD12-2E7D-40FC-8D55-4055941C349C}"/>
+              </a:ext>
+            </a:extLst>
+          </p:cNvPr>
+          <p:cNvCxnSpPr>
+            <a:stCxn xmlns:a="http://schemas.openxmlformats.org/drawingml/2006/main" id="17" idx="3"/>
+            <a:endCxn xmlns:a="http://schemas.openxmlformats.org/drawingml/2006/main" id="18" idx="1"/>
+          </p:cNvCxnSpPr>
+          <p:nvPr/>
+        </p:nvCxnSpPr>
+        <p:spPr>
+          <a:xfrm xmlns:a="http://schemas.openxmlformats.org/drawingml/2006/main">
+            <a:off x="4998710" y="5048251"/>
+            <a:ext cx="520043" cy="0"/>
+          </a:xfrm>
+          <a:prstGeom xmlns:a="http://schemas.openxmlformats.org/drawingml/2006/main" prst="straightConnector1">
+            <a:avLst/>
+          </a:prstGeom>
+          <a:ln xmlns:a="http://schemas.openxmlformats.org/drawingml/2006/main" w="11430">
+            <a:solidFill>
+              <a:srgbClr val="666666"/>
+            </a:solidFill>
+            <a:prstDash val="solid"/>
+            <a:tailEnd type="triangle" w="med" len="med"/>
+          </a:ln>
+        </p:spPr>
+      </p:cxnSp>
+      <p:cxnSp>
+        <p:nvCxnSpPr>
+          <p:cNvPr id="13" name="">
+            <a:extLst xmlns:a="http://schemas.openxmlformats.org/drawingml/2006/main">
+              <a:ext uri="{FF2B5EF4-FFF2-40B4-BE49-F238E27FC236}">
+                <a16:creationId xmlns:a16="http://schemas.microsoft.com/office/drawing/2014/main" id="{174989A2-4CF4-4303-B9C4-442780F050D5}"/>
+              </a:ext>
+            </a:extLst>
+          </p:cNvPr>
+          <p:cNvCxnSpPr>
+            <a:stCxn xmlns:a="http://schemas.openxmlformats.org/drawingml/2006/main" id="16" idx="3"/>
+            <a:endCxn xmlns:a="http://schemas.openxmlformats.org/drawingml/2006/main" id="17" idx="2"/>
+          </p:cNvCxnSpPr>
+          <p:nvPr/>
+        </p:nvCxnSpPr>
+        <p:spPr>
+          <a:xfrm xmlns:a="http://schemas.openxmlformats.org/drawingml/2006/main" flipV="1">
+            <a:off x="2928938" y="5329074"/>
+            <a:ext cx="1294907" cy="260022"/>
+          </a:xfrm>
+          <a:prstGeom xmlns:a="http://schemas.openxmlformats.org/drawingml/2006/main" prst="straightConnector1">
+            <a:avLst/>
+          </a:prstGeom>
+          <a:ln xmlns:a="http://schemas.openxmlformats.org/drawingml/2006/main" w="11430">
+            <a:solidFill>
+              <a:srgbClr val="666666"/>
+            </a:solidFill>
+            <a:prstDash val="solid"/>
+            <a:tailEnd type="triangle" w="med" len="med"/>
+          </a:ln>
+        </p:spPr>
+      </p:cxnSp>
+      <p:cxnSp>
+        <p:nvCxnSpPr>
+          <p:cNvPr id="14" name="">
+            <a:extLst xmlns:a="http://schemas.openxmlformats.org/drawingml/2006/main">
+              <a:ext uri="{FF2B5EF4-FFF2-40B4-BE49-F238E27FC236}">
+                <a16:creationId xmlns:a16="http://schemas.microsoft.com/office/drawing/2014/main" id="{79AA27B1-F711-4A8A-891A-9B099E29F508}"/>
+              </a:ext>
+            </a:extLst>
+          </p:cNvPr>
+          <p:cNvCxnSpPr>
+            <a:stCxn xmlns:a="http://schemas.openxmlformats.org/drawingml/2006/main" id="15" idx="3"/>
+            <a:endCxn xmlns:a="http://schemas.openxmlformats.org/drawingml/2006/main" id="17" idx="0"/>
+          </p:cNvCxnSpPr>
+          <p:nvPr/>
+        </p:nvCxnSpPr>
+        <p:spPr>
+          <a:xfrm xmlns:a="http://schemas.openxmlformats.org/drawingml/2006/main">
+            <a:off x="2882134" y="4507406"/>
+            <a:ext cx="1341711" cy="260022"/>
+          </a:xfrm>
+          <a:prstGeom xmlns:a="http://schemas.openxmlformats.org/drawingml/2006/main" prst="straightConnector1">
+            <a:avLst/>
+          </a:prstGeom>
+          <a:ln xmlns:a="http://schemas.openxmlformats.org/drawingml/2006/main" w="11430">
+            <a:solidFill>
+              <a:srgbClr val="666666"/>
+            </a:solidFill>
+            <a:prstDash val="solid"/>
+            <a:tailEnd type="triangle" w="med" len="med"/>
+          </a:ln>
+        </p:spPr>
+      </p:cxnSp>
+      <p:sp>
+        <p:nvSpPr>
+          <p:cNvPr id="15" name="sdk-flow-node-1">
+            <a:extLst xmlns:a="http://schemas.openxmlformats.org/drawingml/2006/main">
+              <a:ext uri="{FF2B5EF4-FFF2-40B4-BE49-F238E27FC236}">
+                <a16:creationId xmlns:a16="http://schemas.microsoft.com/office/drawing/2014/main" id="{DD384BAD-E5BC-4E2E-B159-357535558FEB}"/>
+              </a:ext>
+            </a:extLst>
+          </p:cNvPr>
+          <p:cNvSpPr>
+            <a:spLocks xmlns:a="http://schemas.openxmlformats.org/drawingml/2006/main" noGrp="1"/>
+          </p:cNvSpPr>
+          <p:nvPr/>
+        </p:nvSpPr>
+        <p:spPr>
+          <a:xfrm xmlns:a="http://schemas.openxmlformats.org/drawingml/2006/main">
+            <a:off x="1155591" y="4226582"/>
+            <a:ext cx="1726543" cy="561647"/>
           </a:xfrm>
           <a:prstGeom xmlns:a="http://schemas.openxmlformats.org/drawingml/2006/main" prst="rect">
             <a:avLst/>
           </a:prstGeom>
+          <a:solidFill xmlns:a="http://schemas.openxmlformats.org/drawingml/2006/main">
+            <a:srgbClr val="EEEEEE"/>
+          </a:solidFill>
+          <a:ln xmlns:a="http://schemas.openxmlformats.org/drawingml/2006/main" w="10478">
+            <a:solidFill>
+              <a:srgbClr val="999999"/>
+            </a:solidFill>
+            <a:prstDash val="solid"/>
+          </a:ln>
         </p:spPr>
-      </p:pic>
+        <p:txBody>
+          <a:bodyPr xmlns:a="http://schemas.openxmlformats.org/drawingml/2006/main" lIns="0" tIns="0" rIns="0" bIns="0" anchor="ctr">
+            <a:noAutofit/>
+          </a:bodyPr>
+          <a:lstStyle xmlns:a="http://schemas.openxmlformats.org/drawingml/2006/main">
+            <a:defPPr algn="ctr">
+              <a:defRPr sz="1388">
+                <a:solidFill>
+                  <a:srgbClr val="000000"/>
+                </a:solidFill>
+                <a:latin typeface="Microsoft YaHei"/>
+                <a:ea typeface="Microsoft YaHei"/>
+                <a:cs typeface="Microsoft YaHei"/>
+              </a:defRPr>
+            </a:defPPr>
+            <a:lvl1pPr algn="ctr">
+              <a:defRPr sz="1388">
+                <a:solidFill>
+                  <a:srgbClr val="000000"/>
+                </a:solidFill>
+                <a:latin typeface="Microsoft YaHei"/>
+                <a:ea typeface="Microsoft YaHei"/>
+                <a:cs typeface="Microsoft YaHei"/>
+              </a:defRPr>
+            </a:lvl1pPr>
+            <a:lvl2pPr algn="ctr">
+              <a:defRPr sz="1388">
+                <a:solidFill>
+                  <a:srgbClr val="000000"/>
+                </a:solidFill>
+                <a:latin typeface="Microsoft YaHei"/>
+                <a:ea typeface="Microsoft YaHei"/>
+                <a:cs typeface="Microsoft YaHei"/>
+              </a:defRPr>
+            </a:lvl2pPr>
+            <a:lvl3pPr algn="ctr">
+              <a:defRPr sz="1388">
+                <a:solidFill>
+                  <a:srgbClr val="000000"/>
+                </a:solidFill>
+                <a:latin typeface="Microsoft YaHei"/>
+                <a:ea typeface="Microsoft YaHei"/>
+                <a:cs typeface="Microsoft YaHei"/>
+              </a:defRPr>
+            </a:lvl3pPr>
+            <a:lvl4pPr algn="ctr">
+              <a:defRPr sz="1388">
+                <a:solidFill>
+                  <a:srgbClr val="000000"/>
+                </a:solidFill>
+                <a:latin typeface="Microsoft YaHei"/>
+                <a:ea typeface="Microsoft YaHei"/>
+                <a:cs typeface="Microsoft YaHei"/>
+              </a:defRPr>
+            </a:lvl4pPr>
+            <a:lvl5pPr algn="ctr">
+              <a:defRPr sz="1388">
+                <a:solidFill>
+                  <a:srgbClr val="000000"/>
+                </a:solidFill>
+                <a:latin typeface="Microsoft YaHei"/>
+                <a:ea typeface="Microsoft YaHei"/>
+                <a:cs typeface="Microsoft YaHei"/>
+              </a:defRPr>
+            </a:lvl5pPr>
+            <a:lvl6pPr algn="ctr">
+              <a:defRPr sz="1388">
+                <a:solidFill>
+                  <a:srgbClr val="000000"/>
+                </a:solidFill>
+                <a:latin typeface="Microsoft YaHei"/>
+                <a:ea typeface="Microsoft YaHei"/>
+                <a:cs typeface="Microsoft YaHei"/>
+              </a:defRPr>
+            </a:lvl6pPr>
+            <a:lvl7pPr algn="ctr">
+              <a:defRPr sz="1388">
+                <a:solidFill>
+                  <a:srgbClr val="000000"/>
+                </a:solidFill>
+                <a:latin typeface="Microsoft YaHei"/>
+                <a:ea typeface="Microsoft YaHei"/>
+                <a:cs typeface="Microsoft YaHei"/>
+              </a:defRPr>
+            </a:lvl7pPr>
+            <a:lvl8pPr algn="ctr">
+              <a:defRPr sz="1388">
+                <a:solidFill>
+                  <a:srgbClr val="000000"/>
+                </a:solidFill>
+                <a:latin typeface="Microsoft YaHei"/>
+                <a:ea typeface="Microsoft YaHei"/>
+                <a:cs typeface="Microsoft YaHei"/>
+              </a:defRPr>
+            </a:lvl8pPr>
+            <a:lvl9pPr algn="ctr">
+              <a:defRPr sz="1388">
+                <a:solidFill>
+                  <a:srgbClr val="000000"/>
+                </a:solidFill>
+                <a:latin typeface="Microsoft YaHei"/>
+                <a:ea typeface="Microsoft YaHei"/>
+                <a:cs typeface="Microsoft YaHei"/>
+              </a:defRPr>
+            </a:lvl9pPr>
+          </a:lstStyle>
+          <a:p xmlns:a="http://schemas.openxmlformats.org/drawingml/2006/main">
+            <a:pPr algn="ctr">
+              <a:lnSpc>
+                <a:spcPct val="120000"/>
+              </a:lnSpc>
+              <a:buNone/>
+              <a:defRPr sz="1388">
+                <a:solidFill>
+                  <a:srgbClr val="000000"/>
+                </a:solidFill>
+                <a:latin typeface="Microsoft YaHei"/>
+                <a:ea typeface="Microsoft YaHei"/>
+                <a:cs typeface="Microsoft YaHei"/>
+              </a:defRPr>
+            </a:pPr>
+            <a:r>
+              <a:rPr sz="1388">
+                <a:solidFill>
+                  <a:srgbClr val="000000"/>
+                </a:solidFill>
+                <a:latin typeface="Microsoft YaHei"/>
+                <a:ea typeface="Microsoft YaHei"/>
+                <a:cs typeface="Microsoft YaHei"/>
+              </a:rPr>
+              <a:t>GNU 预带工具</a:t>
+            </a:r>
+          </a:p>
+        </p:txBody>
+      </p:sp>
+      <p:sp>
+        <p:nvSpPr>
+          <p:cNvPr id="16" name="sdk-flow-node-2">
+            <a:extLst xmlns:a="http://schemas.openxmlformats.org/drawingml/2006/main">
+              <a:ext uri="{FF2B5EF4-FFF2-40B4-BE49-F238E27FC236}">
+                <a16:creationId xmlns:a16="http://schemas.microsoft.com/office/drawing/2014/main" id="{29F88076-EBF5-4E14-A1BC-4CFC4B0A4E26}"/>
+              </a:ext>
+            </a:extLst>
+          </p:cNvPr>
+          <p:cNvSpPr>
+            <a:spLocks xmlns:a="http://schemas.openxmlformats.org/drawingml/2006/main" noGrp="1"/>
+          </p:cNvSpPr>
+          <p:nvPr/>
+        </p:nvSpPr>
+        <p:spPr>
+          <a:xfrm xmlns:a="http://schemas.openxmlformats.org/drawingml/2006/main">
+            <a:off x="1108787" y="5308272"/>
+            <a:ext cx="1820151" cy="561647"/>
+          </a:xfrm>
+          <a:prstGeom xmlns:a="http://schemas.openxmlformats.org/drawingml/2006/main" prst="rect">
+            <a:avLst/>
+          </a:prstGeom>
+          <a:solidFill xmlns:a="http://schemas.openxmlformats.org/drawingml/2006/main">
+            <a:srgbClr val="EEEEEE"/>
+          </a:solidFill>
+          <a:ln xmlns:a="http://schemas.openxmlformats.org/drawingml/2006/main" w="10478">
+            <a:solidFill>
+              <a:srgbClr val="999999"/>
+            </a:solidFill>
+            <a:prstDash val="solid"/>
+          </a:ln>
+        </p:spPr>
+        <p:txBody>
+          <a:bodyPr xmlns:a="http://schemas.openxmlformats.org/drawingml/2006/main" lIns="0" tIns="0" rIns="0" bIns="0" anchor="ctr">
+            <a:noAutofit/>
+          </a:bodyPr>
+          <a:lstStyle xmlns:a="http://schemas.openxmlformats.org/drawingml/2006/main">
+            <a:defPPr algn="ctr">
+              <a:defRPr sz="1388">
+                <a:solidFill>
+                  <a:srgbClr val="000000"/>
+                </a:solidFill>
+                <a:latin typeface="Microsoft YaHei"/>
+                <a:ea typeface="Microsoft YaHei"/>
+                <a:cs typeface="Microsoft YaHei"/>
+              </a:defRPr>
+            </a:defPPr>
+            <a:lvl1pPr algn="ctr">
+              <a:defRPr sz="1388">
+                <a:solidFill>
+                  <a:srgbClr val="000000"/>
+                </a:solidFill>
+                <a:latin typeface="Microsoft YaHei"/>
+                <a:ea typeface="Microsoft YaHei"/>
+                <a:cs typeface="Microsoft YaHei"/>
+              </a:defRPr>
+            </a:lvl1pPr>
+            <a:lvl2pPr algn="ctr">
+              <a:defRPr sz="1388">
+                <a:solidFill>
+                  <a:srgbClr val="000000"/>
+                </a:solidFill>
+                <a:latin typeface="Microsoft YaHei"/>
+                <a:ea typeface="Microsoft YaHei"/>
+                <a:cs typeface="Microsoft YaHei"/>
+              </a:defRPr>
+            </a:lvl2pPr>
+            <a:lvl3pPr algn="ctr">
+              <a:defRPr sz="1388">
+                <a:solidFill>
+                  <a:srgbClr val="000000"/>
+                </a:solidFill>
+                <a:latin typeface="Microsoft YaHei"/>
+                <a:ea typeface="Microsoft YaHei"/>
+                <a:cs typeface="Microsoft YaHei"/>
+              </a:defRPr>
+            </a:lvl3pPr>
+            <a:lvl4pPr algn="ctr">
+              <a:defRPr sz="1388">
+                <a:solidFill>
+                  <a:srgbClr val="000000"/>
+                </a:solidFill>
+                <a:latin typeface="Microsoft YaHei"/>
+                <a:ea typeface="Microsoft YaHei"/>
+                <a:cs typeface="Microsoft YaHei"/>
+              </a:defRPr>
+            </a:lvl4pPr>
+            <a:lvl5pPr algn="ctr">
+              <a:defRPr sz="1388">
+                <a:solidFill>
+                  <a:srgbClr val="000000"/>
+                </a:solidFill>
+                <a:latin typeface="Microsoft YaHei"/>
+                <a:ea typeface="Microsoft YaHei"/>
+                <a:cs typeface="Microsoft YaHei"/>
+              </a:defRPr>
+            </a:lvl5pPr>
+            <a:lvl6pPr algn="ctr">
+              <a:defRPr sz="1388">
+                <a:solidFill>
+                  <a:srgbClr val="000000"/>
+                </a:solidFill>
+                <a:latin typeface="Microsoft YaHei"/>
+                <a:ea typeface="Microsoft YaHei"/>
+                <a:cs typeface="Microsoft YaHei"/>
+              </a:defRPr>
+            </a:lvl6pPr>
+            <a:lvl7pPr algn="ctr">
+              <a:defRPr sz="1388">
+                <a:solidFill>
+                  <a:srgbClr val="000000"/>
+                </a:solidFill>
+                <a:latin typeface="Microsoft YaHei"/>
+                <a:ea typeface="Microsoft YaHei"/>
+                <a:cs typeface="Microsoft YaHei"/>
+              </a:defRPr>
+            </a:lvl7pPr>
+            <a:lvl8pPr algn="ctr">
+              <a:defRPr sz="1388">
+                <a:solidFill>
+                  <a:srgbClr val="000000"/>
+                </a:solidFill>
+                <a:latin typeface="Microsoft YaHei"/>
+                <a:ea typeface="Microsoft YaHei"/>
+                <a:cs typeface="Microsoft YaHei"/>
+              </a:defRPr>
+            </a:lvl8pPr>
+            <a:lvl9pPr algn="ctr">
+              <a:defRPr sz="1388">
+                <a:solidFill>
+                  <a:srgbClr val="000000"/>
+                </a:solidFill>
+                <a:latin typeface="Microsoft YaHei"/>
+                <a:ea typeface="Microsoft YaHei"/>
+                <a:cs typeface="Microsoft YaHei"/>
+              </a:defRPr>
+            </a:lvl9pPr>
+          </a:lstStyle>
+          <a:p xmlns:a="http://schemas.openxmlformats.org/drawingml/2006/main">
+            <a:pPr algn="ctr">
+              <a:lnSpc>
+                <a:spcPct val="120000"/>
+              </a:lnSpc>
+              <a:buNone/>
+              <a:defRPr sz="1388">
+                <a:solidFill>
+                  <a:srgbClr val="000000"/>
+                </a:solidFill>
+                <a:latin typeface="Microsoft YaHei"/>
+                <a:ea typeface="Microsoft YaHei"/>
+                <a:cs typeface="Microsoft YaHei"/>
+              </a:defRPr>
+            </a:pPr>
+            <a:r>
+              <a:rPr sz="1388">
+                <a:solidFill>
+                  <a:srgbClr val="000000"/>
+                </a:solidFill>
+                <a:latin typeface="Microsoft YaHei"/>
+                <a:ea typeface="Microsoft YaHei"/>
+                <a:cs typeface="Microsoft YaHei"/>
+              </a:rPr>
+              <a:t>Minimal 补工具</a:t>
+            </a:r>
+          </a:p>
+        </p:txBody>
+      </p:sp>
+      <p:sp>
+        <p:nvSpPr>
+          <p:cNvPr id="17" name="sdk-flow-node-3">
+            <a:extLst xmlns:a="http://schemas.openxmlformats.org/drawingml/2006/main">
+              <a:ext uri="{FF2B5EF4-FFF2-40B4-BE49-F238E27FC236}">
+                <a16:creationId xmlns:a16="http://schemas.microsoft.com/office/drawing/2014/main" id="{BD4A089F-825F-4BCF-BF75-0EB22D18BAB3}"/>
+              </a:ext>
+            </a:extLst>
+          </p:cNvPr>
+          <p:cNvSpPr>
+            <a:spLocks xmlns:a="http://schemas.openxmlformats.org/drawingml/2006/main" noGrp="1"/>
+          </p:cNvSpPr>
+          <p:nvPr/>
+        </p:nvSpPr>
+        <p:spPr>
+          <a:xfrm xmlns:a="http://schemas.openxmlformats.org/drawingml/2006/main">
+            <a:off x="3448981" y="4767427"/>
+            <a:ext cx="1549729" cy="561647"/>
+          </a:xfrm>
+          <a:prstGeom xmlns:a="http://schemas.openxmlformats.org/drawingml/2006/main" prst="rect">
+            <a:avLst/>
+          </a:prstGeom>
+          <a:solidFill xmlns:a="http://schemas.openxmlformats.org/drawingml/2006/main">
+            <a:srgbClr val="EEEEEE"/>
+          </a:solidFill>
+          <a:ln xmlns:a="http://schemas.openxmlformats.org/drawingml/2006/main" w="10478">
+            <a:solidFill>
+              <a:srgbClr val="999999"/>
+            </a:solidFill>
+            <a:prstDash val="solid"/>
+          </a:ln>
+        </p:spPr>
+        <p:txBody>
+          <a:bodyPr xmlns:a="http://schemas.openxmlformats.org/drawingml/2006/main" lIns="0" tIns="0" rIns="0" bIns="0" anchor="ctr">
+            <a:noAutofit/>
+          </a:bodyPr>
+          <a:lstStyle xmlns:a="http://schemas.openxmlformats.org/drawingml/2006/main">
+            <a:defPPr algn="ctr">
+              <a:defRPr sz="1388">
+                <a:solidFill>
+                  <a:srgbClr val="000000"/>
+                </a:solidFill>
+                <a:latin typeface="Microsoft YaHei"/>
+                <a:ea typeface="Microsoft YaHei"/>
+                <a:cs typeface="Microsoft YaHei"/>
+              </a:defRPr>
+            </a:defPPr>
+            <a:lvl1pPr algn="ctr">
+              <a:defRPr sz="1388">
+                <a:solidFill>
+                  <a:srgbClr val="000000"/>
+                </a:solidFill>
+                <a:latin typeface="Microsoft YaHei"/>
+                <a:ea typeface="Microsoft YaHei"/>
+                <a:cs typeface="Microsoft YaHei"/>
+              </a:defRPr>
+            </a:lvl1pPr>
+            <a:lvl2pPr algn="ctr">
+              <a:defRPr sz="1388">
+                <a:solidFill>
+                  <a:srgbClr val="000000"/>
+                </a:solidFill>
+                <a:latin typeface="Microsoft YaHei"/>
+                <a:ea typeface="Microsoft YaHei"/>
+                <a:cs typeface="Microsoft YaHei"/>
+              </a:defRPr>
+            </a:lvl2pPr>
+            <a:lvl3pPr algn="ctr">
+              <a:defRPr sz="1388">
+                <a:solidFill>
+                  <a:srgbClr val="000000"/>
+                </a:solidFill>
+                <a:latin typeface="Microsoft YaHei"/>
+                <a:ea typeface="Microsoft YaHei"/>
+                <a:cs typeface="Microsoft YaHei"/>
+              </a:defRPr>
+            </a:lvl3pPr>
+            <a:lvl4pPr algn="ctr">
+              <a:defRPr sz="1388">
+                <a:solidFill>
+                  <a:srgbClr val="000000"/>
+                </a:solidFill>
+                <a:latin typeface="Microsoft YaHei"/>
+                <a:ea typeface="Microsoft YaHei"/>
+                <a:cs typeface="Microsoft YaHei"/>
+              </a:defRPr>
+            </a:lvl4pPr>
+            <a:lvl5pPr algn="ctr">
+              <a:defRPr sz="1388">
+                <a:solidFill>
+                  <a:srgbClr val="000000"/>
+                </a:solidFill>
+                <a:latin typeface="Microsoft YaHei"/>
+                <a:ea typeface="Microsoft YaHei"/>
+                <a:cs typeface="Microsoft YaHei"/>
+              </a:defRPr>
+            </a:lvl5pPr>
+            <a:lvl6pPr algn="ctr">
+              <a:defRPr sz="1388">
+                <a:solidFill>
+                  <a:srgbClr val="000000"/>
+                </a:solidFill>
+                <a:latin typeface="Microsoft YaHei"/>
+                <a:ea typeface="Microsoft YaHei"/>
+                <a:cs typeface="Microsoft YaHei"/>
+              </a:defRPr>
+            </a:lvl6pPr>
+            <a:lvl7pPr algn="ctr">
+              <a:defRPr sz="1388">
+                <a:solidFill>
+                  <a:srgbClr val="000000"/>
+                </a:solidFill>
+                <a:latin typeface="Microsoft YaHei"/>
+                <a:ea typeface="Microsoft YaHei"/>
+                <a:cs typeface="Microsoft YaHei"/>
+              </a:defRPr>
+            </a:lvl7pPr>
+            <a:lvl8pPr algn="ctr">
+              <a:defRPr sz="1388">
+                <a:solidFill>
+                  <a:srgbClr val="000000"/>
+                </a:solidFill>
+                <a:latin typeface="Microsoft YaHei"/>
+                <a:ea typeface="Microsoft YaHei"/>
+                <a:cs typeface="Microsoft YaHei"/>
+              </a:defRPr>
+            </a:lvl8pPr>
+            <a:lvl9pPr algn="ctr">
+              <a:defRPr sz="1388">
+                <a:solidFill>
+                  <a:srgbClr val="000000"/>
+                </a:solidFill>
+                <a:latin typeface="Microsoft YaHei"/>
+                <a:ea typeface="Microsoft YaHei"/>
+                <a:cs typeface="Microsoft YaHei"/>
+              </a:defRPr>
+            </a:lvl9pPr>
+          </a:lstStyle>
+          <a:p xmlns:a="http://schemas.openxmlformats.org/drawingml/2006/main">
+            <a:pPr algn="ctr">
+              <a:lnSpc>
+                <a:spcPct val="120000"/>
+              </a:lnSpc>
+              <a:buNone/>
+              <a:defRPr sz="1388">
+                <a:solidFill>
+                  <a:srgbClr val="000000"/>
+                </a:solidFill>
+                <a:latin typeface="Microsoft YaHei"/>
+                <a:ea typeface="Microsoft YaHei"/>
+                <a:cs typeface="Microsoft YaHei"/>
+              </a:defRPr>
+            </a:pPr>
+            <a:r>
+              <a:rPr sz="1388">
+                <a:solidFill>
+                  <a:srgbClr val="000000"/>
+                </a:solidFill>
+                <a:latin typeface="Microsoft YaHei"/>
+                <a:ea typeface="Microsoft YaHei"/>
+                <a:cs typeface="Microsoft YaHei"/>
+              </a:rPr>
+              <a:t>同一 SDK 根</a:t>
+            </a:r>
+          </a:p>
+        </p:txBody>
+      </p:sp>
+      <p:sp>
+        <p:nvSpPr>
+          <p:cNvPr id="18" name="sdk-flow-node-4">
+            <a:extLst xmlns:a="http://schemas.openxmlformats.org/drawingml/2006/main">
+              <a:ext uri="{FF2B5EF4-FFF2-40B4-BE49-F238E27FC236}">
+                <a16:creationId xmlns:a16="http://schemas.microsoft.com/office/drawing/2014/main" id="{F1D7A0CE-763D-4F7B-8025-06B0AFC49778}"/>
+              </a:ext>
+            </a:extLst>
+          </p:cNvPr>
+          <p:cNvSpPr>
+            <a:spLocks xmlns:a="http://schemas.openxmlformats.org/drawingml/2006/main" noGrp="1"/>
+          </p:cNvSpPr>
+          <p:nvPr/>
+        </p:nvSpPr>
+        <p:spPr>
+          <a:xfrm xmlns:a="http://schemas.openxmlformats.org/drawingml/2006/main">
+            <a:off x="5518753" y="4767427"/>
+            <a:ext cx="1502925" cy="561647"/>
+          </a:xfrm>
+          <a:prstGeom xmlns:a="http://schemas.openxmlformats.org/drawingml/2006/main" prst="rect">
+            <a:avLst/>
+          </a:prstGeom>
+          <a:solidFill xmlns:a="http://schemas.openxmlformats.org/drawingml/2006/main">
+            <a:srgbClr val="EEEEEE"/>
+          </a:solidFill>
+          <a:ln xmlns:a="http://schemas.openxmlformats.org/drawingml/2006/main" w="10478">
+            <a:solidFill>
+              <a:srgbClr val="999999"/>
+            </a:solidFill>
+            <a:prstDash val="solid"/>
+          </a:ln>
+        </p:spPr>
+        <p:txBody>
+          <a:bodyPr xmlns:a="http://schemas.openxmlformats.org/drawingml/2006/main" lIns="0" tIns="0" rIns="0" bIns="0" anchor="ctr">
+            <a:noAutofit/>
+          </a:bodyPr>
+          <a:lstStyle xmlns:a="http://schemas.openxmlformats.org/drawingml/2006/main">
+            <a:defPPr algn="ctr">
+              <a:defRPr sz="1388">
+                <a:solidFill>
+                  <a:srgbClr val="000000"/>
+                </a:solidFill>
+                <a:latin typeface="Microsoft YaHei"/>
+                <a:ea typeface="Microsoft YaHei"/>
+                <a:cs typeface="Microsoft YaHei"/>
+              </a:defRPr>
+            </a:defPPr>
+            <a:lvl1pPr algn="ctr">
+              <a:defRPr sz="1388">
+                <a:solidFill>
+                  <a:srgbClr val="000000"/>
+                </a:solidFill>
+                <a:latin typeface="Microsoft YaHei"/>
+                <a:ea typeface="Microsoft YaHei"/>
+                <a:cs typeface="Microsoft YaHei"/>
+              </a:defRPr>
+            </a:lvl1pPr>
+            <a:lvl2pPr algn="ctr">
+              <a:defRPr sz="1388">
+                <a:solidFill>
+                  <a:srgbClr val="000000"/>
+                </a:solidFill>
+                <a:latin typeface="Microsoft YaHei"/>
+                <a:ea typeface="Microsoft YaHei"/>
+                <a:cs typeface="Microsoft YaHei"/>
+              </a:defRPr>
+            </a:lvl2pPr>
+            <a:lvl3pPr algn="ctr">
+              <a:defRPr sz="1388">
+                <a:solidFill>
+                  <a:srgbClr val="000000"/>
+                </a:solidFill>
+                <a:latin typeface="Microsoft YaHei"/>
+                <a:ea typeface="Microsoft YaHei"/>
+                <a:cs typeface="Microsoft YaHei"/>
+              </a:defRPr>
+            </a:lvl3pPr>
+            <a:lvl4pPr algn="ctr">
+              <a:defRPr sz="1388">
+                <a:solidFill>
+                  <a:srgbClr val="000000"/>
+                </a:solidFill>
+                <a:latin typeface="Microsoft YaHei"/>
+                <a:ea typeface="Microsoft YaHei"/>
+                <a:cs typeface="Microsoft YaHei"/>
+              </a:defRPr>
+            </a:lvl4pPr>
+            <a:lvl5pPr algn="ctr">
+              <a:defRPr sz="1388">
+                <a:solidFill>
+                  <a:srgbClr val="000000"/>
+                </a:solidFill>
+                <a:latin typeface="Microsoft YaHei"/>
+                <a:ea typeface="Microsoft YaHei"/>
+                <a:cs typeface="Microsoft YaHei"/>
+              </a:defRPr>
+            </a:lvl5pPr>
+            <a:lvl6pPr algn="ctr">
+              <a:defRPr sz="1388">
+                <a:solidFill>
+                  <a:srgbClr val="000000"/>
+                </a:solidFill>
+                <a:latin typeface="Microsoft YaHei"/>
+                <a:ea typeface="Microsoft YaHei"/>
+                <a:cs typeface="Microsoft YaHei"/>
+              </a:defRPr>
+            </a:lvl6pPr>
+            <a:lvl7pPr algn="ctr">
+              <a:defRPr sz="1388">
+                <a:solidFill>
+                  <a:srgbClr val="000000"/>
+                </a:solidFill>
+                <a:latin typeface="Microsoft YaHei"/>
+                <a:ea typeface="Microsoft YaHei"/>
+                <a:cs typeface="Microsoft YaHei"/>
+              </a:defRPr>
+            </a:lvl7pPr>
+            <a:lvl8pPr algn="ctr">
+              <a:defRPr sz="1388">
+                <a:solidFill>
+                  <a:srgbClr val="000000"/>
+                </a:solidFill>
+                <a:latin typeface="Microsoft YaHei"/>
+                <a:ea typeface="Microsoft YaHei"/>
+                <a:cs typeface="Microsoft YaHei"/>
+              </a:defRPr>
+            </a:lvl8pPr>
+            <a:lvl9pPr algn="ctr">
+              <a:defRPr sz="1388">
+                <a:solidFill>
+                  <a:srgbClr val="000000"/>
+                </a:solidFill>
+                <a:latin typeface="Microsoft YaHei"/>
+                <a:ea typeface="Microsoft YaHei"/>
+                <a:cs typeface="Microsoft YaHei"/>
+              </a:defRPr>
+            </a:lvl9pPr>
+          </a:lstStyle>
+          <a:p xmlns:a="http://schemas.openxmlformats.org/drawingml/2006/main">
+            <a:pPr algn="ctr">
+              <a:lnSpc>
+                <a:spcPct val="120000"/>
+              </a:lnSpc>
+              <a:buNone/>
+              <a:defRPr sz="1388">
+                <a:solidFill>
+                  <a:srgbClr val="000000"/>
+                </a:solidFill>
+                <a:latin typeface="Microsoft YaHei"/>
+                <a:ea typeface="Microsoft YaHei"/>
+                <a:cs typeface="Microsoft YaHei"/>
+              </a:defRPr>
+            </a:pPr>
+            <a:r>
+              <a:rPr sz="1388">
+                <a:solidFill>
+                  <a:srgbClr val="000000"/>
+                </a:solidFill>
+                <a:latin typeface="Microsoft YaHei"/>
+                <a:ea typeface="Microsoft YaHei"/>
+                <a:cs typeface="Microsoft YaHei"/>
+              </a:rPr>
+              <a:t>工程选 SDK</a:t>
+            </a:r>
+          </a:p>
+        </p:txBody>
+      </p:sp>
+      <p:sp>
+        <p:nvSpPr>
+          <p:cNvPr id="19" name="sdk-flow-node-5">
+            <a:extLst xmlns:a="http://schemas.openxmlformats.org/drawingml/2006/main">
+              <a:ext uri="{FF2B5EF4-FFF2-40B4-BE49-F238E27FC236}">
+                <a16:creationId xmlns:a16="http://schemas.microsoft.com/office/drawing/2014/main" id="{1BA70B35-3207-4B41-ADD3-9250911842AD}"/>
+              </a:ext>
+            </a:extLst>
+          </p:cNvPr>
+          <p:cNvSpPr>
+            <a:spLocks xmlns:a="http://schemas.openxmlformats.org/drawingml/2006/main" noGrp="1"/>
+          </p:cNvSpPr>
+          <p:nvPr/>
+        </p:nvSpPr>
+        <p:spPr>
+          <a:xfrm xmlns:a="http://schemas.openxmlformats.org/drawingml/2006/main">
+            <a:off x="7541720" y="4767427"/>
+            <a:ext cx="1622535" cy="561647"/>
+          </a:xfrm>
+          <a:prstGeom xmlns:a="http://schemas.openxmlformats.org/drawingml/2006/main" prst="rect">
+            <a:avLst/>
+          </a:prstGeom>
+          <a:solidFill xmlns:a="http://schemas.openxmlformats.org/drawingml/2006/main">
+            <a:srgbClr val="EEEEEE"/>
+          </a:solidFill>
+          <a:ln xmlns:a="http://schemas.openxmlformats.org/drawingml/2006/main" w="10478">
+            <a:solidFill>
+              <a:srgbClr val="999999"/>
+            </a:solidFill>
+            <a:prstDash val="solid"/>
+          </a:ln>
+        </p:spPr>
+        <p:txBody>
+          <a:bodyPr xmlns:a="http://schemas.openxmlformats.org/drawingml/2006/main" lIns="0" tIns="0" rIns="0" bIns="0" anchor="ctr">
+            <a:noAutofit/>
+          </a:bodyPr>
+          <a:lstStyle xmlns:a="http://schemas.openxmlformats.org/drawingml/2006/main">
+            <a:defPPr algn="ctr">
+              <a:defRPr sz="1388">
+                <a:solidFill>
+                  <a:srgbClr val="000000"/>
+                </a:solidFill>
+                <a:latin typeface="Microsoft YaHei"/>
+                <a:ea typeface="Microsoft YaHei"/>
+                <a:cs typeface="Microsoft YaHei"/>
+              </a:defRPr>
+            </a:defPPr>
+            <a:lvl1pPr algn="ctr">
+              <a:defRPr sz="1388">
+                <a:solidFill>
+                  <a:srgbClr val="000000"/>
+                </a:solidFill>
+                <a:latin typeface="Microsoft YaHei"/>
+                <a:ea typeface="Microsoft YaHei"/>
+                <a:cs typeface="Microsoft YaHei"/>
+              </a:defRPr>
+            </a:lvl1pPr>
+            <a:lvl2pPr algn="ctr">
+              <a:defRPr sz="1388">
+                <a:solidFill>
+                  <a:srgbClr val="000000"/>
+                </a:solidFill>
+                <a:latin typeface="Microsoft YaHei"/>
+                <a:ea typeface="Microsoft YaHei"/>
+                <a:cs typeface="Microsoft YaHei"/>
+              </a:defRPr>
+            </a:lvl2pPr>
+            <a:lvl3pPr algn="ctr">
+              <a:defRPr sz="1388">
+                <a:solidFill>
+                  <a:srgbClr val="000000"/>
+                </a:solidFill>
+                <a:latin typeface="Microsoft YaHei"/>
+                <a:ea typeface="Microsoft YaHei"/>
+                <a:cs typeface="Microsoft YaHei"/>
+              </a:defRPr>
+            </a:lvl3pPr>
+            <a:lvl4pPr algn="ctr">
+              <a:defRPr sz="1388">
+                <a:solidFill>
+                  <a:srgbClr val="000000"/>
+                </a:solidFill>
+                <a:latin typeface="Microsoft YaHei"/>
+                <a:ea typeface="Microsoft YaHei"/>
+                <a:cs typeface="Microsoft YaHei"/>
+              </a:defRPr>
+            </a:lvl4pPr>
+            <a:lvl5pPr algn="ctr">
+              <a:defRPr sz="1388">
+                <a:solidFill>
+                  <a:srgbClr val="000000"/>
+                </a:solidFill>
+                <a:latin typeface="Microsoft YaHei"/>
+                <a:ea typeface="Microsoft YaHei"/>
+                <a:cs typeface="Microsoft YaHei"/>
+              </a:defRPr>
+            </a:lvl5pPr>
+            <a:lvl6pPr algn="ctr">
+              <a:defRPr sz="1388">
+                <a:solidFill>
+                  <a:srgbClr val="000000"/>
+                </a:solidFill>
+                <a:latin typeface="Microsoft YaHei"/>
+                <a:ea typeface="Microsoft YaHei"/>
+                <a:cs typeface="Microsoft YaHei"/>
+              </a:defRPr>
+            </a:lvl6pPr>
+            <a:lvl7pPr algn="ctr">
+              <a:defRPr sz="1388">
+                <a:solidFill>
+                  <a:srgbClr val="000000"/>
+                </a:solidFill>
+                <a:latin typeface="Microsoft YaHei"/>
+                <a:ea typeface="Microsoft YaHei"/>
+                <a:cs typeface="Microsoft YaHei"/>
+              </a:defRPr>
+            </a:lvl7pPr>
+            <a:lvl8pPr algn="ctr">
+              <a:defRPr sz="1388">
+                <a:solidFill>
+                  <a:srgbClr val="000000"/>
+                </a:solidFill>
+                <a:latin typeface="Microsoft YaHei"/>
+                <a:ea typeface="Microsoft YaHei"/>
+                <a:cs typeface="Microsoft YaHei"/>
+              </a:defRPr>
+            </a:lvl8pPr>
+            <a:lvl9pPr algn="ctr">
+              <a:defRPr sz="1388">
+                <a:solidFill>
+                  <a:srgbClr val="000000"/>
+                </a:solidFill>
+                <a:latin typeface="Microsoft YaHei"/>
+                <a:ea typeface="Microsoft YaHei"/>
+                <a:cs typeface="Microsoft YaHei"/>
+              </a:defRPr>
+            </a:lvl9pPr>
+          </a:lstStyle>
+          <a:p xmlns:a="http://schemas.openxmlformats.org/drawingml/2006/main">
+            <a:pPr algn="ctr">
+              <a:lnSpc>
+                <a:spcPct val="120000"/>
+              </a:lnSpc>
+              <a:buNone/>
+              <a:defRPr sz="1388">
+                <a:solidFill>
+                  <a:srgbClr val="000000"/>
+                </a:solidFill>
+                <a:latin typeface="Microsoft YaHei"/>
+                <a:ea typeface="Microsoft YaHei"/>
+                <a:cs typeface="Microsoft YaHei"/>
+              </a:defRPr>
+            </a:pPr>
+            <a:r>
+              <a:rPr sz="1388">
+                <a:solidFill>
+                  <a:srgbClr val="000000"/>
+                </a:solidFill>
+                <a:latin typeface="Microsoft YaHei"/>
+                <a:ea typeface="Microsoft YaHei"/>
+                <a:cs typeface="Microsoft YaHei"/>
+              </a:rPr>
+              <a:t>板配置选目标</a:t>
+            </a:r>
+          </a:p>
+        </p:txBody>
+      </p:sp>
+      <p:sp>
+        <p:nvSpPr>
+          <p:cNvPr id="20" name="sdk-flow-node-6">
+            <a:extLst xmlns:a="http://schemas.openxmlformats.org/drawingml/2006/main">
+              <a:ext uri="{FF2B5EF4-FFF2-40B4-BE49-F238E27FC236}">
+                <a16:creationId xmlns:a16="http://schemas.microsoft.com/office/drawing/2014/main" id="{5971D46E-5CAD-4B57-915D-AE055007BB3A}"/>
+              </a:ext>
+            </a:extLst>
+          </p:cNvPr>
+          <p:cNvSpPr>
+            <a:spLocks xmlns:a="http://schemas.openxmlformats.org/drawingml/2006/main" noGrp="1"/>
+          </p:cNvSpPr>
+          <p:nvPr/>
+        </p:nvSpPr>
+        <p:spPr>
+          <a:xfrm xmlns:a="http://schemas.openxmlformats.org/drawingml/2006/main">
+            <a:off x="9684298" y="4767427"/>
+            <a:ext cx="1398916" cy="561647"/>
+          </a:xfrm>
+          <a:prstGeom xmlns:a="http://schemas.openxmlformats.org/drawingml/2006/main" prst="rect">
+            <a:avLst/>
+          </a:prstGeom>
+          <a:solidFill xmlns:a="http://schemas.openxmlformats.org/drawingml/2006/main">
+            <a:srgbClr val="EEEEEE"/>
+          </a:solidFill>
+          <a:ln xmlns:a="http://schemas.openxmlformats.org/drawingml/2006/main" w="10478">
+            <a:solidFill>
+              <a:srgbClr val="999999"/>
+            </a:solidFill>
+            <a:prstDash val="solid"/>
+          </a:ln>
+        </p:spPr>
+        <p:txBody>
+          <a:bodyPr xmlns:a="http://schemas.openxmlformats.org/drawingml/2006/main" lIns="0" tIns="0" rIns="0" bIns="0" anchor="ctr">
+            <a:noAutofit/>
+          </a:bodyPr>
+          <a:lstStyle xmlns:a="http://schemas.openxmlformats.org/drawingml/2006/main">
+            <a:defPPr algn="ctr">
+              <a:defRPr sz="1388">
+                <a:solidFill>
+                  <a:srgbClr val="000000"/>
+                </a:solidFill>
+                <a:latin typeface="Microsoft YaHei"/>
+                <a:ea typeface="Microsoft YaHei"/>
+                <a:cs typeface="Microsoft YaHei"/>
+              </a:defRPr>
+            </a:defPPr>
+            <a:lvl1pPr algn="ctr">
+              <a:defRPr sz="1388">
+                <a:solidFill>
+                  <a:srgbClr val="000000"/>
+                </a:solidFill>
+                <a:latin typeface="Microsoft YaHei"/>
+                <a:ea typeface="Microsoft YaHei"/>
+                <a:cs typeface="Microsoft YaHei"/>
+              </a:defRPr>
+            </a:lvl1pPr>
+            <a:lvl2pPr algn="ctr">
+              <a:defRPr sz="1388">
+                <a:solidFill>
+                  <a:srgbClr val="000000"/>
+                </a:solidFill>
+                <a:latin typeface="Microsoft YaHei"/>
+                <a:ea typeface="Microsoft YaHei"/>
+                <a:cs typeface="Microsoft YaHei"/>
+              </a:defRPr>
+            </a:lvl2pPr>
+            <a:lvl3pPr algn="ctr">
+              <a:defRPr sz="1388">
+                <a:solidFill>
+                  <a:srgbClr val="000000"/>
+                </a:solidFill>
+                <a:latin typeface="Microsoft YaHei"/>
+                <a:ea typeface="Microsoft YaHei"/>
+                <a:cs typeface="Microsoft YaHei"/>
+              </a:defRPr>
+            </a:lvl3pPr>
+            <a:lvl4pPr algn="ctr">
+              <a:defRPr sz="1388">
+                <a:solidFill>
+                  <a:srgbClr val="000000"/>
+                </a:solidFill>
+                <a:latin typeface="Microsoft YaHei"/>
+                <a:ea typeface="Microsoft YaHei"/>
+                <a:cs typeface="Microsoft YaHei"/>
+              </a:defRPr>
+            </a:lvl4pPr>
+            <a:lvl5pPr algn="ctr">
+              <a:defRPr sz="1388">
+                <a:solidFill>
+                  <a:srgbClr val="000000"/>
+                </a:solidFill>
+                <a:latin typeface="Microsoft YaHei"/>
+                <a:ea typeface="Microsoft YaHei"/>
+                <a:cs typeface="Microsoft YaHei"/>
+              </a:defRPr>
+            </a:lvl5pPr>
+            <a:lvl6pPr algn="ctr">
+              <a:defRPr sz="1388">
+                <a:solidFill>
+                  <a:srgbClr val="000000"/>
+                </a:solidFill>
+                <a:latin typeface="Microsoft YaHei"/>
+                <a:ea typeface="Microsoft YaHei"/>
+                <a:cs typeface="Microsoft YaHei"/>
+              </a:defRPr>
+            </a:lvl6pPr>
+            <a:lvl7pPr algn="ctr">
+              <a:defRPr sz="1388">
+                <a:solidFill>
+                  <a:srgbClr val="000000"/>
+                </a:solidFill>
+                <a:latin typeface="Microsoft YaHei"/>
+                <a:ea typeface="Microsoft YaHei"/>
+                <a:cs typeface="Microsoft YaHei"/>
+              </a:defRPr>
+            </a:lvl7pPr>
+            <a:lvl8pPr algn="ctr">
+              <a:defRPr sz="1388">
+                <a:solidFill>
+                  <a:srgbClr val="000000"/>
+                </a:solidFill>
+                <a:latin typeface="Microsoft YaHei"/>
+                <a:ea typeface="Microsoft YaHei"/>
+                <a:cs typeface="Microsoft YaHei"/>
+              </a:defRPr>
+            </a:lvl8pPr>
+            <a:lvl9pPr algn="ctr">
+              <a:defRPr sz="1388">
+                <a:solidFill>
+                  <a:srgbClr val="000000"/>
+                </a:solidFill>
+                <a:latin typeface="Microsoft YaHei"/>
+                <a:ea typeface="Microsoft YaHei"/>
+                <a:cs typeface="Microsoft YaHei"/>
+              </a:defRPr>
+            </a:lvl9pPr>
+          </a:lstStyle>
+          <a:p xmlns:a="http://schemas.openxmlformats.org/drawingml/2006/main">
+            <a:pPr algn="ctr">
+              <a:lnSpc>
+                <a:spcPct val="120000"/>
+              </a:lnSpc>
+              <a:buNone/>
+              <a:defRPr sz="1388">
+                <a:solidFill>
+                  <a:srgbClr val="000000"/>
+                </a:solidFill>
+                <a:latin typeface="Microsoft YaHei"/>
+                <a:ea typeface="Microsoft YaHei"/>
+                <a:cs typeface="Microsoft YaHei"/>
+              </a:defRPr>
+            </a:pPr>
+            <a:r>
+              <a:rPr sz="1388">
+                <a:solidFill>
+                  <a:srgbClr val="000000"/>
+                </a:solidFill>
+                <a:latin typeface="Microsoft YaHei"/>
+                <a:ea typeface="Microsoft YaHei"/>
+                <a:cs typeface="Microsoft YaHei"/>
+              </a:rPr>
+              <a:t>P008 编译</a:t>
+            </a:r>
+          </a:p>
+        </p:txBody>
+      </p:sp>
       <p:sp>
         <p:nvSpPr>
           <p:cNvPr id="9" name="PageNumber">
